--- a/pptx/Best Practices with Fabric CI-CD.pptx
+++ b/pptx/Best Practices with Fabric CI-CD.pptx
@@ -6,10 +6,10 @@
     <p:sldMasterId id="2147484576" r:id="rId5"/>
   </p:sldMasterIdLst>
   <p:notesMasterIdLst>
-    <p:notesMasterId r:id="rId83"/>
+    <p:notesMasterId r:id="rId89"/>
   </p:notesMasterIdLst>
   <p:handoutMasterIdLst>
-    <p:handoutMasterId r:id="rId84"/>
+    <p:handoutMasterId r:id="rId90"/>
   </p:handoutMasterIdLst>
   <p:sldIdLst>
     <p:sldId id="2147482125" r:id="rId6"/>
@@ -36,59 +36,65 @@
     <p:sldId id="2147482195" r:id="rId27"/>
     <p:sldId id="2147482197" r:id="rId28"/>
     <p:sldId id="2147482196" r:id="rId29"/>
-    <p:sldId id="2147482116" r:id="rId30"/>
-    <p:sldId id="2147482118" r:id="rId31"/>
-    <p:sldId id="2147482139" r:id="rId32"/>
-    <p:sldId id="2147482124" r:id="rId33"/>
-    <p:sldId id="2147482121" r:id="rId34"/>
-    <p:sldId id="2147482122" r:id="rId35"/>
-    <p:sldId id="2147482120" r:id="rId36"/>
-    <p:sldId id="2147482119" r:id="rId37"/>
-    <p:sldId id="2147482146" r:id="rId38"/>
-    <p:sldId id="2147482200" r:id="rId39"/>
-    <p:sldId id="2147482140" r:id="rId40"/>
-    <p:sldId id="2147482204" r:id="rId41"/>
-    <p:sldId id="2147482205" r:id="rId42"/>
-    <p:sldId id="2147482206" r:id="rId43"/>
-    <p:sldId id="2147482141" r:id="rId44"/>
-    <p:sldId id="2147482187" r:id="rId45"/>
-    <p:sldId id="2147482207" r:id="rId46"/>
-    <p:sldId id="2147482208" r:id="rId47"/>
-    <p:sldId id="2147482177" r:id="rId48"/>
-    <p:sldId id="2147482221" r:id="rId49"/>
-    <p:sldId id="2147482222" r:id="rId50"/>
-    <p:sldId id="2147482223" r:id="rId51"/>
-    <p:sldId id="2147482179" r:id="rId52"/>
-    <p:sldId id="2147482210" r:id="rId53"/>
-    <p:sldId id="2147482132" r:id="rId54"/>
-    <p:sldId id="2147482211" r:id="rId55"/>
-    <p:sldId id="2147482178" r:id="rId56"/>
-    <p:sldId id="2147482180" r:id="rId57"/>
-    <p:sldId id="2147482212" r:id="rId58"/>
-    <p:sldId id="2147482213" r:id="rId59"/>
-    <p:sldId id="2147482147" r:id="rId60"/>
-    <p:sldId id="2147482214" r:id="rId61"/>
-    <p:sldId id="2147482185" r:id="rId62"/>
-    <p:sldId id="2147482175" r:id="rId63"/>
-    <p:sldId id="2147482224" r:id="rId64"/>
-    <p:sldId id="2147482161" r:id="rId65"/>
-    <p:sldId id="2147482232" r:id="rId66"/>
-    <p:sldId id="2147482225" r:id="rId67"/>
-    <p:sldId id="2147482226" r:id="rId68"/>
-    <p:sldId id="2147482228" r:id="rId69"/>
-    <p:sldId id="2147482152" r:id="rId70"/>
-    <p:sldId id="2147482229" r:id="rId71"/>
-    <p:sldId id="2147482231" r:id="rId72"/>
-    <p:sldId id="2147482230" r:id="rId73"/>
-    <p:sldId id="2147482154" r:id="rId74"/>
-    <p:sldId id="2147482156" r:id="rId75"/>
-    <p:sldId id="2147482151" r:id="rId76"/>
-    <p:sldId id="2147482149" r:id="rId77"/>
-    <p:sldId id="2147482157" r:id="rId78"/>
-    <p:sldId id="2147482158" r:id="rId79"/>
-    <p:sldId id="2147482233" r:id="rId80"/>
-    <p:sldId id="2147482234" r:id="rId81"/>
-    <p:sldId id="2147482235" r:id="rId82"/>
+    <p:sldId id="2147482236" r:id="rId30"/>
+    <p:sldId id="2147482238" r:id="rId31"/>
+    <p:sldId id="2147482239" r:id="rId32"/>
+    <p:sldId id="2147482240" r:id="rId33"/>
+    <p:sldId id="2147482237" r:id="rId34"/>
+    <p:sldId id="2147482241" r:id="rId35"/>
+    <p:sldId id="2147482118" r:id="rId36"/>
+    <p:sldId id="2147482139" r:id="rId37"/>
+    <p:sldId id="2147482124" r:id="rId38"/>
+    <p:sldId id="2147482121" r:id="rId39"/>
+    <p:sldId id="2147482122" r:id="rId40"/>
+    <p:sldId id="2147482120" r:id="rId41"/>
+    <p:sldId id="2147482119" r:id="rId42"/>
+    <p:sldId id="2147482146" r:id="rId43"/>
+    <p:sldId id="2147482200" r:id="rId44"/>
+    <p:sldId id="2147482140" r:id="rId45"/>
+    <p:sldId id="2147482204" r:id="rId46"/>
+    <p:sldId id="2147482205" r:id="rId47"/>
+    <p:sldId id="2147482206" r:id="rId48"/>
+    <p:sldId id="2147482141" r:id="rId49"/>
+    <p:sldId id="2147482116" r:id="rId50"/>
+    <p:sldId id="2147482187" r:id="rId51"/>
+    <p:sldId id="2147482207" r:id="rId52"/>
+    <p:sldId id="2147482208" r:id="rId53"/>
+    <p:sldId id="2147482177" r:id="rId54"/>
+    <p:sldId id="2147482221" r:id="rId55"/>
+    <p:sldId id="2147482222" r:id="rId56"/>
+    <p:sldId id="2147482223" r:id="rId57"/>
+    <p:sldId id="2147482179" r:id="rId58"/>
+    <p:sldId id="2147482210" r:id="rId59"/>
+    <p:sldId id="2147482132" r:id="rId60"/>
+    <p:sldId id="2147482211" r:id="rId61"/>
+    <p:sldId id="2147482178" r:id="rId62"/>
+    <p:sldId id="2147482180" r:id="rId63"/>
+    <p:sldId id="2147482212" r:id="rId64"/>
+    <p:sldId id="2147482213" r:id="rId65"/>
+    <p:sldId id="2147482147" r:id="rId66"/>
+    <p:sldId id="2147482214" r:id="rId67"/>
+    <p:sldId id="2147482185" r:id="rId68"/>
+    <p:sldId id="2147482175" r:id="rId69"/>
+    <p:sldId id="2147482224" r:id="rId70"/>
+    <p:sldId id="2147482161" r:id="rId71"/>
+    <p:sldId id="2147482232" r:id="rId72"/>
+    <p:sldId id="2147482225" r:id="rId73"/>
+    <p:sldId id="2147482226" r:id="rId74"/>
+    <p:sldId id="2147482228" r:id="rId75"/>
+    <p:sldId id="2147482152" r:id="rId76"/>
+    <p:sldId id="2147482229" r:id="rId77"/>
+    <p:sldId id="2147482231" r:id="rId78"/>
+    <p:sldId id="2147482230" r:id="rId79"/>
+    <p:sldId id="2147482154" r:id="rId80"/>
+    <p:sldId id="2147482156" r:id="rId81"/>
+    <p:sldId id="2147482151" r:id="rId82"/>
+    <p:sldId id="2147482149" r:id="rId83"/>
+    <p:sldId id="2147482157" r:id="rId84"/>
+    <p:sldId id="2147482158" r:id="rId85"/>
+    <p:sldId id="2147482233" r:id="rId86"/>
+    <p:sldId id="2147482234" r:id="rId87"/>
+    <p:sldId id="2147482235" r:id="rId88"/>
   </p:sldIdLst>
   <p:sldSz cx="12436475" cy="6994525"/>
   <p:notesSz cx="7010400" cy="9296400"/>
@@ -216,7 +222,12 @@
             <p14:sldId id="2147482195"/>
             <p14:sldId id="2147482197"/>
             <p14:sldId id="2147482196"/>
-            <p14:sldId id="2147482116"/>
+            <p14:sldId id="2147482236"/>
+            <p14:sldId id="2147482238"/>
+            <p14:sldId id="2147482239"/>
+            <p14:sldId id="2147482240"/>
+            <p14:sldId id="2147482237"/>
+            <p14:sldId id="2147482241"/>
             <p14:sldId id="2147482118"/>
             <p14:sldId id="2147482139"/>
             <p14:sldId id="2147482124"/>
@@ -231,6 +242,7 @@
             <p14:sldId id="2147482205"/>
             <p14:sldId id="2147482206"/>
             <p14:sldId id="2147482141"/>
+            <p14:sldId id="2147482116"/>
             <p14:sldId id="2147482187"/>
             <p14:sldId id="2147482207"/>
             <p14:sldId id="2147482208"/>
@@ -620,7 +632,7 @@
           <a:p>
             <a:fld id="{DCE60099-03E7-4FA1-8A7F-E6E6CFB0F855}" type="datetime8">
               <a:rPr lang="en-US" smtClean="0"/>
-              <a:t>5/21/2026 9:53 AM</a:t>
+              <a:t>5/25/2026 12:51 PM</a:t>
             </a:fld>
             <a:endParaRPr lang="en-US"/>
           </a:p>
@@ -1627,7 +1639,7 @@
             <a:fld id="{B4008EB6-D09E-4580-8CD6-DDB14511944F}" type="slidenum">
               <a:rPr lang="en-US" smtClean="0"/>
               <a:pPr/>
-              <a:t>32</a:t>
+              <a:t>37</a:t>
             </a:fld>
             <a:endParaRPr lang="en-US"/>
           </a:p>
@@ -1812,7 +1824,7 @@
             <a:fld id="{B4008EB6-D09E-4580-8CD6-DDB14511944F}" type="slidenum">
               <a:rPr lang="en-US" smtClean="0"/>
               <a:pPr/>
-              <a:t>41</a:t>
+              <a:t>47</a:t>
             </a:fld>
             <a:endParaRPr lang="en-US"/>
           </a:p>
@@ -1961,7 +1973,7 @@
             <a:fld id="{B4008EB6-D09E-4580-8CD6-DDB14511944F}" type="slidenum">
               <a:rPr lang="en-US" smtClean="0"/>
               <a:pPr/>
-              <a:t>49</a:t>
+              <a:t>55</a:t>
             </a:fld>
             <a:endParaRPr lang="en-US"/>
           </a:p>
@@ -2110,7 +2122,7 @@
             <a:fld id="{B4008EB6-D09E-4580-8CD6-DDB14511944F}" type="slidenum">
               <a:rPr lang="en-US" smtClean="0"/>
               <a:pPr/>
-              <a:t>60</a:t>
+              <a:t>66</a:t>
             </a:fld>
             <a:endParaRPr lang="en-US"/>
           </a:p>
@@ -11714,12 +11726,763 @@
           <a:chExt cx="0" cy="0"/>
         </a:xfrm>
       </p:grpSpPr>
+      <p:sp>
+        <p:nvSpPr>
+          <p:cNvPr id="3" name="Rectangle 2">
+            <a:extLst>
+              <a:ext uri="{FF2B5EF4-FFF2-40B4-BE49-F238E27FC236}">
+                <a16:creationId xmlns:a16="http://schemas.microsoft.com/office/drawing/2014/main" id="{814CF55B-591F-4B32-5B45-1B29CB05DC53}"/>
+              </a:ext>
+            </a:extLst>
+          </p:cNvPr>
+          <p:cNvSpPr/>
+          <p:nvPr/>
+        </p:nvSpPr>
+        <p:spPr bwMode="auto">
+          <a:xfrm>
+            <a:off x="677510" y="756685"/>
+            <a:ext cx="4626011" cy="1346435"/>
+          </a:xfrm>
+          <a:prstGeom prst="rect">
+            <a:avLst/>
+          </a:prstGeom>
+          <a:solidFill>
+            <a:schemeClr val="bg1">
+              <a:lumMod val="85000"/>
+            </a:schemeClr>
+          </a:solidFill>
+          <a:ln>
+            <a:solidFill>
+              <a:schemeClr val="tx1"/>
+            </a:solidFill>
+            <a:headEnd type="none" w="med" len="med"/>
+            <a:tailEnd type="none" w="med" len="med"/>
+          </a:ln>
+          <a:effectLst/>
+        </p:spPr>
+        <p:style>
+          <a:lnRef idx="1">
+            <a:schemeClr val="accent2"/>
+          </a:lnRef>
+          <a:fillRef idx="3">
+            <a:schemeClr val="accent2"/>
+          </a:fillRef>
+          <a:effectRef idx="2">
+            <a:schemeClr val="accent2"/>
+          </a:effectRef>
+          <a:fontRef idx="minor">
+            <a:schemeClr val="lt1"/>
+          </a:fontRef>
+        </p:style>
+        <p:txBody>
+          <a:bodyPr rot="0" spcFirstLastPara="0" vertOverflow="overflow" horzOverflow="overflow" vert="horz" wrap="square" lIns="0" tIns="91440" rIns="0" bIns="91440" numCol="1" spcCol="0" rtlCol="0" fromWordArt="0" anchor="b" anchorCtr="0" forceAA="0" compatLnSpc="1">
+            <a:prstTxWarp prst="textNoShape">
+              <a:avLst/>
+            </a:prstTxWarp>
+            <a:noAutofit/>
+          </a:bodyPr>
+          <a:lstStyle/>
+          <a:p>
+            <a:pPr algn="ctr" defTabSz="932472" fontAlgn="base">
+              <a:lnSpc>
+                <a:spcPct val="90000"/>
+              </a:lnSpc>
+              <a:spcBef>
+                <a:spcPct val="0"/>
+              </a:spcBef>
+              <a:spcAft>
+                <a:spcPct val="0"/>
+              </a:spcAft>
+            </a:pPr>
+            <a:r>
+              <a:rPr lang="en-US" sz="1200" b="1" dirty="0">
+                <a:solidFill>
+                  <a:schemeClr val="tx1"/>
+                </a:solidFill>
+                <a:ea typeface="Segoe UI" pitchFamily="34" charset="0"/>
+                <a:cs typeface="Segoe UI" pitchFamily="34" charset="0"/>
+              </a:rPr>
+              <a:t>Origin GIT Repository</a:t>
+            </a:r>
+          </a:p>
+        </p:txBody>
+      </p:sp>
+      <p:sp>
+        <p:nvSpPr>
+          <p:cNvPr id="17" name="Arrow: Right 16">
+            <a:extLst>
+              <a:ext uri="{FF2B5EF4-FFF2-40B4-BE49-F238E27FC236}">
+                <a16:creationId xmlns:a16="http://schemas.microsoft.com/office/drawing/2014/main" id="{754CF6B9-0E9E-93DF-3DBB-61BB316D9362}"/>
+              </a:ext>
+            </a:extLst>
+          </p:cNvPr>
+          <p:cNvSpPr/>
+          <p:nvPr/>
+        </p:nvSpPr>
+        <p:spPr bwMode="auto">
+          <a:xfrm>
+            <a:off x="2289717" y="1049787"/>
+            <a:ext cx="1333597" cy="528569"/>
+          </a:xfrm>
+          <a:prstGeom prst="rightArrow">
+            <a:avLst>
+              <a:gd name="adj1" fmla="val 62678"/>
+              <a:gd name="adj2" fmla="val 58330"/>
+            </a:avLst>
+          </a:prstGeom>
+          <a:solidFill>
+            <a:srgbClr val="8A0000"/>
+          </a:solidFill>
+          <a:ln>
+            <a:noFill/>
+            <a:headEnd type="none" w="med" len="med"/>
+            <a:tailEnd type="none" w="med" len="med"/>
+          </a:ln>
+          <a:effectLst/>
+        </p:spPr>
+        <p:style>
+          <a:lnRef idx="1">
+            <a:schemeClr val="accent2"/>
+          </a:lnRef>
+          <a:fillRef idx="3">
+            <a:schemeClr val="accent2"/>
+          </a:fillRef>
+          <a:effectRef idx="2">
+            <a:schemeClr val="accent2"/>
+          </a:effectRef>
+          <a:fontRef idx="minor">
+            <a:schemeClr val="lt1"/>
+          </a:fontRef>
+        </p:style>
+        <p:txBody>
+          <a:bodyPr rot="0" spcFirstLastPara="0" vertOverflow="overflow" horzOverflow="overflow" vert="horz" wrap="square" lIns="0" tIns="0" rIns="0" bIns="0" numCol="1" spcCol="0" rtlCol="0" fromWordArt="0" anchor="ctr" anchorCtr="0" forceAA="0" compatLnSpc="1">
+            <a:prstTxWarp prst="textNoShape">
+              <a:avLst/>
+            </a:prstTxWarp>
+            <a:noAutofit/>
+          </a:bodyPr>
+          <a:lstStyle/>
+          <a:p>
+            <a:pPr algn="ctr" defTabSz="932472" fontAlgn="base">
+              <a:lnSpc>
+                <a:spcPct val="90000"/>
+              </a:lnSpc>
+              <a:spcBef>
+                <a:spcPct val="0"/>
+              </a:spcBef>
+              <a:spcAft>
+                <a:spcPct val="0"/>
+              </a:spcAft>
+            </a:pPr>
+            <a:r>
+              <a:rPr lang="en-US" sz="1100" b="1" dirty="0">
+                <a:gradFill>
+                  <a:gsLst>
+                    <a:gs pos="0">
+                      <a:srgbClr val="FFFFFF"/>
+                    </a:gs>
+                    <a:gs pos="100000">
+                      <a:srgbClr val="FFFFFF"/>
+                    </a:gs>
+                  </a:gsLst>
+                  <a:lin ang="5400000" scaled="0"/>
+                </a:gradFill>
+                <a:ea typeface="Segoe UI" pitchFamily="34" charset="0"/>
+                <a:cs typeface="Segoe UI" pitchFamily="34" charset="0"/>
+              </a:rPr>
+              <a:t>Create Branch</a:t>
+            </a:r>
+          </a:p>
+        </p:txBody>
+      </p:sp>
+      <p:sp>
+        <p:nvSpPr>
+          <p:cNvPr id="19" name="Rectangle 18">
+            <a:extLst>
+              <a:ext uri="{FF2B5EF4-FFF2-40B4-BE49-F238E27FC236}">
+                <a16:creationId xmlns:a16="http://schemas.microsoft.com/office/drawing/2014/main" id="{07A41240-D213-31BE-3A93-5186ECD59978}"/>
+              </a:ext>
+            </a:extLst>
+          </p:cNvPr>
+          <p:cNvSpPr/>
+          <p:nvPr/>
+        </p:nvSpPr>
+        <p:spPr bwMode="auto">
+          <a:xfrm>
+            <a:off x="3664803" y="908085"/>
+            <a:ext cx="1343228" cy="811973"/>
+          </a:xfrm>
+          <a:prstGeom prst="rect">
+            <a:avLst/>
+          </a:prstGeom>
+          <a:solidFill>
+            <a:schemeClr val="accent2">
+              <a:lumMod val="75000"/>
+            </a:schemeClr>
+          </a:solidFill>
+          <a:ln>
+            <a:noFill/>
+            <a:headEnd type="none" w="med" len="med"/>
+            <a:tailEnd type="none" w="med" len="med"/>
+          </a:ln>
+          <a:effectLst/>
+        </p:spPr>
+        <p:style>
+          <a:lnRef idx="1">
+            <a:schemeClr val="accent2"/>
+          </a:lnRef>
+          <a:fillRef idx="3">
+            <a:schemeClr val="accent2"/>
+          </a:fillRef>
+          <a:effectRef idx="2">
+            <a:schemeClr val="accent2"/>
+          </a:effectRef>
+          <a:fontRef idx="minor">
+            <a:schemeClr val="lt1"/>
+          </a:fontRef>
+        </p:style>
+        <p:txBody>
+          <a:bodyPr rot="0" spcFirstLastPara="0" vertOverflow="overflow" horzOverflow="overflow" vert="horz" wrap="square" lIns="0" tIns="0" rIns="0" bIns="0" numCol="1" spcCol="0" rtlCol="0" fromWordArt="0" anchor="ctr" anchorCtr="0" forceAA="0" compatLnSpc="1">
+            <a:prstTxWarp prst="textNoShape">
+              <a:avLst/>
+            </a:prstTxWarp>
+            <a:noAutofit/>
+          </a:bodyPr>
+          <a:lstStyle/>
+          <a:p>
+            <a:pPr algn="ctr" defTabSz="932472" fontAlgn="base">
+              <a:lnSpc>
+                <a:spcPct val="90000"/>
+              </a:lnSpc>
+              <a:spcBef>
+                <a:spcPct val="0"/>
+              </a:spcBef>
+              <a:spcAft>
+                <a:spcPct val="0"/>
+              </a:spcAft>
+            </a:pPr>
+            <a:r>
+              <a:rPr lang="en-US" sz="1200" b="1" dirty="0">
+                <a:gradFill>
+                  <a:gsLst>
+                    <a:gs pos="0">
+                      <a:srgbClr val="FFFFFF"/>
+                    </a:gs>
+                    <a:gs pos="100000">
+                      <a:srgbClr val="FFFFFF"/>
+                    </a:gs>
+                  </a:gsLst>
+                  <a:lin ang="5400000" scaled="0"/>
+                </a:gradFill>
+                <a:latin typeface="Lucida Console" panose="020B0609040504020204" pitchFamily="49" charset="0"/>
+                <a:ea typeface="Segoe UI" pitchFamily="34" charset="0"/>
+                <a:cs typeface="Segoe UI" pitchFamily="34" charset="0"/>
+              </a:rPr>
+              <a:t>feature</a:t>
+            </a:r>
+          </a:p>
+          <a:p>
+            <a:pPr algn="ctr" defTabSz="932472" fontAlgn="base">
+              <a:lnSpc>
+                <a:spcPct val="90000"/>
+              </a:lnSpc>
+              <a:spcBef>
+                <a:spcPct val="0"/>
+              </a:spcBef>
+              <a:spcAft>
+                <a:spcPct val="0"/>
+              </a:spcAft>
+            </a:pPr>
+            <a:r>
+              <a:rPr lang="en-US" sz="1200" dirty="0">
+                <a:gradFill>
+                  <a:gsLst>
+                    <a:gs pos="0">
+                      <a:srgbClr val="FFFFFF"/>
+                    </a:gs>
+                    <a:gs pos="100000">
+                      <a:srgbClr val="FFFFFF"/>
+                    </a:gs>
+                  </a:gsLst>
+                  <a:lin ang="5400000" scaled="0"/>
+                </a:gradFill>
+                <a:latin typeface="Lucida Console" panose="020B0609040504020204" pitchFamily="49" charset="0"/>
+                <a:ea typeface="Segoe UI" pitchFamily="34" charset="0"/>
+                <a:cs typeface="Segoe UI" pitchFamily="34" charset="0"/>
+              </a:rPr>
+              <a:t>branch</a:t>
+            </a:r>
+          </a:p>
+        </p:txBody>
+      </p:sp>
+      <p:sp>
+        <p:nvSpPr>
+          <p:cNvPr id="21" name="Rectangle 20">
+            <a:extLst>
+              <a:ext uri="{FF2B5EF4-FFF2-40B4-BE49-F238E27FC236}">
+                <a16:creationId xmlns:a16="http://schemas.microsoft.com/office/drawing/2014/main" id="{DE79E635-7EBE-B9EF-995C-9CBF71DD6135}"/>
+              </a:ext>
+            </a:extLst>
+          </p:cNvPr>
+          <p:cNvSpPr/>
+          <p:nvPr/>
+        </p:nvSpPr>
+        <p:spPr bwMode="auto">
+          <a:xfrm>
+            <a:off x="821972" y="908085"/>
+            <a:ext cx="1343228" cy="811973"/>
+          </a:xfrm>
+          <a:prstGeom prst="rect">
+            <a:avLst/>
+          </a:prstGeom>
+          <a:solidFill>
+            <a:schemeClr val="accent4">
+              <a:lumMod val="75000"/>
+            </a:schemeClr>
+          </a:solidFill>
+          <a:ln>
+            <a:solidFill>
+              <a:schemeClr val="tx1">
+                <a:lumMod val="75000"/>
+              </a:schemeClr>
+            </a:solidFill>
+            <a:headEnd type="none" w="med" len="med"/>
+            <a:tailEnd type="none" w="med" len="med"/>
+          </a:ln>
+          <a:effectLst/>
+        </p:spPr>
+        <p:style>
+          <a:lnRef idx="1">
+            <a:schemeClr val="accent2"/>
+          </a:lnRef>
+          <a:fillRef idx="3">
+            <a:schemeClr val="accent2"/>
+          </a:fillRef>
+          <a:effectRef idx="2">
+            <a:schemeClr val="accent2"/>
+          </a:effectRef>
+          <a:fontRef idx="minor">
+            <a:schemeClr val="lt1"/>
+          </a:fontRef>
+        </p:style>
+        <p:txBody>
+          <a:bodyPr rot="0" spcFirstLastPara="0" vertOverflow="overflow" horzOverflow="overflow" vert="horz" wrap="square" lIns="0" tIns="0" rIns="0" bIns="0" numCol="1" spcCol="0" rtlCol="0" fromWordArt="0" anchor="ctr" anchorCtr="0" forceAA="0" compatLnSpc="1">
+            <a:prstTxWarp prst="textNoShape">
+              <a:avLst/>
+            </a:prstTxWarp>
+            <a:noAutofit/>
+          </a:bodyPr>
+          <a:lstStyle/>
+          <a:p>
+            <a:pPr algn="ctr" defTabSz="932472" fontAlgn="base">
+              <a:lnSpc>
+                <a:spcPct val="90000"/>
+              </a:lnSpc>
+              <a:spcBef>
+                <a:spcPct val="0"/>
+              </a:spcBef>
+              <a:spcAft>
+                <a:spcPct val="0"/>
+              </a:spcAft>
+            </a:pPr>
+            <a:r>
+              <a:rPr lang="en-US" sz="1200" b="1" dirty="0">
+                <a:gradFill>
+                  <a:gsLst>
+                    <a:gs pos="0">
+                      <a:srgbClr val="FFFFFF"/>
+                    </a:gs>
+                    <a:gs pos="100000">
+                      <a:srgbClr val="FFFFFF"/>
+                    </a:gs>
+                  </a:gsLst>
+                  <a:lin ang="5400000" scaled="0"/>
+                </a:gradFill>
+                <a:latin typeface="Lucida Console" panose="020B0609040504020204" pitchFamily="49" charset="0"/>
+                <a:ea typeface="Segoe UI" pitchFamily="34" charset="0"/>
+                <a:cs typeface="Segoe UI" pitchFamily="34" charset="0"/>
+              </a:rPr>
+              <a:t>integration</a:t>
+            </a:r>
+          </a:p>
+          <a:p>
+            <a:pPr algn="ctr" defTabSz="932472" fontAlgn="base">
+              <a:lnSpc>
+                <a:spcPct val="90000"/>
+              </a:lnSpc>
+              <a:spcBef>
+                <a:spcPct val="0"/>
+              </a:spcBef>
+              <a:spcAft>
+                <a:spcPct val="0"/>
+              </a:spcAft>
+            </a:pPr>
+            <a:r>
+              <a:rPr lang="en-US" sz="1200" dirty="0">
+                <a:gradFill>
+                  <a:gsLst>
+                    <a:gs pos="0">
+                      <a:srgbClr val="FFFFFF"/>
+                    </a:gs>
+                    <a:gs pos="100000">
+                      <a:srgbClr val="FFFFFF"/>
+                    </a:gs>
+                  </a:gsLst>
+                  <a:lin ang="5400000" scaled="0"/>
+                </a:gradFill>
+                <a:latin typeface="Lucida Console" panose="020B0609040504020204" pitchFamily="49" charset="0"/>
+                <a:ea typeface="Segoe UI" pitchFamily="34" charset="0"/>
+                <a:cs typeface="Segoe UI" pitchFamily="34" charset="0"/>
+              </a:rPr>
+              <a:t>branch</a:t>
+            </a:r>
+          </a:p>
+        </p:txBody>
+      </p:sp>
+      <p:sp>
+        <p:nvSpPr>
+          <p:cNvPr id="27" name="Rectangle 26">
+            <a:extLst>
+              <a:ext uri="{FF2B5EF4-FFF2-40B4-BE49-F238E27FC236}">
+                <a16:creationId xmlns:a16="http://schemas.microsoft.com/office/drawing/2014/main" id="{323CD043-D506-C06A-B93C-B79743955F11}"/>
+              </a:ext>
+            </a:extLst>
+          </p:cNvPr>
+          <p:cNvSpPr/>
+          <p:nvPr/>
+        </p:nvSpPr>
+        <p:spPr bwMode="auto">
+          <a:xfrm>
+            <a:off x="5958790" y="765655"/>
+            <a:ext cx="1910650" cy="1346435"/>
+          </a:xfrm>
+          <a:prstGeom prst="rect">
+            <a:avLst/>
+          </a:prstGeom>
+          <a:solidFill>
+            <a:schemeClr val="bg1">
+              <a:lumMod val="85000"/>
+            </a:schemeClr>
+          </a:solidFill>
+          <a:ln>
+            <a:solidFill>
+              <a:schemeClr val="tx1"/>
+            </a:solidFill>
+            <a:headEnd type="none" w="med" len="med"/>
+            <a:tailEnd type="none" w="med" len="med"/>
+          </a:ln>
+          <a:effectLst/>
+        </p:spPr>
+        <p:style>
+          <a:lnRef idx="1">
+            <a:schemeClr val="accent2"/>
+          </a:lnRef>
+          <a:fillRef idx="3">
+            <a:schemeClr val="accent2"/>
+          </a:fillRef>
+          <a:effectRef idx="2">
+            <a:schemeClr val="accent2"/>
+          </a:effectRef>
+          <a:fontRef idx="minor">
+            <a:schemeClr val="lt1"/>
+          </a:fontRef>
+        </p:style>
+        <p:txBody>
+          <a:bodyPr rot="0" spcFirstLastPara="0" vertOverflow="overflow" horzOverflow="overflow" vert="horz" wrap="square" lIns="0" tIns="91440" rIns="0" bIns="91440" numCol="1" spcCol="0" rtlCol="0" fromWordArt="0" anchor="b" anchorCtr="0" forceAA="0" compatLnSpc="1">
+            <a:prstTxWarp prst="textNoShape">
+              <a:avLst/>
+            </a:prstTxWarp>
+            <a:noAutofit/>
+          </a:bodyPr>
+          <a:lstStyle/>
+          <a:p>
+            <a:pPr algn="ctr" defTabSz="932472" fontAlgn="base">
+              <a:lnSpc>
+                <a:spcPct val="90000"/>
+              </a:lnSpc>
+              <a:spcBef>
+                <a:spcPct val="0"/>
+              </a:spcBef>
+              <a:spcAft>
+                <a:spcPct val="0"/>
+              </a:spcAft>
+            </a:pPr>
+            <a:r>
+              <a:rPr lang="en-US" sz="1200" b="1" dirty="0">
+                <a:solidFill>
+                  <a:schemeClr val="tx1"/>
+                </a:solidFill>
+                <a:ea typeface="Segoe UI" pitchFamily="34" charset="0"/>
+                <a:cs typeface="Segoe UI" pitchFamily="34" charset="0"/>
+              </a:rPr>
+              <a:t>Developer Desktop</a:t>
+            </a:r>
+          </a:p>
+        </p:txBody>
+      </p:sp>
+      <p:sp>
+        <p:nvSpPr>
+          <p:cNvPr id="7" name="Rectangle 6">
+            <a:extLst>
+              <a:ext uri="{FF2B5EF4-FFF2-40B4-BE49-F238E27FC236}">
+                <a16:creationId xmlns:a16="http://schemas.microsoft.com/office/drawing/2014/main" id="{425F21A5-F489-8DA7-A7F2-676CD577BDE7}"/>
+              </a:ext>
+            </a:extLst>
+          </p:cNvPr>
+          <p:cNvSpPr/>
+          <p:nvPr/>
+        </p:nvSpPr>
+        <p:spPr bwMode="auto">
+          <a:xfrm>
+            <a:off x="6144511" y="908085"/>
+            <a:ext cx="1539208" cy="811973"/>
+          </a:xfrm>
+          <a:prstGeom prst="rect">
+            <a:avLst/>
+          </a:prstGeom>
+          <a:solidFill>
+            <a:schemeClr val="accent2">
+              <a:lumMod val="75000"/>
+            </a:schemeClr>
+          </a:solidFill>
+          <a:ln>
+            <a:noFill/>
+            <a:headEnd type="none" w="med" len="med"/>
+            <a:tailEnd type="none" w="med" len="med"/>
+          </a:ln>
+          <a:effectLst/>
+        </p:spPr>
+        <p:style>
+          <a:lnRef idx="1">
+            <a:schemeClr val="accent2"/>
+          </a:lnRef>
+          <a:fillRef idx="3">
+            <a:schemeClr val="accent2"/>
+          </a:fillRef>
+          <a:effectRef idx="2">
+            <a:schemeClr val="accent2"/>
+          </a:effectRef>
+          <a:fontRef idx="minor">
+            <a:schemeClr val="lt1"/>
+          </a:fontRef>
+        </p:style>
+        <p:txBody>
+          <a:bodyPr rot="0" spcFirstLastPara="0" vertOverflow="overflow" horzOverflow="overflow" vert="horz" wrap="square" lIns="0" tIns="0" rIns="0" bIns="0" numCol="1" spcCol="0" rtlCol="0" fromWordArt="0" anchor="ctr" anchorCtr="0" forceAA="0" compatLnSpc="1">
+            <a:prstTxWarp prst="textNoShape">
+              <a:avLst/>
+            </a:prstTxWarp>
+            <a:noAutofit/>
+          </a:bodyPr>
+          <a:lstStyle/>
+          <a:p>
+            <a:pPr algn="ctr" defTabSz="932472" fontAlgn="base">
+              <a:lnSpc>
+                <a:spcPct val="90000"/>
+              </a:lnSpc>
+              <a:spcBef>
+                <a:spcPct val="0"/>
+              </a:spcBef>
+              <a:spcAft>
+                <a:spcPct val="0"/>
+              </a:spcAft>
+            </a:pPr>
+            <a:r>
+              <a:rPr lang="en-US" sz="1200" b="1" dirty="0">
+                <a:gradFill>
+                  <a:gsLst>
+                    <a:gs pos="0">
+                      <a:srgbClr val="FFFFFF"/>
+                    </a:gs>
+                    <a:gs pos="100000">
+                      <a:srgbClr val="FFFFFF"/>
+                    </a:gs>
+                  </a:gsLst>
+                  <a:lin ang="5400000" scaled="0"/>
+                </a:gradFill>
+                <a:latin typeface="Lucida Console" panose="020B0609040504020204" pitchFamily="49" charset="0"/>
+                <a:ea typeface="Segoe UI" pitchFamily="34" charset="0"/>
+                <a:cs typeface="Segoe UI" pitchFamily="34" charset="0"/>
+              </a:rPr>
+              <a:t>local</a:t>
+            </a:r>
+          </a:p>
+          <a:p>
+            <a:pPr algn="ctr" defTabSz="932472" fontAlgn="base">
+              <a:lnSpc>
+                <a:spcPct val="90000"/>
+              </a:lnSpc>
+              <a:spcBef>
+                <a:spcPct val="0"/>
+              </a:spcBef>
+              <a:spcAft>
+                <a:spcPct val="0"/>
+              </a:spcAft>
+            </a:pPr>
+            <a:r>
+              <a:rPr lang="en-US" sz="1200" b="1" dirty="0">
+                <a:gradFill>
+                  <a:gsLst>
+                    <a:gs pos="0">
+                      <a:srgbClr val="FFFFFF"/>
+                    </a:gs>
+                    <a:gs pos="100000">
+                      <a:srgbClr val="FFFFFF"/>
+                    </a:gs>
+                  </a:gsLst>
+                  <a:lin ang="5400000" scaled="0"/>
+                </a:gradFill>
+                <a:latin typeface="Lucida Console" panose="020B0609040504020204" pitchFamily="49" charset="0"/>
+                <a:ea typeface="Segoe UI" pitchFamily="34" charset="0"/>
+                <a:cs typeface="Segoe UI" pitchFamily="34" charset="0"/>
+              </a:rPr>
+              <a:t>files</a:t>
+            </a:r>
+            <a:endParaRPr lang="en-US" sz="1200" dirty="0">
+              <a:gradFill>
+                <a:gsLst>
+                  <a:gs pos="0">
+                    <a:srgbClr val="FFFFFF"/>
+                  </a:gs>
+                  <a:gs pos="100000">
+                    <a:srgbClr val="FFFFFF"/>
+                  </a:gs>
+                </a:gsLst>
+                <a:lin ang="5400000" scaled="0"/>
+              </a:gradFill>
+              <a:latin typeface="Lucida Console" panose="020B0609040504020204" pitchFamily="49" charset="0"/>
+              <a:ea typeface="Segoe UI" pitchFamily="34" charset="0"/>
+              <a:cs typeface="Segoe UI" pitchFamily="34" charset="0"/>
+            </a:endParaRPr>
+          </a:p>
+        </p:txBody>
+      </p:sp>
+      <p:sp>
+        <p:nvSpPr>
+          <p:cNvPr id="23" name="Arrow: Right 22">
+            <a:extLst>
+              <a:ext uri="{FF2B5EF4-FFF2-40B4-BE49-F238E27FC236}">
+                <a16:creationId xmlns:a16="http://schemas.microsoft.com/office/drawing/2014/main" id="{37A72491-5C5D-3BFC-A0DB-DBCF46F408AA}"/>
+              </a:ext>
+            </a:extLst>
+          </p:cNvPr>
+          <p:cNvSpPr/>
+          <p:nvPr/>
+        </p:nvSpPr>
+        <p:spPr bwMode="auto">
+          <a:xfrm>
+            <a:off x="5058981" y="1049787"/>
+            <a:ext cx="1055519" cy="528569"/>
+          </a:xfrm>
+          <a:prstGeom prst="rightArrow">
+            <a:avLst>
+              <a:gd name="adj1" fmla="val 62678"/>
+              <a:gd name="adj2" fmla="val 84775"/>
+            </a:avLst>
+          </a:prstGeom>
+          <a:solidFill>
+            <a:srgbClr val="8A0000"/>
+          </a:solidFill>
+          <a:ln>
+            <a:noFill/>
+            <a:headEnd type="none" w="med" len="med"/>
+            <a:tailEnd type="none" w="med" len="med"/>
+          </a:ln>
+          <a:effectLst/>
+        </p:spPr>
+        <p:style>
+          <a:lnRef idx="1">
+            <a:schemeClr val="accent2"/>
+          </a:lnRef>
+          <a:fillRef idx="3">
+            <a:schemeClr val="accent2"/>
+          </a:fillRef>
+          <a:effectRef idx="2">
+            <a:schemeClr val="accent2"/>
+          </a:effectRef>
+          <a:fontRef idx="minor">
+            <a:schemeClr val="lt1"/>
+          </a:fontRef>
+        </p:style>
+        <p:txBody>
+          <a:bodyPr rot="0" spcFirstLastPara="0" vertOverflow="overflow" horzOverflow="overflow" vert="horz" wrap="square" lIns="0" tIns="0" rIns="0" bIns="0" numCol="1" spcCol="0" rtlCol="0" fromWordArt="0" anchor="ctr" anchorCtr="0" forceAA="0" compatLnSpc="1">
+            <a:prstTxWarp prst="textNoShape">
+              <a:avLst/>
+            </a:prstTxWarp>
+            <a:noAutofit/>
+          </a:bodyPr>
+          <a:lstStyle/>
+          <a:p>
+            <a:pPr algn="ctr" defTabSz="932472" fontAlgn="base">
+              <a:lnSpc>
+                <a:spcPct val="90000"/>
+              </a:lnSpc>
+              <a:spcBef>
+                <a:spcPct val="0"/>
+              </a:spcBef>
+              <a:spcAft>
+                <a:spcPct val="0"/>
+              </a:spcAft>
+            </a:pPr>
+            <a:r>
+              <a:rPr lang="en-US" sz="1100" b="1" dirty="0">
+                <a:gradFill>
+                  <a:gsLst>
+                    <a:gs pos="0">
+                      <a:srgbClr val="FFFFFF"/>
+                    </a:gs>
+                    <a:gs pos="100000">
+                      <a:srgbClr val="FFFFFF"/>
+                    </a:gs>
+                  </a:gsLst>
+                  <a:lin ang="5400000" scaled="0"/>
+                </a:gradFill>
+                <a:ea typeface="Segoe UI" pitchFamily="34" charset="0"/>
+                <a:cs typeface="Segoe UI" pitchFamily="34" charset="0"/>
+              </a:rPr>
+              <a:t>git clone</a:t>
+            </a:r>
+          </a:p>
+        </p:txBody>
+      </p:sp>
+    </p:spTree>
+    <p:extLst>
+      <p:ext uri="{BB962C8B-B14F-4D97-AF65-F5344CB8AC3E}">
+        <p14:creationId xmlns:p14="http://schemas.microsoft.com/office/powerpoint/2010/main" val="1994004386"/>
+      </p:ext>
+    </p:extLst>
+  </p:cSld>
+  <p:clrMapOvr>
+    <a:masterClrMapping/>
+  </p:clrMapOvr>
+  <p:transition>
+    <p:fade/>
+  </p:transition>
+</p:sld>
+</file>
+
+<file path=ppt/slides/slide26.xml><?xml version="1.0" encoding="utf-8"?>
+<p:sld xmlns:a="http://schemas.openxmlformats.org/drawingml/2006/main" xmlns:r="http://schemas.openxmlformats.org/officeDocument/2006/relationships" xmlns:p="http://schemas.openxmlformats.org/presentationml/2006/main">
+  <p:cSld>
+    <p:spTree>
+      <p:nvGrpSpPr>
+        <p:cNvPr id="1" name=""/>
+        <p:cNvGrpSpPr/>
+        <p:nvPr/>
+      </p:nvGrpSpPr>
+      <p:grpSpPr>
+        <a:xfrm>
+          <a:off x="0" y="0"/>
+          <a:ext cx="0" cy="0"/>
+          <a:chOff x="0" y="0"/>
+          <a:chExt cx="0" cy="0"/>
+        </a:xfrm>
+      </p:grpSpPr>
       <p:pic>
         <p:nvPicPr>
-          <p:cNvPr id="12" name="Picture 11">
+          <p:cNvPr id="3" name="Picture 2">
             <a:extLst>
               <a:ext uri="{FF2B5EF4-FFF2-40B4-BE49-F238E27FC236}">
-                <a16:creationId xmlns:a16="http://schemas.microsoft.com/office/drawing/2014/main" id="{8DB6E530-A653-DBDB-F8B4-EC82B216A148}"/>
+                <a16:creationId xmlns:a16="http://schemas.microsoft.com/office/drawing/2014/main" id="{207DCD52-31B4-45D0-4B06-B9B798D2F5B6}"/>
               </a:ext>
             </a:extLst>
           </p:cNvPr>
@@ -11736,8 +12499,8 @@
         </p:blipFill>
         <p:spPr>
           <a:xfrm>
-            <a:off x="1507284" y="877528"/>
-            <a:ext cx="9421906" cy="5239468"/>
+            <a:off x="1450428" y="749171"/>
+            <a:ext cx="8285456" cy="3675686"/>
           </a:xfrm>
           <a:prstGeom prst="rect">
             <a:avLst/>
@@ -11752,7 +12515,7 @@
     </p:spTree>
     <p:extLst>
       <p:ext uri="{BB962C8B-B14F-4D97-AF65-F5344CB8AC3E}">
-        <p14:creationId xmlns:p14="http://schemas.microsoft.com/office/powerpoint/2010/main" val="424151043"/>
+        <p14:creationId xmlns:p14="http://schemas.microsoft.com/office/powerpoint/2010/main" val="1901455685"/>
       </p:ext>
     </p:extLst>
   </p:cSld>
@@ -11765,7 +12528,2122 @@
 </p:sld>
 </file>
 
-<file path=ppt/slides/slide26.xml><?xml version="1.0" encoding="utf-8"?>
+<file path=ppt/slides/slide27.xml><?xml version="1.0" encoding="utf-8"?>
+<p:sld xmlns:a="http://schemas.openxmlformats.org/drawingml/2006/main" xmlns:r="http://schemas.openxmlformats.org/officeDocument/2006/relationships" xmlns:p="http://schemas.openxmlformats.org/presentationml/2006/main">
+  <p:cSld>
+    <p:spTree>
+      <p:nvGrpSpPr>
+        <p:cNvPr id="1" name=""/>
+        <p:cNvGrpSpPr/>
+        <p:nvPr/>
+      </p:nvGrpSpPr>
+      <p:grpSpPr>
+        <a:xfrm>
+          <a:off x="0" y="0"/>
+          <a:ext cx="0" cy="0"/>
+          <a:chOff x="0" y="0"/>
+          <a:chExt cx="0" cy="0"/>
+        </a:xfrm>
+      </p:grpSpPr>
+      <p:pic>
+        <p:nvPicPr>
+          <p:cNvPr id="3" name="Picture 2">
+            <a:extLst>
+              <a:ext uri="{FF2B5EF4-FFF2-40B4-BE49-F238E27FC236}">
+                <a16:creationId xmlns:a16="http://schemas.microsoft.com/office/drawing/2014/main" id="{92A692F3-9237-C816-EF2C-13DB22F93BE6}"/>
+              </a:ext>
+            </a:extLst>
+          </p:cNvPr>
+          <p:cNvPicPr>
+            <a:picLocks noChangeAspect="1"/>
+          </p:cNvPicPr>
+          <p:nvPr/>
+        </p:nvPicPr>
+        <p:blipFill>
+          <a:blip r:embed="rId2"/>
+          <a:stretch>
+            <a:fillRect/>
+          </a:stretch>
+        </p:blipFill>
+        <p:spPr>
+          <a:xfrm>
+            <a:off x="2502969" y="1877786"/>
+            <a:ext cx="7430537" cy="3238952"/>
+          </a:xfrm>
+          <a:prstGeom prst="rect">
+            <a:avLst/>
+          </a:prstGeom>
+          <a:solidFill>
+            <a:schemeClr val="tx1"/>
+          </a:solidFill>
+          <a:ln>
+            <a:solidFill>
+              <a:schemeClr val="tx1"/>
+            </a:solidFill>
+          </a:ln>
+        </p:spPr>
+      </p:pic>
+    </p:spTree>
+    <p:extLst>
+      <p:ext uri="{BB962C8B-B14F-4D97-AF65-F5344CB8AC3E}">
+        <p14:creationId xmlns:p14="http://schemas.microsoft.com/office/powerpoint/2010/main" val="622530604"/>
+      </p:ext>
+    </p:extLst>
+  </p:cSld>
+  <p:clrMapOvr>
+    <a:masterClrMapping/>
+  </p:clrMapOvr>
+  <p:transition>
+    <p:fade/>
+  </p:transition>
+</p:sld>
+</file>
+
+<file path=ppt/slides/slide28.xml><?xml version="1.0" encoding="utf-8"?>
+<p:sld xmlns:a="http://schemas.openxmlformats.org/drawingml/2006/main" xmlns:r="http://schemas.openxmlformats.org/officeDocument/2006/relationships" xmlns:p="http://schemas.openxmlformats.org/presentationml/2006/main">
+  <p:cSld>
+    <p:spTree>
+      <p:nvGrpSpPr>
+        <p:cNvPr id="1" name=""/>
+        <p:cNvGrpSpPr/>
+        <p:nvPr/>
+      </p:nvGrpSpPr>
+      <p:grpSpPr>
+        <a:xfrm>
+          <a:off x="0" y="0"/>
+          <a:ext cx="0" cy="0"/>
+          <a:chOff x="0" y="0"/>
+          <a:chExt cx="0" cy="0"/>
+        </a:xfrm>
+      </p:grpSpPr>
+      <p:pic>
+        <p:nvPicPr>
+          <p:cNvPr id="3" name="Picture 2">
+            <a:extLst>
+              <a:ext uri="{FF2B5EF4-FFF2-40B4-BE49-F238E27FC236}">
+                <a16:creationId xmlns:a16="http://schemas.microsoft.com/office/drawing/2014/main" id="{838EE0DD-6BEF-60D1-033B-0CAA79276B59}"/>
+              </a:ext>
+            </a:extLst>
+          </p:cNvPr>
+          <p:cNvPicPr>
+            <a:picLocks noChangeAspect="1"/>
+          </p:cNvPicPr>
+          <p:nvPr/>
+        </p:nvPicPr>
+        <p:blipFill>
+          <a:blip r:embed="rId2"/>
+          <a:stretch>
+            <a:fillRect/>
+          </a:stretch>
+        </p:blipFill>
+        <p:spPr>
+          <a:xfrm>
+            <a:off x="653009" y="576552"/>
+            <a:ext cx="10445915" cy="4465052"/>
+          </a:xfrm>
+          <a:prstGeom prst="rect">
+            <a:avLst/>
+          </a:prstGeom>
+          <a:ln>
+            <a:solidFill>
+              <a:schemeClr val="tx1"/>
+            </a:solidFill>
+          </a:ln>
+        </p:spPr>
+      </p:pic>
+    </p:spTree>
+    <p:extLst>
+      <p:ext uri="{BB962C8B-B14F-4D97-AF65-F5344CB8AC3E}">
+        <p14:creationId xmlns:p14="http://schemas.microsoft.com/office/powerpoint/2010/main" val="4170307502"/>
+      </p:ext>
+    </p:extLst>
+  </p:cSld>
+  <p:clrMapOvr>
+    <a:masterClrMapping/>
+  </p:clrMapOvr>
+  <p:transition>
+    <p:fade/>
+  </p:transition>
+</p:sld>
+</file>
+
+<file path=ppt/slides/slide29.xml><?xml version="1.0" encoding="utf-8"?>
+<p:sld xmlns:a="http://schemas.openxmlformats.org/drawingml/2006/main" xmlns:r="http://schemas.openxmlformats.org/officeDocument/2006/relationships" xmlns:p="http://schemas.openxmlformats.org/presentationml/2006/main">
+  <p:cSld>
+    <p:spTree>
+      <p:nvGrpSpPr>
+        <p:cNvPr id="1" name="">
+          <a:extLst>
+            <a:ext uri="{FF2B5EF4-FFF2-40B4-BE49-F238E27FC236}">
+              <a16:creationId xmlns:a16="http://schemas.microsoft.com/office/drawing/2014/main" id="{6542B0D7-6B2B-3D91-15C2-2F2CA02331E3}"/>
+            </a:ext>
+          </a:extLst>
+        </p:cNvPr>
+        <p:cNvGrpSpPr/>
+        <p:nvPr/>
+      </p:nvGrpSpPr>
+      <p:grpSpPr>
+        <a:xfrm>
+          <a:off x="0" y="0"/>
+          <a:ext cx="0" cy="0"/>
+          <a:chOff x="0" y="0"/>
+          <a:chExt cx="0" cy="0"/>
+        </a:xfrm>
+      </p:grpSpPr>
+      <p:sp>
+        <p:nvSpPr>
+          <p:cNvPr id="3" name="Rectangle 2">
+            <a:extLst>
+              <a:ext uri="{FF2B5EF4-FFF2-40B4-BE49-F238E27FC236}">
+                <a16:creationId xmlns:a16="http://schemas.microsoft.com/office/drawing/2014/main" id="{00C759EC-748C-0775-9B20-AA55B6E97D1A}"/>
+              </a:ext>
+            </a:extLst>
+          </p:cNvPr>
+          <p:cNvSpPr/>
+          <p:nvPr/>
+        </p:nvSpPr>
+        <p:spPr bwMode="auto">
+          <a:xfrm>
+            <a:off x="5379666" y="1567924"/>
+            <a:ext cx="4626011" cy="3045061"/>
+          </a:xfrm>
+          <a:prstGeom prst="rect">
+            <a:avLst/>
+          </a:prstGeom>
+          <a:solidFill>
+            <a:schemeClr val="bg1">
+              <a:lumMod val="85000"/>
+            </a:schemeClr>
+          </a:solidFill>
+          <a:ln>
+            <a:solidFill>
+              <a:schemeClr val="tx1"/>
+            </a:solidFill>
+            <a:headEnd type="none" w="med" len="med"/>
+            <a:tailEnd type="none" w="med" len="med"/>
+          </a:ln>
+          <a:effectLst/>
+        </p:spPr>
+        <p:style>
+          <a:lnRef idx="1">
+            <a:schemeClr val="accent2"/>
+          </a:lnRef>
+          <a:fillRef idx="3">
+            <a:schemeClr val="accent2"/>
+          </a:fillRef>
+          <a:effectRef idx="2">
+            <a:schemeClr val="accent2"/>
+          </a:effectRef>
+          <a:fontRef idx="minor">
+            <a:schemeClr val="lt1"/>
+          </a:fontRef>
+        </p:style>
+        <p:txBody>
+          <a:bodyPr rot="0" spcFirstLastPara="0" vertOverflow="overflow" horzOverflow="overflow" vert="horz" wrap="square" lIns="0" tIns="91440" rIns="0" bIns="91440" numCol="1" spcCol="0" rtlCol="0" fromWordArt="0" anchor="b" anchorCtr="0" forceAA="0" compatLnSpc="1">
+            <a:prstTxWarp prst="textNoShape">
+              <a:avLst/>
+            </a:prstTxWarp>
+            <a:noAutofit/>
+          </a:bodyPr>
+          <a:lstStyle/>
+          <a:p>
+            <a:pPr algn="ctr" defTabSz="932472" fontAlgn="base">
+              <a:lnSpc>
+                <a:spcPct val="90000"/>
+              </a:lnSpc>
+              <a:spcBef>
+                <a:spcPct val="0"/>
+              </a:spcBef>
+              <a:spcAft>
+                <a:spcPct val="0"/>
+              </a:spcAft>
+            </a:pPr>
+            <a:r>
+              <a:rPr lang="en-US" sz="1200" b="1" dirty="0">
+                <a:solidFill>
+                  <a:schemeClr val="tx1"/>
+                </a:solidFill>
+                <a:ea typeface="Segoe UI" pitchFamily="34" charset="0"/>
+                <a:cs typeface="Segoe UI" pitchFamily="34" charset="0"/>
+              </a:rPr>
+              <a:t>Origin GIT Repository</a:t>
+            </a:r>
+          </a:p>
+        </p:txBody>
+      </p:sp>
+      <p:sp>
+        <p:nvSpPr>
+          <p:cNvPr id="17" name="Arrow: Right 16">
+            <a:extLst>
+              <a:ext uri="{FF2B5EF4-FFF2-40B4-BE49-F238E27FC236}">
+                <a16:creationId xmlns:a16="http://schemas.microsoft.com/office/drawing/2014/main" id="{36984137-3989-C886-F21D-37A1CE7EFF52}"/>
+              </a:ext>
+            </a:extLst>
+          </p:cNvPr>
+          <p:cNvSpPr/>
+          <p:nvPr/>
+        </p:nvSpPr>
+        <p:spPr bwMode="auto">
+          <a:xfrm>
+            <a:off x="7053536" y="3521009"/>
+            <a:ext cx="1333597" cy="528569"/>
+          </a:xfrm>
+          <a:prstGeom prst="rightArrow">
+            <a:avLst>
+              <a:gd name="adj1" fmla="val 62678"/>
+              <a:gd name="adj2" fmla="val 58330"/>
+            </a:avLst>
+          </a:prstGeom>
+          <a:solidFill>
+            <a:srgbClr val="8A0000"/>
+          </a:solidFill>
+          <a:ln>
+            <a:noFill/>
+            <a:headEnd type="none" w="med" len="med"/>
+            <a:tailEnd type="none" w="med" len="med"/>
+          </a:ln>
+          <a:effectLst/>
+        </p:spPr>
+        <p:style>
+          <a:lnRef idx="1">
+            <a:schemeClr val="accent2"/>
+          </a:lnRef>
+          <a:fillRef idx="3">
+            <a:schemeClr val="accent2"/>
+          </a:fillRef>
+          <a:effectRef idx="2">
+            <a:schemeClr val="accent2"/>
+          </a:effectRef>
+          <a:fontRef idx="minor">
+            <a:schemeClr val="lt1"/>
+          </a:fontRef>
+        </p:style>
+        <p:txBody>
+          <a:bodyPr rot="0" spcFirstLastPara="0" vertOverflow="overflow" horzOverflow="overflow" vert="horz" wrap="square" lIns="0" tIns="0" rIns="0" bIns="0" numCol="1" spcCol="0" rtlCol="0" fromWordArt="0" anchor="ctr" anchorCtr="0" forceAA="0" compatLnSpc="1">
+            <a:prstTxWarp prst="textNoShape">
+              <a:avLst/>
+            </a:prstTxWarp>
+            <a:noAutofit/>
+          </a:bodyPr>
+          <a:lstStyle/>
+          <a:p>
+            <a:pPr algn="ctr" defTabSz="932472" fontAlgn="base">
+              <a:lnSpc>
+                <a:spcPct val="90000"/>
+              </a:lnSpc>
+              <a:spcBef>
+                <a:spcPct val="0"/>
+              </a:spcBef>
+              <a:spcAft>
+                <a:spcPct val="0"/>
+              </a:spcAft>
+            </a:pPr>
+            <a:r>
+              <a:rPr lang="en-US" sz="1100" b="1" dirty="0">
+                <a:gradFill>
+                  <a:gsLst>
+                    <a:gs pos="0">
+                      <a:srgbClr val="FFFFFF"/>
+                    </a:gs>
+                    <a:gs pos="100000">
+                      <a:srgbClr val="FFFFFF"/>
+                    </a:gs>
+                  </a:gsLst>
+                  <a:lin ang="5400000" scaled="0"/>
+                </a:gradFill>
+                <a:ea typeface="Segoe UI" pitchFamily="34" charset="0"/>
+                <a:cs typeface="Segoe UI" pitchFamily="34" charset="0"/>
+              </a:rPr>
+              <a:t>Pull Request</a:t>
+            </a:r>
+          </a:p>
+        </p:txBody>
+      </p:sp>
+      <p:sp>
+        <p:nvSpPr>
+          <p:cNvPr id="19" name="Rectangle 18">
+            <a:extLst>
+              <a:ext uri="{FF2B5EF4-FFF2-40B4-BE49-F238E27FC236}">
+                <a16:creationId xmlns:a16="http://schemas.microsoft.com/office/drawing/2014/main" id="{E8C15469-30C5-F319-8071-8664B5CE9C36}"/>
+              </a:ext>
+            </a:extLst>
+          </p:cNvPr>
+          <p:cNvSpPr/>
+          <p:nvPr/>
+        </p:nvSpPr>
+        <p:spPr bwMode="auto">
+          <a:xfrm>
+            <a:off x="5670283" y="3379307"/>
+            <a:ext cx="1343228" cy="811973"/>
+          </a:xfrm>
+          <a:prstGeom prst="rect">
+            <a:avLst/>
+          </a:prstGeom>
+          <a:solidFill>
+            <a:schemeClr val="accent2">
+              <a:lumMod val="75000"/>
+            </a:schemeClr>
+          </a:solidFill>
+          <a:ln>
+            <a:noFill/>
+            <a:headEnd type="none" w="med" len="med"/>
+            <a:tailEnd type="none" w="med" len="med"/>
+          </a:ln>
+          <a:effectLst/>
+        </p:spPr>
+        <p:style>
+          <a:lnRef idx="1">
+            <a:schemeClr val="accent2"/>
+          </a:lnRef>
+          <a:fillRef idx="3">
+            <a:schemeClr val="accent2"/>
+          </a:fillRef>
+          <a:effectRef idx="2">
+            <a:schemeClr val="accent2"/>
+          </a:effectRef>
+          <a:fontRef idx="minor">
+            <a:schemeClr val="lt1"/>
+          </a:fontRef>
+        </p:style>
+        <p:txBody>
+          <a:bodyPr rot="0" spcFirstLastPara="0" vertOverflow="overflow" horzOverflow="overflow" vert="horz" wrap="square" lIns="0" tIns="0" rIns="0" bIns="0" numCol="1" spcCol="0" rtlCol="0" fromWordArt="0" anchor="ctr" anchorCtr="0" forceAA="0" compatLnSpc="1">
+            <a:prstTxWarp prst="textNoShape">
+              <a:avLst/>
+            </a:prstTxWarp>
+            <a:noAutofit/>
+          </a:bodyPr>
+          <a:lstStyle/>
+          <a:p>
+            <a:pPr algn="ctr" defTabSz="932472" fontAlgn="base">
+              <a:lnSpc>
+                <a:spcPct val="90000"/>
+              </a:lnSpc>
+              <a:spcBef>
+                <a:spcPct val="0"/>
+              </a:spcBef>
+              <a:spcAft>
+                <a:spcPct val="0"/>
+              </a:spcAft>
+            </a:pPr>
+            <a:r>
+              <a:rPr lang="en-US" sz="1200" b="1" dirty="0">
+                <a:gradFill>
+                  <a:gsLst>
+                    <a:gs pos="0">
+                      <a:srgbClr val="FFFFFF"/>
+                    </a:gs>
+                    <a:gs pos="100000">
+                      <a:srgbClr val="FFFFFF"/>
+                    </a:gs>
+                  </a:gsLst>
+                  <a:lin ang="5400000" scaled="0"/>
+                </a:gradFill>
+                <a:latin typeface="Lucida Console" panose="020B0609040504020204" pitchFamily="49" charset="0"/>
+                <a:ea typeface="Segoe UI" pitchFamily="34" charset="0"/>
+                <a:cs typeface="Segoe UI" pitchFamily="34" charset="0"/>
+              </a:rPr>
+              <a:t>feature</a:t>
+            </a:r>
+          </a:p>
+          <a:p>
+            <a:pPr algn="ctr" defTabSz="932472" fontAlgn="base">
+              <a:lnSpc>
+                <a:spcPct val="90000"/>
+              </a:lnSpc>
+              <a:spcBef>
+                <a:spcPct val="0"/>
+              </a:spcBef>
+              <a:spcAft>
+                <a:spcPct val="0"/>
+              </a:spcAft>
+            </a:pPr>
+            <a:r>
+              <a:rPr lang="en-US" sz="1200" dirty="0">
+                <a:gradFill>
+                  <a:gsLst>
+                    <a:gs pos="0">
+                      <a:srgbClr val="FFFFFF"/>
+                    </a:gs>
+                    <a:gs pos="100000">
+                      <a:srgbClr val="FFFFFF"/>
+                    </a:gs>
+                  </a:gsLst>
+                  <a:lin ang="5400000" scaled="0"/>
+                </a:gradFill>
+                <a:latin typeface="Lucida Console" panose="020B0609040504020204" pitchFamily="49" charset="0"/>
+                <a:ea typeface="Segoe UI" pitchFamily="34" charset="0"/>
+                <a:cs typeface="Segoe UI" pitchFamily="34" charset="0"/>
+              </a:rPr>
+              <a:t>branch</a:t>
+            </a:r>
+          </a:p>
+        </p:txBody>
+      </p:sp>
+      <p:sp>
+        <p:nvSpPr>
+          <p:cNvPr id="21" name="Rectangle 20">
+            <a:extLst>
+              <a:ext uri="{FF2B5EF4-FFF2-40B4-BE49-F238E27FC236}">
+                <a16:creationId xmlns:a16="http://schemas.microsoft.com/office/drawing/2014/main" id="{638EB768-85D8-606C-9C27-F3B806E71864}"/>
+              </a:ext>
+            </a:extLst>
+          </p:cNvPr>
+          <p:cNvSpPr/>
+          <p:nvPr/>
+        </p:nvSpPr>
+        <p:spPr bwMode="auto">
+          <a:xfrm>
+            <a:off x="8426795" y="3379307"/>
+            <a:ext cx="1343228" cy="811973"/>
+          </a:xfrm>
+          <a:prstGeom prst="rect">
+            <a:avLst/>
+          </a:prstGeom>
+          <a:solidFill>
+            <a:schemeClr val="accent4">
+              <a:lumMod val="75000"/>
+            </a:schemeClr>
+          </a:solidFill>
+          <a:ln>
+            <a:solidFill>
+              <a:schemeClr val="tx1">
+                <a:lumMod val="75000"/>
+              </a:schemeClr>
+            </a:solidFill>
+            <a:headEnd type="none" w="med" len="med"/>
+            <a:tailEnd type="none" w="med" len="med"/>
+          </a:ln>
+          <a:effectLst/>
+        </p:spPr>
+        <p:style>
+          <a:lnRef idx="1">
+            <a:schemeClr val="accent2"/>
+          </a:lnRef>
+          <a:fillRef idx="3">
+            <a:schemeClr val="accent2"/>
+          </a:fillRef>
+          <a:effectRef idx="2">
+            <a:schemeClr val="accent2"/>
+          </a:effectRef>
+          <a:fontRef idx="minor">
+            <a:schemeClr val="lt1"/>
+          </a:fontRef>
+        </p:style>
+        <p:txBody>
+          <a:bodyPr rot="0" spcFirstLastPara="0" vertOverflow="overflow" horzOverflow="overflow" vert="horz" wrap="square" lIns="0" tIns="0" rIns="0" bIns="0" numCol="1" spcCol="0" rtlCol="0" fromWordArt="0" anchor="ctr" anchorCtr="0" forceAA="0" compatLnSpc="1">
+            <a:prstTxWarp prst="textNoShape">
+              <a:avLst/>
+            </a:prstTxWarp>
+            <a:noAutofit/>
+          </a:bodyPr>
+          <a:lstStyle/>
+          <a:p>
+            <a:pPr algn="ctr" defTabSz="932472" fontAlgn="base">
+              <a:lnSpc>
+                <a:spcPct val="90000"/>
+              </a:lnSpc>
+              <a:spcBef>
+                <a:spcPct val="0"/>
+              </a:spcBef>
+              <a:spcAft>
+                <a:spcPct val="0"/>
+              </a:spcAft>
+            </a:pPr>
+            <a:r>
+              <a:rPr lang="en-US" sz="1200" b="1" dirty="0">
+                <a:gradFill>
+                  <a:gsLst>
+                    <a:gs pos="0">
+                      <a:srgbClr val="FFFFFF"/>
+                    </a:gs>
+                    <a:gs pos="100000">
+                      <a:srgbClr val="FFFFFF"/>
+                    </a:gs>
+                  </a:gsLst>
+                  <a:lin ang="5400000" scaled="0"/>
+                </a:gradFill>
+                <a:latin typeface="Lucida Console" panose="020B0609040504020204" pitchFamily="49" charset="0"/>
+                <a:ea typeface="Segoe UI" pitchFamily="34" charset="0"/>
+                <a:cs typeface="Segoe UI" pitchFamily="34" charset="0"/>
+              </a:rPr>
+              <a:t>integration</a:t>
+            </a:r>
+          </a:p>
+          <a:p>
+            <a:pPr algn="ctr" defTabSz="932472" fontAlgn="base">
+              <a:lnSpc>
+                <a:spcPct val="90000"/>
+              </a:lnSpc>
+              <a:spcBef>
+                <a:spcPct val="0"/>
+              </a:spcBef>
+              <a:spcAft>
+                <a:spcPct val="0"/>
+              </a:spcAft>
+            </a:pPr>
+            <a:r>
+              <a:rPr lang="en-US" sz="1200" dirty="0">
+                <a:gradFill>
+                  <a:gsLst>
+                    <a:gs pos="0">
+                      <a:srgbClr val="FFFFFF"/>
+                    </a:gs>
+                    <a:gs pos="100000">
+                      <a:srgbClr val="FFFFFF"/>
+                    </a:gs>
+                  </a:gsLst>
+                  <a:lin ang="5400000" scaled="0"/>
+                </a:gradFill>
+                <a:latin typeface="Lucida Console" panose="020B0609040504020204" pitchFamily="49" charset="0"/>
+                <a:ea typeface="Segoe UI" pitchFamily="34" charset="0"/>
+                <a:cs typeface="Segoe UI" pitchFamily="34" charset="0"/>
+              </a:rPr>
+              <a:t>branch</a:t>
+            </a:r>
+          </a:p>
+        </p:txBody>
+      </p:sp>
+      <p:sp>
+        <p:nvSpPr>
+          <p:cNvPr id="27" name="Rectangle 26">
+            <a:extLst>
+              <a:ext uri="{FF2B5EF4-FFF2-40B4-BE49-F238E27FC236}">
+                <a16:creationId xmlns:a16="http://schemas.microsoft.com/office/drawing/2014/main" id="{E84A40C4-1ABF-C2BD-6EE7-6BEFB22906D1}"/>
+              </a:ext>
+            </a:extLst>
+          </p:cNvPr>
+          <p:cNvSpPr/>
+          <p:nvPr/>
+        </p:nvSpPr>
+        <p:spPr bwMode="auto">
+          <a:xfrm>
+            <a:off x="1681655" y="1567924"/>
+            <a:ext cx="3357419" cy="2962036"/>
+          </a:xfrm>
+          <a:prstGeom prst="rect">
+            <a:avLst/>
+          </a:prstGeom>
+          <a:solidFill>
+            <a:schemeClr val="bg1">
+              <a:lumMod val="85000"/>
+            </a:schemeClr>
+          </a:solidFill>
+          <a:ln>
+            <a:solidFill>
+              <a:schemeClr val="tx1"/>
+            </a:solidFill>
+            <a:headEnd type="none" w="med" len="med"/>
+            <a:tailEnd type="none" w="med" len="med"/>
+          </a:ln>
+          <a:effectLst/>
+        </p:spPr>
+        <p:style>
+          <a:lnRef idx="1">
+            <a:schemeClr val="accent2"/>
+          </a:lnRef>
+          <a:fillRef idx="3">
+            <a:schemeClr val="accent2"/>
+          </a:fillRef>
+          <a:effectRef idx="2">
+            <a:schemeClr val="accent2"/>
+          </a:effectRef>
+          <a:fontRef idx="minor">
+            <a:schemeClr val="lt1"/>
+          </a:fontRef>
+        </p:style>
+        <p:txBody>
+          <a:bodyPr rot="0" spcFirstLastPara="0" vertOverflow="overflow" horzOverflow="overflow" vert="horz" wrap="square" lIns="0" tIns="91440" rIns="0" bIns="91440" numCol="1" spcCol="0" rtlCol="0" fromWordArt="0" anchor="b" anchorCtr="0" forceAA="0" compatLnSpc="1">
+            <a:prstTxWarp prst="textNoShape">
+              <a:avLst/>
+            </a:prstTxWarp>
+            <a:noAutofit/>
+          </a:bodyPr>
+          <a:lstStyle/>
+          <a:p>
+            <a:pPr algn="ctr" defTabSz="932472" fontAlgn="base">
+              <a:lnSpc>
+                <a:spcPct val="90000"/>
+              </a:lnSpc>
+              <a:spcBef>
+                <a:spcPct val="0"/>
+              </a:spcBef>
+              <a:spcAft>
+                <a:spcPct val="0"/>
+              </a:spcAft>
+            </a:pPr>
+            <a:r>
+              <a:rPr lang="en-US" sz="1200" b="1" dirty="0">
+                <a:solidFill>
+                  <a:schemeClr val="tx1"/>
+                </a:solidFill>
+                <a:ea typeface="Segoe UI" pitchFamily="34" charset="0"/>
+                <a:cs typeface="Segoe UI" pitchFamily="34" charset="0"/>
+              </a:rPr>
+              <a:t>Developer Desktop</a:t>
+            </a:r>
+          </a:p>
+        </p:txBody>
+      </p:sp>
+      <p:sp>
+        <p:nvSpPr>
+          <p:cNvPr id="7" name="Rectangle 6">
+            <a:extLst>
+              <a:ext uri="{FF2B5EF4-FFF2-40B4-BE49-F238E27FC236}">
+                <a16:creationId xmlns:a16="http://schemas.microsoft.com/office/drawing/2014/main" id="{248900FD-DF50-B3FA-4949-E6993959488F}"/>
+              </a:ext>
+            </a:extLst>
+          </p:cNvPr>
+          <p:cNvSpPr/>
+          <p:nvPr/>
+        </p:nvSpPr>
+        <p:spPr bwMode="auto">
+          <a:xfrm>
+            <a:off x="2406872" y="3379307"/>
+            <a:ext cx="1681069" cy="811973"/>
+          </a:xfrm>
+          <a:prstGeom prst="rect">
+            <a:avLst/>
+          </a:prstGeom>
+          <a:solidFill>
+            <a:schemeClr val="accent2">
+              <a:lumMod val="75000"/>
+            </a:schemeClr>
+          </a:solidFill>
+          <a:ln>
+            <a:noFill/>
+            <a:headEnd type="none" w="med" len="med"/>
+            <a:tailEnd type="none" w="med" len="med"/>
+          </a:ln>
+          <a:effectLst/>
+        </p:spPr>
+        <p:style>
+          <a:lnRef idx="1">
+            <a:schemeClr val="accent2"/>
+          </a:lnRef>
+          <a:fillRef idx="3">
+            <a:schemeClr val="accent2"/>
+          </a:fillRef>
+          <a:effectRef idx="2">
+            <a:schemeClr val="accent2"/>
+          </a:effectRef>
+          <a:fontRef idx="minor">
+            <a:schemeClr val="lt1"/>
+          </a:fontRef>
+        </p:style>
+        <p:txBody>
+          <a:bodyPr rot="0" spcFirstLastPara="0" vertOverflow="overflow" horzOverflow="overflow" vert="horz" wrap="square" lIns="0" tIns="0" rIns="0" bIns="0" numCol="1" spcCol="0" rtlCol="0" fromWordArt="0" anchor="ctr" anchorCtr="0" forceAA="0" compatLnSpc="1">
+            <a:prstTxWarp prst="textNoShape">
+              <a:avLst/>
+            </a:prstTxWarp>
+            <a:noAutofit/>
+          </a:bodyPr>
+          <a:lstStyle/>
+          <a:p>
+            <a:pPr algn="ctr" defTabSz="932472" fontAlgn="base">
+              <a:lnSpc>
+                <a:spcPct val="90000"/>
+              </a:lnSpc>
+              <a:spcBef>
+                <a:spcPct val="0"/>
+              </a:spcBef>
+              <a:spcAft>
+                <a:spcPct val="0"/>
+              </a:spcAft>
+            </a:pPr>
+            <a:r>
+              <a:rPr lang="en-US" sz="1200" b="1" dirty="0">
+                <a:gradFill>
+                  <a:gsLst>
+                    <a:gs pos="0">
+                      <a:srgbClr val="FFFFFF"/>
+                    </a:gs>
+                    <a:gs pos="100000">
+                      <a:srgbClr val="FFFFFF"/>
+                    </a:gs>
+                  </a:gsLst>
+                  <a:lin ang="5400000" scaled="0"/>
+                </a:gradFill>
+                <a:latin typeface="Lucida Console" panose="020B0609040504020204" pitchFamily="49" charset="0"/>
+                <a:ea typeface="Segoe UI" pitchFamily="34" charset="0"/>
+                <a:cs typeface="Segoe UI" pitchFamily="34" charset="0"/>
+              </a:rPr>
+              <a:t>local</a:t>
+            </a:r>
+          </a:p>
+          <a:p>
+            <a:pPr algn="ctr" defTabSz="932472" fontAlgn="base">
+              <a:lnSpc>
+                <a:spcPct val="90000"/>
+              </a:lnSpc>
+              <a:spcBef>
+                <a:spcPct val="0"/>
+              </a:spcBef>
+              <a:spcAft>
+                <a:spcPct val="0"/>
+              </a:spcAft>
+            </a:pPr>
+            <a:r>
+              <a:rPr lang="en-US" sz="1200" b="1" dirty="0">
+                <a:gradFill>
+                  <a:gsLst>
+                    <a:gs pos="0">
+                      <a:srgbClr val="FFFFFF"/>
+                    </a:gs>
+                    <a:gs pos="100000">
+                      <a:srgbClr val="FFFFFF"/>
+                    </a:gs>
+                  </a:gsLst>
+                  <a:lin ang="5400000" scaled="0"/>
+                </a:gradFill>
+                <a:latin typeface="Lucida Console" panose="020B0609040504020204" pitchFamily="49" charset="0"/>
+                <a:ea typeface="Segoe UI" pitchFamily="34" charset="0"/>
+                <a:cs typeface="Segoe UI" pitchFamily="34" charset="0"/>
+              </a:rPr>
+              <a:t>files</a:t>
+            </a:r>
+            <a:endParaRPr lang="en-US" sz="1200" dirty="0">
+              <a:gradFill>
+                <a:gsLst>
+                  <a:gs pos="0">
+                    <a:srgbClr val="FFFFFF"/>
+                  </a:gs>
+                  <a:gs pos="100000">
+                    <a:srgbClr val="FFFFFF"/>
+                  </a:gs>
+                </a:gsLst>
+                <a:lin ang="5400000" scaled="0"/>
+              </a:gradFill>
+              <a:latin typeface="Lucida Console" panose="020B0609040504020204" pitchFamily="49" charset="0"/>
+              <a:ea typeface="Segoe UI" pitchFamily="34" charset="0"/>
+              <a:cs typeface="Segoe UI" pitchFamily="34" charset="0"/>
+            </a:endParaRPr>
+          </a:p>
+        </p:txBody>
+      </p:sp>
+      <p:sp>
+        <p:nvSpPr>
+          <p:cNvPr id="23" name="Arrow: Right 22">
+            <a:extLst>
+              <a:ext uri="{FF2B5EF4-FFF2-40B4-BE49-F238E27FC236}">
+                <a16:creationId xmlns:a16="http://schemas.microsoft.com/office/drawing/2014/main" id="{31E0F7B1-A1A2-845B-9CE1-3BEBB7DD0CEF}"/>
+              </a:ext>
+            </a:extLst>
+          </p:cNvPr>
+          <p:cNvSpPr/>
+          <p:nvPr/>
+        </p:nvSpPr>
+        <p:spPr bwMode="auto">
+          <a:xfrm>
+            <a:off x="4127602" y="3521009"/>
+            <a:ext cx="1481105" cy="528569"/>
+          </a:xfrm>
+          <a:prstGeom prst="rightArrow">
+            <a:avLst>
+              <a:gd name="adj1" fmla="val 62678"/>
+              <a:gd name="adj2" fmla="val 84775"/>
+            </a:avLst>
+          </a:prstGeom>
+          <a:solidFill>
+            <a:srgbClr val="8A0000"/>
+          </a:solidFill>
+          <a:ln>
+            <a:noFill/>
+            <a:headEnd type="none" w="med" len="med"/>
+            <a:tailEnd type="none" w="med" len="med"/>
+          </a:ln>
+          <a:effectLst/>
+        </p:spPr>
+        <p:style>
+          <a:lnRef idx="1">
+            <a:schemeClr val="accent2"/>
+          </a:lnRef>
+          <a:fillRef idx="3">
+            <a:schemeClr val="accent2"/>
+          </a:fillRef>
+          <a:effectRef idx="2">
+            <a:schemeClr val="accent2"/>
+          </a:effectRef>
+          <a:fontRef idx="minor">
+            <a:schemeClr val="lt1"/>
+          </a:fontRef>
+        </p:style>
+        <p:txBody>
+          <a:bodyPr rot="0" spcFirstLastPara="0" vertOverflow="overflow" horzOverflow="overflow" vert="horz" wrap="square" lIns="0" tIns="0" rIns="0" bIns="0" numCol="1" spcCol="0" rtlCol="0" fromWordArt="0" anchor="ctr" anchorCtr="0" forceAA="0" compatLnSpc="1">
+            <a:prstTxWarp prst="textNoShape">
+              <a:avLst/>
+            </a:prstTxWarp>
+            <a:noAutofit/>
+          </a:bodyPr>
+          <a:lstStyle/>
+          <a:p>
+            <a:pPr algn="ctr" defTabSz="932472" fontAlgn="base">
+              <a:lnSpc>
+                <a:spcPct val="90000"/>
+              </a:lnSpc>
+              <a:spcBef>
+                <a:spcPct val="0"/>
+              </a:spcBef>
+              <a:spcAft>
+                <a:spcPct val="0"/>
+              </a:spcAft>
+            </a:pPr>
+            <a:r>
+              <a:rPr lang="en-US" sz="1100" b="1" dirty="0">
+                <a:gradFill>
+                  <a:gsLst>
+                    <a:gs pos="0">
+                      <a:srgbClr val="FFFFFF"/>
+                    </a:gs>
+                    <a:gs pos="100000">
+                      <a:srgbClr val="FFFFFF"/>
+                    </a:gs>
+                  </a:gsLst>
+                  <a:lin ang="5400000" scaled="0"/>
+                </a:gradFill>
+                <a:ea typeface="Segoe UI" pitchFamily="34" charset="0"/>
+                <a:cs typeface="Segoe UI" pitchFamily="34" charset="0"/>
+              </a:rPr>
+              <a:t>git push</a:t>
+            </a:r>
+          </a:p>
+        </p:txBody>
+      </p:sp>
+      <p:sp>
+        <p:nvSpPr>
+          <p:cNvPr id="4" name="Rectangle 3">
+            <a:extLst>
+              <a:ext uri="{FF2B5EF4-FFF2-40B4-BE49-F238E27FC236}">
+                <a16:creationId xmlns:a16="http://schemas.microsoft.com/office/drawing/2014/main" id="{CC2D23ED-F9AB-DCA5-0706-D01A6F4EEEBE}"/>
+              </a:ext>
+            </a:extLst>
+          </p:cNvPr>
+          <p:cNvSpPr/>
+          <p:nvPr/>
+        </p:nvSpPr>
+        <p:spPr bwMode="auto">
+          <a:xfrm>
+            <a:off x="5670283" y="1731489"/>
+            <a:ext cx="1343228" cy="899269"/>
+          </a:xfrm>
+          <a:prstGeom prst="rect">
+            <a:avLst/>
+          </a:prstGeom>
+          <a:solidFill>
+            <a:schemeClr val="bg1"/>
+          </a:solidFill>
+          <a:ln>
+            <a:solidFill>
+              <a:schemeClr val="tx1"/>
+            </a:solidFill>
+            <a:headEnd type="none" w="med" len="med"/>
+            <a:tailEnd type="none" w="med" len="med"/>
+          </a:ln>
+          <a:effectLst/>
+        </p:spPr>
+        <p:style>
+          <a:lnRef idx="1">
+            <a:schemeClr val="accent2"/>
+          </a:lnRef>
+          <a:fillRef idx="3">
+            <a:schemeClr val="accent2"/>
+          </a:fillRef>
+          <a:effectRef idx="2">
+            <a:schemeClr val="accent2"/>
+          </a:effectRef>
+          <a:fontRef idx="minor">
+            <a:schemeClr val="lt1"/>
+          </a:fontRef>
+        </p:style>
+        <p:txBody>
+          <a:bodyPr rot="0" spcFirstLastPara="0" vertOverflow="overflow" horzOverflow="overflow" vert="horz" wrap="square" lIns="0" tIns="0" rIns="0" bIns="0" numCol="1" spcCol="0" rtlCol="0" fromWordArt="0" anchor="ctr" anchorCtr="0" forceAA="0" compatLnSpc="1">
+            <a:prstTxWarp prst="textNoShape">
+              <a:avLst/>
+            </a:prstTxWarp>
+            <a:noAutofit/>
+          </a:bodyPr>
+          <a:lstStyle/>
+          <a:p>
+            <a:pPr algn="ctr" defTabSz="932472" fontAlgn="base">
+              <a:lnSpc>
+                <a:spcPct val="90000"/>
+              </a:lnSpc>
+              <a:spcBef>
+                <a:spcPct val="0"/>
+              </a:spcBef>
+              <a:spcAft>
+                <a:spcPct val="0"/>
+              </a:spcAft>
+            </a:pPr>
+            <a:r>
+              <a:rPr lang="en-US" sz="1200" b="1" dirty="0">
+                <a:solidFill>
+                  <a:schemeClr val="tx1"/>
+                </a:solidFill>
+                <a:latin typeface="Lucida Console" panose="020B0609040504020204" pitchFamily="49" charset="0"/>
+                <a:ea typeface="Segoe UI" pitchFamily="34" charset="0"/>
+                <a:cs typeface="Segoe UI" pitchFamily="34" charset="0"/>
+              </a:rPr>
+              <a:t>branched</a:t>
+            </a:r>
+          </a:p>
+          <a:p>
+            <a:pPr algn="ctr" defTabSz="932472" fontAlgn="base">
+              <a:lnSpc>
+                <a:spcPct val="90000"/>
+              </a:lnSpc>
+              <a:spcBef>
+                <a:spcPct val="0"/>
+              </a:spcBef>
+              <a:spcAft>
+                <a:spcPct val="0"/>
+              </a:spcAft>
+            </a:pPr>
+            <a:r>
+              <a:rPr lang="en-US" sz="1200" dirty="0">
+                <a:solidFill>
+                  <a:schemeClr val="tx1"/>
+                </a:solidFill>
+                <a:latin typeface="Lucida Console" panose="020B0609040504020204" pitchFamily="49" charset="0"/>
+                <a:ea typeface="Segoe UI" pitchFamily="34" charset="0"/>
+                <a:cs typeface="Segoe UI" pitchFamily="34" charset="0"/>
+              </a:rPr>
+              <a:t>workspace</a:t>
+            </a:r>
+          </a:p>
+        </p:txBody>
+      </p:sp>
+      <p:sp>
+        <p:nvSpPr>
+          <p:cNvPr id="6" name="Arrow: Up 5">
+            <a:extLst>
+              <a:ext uri="{FF2B5EF4-FFF2-40B4-BE49-F238E27FC236}">
+                <a16:creationId xmlns:a16="http://schemas.microsoft.com/office/drawing/2014/main" id="{042076D6-F66D-78AA-CB7B-2CD5A1B53038}"/>
+              </a:ext>
+            </a:extLst>
+          </p:cNvPr>
+          <p:cNvSpPr/>
+          <p:nvPr/>
+        </p:nvSpPr>
+        <p:spPr bwMode="auto">
+          <a:xfrm>
+            <a:off x="5973163" y="2683230"/>
+            <a:ext cx="737468" cy="643605"/>
+          </a:xfrm>
+          <a:prstGeom prst="upArrow">
+            <a:avLst>
+              <a:gd name="adj1" fmla="val 77388"/>
+              <a:gd name="adj2" fmla="val 44825"/>
+            </a:avLst>
+          </a:prstGeom>
+          <a:solidFill>
+            <a:srgbClr val="8A0000"/>
+          </a:solidFill>
+          <a:ln>
+            <a:noFill/>
+            <a:headEnd type="none" w="med" len="med"/>
+            <a:tailEnd type="none" w="med" len="med"/>
+          </a:ln>
+          <a:effectLst/>
+        </p:spPr>
+        <p:style>
+          <a:lnRef idx="1">
+            <a:schemeClr val="accent2"/>
+          </a:lnRef>
+          <a:fillRef idx="3">
+            <a:schemeClr val="accent2"/>
+          </a:fillRef>
+          <a:effectRef idx="2">
+            <a:schemeClr val="accent2"/>
+          </a:effectRef>
+          <a:fontRef idx="minor">
+            <a:schemeClr val="lt1"/>
+          </a:fontRef>
+        </p:style>
+        <p:txBody>
+          <a:bodyPr rot="0" spcFirstLastPara="0" vertOverflow="overflow" horzOverflow="overflow" vert="horz" wrap="square" lIns="0" tIns="0" rIns="0" bIns="0" numCol="1" spcCol="0" rtlCol="0" fromWordArt="0" anchor="ctr" anchorCtr="0" forceAA="0" compatLnSpc="1">
+            <a:prstTxWarp prst="textNoShape">
+              <a:avLst/>
+            </a:prstTxWarp>
+            <a:noAutofit/>
+          </a:bodyPr>
+          <a:lstStyle/>
+          <a:p>
+            <a:pPr algn="ctr" defTabSz="932472" fontAlgn="base">
+              <a:lnSpc>
+                <a:spcPct val="90000"/>
+              </a:lnSpc>
+              <a:spcBef>
+                <a:spcPct val="0"/>
+              </a:spcBef>
+              <a:spcAft>
+                <a:spcPct val="0"/>
+              </a:spcAft>
+            </a:pPr>
+            <a:r>
+              <a:rPr lang="en-US" sz="900" b="1" dirty="0">
+                <a:gradFill>
+                  <a:gsLst>
+                    <a:gs pos="0">
+                      <a:srgbClr val="FFFFFF"/>
+                    </a:gs>
+                    <a:gs pos="100000">
+                      <a:srgbClr val="FFFFFF"/>
+                    </a:gs>
+                  </a:gsLst>
+                  <a:lin ang="5400000" scaled="0"/>
+                </a:gradFill>
+                <a:ea typeface="Segoe UI" pitchFamily="34" charset="0"/>
+                <a:cs typeface="Segoe UI" pitchFamily="34" charset="0"/>
+              </a:rPr>
+              <a:t>Update</a:t>
+            </a:r>
+          </a:p>
+          <a:p>
+            <a:pPr algn="ctr" defTabSz="932472" fontAlgn="base">
+              <a:lnSpc>
+                <a:spcPct val="90000"/>
+              </a:lnSpc>
+              <a:spcBef>
+                <a:spcPct val="0"/>
+              </a:spcBef>
+              <a:spcAft>
+                <a:spcPct val="0"/>
+              </a:spcAft>
+            </a:pPr>
+            <a:r>
+              <a:rPr lang="en-US" sz="900" b="1" dirty="0">
+                <a:gradFill>
+                  <a:gsLst>
+                    <a:gs pos="0">
+                      <a:srgbClr val="FFFFFF"/>
+                    </a:gs>
+                    <a:gs pos="100000">
+                      <a:srgbClr val="FFFFFF"/>
+                    </a:gs>
+                  </a:gsLst>
+                  <a:lin ang="5400000" scaled="0"/>
+                </a:gradFill>
+                <a:ea typeface="Segoe UI" pitchFamily="34" charset="0"/>
+                <a:cs typeface="Segoe UI" pitchFamily="34" charset="0"/>
+              </a:rPr>
+              <a:t>from GIT</a:t>
+            </a:r>
+          </a:p>
+        </p:txBody>
+      </p:sp>
+      <p:cxnSp>
+        <p:nvCxnSpPr>
+          <p:cNvPr id="24" name="Straight Arrow Connector 23">
+            <a:extLst>
+              <a:ext uri="{FF2B5EF4-FFF2-40B4-BE49-F238E27FC236}">
+                <a16:creationId xmlns:a16="http://schemas.microsoft.com/office/drawing/2014/main" id="{1A835A39-F449-CE92-7829-1CD940557538}"/>
+              </a:ext>
+            </a:extLst>
+          </p:cNvPr>
+          <p:cNvCxnSpPr>
+            <a:cxnSpLocks/>
+          </p:cNvCxnSpPr>
+          <p:nvPr/>
+        </p:nvCxnSpPr>
+        <p:spPr>
+          <a:xfrm>
+            <a:off x="2469724" y="2288717"/>
+            <a:ext cx="400050" cy="1062470"/>
+          </a:xfrm>
+          <a:prstGeom prst="straightConnector1">
+            <a:avLst/>
+          </a:prstGeom>
+          <a:ln w="76200">
+            <a:solidFill>
+              <a:srgbClr val="C00000"/>
+            </a:solidFill>
+            <a:headEnd type="none"/>
+            <a:tailEnd type="triangle"/>
+          </a:ln>
+        </p:spPr>
+        <p:style>
+          <a:lnRef idx="1">
+            <a:schemeClr val="accent1"/>
+          </a:lnRef>
+          <a:fillRef idx="0">
+            <a:schemeClr val="accent1"/>
+          </a:fillRef>
+          <a:effectRef idx="0">
+            <a:schemeClr val="accent1"/>
+          </a:effectRef>
+          <a:fontRef idx="minor">
+            <a:schemeClr val="tx1"/>
+          </a:fontRef>
+        </p:style>
+      </p:cxnSp>
+      <p:cxnSp>
+        <p:nvCxnSpPr>
+          <p:cNvPr id="25" name="Straight Arrow Connector 24">
+            <a:extLst>
+              <a:ext uri="{FF2B5EF4-FFF2-40B4-BE49-F238E27FC236}">
+                <a16:creationId xmlns:a16="http://schemas.microsoft.com/office/drawing/2014/main" id="{8C911DCF-62BD-3791-1A0C-190A9AC9FC0F}"/>
+              </a:ext>
+            </a:extLst>
+          </p:cNvPr>
+          <p:cNvCxnSpPr>
+            <a:cxnSpLocks/>
+          </p:cNvCxnSpPr>
+          <p:nvPr/>
+        </p:nvCxnSpPr>
+        <p:spPr>
+          <a:xfrm flipH="1">
+            <a:off x="3595850" y="2486144"/>
+            <a:ext cx="389659" cy="865043"/>
+          </a:xfrm>
+          <a:prstGeom prst="straightConnector1">
+            <a:avLst/>
+          </a:prstGeom>
+          <a:ln w="76200">
+            <a:solidFill>
+              <a:srgbClr val="C00000"/>
+            </a:solidFill>
+            <a:headEnd type="none"/>
+            <a:tailEnd type="triangle"/>
+          </a:ln>
+        </p:spPr>
+        <p:style>
+          <a:lnRef idx="1">
+            <a:schemeClr val="accent1"/>
+          </a:lnRef>
+          <a:fillRef idx="0">
+            <a:schemeClr val="accent1"/>
+          </a:fillRef>
+          <a:effectRef idx="0">
+            <a:schemeClr val="accent1"/>
+          </a:effectRef>
+          <a:fontRef idx="minor">
+            <a:schemeClr val="tx1"/>
+          </a:fontRef>
+        </p:style>
+      </p:cxnSp>
+      <p:grpSp>
+        <p:nvGrpSpPr>
+          <p:cNvPr id="20" name="Group 19">
+            <a:extLst>
+              <a:ext uri="{FF2B5EF4-FFF2-40B4-BE49-F238E27FC236}">
+                <a16:creationId xmlns:a16="http://schemas.microsoft.com/office/drawing/2014/main" id="{3C773F35-DAAB-8846-8876-8FEA34091E33}"/>
+              </a:ext>
+            </a:extLst>
+          </p:cNvPr>
+          <p:cNvGrpSpPr/>
+          <p:nvPr/>
+        </p:nvGrpSpPr>
+        <p:grpSpPr>
+          <a:xfrm>
+            <a:off x="1839336" y="1726778"/>
+            <a:ext cx="1337692" cy="908691"/>
+            <a:chOff x="6687092" y="5040219"/>
+            <a:chExt cx="1337692" cy="908691"/>
+          </a:xfrm>
+        </p:grpSpPr>
+        <p:sp>
+          <p:nvSpPr>
+            <p:cNvPr id="14" name="Rectangle 13">
+              <a:extLst>
+                <a:ext uri="{FF2B5EF4-FFF2-40B4-BE49-F238E27FC236}">
+                  <a16:creationId xmlns:a16="http://schemas.microsoft.com/office/drawing/2014/main" id="{4AA05B39-D3C1-00CC-79FA-EAC29B81B4F0}"/>
+                </a:ext>
+              </a:extLst>
+            </p:cNvPr>
+            <p:cNvSpPr/>
+            <p:nvPr/>
+          </p:nvSpPr>
+          <p:spPr bwMode="auto">
+            <a:xfrm>
+              <a:off x="6687092" y="5040219"/>
+              <a:ext cx="1337692" cy="908691"/>
+            </a:xfrm>
+            <a:prstGeom prst="rect">
+              <a:avLst/>
+            </a:prstGeom>
+            <a:solidFill>
+              <a:schemeClr val="bg1"/>
+            </a:solidFill>
+            <a:ln>
+              <a:solidFill>
+                <a:schemeClr val="tx1"/>
+              </a:solidFill>
+              <a:headEnd type="none" w="med" len="med"/>
+              <a:tailEnd type="none" w="med" len="med"/>
+            </a:ln>
+            <a:effectLst/>
+          </p:spPr>
+          <p:style>
+            <a:lnRef idx="1">
+              <a:schemeClr val="accent2"/>
+            </a:lnRef>
+            <a:fillRef idx="3">
+              <a:schemeClr val="accent2"/>
+            </a:fillRef>
+            <a:effectRef idx="2">
+              <a:schemeClr val="accent2"/>
+            </a:effectRef>
+            <a:fontRef idx="minor">
+              <a:schemeClr val="lt1"/>
+            </a:fontRef>
+          </p:style>
+          <p:txBody>
+            <a:bodyPr rot="0" spcFirstLastPara="0" vertOverflow="overflow" horzOverflow="overflow" vert="horz" wrap="square" lIns="0" tIns="91440" rIns="0" bIns="91440" numCol="1" spcCol="0" rtlCol="0" fromWordArt="0" anchor="t" anchorCtr="0" forceAA="0" compatLnSpc="1">
+              <a:prstTxWarp prst="textNoShape">
+                <a:avLst/>
+              </a:prstTxWarp>
+              <a:noAutofit/>
+            </a:bodyPr>
+            <a:lstStyle/>
+            <a:p>
+              <a:pPr algn="ctr" defTabSz="932472" fontAlgn="base">
+                <a:lnSpc>
+                  <a:spcPct val="90000"/>
+                </a:lnSpc>
+                <a:spcBef>
+                  <a:spcPct val="0"/>
+                </a:spcBef>
+                <a:spcAft>
+                  <a:spcPct val="0"/>
+                </a:spcAft>
+              </a:pPr>
+              <a:r>
+                <a:rPr lang="en-US" sz="800" b="1" dirty="0">
+                  <a:solidFill>
+                    <a:schemeClr val="tx1"/>
+                  </a:solidFill>
+                  <a:latin typeface="Lucida Console" panose="020B0609040504020204" pitchFamily="49" charset="0"/>
+                  <a:ea typeface="Segoe UI" pitchFamily="34" charset="0"/>
+                  <a:cs typeface="Segoe UI" pitchFamily="34" charset="0"/>
+                </a:rPr>
+                <a:t>Visual Studio Code</a:t>
+              </a:r>
+            </a:p>
+          </p:txBody>
+        </p:sp>
+        <p:pic>
+          <p:nvPicPr>
+            <p:cNvPr id="9" name="Picture 8" descr="VS Code icon">
+              <a:extLst>
+                <a:ext uri="{FF2B5EF4-FFF2-40B4-BE49-F238E27FC236}">
+                  <a16:creationId xmlns:a16="http://schemas.microsoft.com/office/drawing/2014/main" id="{678C5DCF-84C4-88AF-1382-8C06BD11D67F}"/>
+                </a:ext>
+              </a:extLst>
+            </p:cNvPr>
+            <p:cNvPicPr>
+              <a:picLocks noChangeAspect="1"/>
+            </p:cNvPicPr>
+            <p:nvPr/>
+          </p:nvPicPr>
+          <p:blipFill>
+            <a:blip r:embed="rId2"/>
+            <a:stretch>
+              <a:fillRect/>
+            </a:stretch>
+          </p:blipFill>
+          <p:spPr>
+            <a:xfrm>
+              <a:off x="7080499" y="5323487"/>
+              <a:ext cx="512753" cy="512753"/>
+            </a:xfrm>
+            <a:prstGeom prst="rect">
+              <a:avLst/>
+            </a:prstGeom>
+          </p:spPr>
+        </p:pic>
+      </p:grpSp>
+      <p:grpSp>
+        <p:nvGrpSpPr>
+          <p:cNvPr id="18" name="Group 17">
+            <a:extLst>
+              <a:ext uri="{FF2B5EF4-FFF2-40B4-BE49-F238E27FC236}">
+                <a16:creationId xmlns:a16="http://schemas.microsoft.com/office/drawing/2014/main" id="{20578ADB-7FB4-1A18-A6AB-003B41DFD930}"/>
+              </a:ext>
+            </a:extLst>
+          </p:cNvPr>
+          <p:cNvGrpSpPr/>
+          <p:nvPr/>
+        </p:nvGrpSpPr>
+        <p:grpSpPr>
+          <a:xfrm>
+            <a:off x="3439205" y="1726778"/>
+            <a:ext cx="1337692" cy="908691"/>
+            <a:chOff x="8583549" y="5040219"/>
+            <a:chExt cx="1337692" cy="908691"/>
+          </a:xfrm>
+        </p:grpSpPr>
+        <p:sp>
+          <p:nvSpPr>
+            <p:cNvPr id="16" name="Rectangle 15">
+              <a:extLst>
+                <a:ext uri="{FF2B5EF4-FFF2-40B4-BE49-F238E27FC236}">
+                  <a16:creationId xmlns:a16="http://schemas.microsoft.com/office/drawing/2014/main" id="{A1993B70-6124-B31E-D5A5-2234E0F9FA7A}"/>
+                </a:ext>
+              </a:extLst>
+            </p:cNvPr>
+            <p:cNvSpPr/>
+            <p:nvPr/>
+          </p:nvSpPr>
+          <p:spPr bwMode="auto">
+            <a:xfrm>
+              <a:off x="8583549" y="5040219"/>
+              <a:ext cx="1337692" cy="908691"/>
+            </a:xfrm>
+            <a:prstGeom prst="rect">
+              <a:avLst/>
+            </a:prstGeom>
+            <a:solidFill>
+              <a:schemeClr val="bg1"/>
+            </a:solidFill>
+            <a:ln>
+              <a:solidFill>
+                <a:schemeClr val="tx1"/>
+              </a:solidFill>
+              <a:headEnd type="none" w="med" len="med"/>
+              <a:tailEnd type="none" w="med" len="med"/>
+            </a:ln>
+            <a:effectLst/>
+          </p:spPr>
+          <p:style>
+            <a:lnRef idx="1">
+              <a:schemeClr val="accent2"/>
+            </a:lnRef>
+            <a:fillRef idx="3">
+              <a:schemeClr val="accent2"/>
+            </a:fillRef>
+            <a:effectRef idx="2">
+              <a:schemeClr val="accent2"/>
+            </a:effectRef>
+            <a:fontRef idx="minor">
+              <a:schemeClr val="lt1"/>
+            </a:fontRef>
+          </p:style>
+          <p:txBody>
+            <a:bodyPr rot="0" spcFirstLastPara="0" vertOverflow="overflow" horzOverflow="overflow" vert="horz" wrap="square" lIns="0" tIns="91440" rIns="0" bIns="91440" numCol="1" spcCol="0" rtlCol="0" fromWordArt="0" anchor="t" anchorCtr="0" forceAA="0" compatLnSpc="1">
+              <a:prstTxWarp prst="textNoShape">
+                <a:avLst/>
+              </a:prstTxWarp>
+              <a:noAutofit/>
+            </a:bodyPr>
+            <a:lstStyle/>
+            <a:p>
+              <a:pPr algn="ctr" defTabSz="932472" fontAlgn="base">
+                <a:lnSpc>
+                  <a:spcPct val="90000"/>
+                </a:lnSpc>
+                <a:spcBef>
+                  <a:spcPct val="0"/>
+                </a:spcBef>
+                <a:spcAft>
+                  <a:spcPct val="0"/>
+                </a:spcAft>
+              </a:pPr>
+              <a:r>
+                <a:rPr lang="en-US" sz="800" b="1" dirty="0">
+                  <a:solidFill>
+                    <a:schemeClr val="tx1"/>
+                  </a:solidFill>
+                  <a:latin typeface="Lucida Console" panose="020B0609040504020204" pitchFamily="49" charset="0"/>
+                  <a:ea typeface="Segoe UI" pitchFamily="34" charset="0"/>
+                  <a:cs typeface="Segoe UI" pitchFamily="34" charset="0"/>
+                </a:rPr>
+                <a:t>Power BI Desktop</a:t>
+              </a:r>
+            </a:p>
+          </p:txBody>
+        </p:sp>
+        <p:pic>
+          <p:nvPicPr>
+            <p:cNvPr id="10" name="Picture 9" descr="Power-BI.png">
+              <a:extLst>
+                <a:ext uri="{FF2B5EF4-FFF2-40B4-BE49-F238E27FC236}">
+                  <a16:creationId xmlns:a16="http://schemas.microsoft.com/office/drawing/2014/main" id="{5D591FD8-7EA8-2EAE-064F-88190967BC7C}"/>
+                </a:ext>
+              </a:extLst>
+            </p:cNvPr>
+            <p:cNvPicPr>
+              <a:picLocks noChangeAspect="1"/>
+            </p:cNvPicPr>
+            <p:nvPr/>
+          </p:nvPicPr>
+          <p:blipFill>
+            <a:blip r:embed="rId3"/>
+            <a:stretch>
+              <a:fillRect/>
+            </a:stretch>
+          </p:blipFill>
+          <p:spPr>
+            <a:xfrm>
+              <a:off x="8982241" y="5298115"/>
+              <a:ext cx="422625" cy="563499"/>
+            </a:xfrm>
+            <a:prstGeom prst="rect">
+              <a:avLst/>
+            </a:prstGeom>
+          </p:spPr>
+        </p:pic>
+      </p:grpSp>
+    </p:spTree>
+    <p:extLst>
+      <p:ext uri="{BB962C8B-B14F-4D97-AF65-F5344CB8AC3E}">
+        <p14:creationId xmlns:p14="http://schemas.microsoft.com/office/powerpoint/2010/main" val="331818928"/>
+      </p:ext>
+    </p:extLst>
+  </p:cSld>
+  <p:clrMapOvr>
+    <a:masterClrMapping/>
+  </p:clrMapOvr>
+  <p:transition>
+    <p:fade/>
+  </p:transition>
+</p:sld>
+</file>
+
+<file path=ppt/slides/slide3.xml><?xml version="1.0" encoding="utf-8"?>
+<p:sld xmlns:a="http://schemas.openxmlformats.org/drawingml/2006/main" xmlns:r="http://schemas.openxmlformats.org/officeDocument/2006/relationships" xmlns:p="http://schemas.openxmlformats.org/presentationml/2006/main">
+  <p:cSld>
+    <p:spTree>
+      <p:nvGrpSpPr>
+        <p:cNvPr id="1" name=""/>
+        <p:cNvGrpSpPr/>
+        <p:nvPr/>
+      </p:nvGrpSpPr>
+      <p:grpSpPr>
+        <a:xfrm>
+          <a:off x="0" y="0"/>
+          <a:ext cx="0" cy="0"/>
+          <a:chOff x="0" y="0"/>
+          <a:chExt cx="0" cy="0"/>
+        </a:xfrm>
+      </p:grpSpPr>
+      <p:sp>
+        <p:nvSpPr>
+          <p:cNvPr id="8" name="Rectangle 7">
+            <a:extLst>
+              <a:ext uri="{FF2B5EF4-FFF2-40B4-BE49-F238E27FC236}">
+                <a16:creationId xmlns:a16="http://schemas.microsoft.com/office/drawing/2014/main" id="{D78C485D-3A46-40D1-5373-DDF18F784091}"/>
+              </a:ext>
+            </a:extLst>
+          </p:cNvPr>
+          <p:cNvSpPr/>
+          <p:nvPr/>
+        </p:nvSpPr>
+        <p:spPr bwMode="auto">
+          <a:xfrm>
+            <a:off x="1543736" y="615928"/>
+            <a:ext cx="5622378" cy="1221837"/>
+          </a:xfrm>
+          <a:prstGeom prst="rect">
+            <a:avLst/>
+          </a:prstGeom>
+          <a:solidFill>
+            <a:schemeClr val="bg1">
+              <a:lumMod val="85000"/>
+            </a:schemeClr>
+          </a:solidFill>
+          <a:ln>
+            <a:solidFill>
+              <a:schemeClr val="tx1"/>
+            </a:solidFill>
+            <a:headEnd type="none" w="med" len="med"/>
+            <a:tailEnd type="none" w="med" len="med"/>
+          </a:ln>
+          <a:effectLst/>
+        </p:spPr>
+        <p:style>
+          <a:lnRef idx="1">
+            <a:schemeClr val="accent2"/>
+          </a:lnRef>
+          <a:fillRef idx="3">
+            <a:schemeClr val="accent2"/>
+          </a:fillRef>
+          <a:effectRef idx="2">
+            <a:schemeClr val="accent2"/>
+          </a:effectRef>
+          <a:fontRef idx="minor">
+            <a:schemeClr val="lt1"/>
+          </a:fontRef>
+        </p:style>
+        <p:txBody>
+          <a:bodyPr rot="0" spcFirstLastPara="0" vertOverflow="overflow" horzOverflow="overflow" vert="horz" wrap="square" lIns="0" tIns="0" rIns="0" bIns="0" numCol="1" spcCol="0" rtlCol="0" fromWordArt="0" anchor="ctr" anchorCtr="0" forceAA="0" compatLnSpc="1">
+            <a:prstTxWarp prst="textNoShape">
+              <a:avLst/>
+            </a:prstTxWarp>
+            <a:noAutofit/>
+          </a:bodyPr>
+          <a:lstStyle/>
+          <a:p>
+            <a:pPr algn="ctr" defTabSz="932472" fontAlgn="base">
+              <a:lnSpc>
+                <a:spcPct val="90000"/>
+              </a:lnSpc>
+              <a:spcBef>
+                <a:spcPct val="0"/>
+              </a:spcBef>
+              <a:spcAft>
+                <a:spcPct val="0"/>
+              </a:spcAft>
+            </a:pPr>
+            <a:endParaRPr lang="en-US" sz="1400" b="1" dirty="0">
+              <a:gradFill>
+                <a:gsLst>
+                  <a:gs pos="0">
+                    <a:srgbClr val="FFFFFF"/>
+                  </a:gs>
+                  <a:gs pos="100000">
+                    <a:srgbClr val="FFFFFF"/>
+                  </a:gs>
+                </a:gsLst>
+                <a:lin ang="5400000" scaled="0"/>
+              </a:gradFill>
+              <a:latin typeface="Lucida Console" panose="020B0609040504020204" pitchFamily="49" charset="0"/>
+              <a:ea typeface="Segoe UI" pitchFamily="34" charset="0"/>
+              <a:cs typeface="Segoe UI" pitchFamily="34" charset="0"/>
+            </a:endParaRPr>
+          </a:p>
+        </p:txBody>
+      </p:sp>
+      <p:grpSp>
+        <p:nvGrpSpPr>
+          <p:cNvPr id="7" name="Group 6">
+            <a:extLst>
+              <a:ext uri="{FF2B5EF4-FFF2-40B4-BE49-F238E27FC236}">
+                <a16:creationId xmlns:a16="http://schemas.microsoft.com/office/drawing/2014/main" id="{3B81A26D-EBCD-FB0A-ED1B-5BB31977E55B}"/>
+              </a:ext>
+            </a:extLst>
+          </p:cNvPr>
+          <p:cNvGrpSpPr/>
+          <p:nvPr/>
+        </p:nvGrpSpPr>
+        <p:grpSpPr>
+          <a:xfrm>
+            <a:off x="1664104" y="773980"/>
+            <a:ext cx="5320563" cy="893455"/>
+            <a:chOff x="1664104" y="773980"/>
+            <a:chExt cx="6857927" cy="1667072"/>
+          </a:xfrm>
+        </p:grpSpPr>
+        <p:sp>
+          <p:nvSpPr>
+            <p:cNvPr id="2" name="Rectangle 1">
+              <a:extLst>
+                <a:ext uri="{FF2B5EF4-FFF2-40B4-BE49-F238E27FC236}">
+                  <a16:creationId xmlns:a16="http://schemas.microsoft.com/office/drawing/2014/main" id="{275316FA-3A99-1746-7388-C57FA01FDF73}"/>
+                </a:ext>
+              </a:extLst>
+            </p:cNvPr>
+            <p:cNvSpPr/>
+            <p:nvPr/>
+          </p:nvSpPr>
+          <p:spPr bwMode="auto">
+            <a:xfrm>
+              <a:off x="1664104" y="773980"/>
+              <a:ext cx="1632212" cy="1667071"/>
+            </a:xfrm>
+            <a:prstGeom prst="rect">
+              <a:avLst/>
+            </a:prstGeom>
+            <a:solidFill>
+              <a:schemeClr val="accent4">
+                <a:lumMod val="75000"/>
+              </a:schemeClr>
+            </a:solidFill>
+            <a:ln>
+              <a:noFill/>
+              <a:headEnd type="none" w="med" len="med"/>
+              <a:tailEnd type="none" w="med" len="med"/>
+            </a:ln>
+            <a:effectLst/>
+          </p:spPr>
+          <p:style>
+            <a:lnRef idx="1">
+              <a:schemeClr val="accent2"/>
+            </a:lnRef>
+            <a:fillRef idx="3">
+              <a:schemeClr val="accent2"/>
+            </a:fillRef>
+            <a:effectRef idx="2">
+              <a:schemeClr val="accent2"/>
+            </a:effectRef>
+            <a:fontRef idx="minor">
+              <a:schemeClr val="lt1"/>
+            </a:fontRef>
+          </p:style>
+          <p:txBody>
+            <a:bodyPr rot="0" spcFirstLastPara="0" vertOverflow="overflow" horzOverflow="overflow" vert="horz" wrap="square" lIns="0" tIns="0" rIns="0" bIns="0" numCol="1" spcCol="0" rtlCol="0" fromWordArt="0" anchor="ctr" anchorCtr="0" forceAA="0" compatLnSpc="1">
+              <a:prstTxWarp prst="textNoShape">
+                <a:avLst/>
+              </a:prstTxWarp>
+              <a:noAutofit/>
+            </a:bodyPr>
+            <a:lstStyle/>
+            <a:p>
+              <a:pPr algn="ctr" defTabSz="932472" fontAlgn="base">
+                <a:lnSpc>
+                  <a:spcPct val="90000"/>
+                </a:lnSpc>
+                <a:spcBef>
+                  <a:spcPct val="0"/>
+                </a:spcBef>
+                <a:spcAft>
+                  <a:spcPct val="0"/>
+                </a:spcAft>
+              </a:pPr>
+              <a:r>
+                <a:rPr lang="en-US" sz="1600" b="1" dirty="0">
+                  <a:gradFill>
+                    <a:gsLst>
+                      <a:gs pos="0">
+                        <a:srgbClr val="FFFFFF"/>
+                      </a:gs>
+                      <a:gs pos="100000">
+                        <a:srgbClr val="FFFFFF"/>
+                      </a:gs>
+                    </a:gsLst>
+                    <a:lin ang="5400000" scaled="0"/>
+                  </a:gradFill>
+                  <a:latin typeface="Lucida Console" panose="020B0609040504020204" pitchFamily="49" charset="0"/>
+                  <a:ea typeface="Segoe UI" pitchFamily="34" charset="0"/>
+                  <a:cs typeface="Segoe UI" pitchFamily="34" charset="0"/>
+                </a:rPr>
+                <a:t>dev</a:t>
+              </a:r>
+            </a:p>
+          </p:txBody>
+        </p:sp>
+        <p:sp>
+          <p:nvSpPr>
+            <p:cNvPr id="3" name="Rectangle 2">
+              <a:extLst>
+                <a:ext uri="{FF2B5EF4-FFF2-40B4-BE49-F238E27FC236}">
+                  <a16:creationId xmlns:a16="http://schemas.microsoft.com/office/drawing/2014/main" id="{FD6F9DE8-BFD8-ED75-D80E-6643CBD92F41}"/>
+                </a:ext>
+              </a:extLst>
+            </p:cNvPr>
+            <p:cNvSpPr/>
+            <p:nvPr/>
+          </p:nvSpPr>
+          <p:spPr bwMode="auto">
+            <a:xfrm>
+              <a:off x="4275308" y="797714"/>
+              <a:ext cx="1625443" cy="1643338"/>
+            </a:xfrm>
+            <a:prstGeom prst="rect">
+              <a:avLst/>
+            </a:prstGeom>
+            <a:solidFill>
+              <a:schemeClr val="accent2">
+                <a:lumMod val="50000"/>
+              </a:schemeClr>
+            </a:solidFill>
+            <a:ln>
+              <a:noFill/>
+              <a:headEnd type="none" w="med" len="med"/>
+              <a:tailEnd type="none" w="med" len="med"/>
+            </a:ln>
+            <a:effectLst/>
+          </p:spPr>
+          <p:style>
+            <a:lnRef idx="1">
+              <a:schemeClr val="accent2"/>
+            </a:lnRef>
+            <a:fillRef idx="3">
+              <a:schemeClr val="accent2"/>
+            </a:fillRef>
+            <a:effectRef idx="2">
+              <a:schemeClr val="accent2"/>
+            </a:effectRef>
+            <a:fontRef idx="minor">
+              <a:schemeClr val="lt1"/>
+            </a:fontRef>
+          </p:style>
+          <p:txBody>
+            <a:bodyPr rot="0" spcFirstLastPara="0" vertOverflow="overflow" horzOverflow="overflow" vert="horz" wrap="square" lIns="0" tIns="0" rIns="0" bIns="0" numCol="1" spcCol="0" rtlCol="0" fromWordArt="0" anchor="ctr" anchorCtr="0" forceAA="0" compatLnSpc="1">
+              <a:prstTxWarp prst="textNoShape">
+                <a:avLst/>
+              </a:prstTxWarp>
+              <a:noAutofit/>
+            </a:bodyPr>
+            <a:lstStyle/>
+            <a:p>
+              <a:pPr algn="ctr" defTabSz="932472" fontAlgn="base">
+                <a:lnSpc>
+                  <a:spcPct val="90000"/>
+                </a:lnSpc>
+                <a:spcBef>
+                  <a:spcPct val="0"/>
+                </a:spcBef>
+                <a:spcAft>
+                  <a:spcPct val="0"/>
+                </a:spcAft>
+              </a:pPr>
+              <a:r>
+                <a:rPr lang="en-US" sz="1600" b="1" dirty="0">
+                  <a:gradFill>
+                    <a:gsLst>
+                      <a:gs pos="0">
+                        <a:srgbClr val="FFFFFF"/>
+                      </a:gs>
+                      <a:gs pos="100000">
+                        <a:srgbClr val="FFFFFF"/>
+                      </a:gs>
+                    </a:gsLst>
+                    <a:lin ang="5400000" scaled="0"/>
+                  </a:gradFill>
+                  <a:latin typeface="Lucida Console" panose="020B0609040504020204" pitchFamily="49" charset="0"/>
+                  <a:ea typeface="Segoe UI" pitchFamily="34" charset="0"/>
+                  <a:cs typeface="Segoe UI" pitchFamily="34" charset="0"/>
+                </a:rPr>
+                <a:t>test</a:t>
+              </a:r>
+            </a:p>
+          </p:txBody>
+        </p:sp>
+        <p:sp>
+          <p:nvSpPr>
+            <p:cNvPr id="4" name="Arrow: Right 3">
+              <a:extLst>
+                <a:ext uri="{FF2B5EF4-FFF2-40B4-BE49-F238E27FC236}">
+                  <a16:creationId xmlns:a16="http://schemas.microsoft.com/office/drawing/2014/main" id="{7E711A8B-74EF-8F35-800C-37539A4E8977}"/>
+                </a:ext>
+              </a:extLst>
+            </p:cNvPr>
+            <p:cNvSpPr/>
+            <p:nvPr/>
+          </p:nvSpPr>
+          <p:spPr bwMode="auto">
+            <a:xfrm>
+              <a:off x="3363614" y="1301322"/>
+              <a:ext cx="879837" cy="506304"/>
+            </a:xfrm>
+            <a:prstGeom prst="rightArrow">
+              <a:avLst>
+                <a:gd name="adj1" fmla="val 61383"/>
+                <a:gd name="adj2" fmla="val 50000"/>
+              </a:avLst>
+            </a:prstGeom>
+            <a:solidFill>
+              <a:srgbClr val="C00000"/>
+            </a:solidFill>
+            <a:ln>
+              <a:noFill/>
+              <a:headEnd type="none" w="med" len="med"/>
+              <a:tailEnd type="none" w="med" len="med"/>
+            </a:ln>
+            <a:effectLst/>
+          </p:spPr>
+          <p:style>
+            <a:lnRef idx="1">
+              <a:schemeClr val="accent2"/>
+            </a:lnRef>
+            <a:fillRef idx="3">
+              <a:schemeClr val="accent2"/>
+            </a:fillRef>
+            <a:effectRef idx="2">
+              <a:schemeClr val="accent2"/>
+            </a:effectRef>
+            <a:fontRef idx="minor">
+              <a:schemeClr val="lt1"/>
+            </a:fontRef>
+          </p:style>
+          <p:txBody>
+            <a:bodyPr rot="0" spcFirstLastPara="0" vertOverflow="overflow" horzOverflow="overflow" vert="horz" wrap="square" lIns="0" tIns="0" rIns="0" bIns="0" numCol="1" spcCol="0" rtlCol="0" fromWordArt="0" anchor="ctr" anchorCtr="0" forceAA="0" compatLnSpc="1">
+              <a:prstTxWarp prst="textNoShape">
+                <a:avLst/>
+              </a:prstTxWarp>
+              <a:noAutofit/>
+            </a:bodyPr>
+            <a:lstStyle/>
+            <a:p>
+              <a:pPr algn="ctr" defTabSz="932472" fontAlgn="base">
+                <a:lnSpc>
+                  <a:spcPct val="90000"/>
+                </a:lnSpc>
+                <a:spcBef>
+                  <a:spcPct val="0"/>
+                </a:spcBef>
+                <a:spcAft>
+                  <a:spcPct val="0"/>
+                </a:spcAft>
+              </a:pPr>
+              <a:endParaRPr lang="en-US" sz="1600" b="1" dirty="0">
+                <a:gradFill>
+                  <a:gsLst>
+                    <a:gs pos="0">
+                      <a:srgbClr val="FFFFFF"/>
+                    </a:gs>
+                    <a:gs pos="100000">
+                      <a:srgbClr val="FFFFFF"/>
+                    </a:gs>
+                  </a:gsLst>
+                  <a:lin ang="5400000" scaled="0"/>
+                </a:gradFill>
+                <a:latin typeface="Lucida Console" panose="020B0609040504020204" pitchFamily="49" charset="0"/>
+                <a:ea typeface="Segoe UI" pitchFamily="34" charset="0"/>
+                <a:cs typeface="Segoe UI" pitchFamily="34" charset="0"/>
+              </a:endParaRPr>
+            </a:p>
+          </p:txBody>
+        </p:sp>
+        <p:sp>
+          <p:nvSpPr>
+            <p:cNvPr id="5" name="Rectangle 4">
+              <a:extLst>
+                <a:ext uri="{FF2B5EF4-FFF2-40B4-BE49-F238E27FC236}">
+                  <a16:creationId xmlns:a16="http://schemas.microsoft.com/office/drawing/2014/main" id="{4876C167-CDFD-1E40-7D5A-871E02B6B79C}"/>
+                </a:ext>
+              </a:extLst>
+            </p:cNvPr>
+            <p:cNvSpPr/>
+            <p:nvPr/>
+          </p:nvSpPr>
+          <p:spPr bwMode="auto">
+            <a:xfrm>
+              <a:off x="6896588" y="797714"/>
+              <a:ext cx="1625443" cy="1643338"/>
+            </a:xfrm>
+            <a:prstGeom prst="rect">
+              <a:avLst/>
+            </a:prstGeom>
+            <a:solidFill>
+              <a:schemeClr val="accent1"/>
+            </a:solidFill>
+            <a:ln>
+              <a:noFill/>
+              <a:headEnd type="none" w="med" len="med"/>
+              <a:tailEnd type="none" w="med" len="med"/>
+            </a:ln>
+            <a:effectLst/>
+          </p:spPr>
+          <p:style>
+            <a:lnRef idx="1">
+              <a:schemeClr val="accent2"/>
+            </a:lnRef>
+            <a:fillRef idx="3">
+              <a:schemeClr val="accent2"/>
+            </a:fillRef>
+            <a:effectRef idx="2">
+              <a:schemeClr val="accent2"/>
+            </a:effectRef>
+            <a:fontRef idx="minor">
+              <a:schemeClr val="lt1"/>
+            </a:fontRef>
+          </p:style>
+          <p:txBody>
+            <a:bodyPr rot="0" spcFirstLastPara="0" vertOverflow="overflow" horzOverflow="overflow" vert="horz" wrap="square" lIns="0" tIns="0" rIns="0" bIns="0" numCol="1" spcCol="0" rtlCol="0" fromWordArt="0" anchor="ctr" anchorCtr="0" forceAA="0" compatLnSpc="1">
+              <a:prstTxWarp prst="textNoShape">
+                <a:avLst/>
+              </a:prstTxWarp>
+              <a:noAutofit/>
+            </a:bodyPr>
+            <a:lstStyle/>
+            <a:p>
+              <a:pPr algn="ctr" defTabSz="932472" fontAlgn="base">
+                <a:lnSpc>
+                  <a:spcPct val="90000"/>
+                </a:lnSpc>
+                <a:spcBef>
+                  <a:spcPct val="0"/>
+                </a:spcBef>
+                <a:spcAft>
+                  <a:spcPct val="0"/>
+                </a:spcAft>
+              </a:pPr>
+              <a:r>
+                <a:rPr lang="en-US" sz="1600" b="1" dirty="0">
+                  <a:gradFill>
+                    <a:gsLst>
+                      <a:gs pos="0">
+                        <a:srgbClr val="FFFFFF"/>
+                      </a:gs>
+                      <a:gs pos="100000">
+                        <a:srgbClr val="FFFFFF"/>
+                      </a:gs>
+                    </a:gsLst>
+                    <a:lin ang="5400000" scaled="0"/>
+                  </a:gradFill>
+                  <a:latin typeface="Lucida Console" panose="020B0609040504020204" pitchFamily="49" charset="0"/>
+                  <a:ea typeface="Segoe UI" pitchFamily="34" charset="0"/>
+                  <a:cs typeface="Segoe UI" pitchFamily="34" charset="0"/>
+                </a:rPr>
+                <a:t>prod</a:t>
+              </a:r>
+            </a:p>
+          </p:txBody>
+        </p:sp>
+        <p:sp>
+          <p:nvSpPr>
+            <p:cNvPr id="6" name="Arrow: Right 5">
+              <a:extLst>
+                <a:ext uri="{FF2B5EF4-FFF2-40B4-BE49-F238E27FC236}">
+                  <a16:creationId xmlns:a16="http://schemas.microsoft.com/office/drawing/2014/main" id="{A55C7AC8-4247-2C70-2CDB-A7000BB82B63}"/>
+                </a:ext>
+              </a:extLst>
+            </p:cNvPr>
+            <p:cNvSpPr/>
+            <p:nvPr/>
+          </p:nvSpPr>
+          <p:spPr bwMode="auto">
+            <a:xfrm>
+              <a:off x="5984894" y="1301322"/>
+              <a:ext cx="879837" cy="506304"/>
+            </a:xfrm>
+            <a:prstGeom prst="rightArrow">
+              <a:avLst>
+                <a:gd name="adj1" fmla="val 61383"/>
+                <a:gd name="adj2" fmla="val 50000"/>
+              </a:avLst>
+            </a:prstGeom>
+            <a:solidFill>
+              <a:srgbClr val="C00000"/>
+            </a:solidFill>
+            <a:ln>
+              <a:noFill/>
+              <a:headEnd type="none" w="med" len="med"/>
+              <a:tailEnd type="none" w="med" len="med"/>
+            </a:ln>
+            <a:effectLst/>
+          </p:spPr>
+          <p:style>
+            <a:lnRef idx="1">
+              <a:schemeClr val="accent2"/>
+            </a:lnRef>
+            <a:fillRef idx="3">
+              <a:schemeClr val="accent2"/>
+            </a:fillRef>
+            <a:effectRef idx="2">
+              <a:schemeClr val="accent2"/>
+            </a:effectRef>
+            <a:fontRef idx="minor">
+              <a:schemeClr val="lt1"/>
+            </a:fontRef>
+          </p:style>
+          <p:txBody>
+            <a:bodyPr rot="0" spcFirstLastPara="0" vertOverflow="overflow" horzOverflow="overflow" vert="horz" wrap="square" lIns="0" tIns="0" rIns="0" bIns="0" numCol="1" spcCol="0" rtlCol="0" fromWordArt="0" anchor="ctr" anchorCtr="0" forceAA="0" compatLnSpc="1">
+              <a:prstTxWarp prst="textNoShape">
+                <a:avLst/>
+              </a:prstTxWarp>
+              <a:noAutofit/>
+            </a:bodyPr>
+            <a:lstStyle/>
+            <a:p>
+              <a:pPr algn="ctr" defTabSz="932472" fontAlgn="base">
+                <a:lnSpc>
+                  <a:spcPct val="90000"/>
+                </a:lnSpc>
+                <a:spcBef>
+                  <a:spcPct val="0"/>
+                </a:spcBef>
+                <a:spcAft>
+                  <a:spcPct val="0"/>
+                </a:spcAft>
+              </a:pPr>
+              <a:endParaRPr lang="en-US" sz="1600" b="1" dirty="0">
+                <a:gradFill>
+                  <a:gsLst>
+                    <a:gs pos="0">
+                      <a:srgbClr val="FFFFFF"/>
+                    </a:gs>
+                    <a:gs pos="100000">
+                      <a:srgbClr val="FFFFFF"/>
+                    </a:gs>
+                  </a:gsLst>
+                  <a:lin ang="5400000" scaled="0"/>
+                </a:gradFill>
+                <a:latin typeface="Lucida Console" panose="020B0609040504020204" pitchFamily="49" charset="0"/>
+                <a:ea typeface="Segoe UI" pitchFamily="34" charset="0"/>
+                <a:cs typeface="Segoe UI" pitchFamily="34" charset="0"/>
+              </a:endParaRPr>
+            </a:p>
+          </p:txBody>
+        </p:sp>
+      </p:grpSp>
+    </p:spTree>
+    <p:extLst>
+      <p:ext uri="{BB962C8B-B14F-4D97-AF65-F5344CB8AC3E}">
+        <p14:creationId xmlns:p14="http://schemas.microsoft.com/office/powerpoint/2010/main" val="2677553126"/>
+      </p:ext>
+    </p:extLst>
+  </p:cSld>
+  <p:clrMapOvr>
+    <a:masterClrMapping/>
+  </p:clrMapOvr>
+  <p:transition>
+    <p:fade/>
+  </p:transition>
+</p:sld>
+</file>
+
+<file path=ppt/slides/slide30.xml><?xml version="1.0" encoding="utf-8"?>
+<p:sld xmlns:a="http://schemas.openxmlformats.org/drawingml/2006/main" xmlns:r="http://schemas.openxmlformats.org/officeDocument/2006/relationships" xmlns:p="http://schemas.openxmlformats.org/presentationml/2006/main">
+  <p:cSld>
+    <p:spTree>
+      <p:nvGrpSpPr>
+        <p:cNvPr id="1" name=""/>
+        <p:cNvGrpSpPr/>
+        <p:nvPr/>
+      </p:nvGrpSpPr>
+      <p:grpSpPr>
+        <a:xfrm>
+          <a:off x="0" y="0"/>
+          <a:ext cx="0" cy="0"/>
+          <a:chOff x="0" y="0"/>
+          <a:chExt cx="0" cy="0"/>
+        </a:xfrm>
+      </p:grpSpPr>
+      <p:pic>
+        <p:nvPicPr>
+          <p:cNvPr id="3" name="Picture 2">
+            <a:extLst>
+              <a:ext uri="{FF2B5EF4-FFF2-40B4-BE49-F238E27FC236}">
+                <a16:creationId xmlns:a16="http://schemas.microsoft.com/office/drawing/2014/main" id="{38E360A7-87C0-15D3-E013-E3AA91BE2032}"/>
+              </a:ext>
+            </a:extLst>
+          </p:cNvPr>
+          <p:cNvPicPr>
+            <a:picLocks noChangeAspect="1"/>
+          </p:cNvPicPr>
+          <p:nvPr/>
+        </p:nvPicPr>
+        <p:blipFill>
+          <a:blip r:embed="rId2"/>
+          <a:srcRect l="803"/>
+          <a:stretch>
+            <a:fillRect/>
+          </a:stretch>
+        </p:blipFill>
+        <p:spPr>
+          <a:xfrm>
+            <a:off x="1206110" y="649801"/>
+            <a:ext cx="8759614" cy="3775054"/>
+          </a:xfrm>
+          <a:prstGeom prst="rect">
+            <a:avLst/>
+          </a:prstGeom>
+          <a:ln>
+            <a:solidFill>
+              <a:schemeClr val="tx1"/>
+            </a:solidFill>
+          </a:ln>
+        </p:spPr>
+      </p:pic>
+    </p:spTree>
+    <p:extLst>
+      <p:ext uri="{BB962C8B-B14F-4D97-AF65-F5344CB8AC3E}">
+        <p14:creationId xmlns:p14="http://schemas.microsoft.com/office/powerpoint/2010/main" val="859497540"/>
+      </p:ext>
+    </p:extLst>
+  </p:cSld>
+  <p:clrMapOvr>
+    <a:masterClrMapping/>
+  </p:clrMapOvr>
+  <p:transition>
+    <p:fade/>
+  </p:transition>
+</p:sld>
+</file>
+
+<file path=ppt/slides/slide31.xml><?xml version="1.0" encoding="utf-8"?>
 <p:sld xmlns:a="http://schemas.openxmlformats.org/drawingml/2006/main" xmlns:r="http://schemas.openxmlformats.org/officeDocument/2006/relationships" xmlns:p="http://schemas.openxmlformats.org/presentationml/2006/main">
   <p:cSld>
     <p:spTree>
@@ -12901,7 +15779,7 @@
 </p:sld>
 </file>
 
-<file path=ppt/slides/slide27.xml><?xml version="1.0" encoding="utf-8"?>
+<file path=ppt/slides/slide32.xml><?xml version="1.0" encoding="utf-8"?>
 <p:sld xmlns:a="http://schemas.openxmlformats.org/drawingml/2006/main" xmlns:r="http://schemas.openxmlformats.org/officeDocument/2006/relationships" xmlns:p="http://schemas.openxmlformats.org/presentationml/2006/main">
   <p:cSld>
     <p:spTree>
@@ -13927,7 +16805,7 @@
 </p:sld>
 </file>
 
-<file path=ppt/slides/slide28.xml><?xml version="1.0" encoding="utf-8"?>
+<file path=ppt/slides/slide33.xml><?xml version="1.0" encoding="utf-8"?>
 <p:sld xmlns:a="http://schemas.openxmlformats.org/drawingml/2006/main" xmlns:r="http://schemas.openxmlformats.org/officeDocument/2006/relationships" xmlns:p="http://schemas.openxmlformats.org/presentationml/2006/main">
   <p:cSld>
     <p:spTree>
@@ -13995,7 +16873,7 @@
 </p:sld>
 </file>
 
-<file path=ppt/slides/slide29.xml><?xml version="1.0" encoding="utf-8"?>
+<file path=ppt/slides/slide34.xml><?xml version="1.0" encoding="utf-8"?>
 <p:sld xmlns:a="http://schemas.openxmlformats.org/drawingml/2006/main" xmlns:r="http://schemas.openxmlformats.org/officeDocument/2006/relationships" xmlns:p="http://schemas.openxmlformats.org/presentationml/2006/main">
   <p:cSld>
     <p:spTree>
@@ -14669,582 +17547,7 @@
 </p:sld>
 </file>
 
-<file path=ppt/slides/slide3.xml><?xml version="1.0" encoding="utf-8"?>
-<p:sld xmlns:a="http://schemas.openxmlformats.org/drawingml/2006/main" xmlns:r="http://schemas.openxmlformats.org/officeDocument/2006/relationships" xmlns:p="http://schemas.openxmlformats.org/presentationml/2006/main">
-  <p:cSld>
-    <p:spTree>
-      <p:nvGrpSpPr>
-        <p:cNvPr id="1" name=""/>
-        <p:cNvGrpSpPr/>
-        <p:nvPr/>
-      </p:nvGrpSpPr>
-      <p:grpSpPr>
-        <a:xfrm>
-          <a:off x="0" y="0"/>
-          <a:ext cx="0" cy="0"/>
-          <a:chOff x="0" y="0"/>
-          <a:chExt cx="0" cy="0"/>
-        </a:xfrm>
-      </p:grpSpPr>
-      <p:sp>
-        <p:nvSpPr>
-          <p:cNvPr id="8" name="Rectangle 7">
-            <a:extLst>
-              <a:ext uri="{FF2B5EF4-FFF2-40B4-BE49-F238E27FC236}">
-                <a16:creationId xmlns:a16="http://schemas.microsoft.com/office/drawing/2014/main" id="{D78C485D-3A46-40D1-5373-DDF18F784091}"/>
-              </a:ext>
-            </a:extLst>
-          </p:cNvPr>
-          <p:cNvSpPr/>
-          <p:nvPr/>
-        </p:nvSpPr>
-        <p:spPr bwMode="auto">
-          <a:xfrm>
-            <a:off x="1543736" y="615928"/>
-            <a:ext cx="5622378" cy="1221837"/>
-          </a:xfrm>
-          <a:prstGeom prst="rect">
-            <a:avLst/>
-          </a:prstGeom>
-          <a:solidFill>
-            <a:schemeClr val="bg1">
-              <a:lumMod val="85000"/>
-            </a:schemeClr>
-          </a:solidFill>
-          <a:ln>
-            <a:solidFill>
-              <a:schemeClr val="tx1"/>
-            </a:solidFill>
-            <a:headEnd type="none" w="med" len="med"/>
-            <a:tailEnd type="none" w="med" len="med"/>
-          </a:ln>
-          <a:effectLst/>
-        </p:spPr>
-        <p:style>
-          <a:lnRef idx="1">
-            <a:schemeClr val="accent2"/>
-          </a:lnRef>
-          <a:fillRef idx="3">
-            <a:schemeClr val="accent2"/>
-          </a:fillRef>
-          <a:effectRef idx="2">
-            <a:schemeClr val="accent2"/>
-          </a:effectRef>
-          <a:fontRef idx="minor">
-            <a:schemeClr val="lt1"/>
-          </a:fontRef>
-        </p:style>
-        <p:txBody>
-          <a:bodyPr rot="0" spcFirstLastPara="0" vertOverflow="overflow" horzOverflow="overflow" vert="horz" wrap="square" lIns="0" tIns="0" rIns="0" bIns="0" numCol="1" spcCol="0" rtlCol="0" fromWordArt="0" anchor="ctr" anchorCtr="0" forceAA="0" compatLnSpc="1">
-            <a:prstTxWarp prst="textNoShape">
-              <a:avLst/>
-            </a:prstTxWarp>
-            <a:noAutofit/>
-          </a:bodyPr>
-          <a:lstStyle/>
-          <a:p>
-            <a:pPr algn="ctr" defTabSz="932472" fontAlgn="base">
-              <a:lnSpc>
-                <a:spcPct val="90000"/>
-              </a:lnSpc>
-              <a:spcBef>
-                <a:spcPct val="0"/>
-              </a:spcBef>
-              <a:spcAft>
-                <a:spcPct val="0"/>
-              </a:spcAft>
-            </a:pPr>
-            <a:endParaRPr lang="en-US" sz="1400" b="1" dirty="0">
-              <a:gradFill>
-                <a:gsLst>
-                  <a:gs pos="0">
-                    <a:srgbClr val="FFFFFF"/>
-                  </a:gs>
-                  <a:gs pos="100000">
-                    <a:srgbClr val="FFFFFF"/>
-                  </a:gs>
-                </a:gsLst>
-                <a:lin ang="5400000" scaled="0"/>
-              </a:gradFill>
-              <a:latin typeface="Lucida Console" panose="020B0609040504020204" pitchFamily="49" charset="0"/>
-              <a:ea typeface="Segoe UI" pitchFamily="34" charset="0"/>
-              <a:cs typeface="Segoe UI" pitchFamily="34" charset="0"/>
-            </a:endParaRPr>
-          </a:p>
-        </p:txBody>
-      </p:sp>
-      <p:grpSp>
-        <p:nvGrpSpPr>
-          <p:cNvPr id="7" name="Group 6">
-            <a:extLst>
-              <a:ext uri="{FF2B5EF4-FFF2-40B4-BE49-F238E27FC236}">
-                <a16:creationId xmlns:a16="http://schemas.microsoft.com/office/drawing/2014/main" id="{3B81A26D-EBCD-FB0A-ED1B-5BB31977E55B}"/>
-              </a:ext>
-            </a:extLst>
-          </p:cNvPr>
-          <p:cNvGrpSpPr/>
-          <p:nvPr/>
-        </p:nvGrpSpPr>
-        <p:grpSpPr>
-          <a:xfrm>
-            <a:off x="1664104" y="773980"/>
-            <a:ext cx="5320563" cy="893455"/>
-            <a:chOff x="1664104" y="773980"/>
-            <a:chExt cx="6857927" cy="1667072"/>
-          </a:xfrm>
-        </p:grpSpPr>
-        <p:sp>
-          <p:nvSpPr>
-            <p:cNvPr id="2" name="Rectangle 1">
-              <a:extLst>
-                <a:ext uri="{FF2B5EF4-FFF2-40B4-BE49-F238E27FC236}">
-                  <a16:creationId xmlns:a16="http://schemas.microsoft.com/office/drawing/2014/main" id="{275316FA-3A99-1746-7388-C57FA01FDF73}"/>
-                </a:ext>
-              </a:extLst>
-            </p:cNvPr>
-            <p:cNvSpPr/>
-            <p:nvPr/>
-          </p:nvSpPr>
-          <p:spPr bwMode="auto">
-            <a:xfrm>
-              <a:off x="1664104" y="773980"/>
-              <a:ext cx="1632212" cy="1667071"/>
-            </a:xfrm>
-            <a:prstGeom prst="rect">
-              <a:avLst/>
-            </a:prstGeom>
-            <a:solidFill>
-              <a:schemeClr val="accent4">
-                <a:lumMod val="75000"/>
-              </a:schemeClr>
-            </a:solidFill>
-            <a:ln>
-              <a:noFill/>
-              <a:headEnd type="none" w="med" len="med"/>
-              <a:tailEnd type="none" w="med" len="med"/>
-            </a:ln>
-            <a:effectLst/>
-          </p:spPr>
-          <p:style>
-            <a:lnRef idx="1">
-              <a:schemeClr val="accent2"/>
-            </a:lnRef>
-            <a:fillRef idx="3">
-              <a:schemeClr val="accent2"/>
-            </a:fillRef>
-            <a:effectRef idx="2">
-              <a:schemeClr val="accent2"/>
-            </a:effectRef>
-            <a:fontRef idx="minor">
-              <a:schemeClr val="lt1"/>
-            </a:fontRef>
-          </p:style>
-          <p:txBody>
-            <a:bodyPr rot="0" spcFirstLastPara="0" vertOverflow="overflow" horzOverflow="overflow" vert="horz" wrap="square" lIns="0" tIns="0" rIns="0" bIns="0" numCol="1" spcCol="0" rtlCol="0" fromWordArt="0" anchor="ctr" anchorCtr="0" forceAA="0" compatLnSpc="1">
-              <a:prstTxWarp prst="textNoShape">
-                <a:avLst/>
-              </a:prstTxWarp>
-              <a:noAutofit/>
-            </a:bodyPr>
-            <a:lstStyle/>
-            <a:p>
-              <a:pPr algn="ctr" defTabSz="932472" fontAlgn="base">
-                <a:lnSpc>
-                  <a:spcPct val="90000"/>
-                </a:lnSpc>
-                <a:spcBef>
-                  <a:spcPct val="0"/>
-                </a:spcBef>
-                <a:spcAft>
-                  <a:spcPct val="0"/>
-                </a:spcAft>
-              </a:pPr>
-              <a:r>
-                <a:rPr lang="en-US" sz="1600" b="1" dirty="0">
-                  <a:gradFill>
-                    <a:gsLst>
-                      <a:gs pos="0">
-                        <a:srgbClr val="FFFFFF"/>
-                      </a:gs>
-                      <a:gs pos="100000">
-                        <a:srgbClr val="FFFFFF"/>
-                      </a:gs>
-                    </a:gsLst>
-                    <a:lin ang="5400000" scaled="0"/>
-                  </a:gradFill>
-                  <a:latin typeface="Lucida Console" panose="020B0609040504020204" pitchFamily="49" charset="0"/>
-                  <a:ea typeface="Segoe UI" pitchFamily="34" charset="0"/>
-                  <a:cs typeface="Segoe UI" pitchFamily="34" charset="0"/>
-                </a:rPr>
-                <a:t>dev</a:t>
-              </a:r>
-            </a:p>
-          </p:txBody>
-        </p:sp>
-        <p:sp>
-          <p:nvSpPr>
-            <p:cNvPr id="3" name="Rectangle 2">
-              <a:extLst>
-                <a:ext uri="{FF2B5EF4-FFF2-40B4-BE49-F238E27FC236}">
-                  <a16:creationId xmlns:a16="http://schemas.microsoft.com/office/drawing/2014/main" id="{FD6F9DE8-BFD8-ED75-D80E-6643CBD92F41}"/>
-                </a:ext>
-              </a:extLst>
-            </p:cNvPr>
-            <p:cNvSpPr/>
-            <p:nvPr/>
-          </p:nvSpPr>
-          <p:spPr bwMode="auto">
-            <a:xfrm>
-              <a:off x="4275308" y="797714"/>
-              <a:ext cx="1625443" cy="1643338"/>
-            </a:xfrm>
-            <a:prstGeom prst="rect">
-              <a:avLst/>
-            </a:prstGeom>
-            <a:solidFill>
-              <a:schemeClr val="accent2">
-                <a:lumMod val="50000"/>
-              </a:schemeClr>
-            </a:solidFill>
-            <a:ln>
-              <a:noFill/>
-              <a:headEnd type="none" w="med" len="med"/>
-              <a:tailEnd type="none" w="med" len="med"/>
-            </a:ln>
-            <a:effectLst/>
-          </p:spPr>
-          <p:style>
-            <a:lnRef idx="1">
-              <a:schemeClr val="accent2"/>
-            </a:lnRef>
-            <a:fillRef idx="3">
-              <a:schemeClr val="accent2"/>
-            </a:fillRef>
-            <a:effectRef idx="2">
-              <a:schemeClr val="accent2"/>
-            </a:effectRef>
-            <a:fontRef idx="minor">
-              <a:schemeClr val="lt1"/>
-            </a:fontRef>
-          </p:style>
-          <p:txBody>
-            <a:bodyPr rot="0" spcFirstLastPara="0" vertOverflow="overflow" horzOverflow="overflow" vert="horz" wrap="square" lIns="0" tIns="0" rIns="0" bIns="0" numCol="1" spcCol="0" rtlCol="0" fromWordArt="0" anchor="ctr" anchorCtr="0" forceAA="0" compatLnSpc="1">
-              <a:prstTxWarp prst="textNoShape">
-                <a:avLst/>
-              </a:prstTxWarp>
-              <a:noAutofit/>
-            </a:bodyPr>
-            <a:lstStyle/>
-            <a:p>
-              <a:pPr algn="ctr" defTabSz="932472" fontAlgn="base">
-                <a:lnSpc>
-                  <a:spcPct val="90000"/>
-                </a:lnSpc>
-                <a:spcBef>
-                  <a:spcPct val="0"/>
-                </a:spcBef>
-                <a:spcAft>
-                  <a:spcPct val="0"/>
-                </a:spcAft>
-              </a:pPr>
-              <a:r>
-                <a:rPr lang="en-US" sz="1600" b="1" dirty="0">
-                  <a:gradFill>
-                    <a:gsLst>
-                      <a:gs pos="0">
-                        <a:srgbClr val="FFFFFF"/>
-                      </a:gs>
-                      <a:gs pos="100000">
-                        <a:srgbClr val="FFFFFF"/>
-                      </a:gs>
-                    </a:gsLst>
-                    <a:lin ang="5400000" scaled="0"/>
-                  </a:gradFill>
-                  <a:latin typeface="Lucida Console" panose="020B0609040504020204" pitchFamily="49" charset="0"/>
-                  <a:ea typeface="Segoe UI" pitchFamily="34" charset="0"/>
-                  <a:cs typeface="Segoe UI" pitchFamily="34" charset="0"/>
-                </a:rPr>
-                <a:t>test</a:t>
-              </a:r>
-            </a:p>
-          </p:txBody>
-        </p:sp>
-        <p:sp>
-          <p:nvSpPr>
-            <p:cNvPr id="4" name="Arrow: Right 3">
-              <a:extLst>
-                <a:ext uri="{FF2B5EF4-FFF2-40B4-BE49-F238E27FC236}">
-                  <a16:creationId xmlns:a16="http://schemas.microsoft.com/office/drawing/2014/main" id="{7E711A8B-74EF-8F35-800C-37539A4E8977}"/>
-                </a:ext>
-              </a:extLst>
-            </p:cNvPr>
-            <p:cNvSpPr/>
-            <p:nvPr/>
-          </p:nvSpPr>
-          <p:spPr bwMode="auto">
-            <a:xfrm>
-              <a:off x="3363614" y="1301322"/>
-              <a:ext cx="879837" cy="506304"/>
-            </a:xfrm>
-            <a:prstGeom prst="rightArrow">
-              <a:avLst>
-                <a:gd name="adj1" fmla="val 61383"/>
-                <a:gd name="adj2" fmla="val 50000"/>
-              </a:avLst>
-            </a:prstGeom>
-            <a:solidFill>
-              <a:srgbClr val="C00000"/>
-            </a:solidFill>
-            <a:ln>
-              <a:noFill/>
-              <a:headEnd type="none" w="med" len="med"/>
-              <a:tailEnd type="none" w="med" len="med"/>
-            </a:ln>
-            <a:effectLst/>
-          </p:spPr>
-          <p:style>
-            <a:lnRef idx="1">
-              <a:schemeClr val="accent2"/>
-            </a:lnRef>
-            <a:fillRef idx="3">
-              <a:schemeClr val="accent2"/>
-            </a:fillRef>
-            <a:effectRef idx="2">
-              <a:schemeClr val="accent2"/>
-            </a:effectRef>
-            <a:fontRef idx="minor">
-              <a:schemeClr val="lt1"/>
-            </a:fontRef>
-          </p:style>
-          <p:txBody>
-            <a:bodyPr rot="0" spcFirstLastPara="0" vertOverflow="overflow" horzOverflow="overflow" vert="horz" wrap="square" lIns="0" tIns="0" rIns="0" bIns="0" numCol="1" spcCol="0" rtlCol="0" fromWordArt="0" anchor="ctr" anchorCtr="0" forceAA="0" compatLnSpc="1">
-              <a:prstTxWarp prst="textNoShape">
-                <a:avLst/>
-              </a:prstTxWarp>
-              <a:noAutofit/>
-            </a:bodyPr>
-            <a:lstStyle/>
-            <a:p>
-              <a:pPr algn="ctr" defTabSz="932472" fontAlgn="base">
-                <a:lnSpc>
-                  <a:spcPct val="90000"/>
-                </a:lnSpc>
-                <a:spcBef>
-                  <a:spcPct val="0"/>
-                </a:spcBef>
-                <a:spcAft>
-                  <a:spcPct val="0"/>
-                </a:spcAft>
-              </a:pPr>
-              <a:endParaRPr lang="en-US" sz="1600" b="1" dirty="0">
-                <a:gradFill>
-                  <a:gsLst>
-                    <a:gs pos="0">
-                      <a:srgbClr val="FFFFFF"/>
-                    </a:gs>
-                    <a:gs pos="100000">
-                      <a:srgbClr val="FFFFFF"/>
-                    </a:gs>
-                  </a:gsLst>
-                  <a:lin ang="5400000" scaled="0"/>
-                </a:gradFill>
-                <a:latin typeface="Lucida Console" panose="020B0609040504020204" pitchFamily="49" charset="0"/>
-                <a:ea typeface="Segoe UI" pitchFamily="34" charset="0"/>
-                <a:cs typeface="Segoe UI" pitchFamily="34" charset="0"/>
-              </a:endParaRPr>
-            </a:p>
-          </p:txBody>
-        </p:sp>
-        <p:sp>
-          <p:nvSpPr>
-            <p:cNvPr id="5" name="Rectangle 4">
-              <a:extLst>
-                <a:ext uri="{FF2B5EF4-FFF2-40B4-BE49-F238E27FC236}">
-                  <a16:creationId xmlns:a16="http://schemas.microsoft.com/office/drawing/2014/main" id="{4876C167-CDFD-1E40-7D5A-871E02B6B79C}"/>
-                </a:ext>
-              </a:extLst>
-            </p:cNvPr>
-            <p:cNvSpPr/>
-            <p:nvPr/>
-          </p:nvSpPr>
-          <p:spPr bwMode="auto">
-            <a:xfrm>
-              <a:off x="6896588" y="797714"/>
-              <a:ext cx="1625443" cy="1643338"/>
-            </a:xfrm>
-            <a:prstGeom prst="rect">
-              <a:avLst/>
-            </a:prstGeom>
-            <a:solidFill>
-              <a:schemeClr val="accent1"/>
-            </a:solidFill>
-            <a:ln>
-              <a:noFill/>
-              <a:headEnd type="none" w="med" len="med"/>
-              <a:tailEnd type="none" w="med" len="med"/>
-            </a:ln>
-            <a:effectLst/>
-          </p:spPr>
-          <p:style>
-            <a:lnRef idx="1">
-              <a:schemeClr val="accent2"/>
-            </a:lnRef>
-            <a:fillRef idx="3">
-              <a:schemeClr val="accent2"/>
-            </a:fillRef>
-            <a:effectRef idx="2">
-              <a:schemeClr val="accent2"/>
-            </a:effectRef>
-            <a:fontRef idx="minor">
-              <a:schemeClr val="lt1"/>
-            </a:fontRef>
-          </p:style>
-          <p:txBody>
-            <a:bodyPr rot="0" spcFirstLastPara="0" vertOverflow="overflow" horzOverflow="overflow" vert="horz" wrap="square" lIns="0" tIns="0" rIns="0" bIns="0" numCol="1" spcCol="0" rtlCol="0" fromWordArt="0" anchor="ctr" anchorCtr="0" forceAA="0" compatLnSpc="1">
-              <a:prstTxWarp prst="textNoShape">
-                <a:avLst/>
-              </a:prstTxWarp>
-              <a:noAutofit/>
-            </a:bodyPr>
-            <a:lstStyle/>
-            <a:p>
-              <a:pPr algn="ctr" defTabSz="932472" fontAlgn="base">
-                <a:lnSpc>
-                  <a:spcPct val="90000"/>
-                </a:lnSpc>
-                <a:spcBef>
-                  <a:spcPct val="0"/>
-                </a:spcBef>
-                <a:spcAft>
-                  <a:spcPct val="0"/>
-                </a:spcAft>
-              </a:pPr>
-              <a:r>
-                <a:rPr lang="en-US" sz="1600" b="1" dirty="0">
-                  <a:gradFill>
-                    <a:gsLst>
-                      <a:gs pos="0">
-                        <a:srgbClr val="FFFFFF"/>
-                      </a:gs>
-                      <a:gs pos="100000">
-                        <a:srgbClr val="FFFFFF"/>
-                      </a:gs>
-                    </a:gsLst>
-                    <a:lin ang="5400000" scaled="0"/>
-                  </a:gradFill>
-                  <a:latin typeface="Lucida Console" panose="020B0609040504020204" pitchFamily="49" charset="0"/>
-                  <a:ea typeface="Segoe UI" pitchFamily="34" charset="0"/>
-                  <a:cs typeface="Segoe UI" pitchFamily="34" charset="0"/>
-                </a:rPr>
-                <a:t>prod</a:t>
-              </a:r>
-            </a:p>
-          </p:txBody>
-        </p:sp>
-        <p:sp>
-          <p:nvSpPr>
-            <p:cNvPr id="6" name="Arrow: Right 5">
-              <a:extLst>
-                <a:ext uri="{FF2B5EF4-FFF2-40B4-BE49-F238E27FC236}">
-                  <a16:creationId xmlns:a16="http://schemas.microsoft.com/office/drawing/2014/main" id="{A55C7AC8-4247-2C70-2CDB-A7000BB82B63}"/>
-                </a:ext>
-              </a:extLst>
-            </p:cNvPr>
-            <p:cNvSpPr/>
-            <p:nvPr/>
-          </p:nvSpPr>
-          <p:spPr bwMode="auto">
-            <a:xfrm>
-              <a:off x="5984894" y="1301322"/>
-              <a:ext cx="879837" cy="506304"/>
-            </a:xfrm>
-            <a:prstGeom prst="rightArrow">
-              <a:avLst>
-                <a:gd name="adj1" fmla="val 61383"/>
-                <a:gd name="adj2" fmla="val 50000"/>
-              </a:avLst>
-            </a:prstGeom>
-            <a:solidFill>
-              <a:srgbClr val="C00000"/>
-            </a:solidFill>
-            <a:ln>
-              <a:noFill/>
-              <a:headEnd type="none" w="med" len="med"/>
-              <a:tailEnd type="none" w="med" len="med"/>
-            </a:ln>
-            <a:effectLst/>
-          </p:spPr>
-          <p:style>
-            <a:lnRef idx="1">
-              <a:schemeClr val="accent2"/>
-            </a:lnRef>
-            <a:fillRef idx="3">
-              <a:schemeClr val="accent2"/>
-            </a:fillRef>
-            <a:effectRef idx="2">
-              <a:schemeClr val="accent2"/>
-            </a:effectRef>
-            <a:fontRef idx="minor">
-              <a:schemeClr val="lt1"/>
-            </a:fontRef>
-          </p:style>
-          <p:txBody>
-            <a:bodyPr rot="0" spcFirstLastPara="0" vertOverflow="overflow" horzOverflow="overflow" vert="horz" wrap="square" lIns="0" tIns="0" rIns="0" bIns="0" numCol="1" spcCol="0" rtlCol="0" fromWordArt="0" anchor="ctr" anchorCtr="0" forceAA="0" compatLnSpc="1">
-              <a:prstTxWarp prst="textNoShape">
-                <a:avLst/>
-              </a:prstTxWarp>
-              <a:noAutofit/>
-            </a:bodyPr>
-            <a:lstStyle/>
-            <a:p>
-              <a:pPr algn="ctr" defTabSz="932472" fontAlgn="base">
-                <a:lnSpc>
-                  <a:spcPct val="90000"/>
-                </a:lnSpc>
-                <a:spcBef>
-                  <a:spcPct val="0"/>
-                </a:spcBef>
-                <a:spcAft>
-                  <a:spcPct val="0"/>
-                </a:spcAft>
-              </a:pPr>
-              <a:endParaRPr lang="en-US" sz="1600" b="1" dirty="0">
-                <a:gradFill>
-                  <a:gsLst>
-                    <a:gs pos="0">
-                      <a:srgbClr val="FFFFFF"/>
-                    </a:gs>
-                    <a:gs pos="100000">
-                      <a:srgbClr val="FFFFFF"/>
-                    </a:gs>
-                  </a:gsLst>
-                  <a:lin ang="5400000" scaled="0"/>
-                </a:gradFill>
-                <a:latin typeface="Lucida Console" panose="020B0609040504020204" pitchFamily="49" charset="0"/>
-                <a:ea typeface="Segoe UI" pitchFamily="34" charset="0"/>
-                <a:cs typeface="Segoe UI" pitchFamily="34" charset="0"/>
-              </a:endParaRPr>
-            </a:p>
-          </p:txBody>
-        </p:sp>
-      </p:grpSp>
-    </p:spTree>
-    <p:extLst>
-      <p:ext uri="{BB962C8B-B14F-4D97-AF65-F5344CB8AC3E}">
-        <p14:creationId xmlns:p14="http://schemas.microsoft.com/office/powerpoint/2010/main" val="2677553126"/>
-      </p:ext>
-    </p:extLst>
-  </p:cSld>
-  <p:clrMapOvr>
-    <a:masterClrMapping/>
-  </p:clrMapOvr>
-  <p:transition>
-    <p:fade/>
-  </p:transition>
-</p:sld>
-</file>
-
-<file path=ppt/slides/slide30.xml><?xml version="1.0" encoding="utf-8"?>
+<file path=ppt/slides/slide35.xml><?xml version="1.0" encoding="utf-8"?>
 <p:sld xmlns:a="http://schemas.openxmlformats.org/drawingml/2006/main" xmlns:r="http://schemas.openxmlformats.org/officeDocument/2006/relationships" xmlns:p="http://schemas.openxmlformats.org/presentationml/2006/main">
   <p:cSld>
     <p:spTree>
@@ -16632,7 +18935,7 @@
 </p:sld>
 </file>
 
-<file path=ppt/slides/slide31.xml><?xml version="1.0" encoding="utf-8"?>
+<file path=ppt/slides/slide36.xml><?xml version="1.0" encoding="utf-8"?>
 <p:sld xmlns:a="http://schemas.openxmlformats.org/drawingml/2006/main" xmlns:r="http://schemas.openxmlformats.org/officeDocument/2006/relationships" xmlns:p="http://schemas.openxmlformats.org/presentationml/2006/main">
   <p:cSld>
     <p:spTree>
@@ -17864,7 +20167,7 @@
 </p:sld>
 </file>
 
-<file path=ppt/slides/slide32.xml><?xml version="1.0" encoding="utf-8"?>
+<file path=ppt/slides/slide37.xml><?xml version="1.0" encoding="utf-8"?>
 <p:sld xmlns:a="http://schemas.openxmlformats.org/drawingml/2006/main" xmlns:r="http://schemas.openxmlformats.org/officeDocument/2006/relationships" xmlns:p="http://schemas.openxmlformats.org/presentationml/2006/main">
   <p:cSld>
     <p:spTree>
@@ -18681,7 +20984,7 @@
 </p:sld>
 </file>
 
-<file path=ppt/slides/slide33.xml><?xml version="1.0" encoding="utf-8"?>
+<file path=ppt/slides/slide38.xml><?xml version="1.0" encoding="utf-8"?>
 <p:sld xmlns:a="http://schemas.openxmlformats.org/drawingml/2006/main" xmlns:r="http://schemas.openxmlformats.org/officeDocument/2006/relationships" xmlns:p="http://schemas.openxmlformats.org/presentationml/2006/main">
   <p:cSld>
     <p:spTree>
@@ -19485,7 +21788,7 @@
 </p:sld>
 </file>
 
-<file path=ppt/slides/slide34.xml><?xml version="1.0" encoding="utf-8"?>
+<file path=ppt/slides/slide39.xml><?xml version="1.0" encoding="utf-8"?>
 <p:sld xmlns:a="http://schemas.openxmlformats.org/drawingml/2006/main" xmlns:r="http://schemas.openxmlformats.org/officeDocument/2006/relationships" xmlns:p="http://schemas.openxmlformats.org/presentationml/2006/main">
   <p:cSld>
     <p:spTree>
@@ -21723,382 +24026,6 @@
 </p:sld>
 </file>
 
-<file path=ppt/slides/slide35.xml><?xml version="1.0" encoding="utf-8"?>
-<p:sld xmlns:a="http://schemas.openxmlformats.org/drawingml/2006/main" xmlns:r="http://schemas.openxmlformats.org/officeDocument/2006/relationships" xmlns:p="http://schemas.openxmlformats.org/presentationml/2006/main">
-  <p:cSld>
-    <p:spTree>
-      <p:nvGrpSpPr>
-        <p:cNvPr id="1" name=""/>
-        <p:cNvGrpSpPr/>
-        <p:nvPr/>
-      </p:nvGrpSpPr>
-      <p:grpSpPr>
-        <a:xfrm>
-          <a:off x="0" y="0"/>
-          <a:ext cx="0" cy="0"/>
-          <a:chOff x="0" y="0"/>
-          <a:chExt cx="0" cy="0"/>
-        </a:xfrm>
-      </p:grpSpPr>
-      <p:pic>
-        <p:nvPicPr>
-          <p:cNvPr id="3" name="Picture 2">
-            <a:extLst>
-              <a:ext uri="{FF2B5EF4-FFF2-40B4-BE49-F238E27FC236}">
-                <a16:creationId xmlns:a16="http://schemas.microsoft.com/office/drawing/2014/main" id="{26E42FD6-2E77-96C8-9E00-9558CDB4E16B}"/>
-              </a:ext>
-            </a:extLst>
-          </p:cNvPr>
-          <p:cNvPicPr>
-            <a:picLocks noChangeAspect="1"/>
-          </p:cNvPicPr>
-          <p:nvPr/>
-        </p:nvPicPr>
-        <p:blipFill>
-          <a:blip r:embed="rId2"/>
-          <a:stretch>
-            <a:fillRect/>
-          </a:stretch>
-        </p:blipFill>
-        <p:spPr>
-          <a:xfrm>
-            <a:off x="1477553" y="509531"/>
-            <a:ext cx="7778207" cy="2246525"/>
-          </a:xfrm>
-          <a:prstGeom prst="rect">
-            <a:avLst/>
-          </a:prstGeom>
-          <a:ln>
-            <a:solidFill>
-              <a:schemeClr val="tx1"/>
-            </a:solidFill>
-          </a:ln>
-        </p:spPr>
-      </p:pic>
-    </p:spTree>
-    <p:extLst>
-      <p:ext uri="{BB962C8B-B14F-4D97-AF65-F5344CB8AC3E}">
-        <p14:creationId xmlns:p14="http://schemas.microsoft.com/office/powerpoint/2010/main" val="3278745845"/>
-      </p:ext>
-    </p:extLst>
-  </p:cSld>
-  <p:clrMapOvr>
-    <a:masterClrMapping/>
-  </p:clrMapOvr>
-  <p:transition>
-    <p:fade/>
-  </p:transition>
-</p:sld>
-</file>
-
-<file path=ppt/slides/slide36.xml><?xml version="1.0" encoding="utf-8"?>
-<p:sld xmlns:a="http://schemas.openxmlformats.org/drawingml/2006/main" xmlns:r="http://schemas.openxmlformats.org/officeDocument/2006/relationships" xmlns:p="http://schemas.openxmlformats.org/presentationml/2006/main">
-  <p:cSld>
-    <p:spTree>
-      <p:nvGrpSpPr>
-        <p:cNvPr id="1" name=""/>
-        <p:cNvGrpSpPr/>
-        <p:nvPr/>
-      </p:nvGrpSpPr>
-      <p:grpSpPr>
-        <a:xfrm>
-          <a:off x="0" y="0"/>
-          <a:ext cx="0" cy="0"/>
-          <a:chOff x="0" y="0"/>
-          <a:chExt cx="0" cy="0"/>
-        </a:xfrm>
-      </p:grpSpPr>
-      <p:pic>
-        <p:nvPicPr>
-          <p:cNvPr id="3" name="Picture 2">
-            <a:extLst>
-              <a:ext uri="{FF2B5EF4-FFF2-40B4-BE49-F238E27FC236}">
-                <a16:creationId xmlns:a16="http://schemas.microsoft.com/office/drawing/2014/main" id="{31F13B54-D851-4DF9-3613-F3BAB9E4EC9B}"/>
-              </a:ext>
-            </a:extLst>
-          </p:cNvPr>
-          <p:cNvPicPr>
-            <a:picLocks noChangeAspect="1"/>
-          </p:cNvPicPr>
-          <p:nvPr/>
-        </p:nvPicPr>
-        <p:blipFill>
-          <a:blip r:embed="rId2"/>
-          <a:stretch>
-            <a:fillRect/>
-          </a:stretch>
-        </p:blipFill>
-        <p:spPr>
-          <a:xfrm>
-            <a:off x="1678733" y="1258575"/>
-            <a:ext cx="2962688" cy="2238687"/>
-          </a:xfrm>
-          <a:prstGeom prst="rect">
-            <a:avLst/>
-          </a:prstGeom>
-          <a:ln>
-            <a:solidFill>
-              <a:schemeClr val="tx1"/>
-            </a:solidFill>
-          </a:ln>
-        </p:spPr>
-      </p:pic>
-    </p:spTree>
-    <p:extLst>
-      <p:ext uri="{BB962C8B-B14F-4D97-AF65-F5344CB8AC3E}">
-        <p14:creationId xmlns:p14="http://schemas.microsoft.com/office/powerpoint/2010/main" val="3971795737"/>
-      </p:ext>
-    </p:extLst>
-  </p:cSld>
-  <p:clrMapOvr>
-    <a:masterClrMapping/>
-  </p:clrMapOvr>
-  <p:transition>
-    <p:fade/>
-  </p:transition>
-</p:sld>
-</file>
-
-<file path=ppt/slides/slide37.xml><?xml version="1.0" encoding="utf-8"?>
-<p:sld xmlns:a="http://schemas.openxmlformats.org/drawingml/2006/main" xmlns:r="http://schemas.openxmlformats.org/officeDocument/2006/relationships" xmlns:p="http://schemas.openxmlformats.org/presentationml/2006/main">
-  <p:cSld>
-    <p:spTree>
-      <p:nvGrpSpPr>
-        <p:cNvPr id="1" name=""/>
-        <p:cNvGrpSpPr/>
-        <p:nvPr/>
-      </p:nvGrpSpPr>
-      <p:grpSpPr>
-        <a:xfrm>
-          <a:off x="0" y="0"/>
-          <a:ext cx="0" cy="0"/>
-          <a:chOff x="0" y="0"/>
-          <a:chExt cx="0" cy="0"/>
-        </a:xfrm>
-      </p:grpSpPr>
-      <p:pic>
-        <p:nvPicPr>
-          <p:cNvPr id="3" name="Picture 2">
-            <a:extLst>
-              <a:ext uri="{FF2B5EF4-FFF2-40B4-BE49-F238E27FC236}">
-                <a16:creationId xmlns:a16="http://schemas.microsoft.com/office/drawing/2014/main" id="{E3D85509-5D2A-57FF-03A8-D7A1110E2519}"/>
-              </a:ext>
-            </a:extLst>
-          </p:cNvPr>
-          <p:cNvPicPr>
-            <a:picLocks noChangeAspect="1"/>
-          </p:cNvPicPr>
-          <p:nvPr/>
-        </p:nvPicPr>
-        <p:blipFill>
-          <a:blip r:embed="rId2"/>
-          <a:stretch>
-            <a:fillRect/>
-          </a:stretch>
-        </p:blipFill>
-        <p:spPr>
-          <a:xfrm>
-            <a:off x="1088428" y="775237"/>
-            <a:ext cx="4001058" cy="1400370"/>
-          </a:xfrm>
-          <a:prstGeom prst="rect">
-            <a:avLst/>
-          </a:prstGeom>
-          <a:ln>
-            <a:solidFill>
-              <a:schemeClr val="tx1"/>
-            </a:solidFill>
-          </a:ln>
-        </p:spPr>
-      </p:pic>
-      <p:pic>
-        <p:nvPicPr>
-          <p:cNvPr id="5" name="Picture 4">
-            <a:extLst>
-              <a:ext uri="{FF2B5EF4-FFF2-40B4-BE49-F238E27FC236}">
-                <a16:creationId xmlns:a16="http://schemas.microsoft.com/office/drawing/2014/main" id="{8246D4D5-8583-3C79-9A65-1E953C744687}"/>
-              </a:ext>
-            </a:extLst>
-          </p:cNvPr>
-          <p:cNvPicPr>
-            <a:picLocks noChangeAspect="1"/>
-          </p:cNvPicPr>
-          <p:nvPr/>
-        </p:nvPicPr>
-        <p:blipFill>
-          <a:blip r:embed="rId3"/>
-          <a:stretch>
-            <a:fillRect/>
-          </a:stretch>
-        </p:blipFill>
-        <p:spPr>
-          <a:xfrm>
-            <a:off x="1249117" y="3273900"/>
-            <a:ext cx="8068801" cy="2295845"/>
-          </a:xfrm>
-          <a:prstGeom prst="rect">
-            <a:avLst/>
-          </a:prstGeom>
-          <a:ln>
-            <a:solidFill>
-              <a:schemeClr val="tx1"/>
-            </a:solidFill>
-          </a:ln>
-        </p:spPr>
-      </p:pic>
-    </p:spTree>
-    <p:extLst>
-      <p:ext uri="{BB962C8B-B14F-4D97-AF65-F5344CB8AC3E}">
-        <p14:creationId xmlns:p14="http://schemas.microsoft.com/office/powerpoint/2010/main" val="826397614"/>
-      </p:ext>
-    </p:extLst>
-  </p:cSld>
-  <p:clrMapOvr>
-    <a:masterClrMapping/>
-  </p:clrMapOvr>
-  <p:transition>
-    <p:fade/>
-  </p:transition>
-</p:sld>
-</file>
-
-<file path=ppt/slides/slide38.xml><?xml version="1.0" encoding="utf-8"?>
-<p:sld xmlns:a="http://schemas.openxmlformats.org/drawingml/2006/main" xmlns:r="http://schemas.openxmlformats.org/officeDocument/2006/relationships" xmlns:p="http://schemas.openxmlformats.org/presentationml/2006/main">
-  <p:cSld>
-    <p:spTree>
-      <p:nvGrpSpPr>
-        <p:cNvPr id="1" name=""/>
-        <p:cNvGrpSpPr/>
-        <p:nvPr/>
-      </p:nvGrpSpPr>
-      <p:grpSpPr>
-        <a:xfrm>
-          <a:off x="0" y="0"/>
-          <a:ext cx="0" cy="0"/>
-          <a:chOff x="0" y="0"/>
-          <a:chExt cx="0" cy="0"/>
-        </a:xfrm>
-      </p:grpSpPr>
-      <p:pic>
-        <p:nvPicPr>
-          <p:cNvPr id="3" name="Picture 2">
-            <a:extLst>
-              <a:ext uri="{FF2B5EF4-FFF2-40B4-BE49-F238E27FC236}">
-                <a16:creationId xmlns:a16="http://schemas.microsoft.com/office/drawing/2014/main" id="{CF8E32F5-E4B4-872A-0ED2-BD860DACAA62}"/>
-              </a:ext>
-            </a:extLst>
-          </p:cNvPr>
-          <p:cNvPicPr>
-            <a:picLocks noChangeAspect="1"/>
-          </p:cNvPicPr>
-          <p:nvPr/>
-        </p:nvPicPr>
-        <p:blipFill>
-          <a:blip r:embed="rId2"/>
-          <a:srcRect t="1" b="29088"/>
-          <a:stretch>
-            <a:fillRect/>
-          </a:stretch>
-        </p:blipFill>
-        <p:spPr>
-          <a:xfrm>
-            <a:off x="2094204" y="1633683"/>
-            <a:ext cx="4915586" cy="1749597"/>
-          </a:xfrm>
-          <a:prstGeom prst="rect">
-            <a:avLst/>
-          </a:prstGeom>
-          <a:ln>
-            <a:solidFill>
-              <a:schemeClr val="tx1"/>
-            </a:solidFill>
-          </a:ln>
-        </p:spPr>
-      </p:pic>
-    </p:spTree>
-    <p:extLst>
-      <p:ext uri="{BB962C8B-B14F-4D97-AF65-F5344CB8AC3E}">
-        <p14:creationId xmlns:p14="http://schemas.microsoft.com/office/powerpoint/2010/main" val="606498256"/>
-      </p:ext>
-    </p:extLst>
-  </p:cSld>
-  <p:clrMapOvr>
-    <a:masterClrMapping/>
-  </p:clrMapOvr>
-  <p:transition>
-    <p:fade/>
-  </p:transition>
-</p:sld>
-</file>
-
-<file path=ppt/slides/slide39.xml><?xml version="1.0" encoding="utf-8"?>
-<p:sld xmlns:a="http://schemas.openxmlformats.org/drawingml/2006/main" xmlns:r="http://schemas.openxmlformats.org/officeDocument/2006/relationships" xmlns:p="http://schemas.openxmlformats.org/presentationml/2006/main">
-  <p:cSld>
-    <p:spTree>
-      <p:nvGrpSpPr>
-        <p:cNvPr id="1" name=""/>
-        <p:cNvGrpSpPr/>
-        <p:nvPr/>
-      </p:nvGrpSpPr>
-      <p:grpSpPr>
-        <a:xfrm>
-          <a:off x="0" y="0"/>
-          <a:ext cx="0" cy="0"/>
-          <a:chOff x="0" y="0"/>
-          <a:chExt cx="0" cy="0"/>
-        </a:xfrm>
-      </p:grpSpPr>
-      <p:pic>
-        <p:nvPicPr>
-          <p:cNvPr id="5" name="Picture 4">
-            <a:extLst>
-              <a:ext uri="{FF2B5EF4-FFF2-40B4-BE49-F238E27FC236}">
-                <a16:creationId xmlns:a16="http://schemas.microsoft.com/office/drawing/2014/main" id="{81080BB8-3CFB-B1DB-E05C-BA0F107832FC}"/>
-              </a:ext>
-            </a:extLst>
-          </p:cNvPr>
-          <p:cNvPicPr>
-            <a:picLocks noChangeAspect="1"/>
-          </p:cNvPicPr>
-          <p:nvPr/>
-        </p:nvPicPr>
-        <p:blipFill>
-          <a:blip r:embed="rId2"/>
-          <a:stretch>
-            <a:fillRect/>
-          </a:stretch>
-        </p:blipFill>
-        <p:spPr>
-          <a:xfrm>
-            <a:off x="1792162" y="403412"/>
-            <a:ext cx="3897583" cy="5921009"/>
-          </a:xfrm>
-          <a:prstGeom prst="rect">
-            <a:avLst/>
-          </a:prstGeom>
-          <a:ln>
-            <a:solidFill>
-              <a:schemeClr val="tx1"/>
-            </a:solidFill>
-          </a:ln>
-        </p:spPr>
-      </p:pic>
-    </p:spTree>
-    <p:extLst>
-      <p:ext uri="{BB962C8B-B14F-4D97-AF65-F5344CB8AC3E}">
-        <p14:creationId xmlns:p14="http://schemas.microsoft.com/office/powerpoint/2010/main" val="3416797157"/>
-      </p:ext>
-    </p:extLst>
-  </p:cSld>
-  <p:clrMapOvr>
-    <a:masterClrMapping/>
-  </p:clrMapOvr>
-  <p:transition>
-    <p:fade/>
-  </p:transition>
-</p:sld>
-</file>
-
 <file path=ppt/slides/slide4.xml><?xml version="1.0" encoding="utf-8"?>
 <p:sld xmlns:a="http://schemas.openxmlformats.org/drawingml/2006/main" xmlns:r="http://schemas.openxmlformats.org/officeDocument/2006/relationships" xmlns:p="http://schemas.openxmlformats.org/presentationml/2006/main">
   <p:cSld>
@@ -22287,6 +24214,450 @@
           <a:chExt cx="0" cy="0"/>
         </a:xfrm>
       </p:grpSpPr>
+      <p:pic>
+        <p:nvPicPr>
+          <p:cNvPr id="3" name="Picture 2">
+            <a:extLst>
+              <a:ext uri="{FF2B5EF4-FFF2-40B4-BE49-F238E27FC236}">
+                <a16:creationId xmlns:a16="http://schemas.microsoft.com/office/drawing/2014/main" id="{26E42FD6-2E77-96C8-9E00-9558CDB4E16B}"/>
+              </a:ext>
+            </a:extLst>
+          </p:cNvPr>
+          <p:cNvPicPr>
+            <a:picLocks noChangeAspect="1"/>
+          </p:cNvPicPr>
+          <p:nvPr/>
+        </p:nvPicPr>
+        <p:blipFill>
+          <a:blip r:embed="rId2"/>
+          <a:stretch>
+            <a:fillRect/>
+          </a:stretch>
+        </p:blipFill>
+        <p:spPr>
+          <a:xfrm>
+            <a:off x="1477553" y="509531"/>
+            <a:ext cx="7778207" cy="2246525"/>
+          </a:xfrm>
+          <a:prstGeom prst="rect">
+            <a:avLst/>
+          </a:prstGeom>
+          <a:ln>
+            <a:solidFill>
+              <a:schemeClr val="tx1"/>
+            </a:solidFill>
+          </a:ln>
+        </p:spPr>
+      </p:pic>
+    </p:spTree>
+    <p:extLst>
+      <p:ext uri="{BB962C8B-B14F-4D97-AF65-F5344CB8AC3E}">
+        <p14:creationId xmlns:p14="http://schemas.microsoft.com/office/powerpoint/2010/main" val="3278745845"/>
+      </p:ext>
+    </p:extLst>
+  </p:cSld>
+  <p:clrMapOvr>
+    <a:masterClrMapping/>
+  </p:clrMapOvr>
+  <p:transition>
+    <p:fade/>
+  </p:transition>
+</p:sld>
+</file>
+
+<file path=ppt/slides/slide41.xml><?xml version="1.0" encoding="utf-8"?>
+<p:sld xmlns:a="http://schemas.openxmlformats.org/drawingml/2006/main" xmlns:r="http://schemas.openxmlformats.org/officeDocument/2006/relationships" xmlns:p="http://schemas.openxmlformats.org/presentationml/2006/main">
+  <p:cSld>
+    <p:spTree>
+      <p:nvGrpSpPr>
+        <p:cNvPr id="1" name=""/>
+        <p:cNvGrpSpPr/>
+        <p:nvPr/>
+      </p:nvGrpSpPr>
+      <p:grpSpPr>
+        <a:xfrm>
+          <a:off x="0" y="0"/>
+          <a:ext cx="0" cy="0"/>
+          <a:chOff x="0" y="0"/>
+          <a:chExt cx="0" cy="0"/>
+        </a:xfrm>
+      </p:grpSpPr>
+      <p:pic>
+        <p:nvPicPr>
+          <p:cNvPr id="3" name="Picture 2">
+            <a:extLst>
+              <a:ext uri="{FF2B5EF4-FFF2-40B4-BE49-F238E27FC236}">
+                <a16:creationId xmlns:a16="http://schemas.microsoft.com/office/drawing/2014/main" id="{31F13B54-D851-4DF9-3613-F3BAB9E4EC9B}"/>
+              </a:ext>
+            </a:extLst>
+          </p:cNvPr>
+          <p:cNvPicPr>
+            <a:picLocks noChangeAspect="1"/>
+          </p:cNvPicPr>
+          <p:nvPr/>
+        </p:nvPicPr>
+        <p:blipFill>
+          <a:blip r:embed="rId2"/>
+          <a:stretch>
+            <a:fillRect/>
+          </a:stretch>
+        </p:blipFill>
+        <p:spPr>
+          <a:xfrm>
+            <a:off x="1678733" y="1258575"/>
+            <a:ext cx="2962688" cy="2238687"/>
+          </a:xfrm>
+          <a:prstGeom prst="rect">
+            <a:avLst/>
+          </a:prstGeom>
+          <a:ln>
+            <a:solidFill>
+              <a:schemeClr val="tx1"/>
+            </a:solidFill>
+          </a:ln>
+        </p:spPr>
+      </p:pic>
+    </p:spTree>
+    <p:extLst>
+      <p:ext uri="{BB962C8B-B14F-4D97-AF65-F5344CB8AC3E}">
+        <p14:creationId xmlns:p14="http://schemas.microsoft.com/office/powerpoint/2010/main" val="3971795737"/>
+      </p:ext>
+    </p:extLst>
+  </p:cSld>
+  <p:clrMapOvr>
+    <a:masterClrMapping/>
+  </p:clrMapOvr>
+  <p:transition>
+    <p:fade/>
+  </p:transition>
+</p:sld>
+</file>
+
+<file path=ppt/slides/slide42.xml><?xml version="1.0" encoding="utf-8"?>
+<p:sld xmlns:a="http://schemas.openxmlformats.org/drawingml/2006/main" xmlns:r="http://schemas.openxmlformats.org/officeDocument/2006/relationships" xmlns:p="http://schemas.openxmlformats.org/presentationml/2006/main">
+  <p:cSld>
+    <p:spTree>
+      <p:nvGrpSpPr>
+        <p:cNvPr id="1" name=""/>
+        <p:cNvGrpSpPr/>
+        <p:nvPr/>
+      </p:nvGrpSpPr>
+      <p:grpSpPr>
+        <a:xfrm>
+          <a:off x="0" y="0"/>
+          <a:ext cx="0" cy="0"/>
+          <a:chOff x="0" y="0"/>
+          <a:chExt cx="0" cy="0"/>
+        </a:xfrm>
+      </p:grpSpPr>
+      <p:pic>
+        <p:nvPicPr>
+          <p:cNvPr id="3" name="Picture 2">
+            <a:extLst>
+              <a:ext uri="{FF2B5EF4-FFF2-40B4-BE49-F238E27FC236}">
+                <a16:creationId xmlns:a16="http://schemas.microsoft.com/office/drawing/2014/main" id="{E3D85509-5D2A-57FF-03A8-D7A1110E2519}"/>
+              </a:ext>
+            </a:extLst>
+          </p:cNvPr>
+          <p:cNvPicPr>
+            <a:picLocks noChangeAspect="1"/>
+          </p:cNvPicPr>
+          <p:nvPr/>
+        </p:nvPicPr>
+        <p:blipFill>
+          <a:blip r:embed="rId2"/>
+          <a:stretch>
+            <a:fillRect/>
+          </a:stretch>
+        </p:blipFill>
+        <p:spPr>
+          <a:xfrm>
+            <a:off x="1088428" y="775237"/>
+            <a:ext cx="4001058" cy="1400370"/>
+          </a:xfrm>
+          <a:prstGeom prst="rect">
+            <a:avLst/>
+          </a:prstGeom>
+          <a:ln>
+            <a:solidFill>
+              <a:schemeClr val="tx1"/>
+            </a:solidFill>
+          </a:ln>
+        </p:spPr>
+      </p:pic>
+      <p:pic>
+        <p:nvPicPr>
+          <p:cNvPr id="5" name="Picture 4">
+            <a:extLst>
+              <a:ext uri="{FF2B5EF4-FFF2-40B4-BE49-F238E27FC236}">
+                <a16:creationId xmlns:a16="http://schemas.microsoft.com/office/drawing/2014/main" id="{8246D4D5-8583-3C79-9A65-1E953C744687}"/>
+              </a:ext>
+            </a:extLst>
+          </p:cNvPr>
+          <p:cNvPicPr>
+            <a:picLocks noChangeAspect="1"/>
+          </p:cNvPicPr>
+          <p:nvPr/>
+        </p:nvPicPr>
+        <p:blipFill>
+          <a:blip r:embed="rId3"/>
+          <a:stretch>
+            <a:fillRect/>
+          </a:stretch>
+        </p:blipFill>
+        <p:spPr>
+          <a:xfrm>
+            <a:off x="1249117" y="3273900"/>
+            <a:ext cx="8068801" cy="2295845"/>
+          </a:xfrm>
+          <a:prstGeom prst="rect">
+            <a:avLst/>
+          </a:prstGeom>
+          <a:ln>
+            <a:solidFill>
+              <a:schemeClr val="tx1"/>
+            </a:solidFill>
+          </a:ln>
+        </p:spPr>
+      </p:pic>
+    </p:spTree>
+    <p:extLst>
+      <p:ext uri="{BB962C8B-B14F-4D97-AF65-F5344CB8AC3E}">
+        <p14:creationId xmlns:p14="http://schemas.microsoft.com/office/powerpoint/2010/main" val="826397614"/>
+      </p:ext>
+    </p:extLst>
+  </p:cSld>
+  <p:clrMapOvr>
+    <a:masterClrMapping/>
+  </p:clrMapOvr>
+  <p:transition>
+    <p:fade/>
+  </p:transition>
+</p:sld>
+</file>
+
+<file path=ppt/slides/slide43.xml><?xml version="1.0" encoding="utf-8"?>
+<p:sld xmlns:a="http://schemas.openxmlformats.org/drawingml/2006/main" xmlns:r="http://schemas.openxmlformats.org/officeDocument/2006/relationships" xmlns:p="http://schemas.openxmlformats.org/presentationml/2006/main">
+  <p:cSld>
+    <p:spTree>
+      <p:nvGrpSpPr>
+        <p:cNvPr id="1" name=""/>
+        <p:cNvGrpSpPr/>
+        <p:nvPr/>
+      </p:nvGrpSpPr>
+      <p:grpSpPr>
+        <a:xfrm>
+          <a:off x="0" y="0"/>
+          <a:ext cx="0" cy="0"/>
+          <a:chOff x="0" y="0"/>
+          <a:chExt cx="0" cy="0"/>
+        </a:xfrm>
+      </p:grpSpPr>
+      <p:pic>
+        <p:nvPicPr>
+          <p:cNvPr id="3" name="Picture 2">
+            <a:extLst>
+              <a:ext uri="{FF2B5EF4-FFF2-40B4-BE49-F238E27FC236}">
+                <a16:creationId xmlns:a16="http://schemas.microsoft.com/office/drawing/2014/main" id="{CF8E32F5-E4B4-872A-0ED2-BD860DACAA62}"/>
+              </a:ext>
+            </a:extLst>
+          </p:cNvPr>
+          <p:cNvPicPr>
+            <a:picLocks noChangeAspect="1"/>
+          </p:cNvPicPr>
+          <p:nvPr/>
+        </p:nvPicPr>
+        <p:blipFill>
+          <a:blip r:embed="rId2"/>
+          <a:srcRect t="1" b="29088"/>
+          <a:stretch>
+            <a:fillRect/>
+          </a:stretch>
+        </p:blipFill>
+        <p:spPr>
+          <a:xfrm>
+            <a:off x="2094204" y="1633683"/>
+            <a:ext cx="4915586" cy="1749597"/>
+          </a:xfrm>
+          <a:prstGeom prst="rect">
+            <a:avLst/>
+          </a:prstGeom>
+          <a:ln>
+            <a:solidFill>
+              <a:schemeClr val="tx1"/>
+            </a:solidFill>
+          </a:ln>
+        </p:spPr>
+      </p:pic>
+    </p:spTree>
+    <p:extLst>
+      <p:ext uri="{BB962C8B-B14F-4D97-AF65-F5344CB8AC3E}">
+        <p14:creationId xmlns:p14="http://schemas.microsoft.com/office/powerpoint/2010/main" val="606498256"/>
+      </p:ext>
+    </p:extLst>
+  </p:cSld>
+  <p:clrMapOvr>
+    <a:masterClrMapping/>
+  </p:clrMapOvr>
+  <p:transition>
+    <p:fade/>
+  </p:transition>
+</p:sld>
+</file>
+
+<file path=ppt/slides/slide44.xml><?xml version="1.0" encoding="utf-8"?>
+<p:sld xmlns:a="http://schemas.openxmlformats.org/drawingml/2006/main" xmlns:r="http://schemas.openxmlformats.org/officeDocument/2006/relationships" xmlns:p="http://schemas.openxmlformats.org/presentationml/2006/main">
+  <p:cSld>
+    <p:spTree>
+      <p:nvGrpSpPr>
+        <p:cNvPr id="1" name=""/>
+        <p:cNvGrpSpPr/>
+        <p:nvPr/>
+      </p:nvGrpSpPr>
+      <p:grpSpPr>
+        <a:xfrm>
+          <a:off x="0" y="0"/>
+          <a:ext cx="0" cy="0"/>
+          <a:chOff x="0" y="0"/>
+          <a:chExt cx="0" cy="0"/>
+        </a:xfrm>
+      </p:grpSpPr>
+      <p:pic>
+        <p:nvPicPr>
+          <p:cNvPr id="5" name="Picture 4">
+            <a:extLst>
+              <a:ext uri="{FF2B5EF4-FFF2-40B4-BE49-F238E27FC236}">
+                <a16:creationId xmlns:a16="http://schemas.microsoft.com/office/drawing/2014/main" id="{81080BB8-3CFB-B1DB-E05C-BA0F107832FC}"/>
+              </a:ext>
+            </a:extLst>
+          </p:cNvPr>
+          <p:cNvPicPr>
+            <a:picLocks noChangeAspect="1"/>
+          </p:cNvPicPr>
+          <p:nvPr/>
+        </p:nvPicPr>
+        <p:blipFill>
+          <a:blip r:embed="rId2"/>
+          <a:stretch>
+            <a:fillRect/>
+          </a:stretch>
+        </p:blipFill>
+        <p:spPr>
+          <a:xfrm>
+            <a:off x="1792162" y="403412"/>
+            <a:ext cx="3897583" cy="5921009"/>
+          </a:xfrm>
+          <a:prstGeom prst="rect">
+            <a:avLst/>
+          </a:prstGeom>
+          <a:ln>
+            <a:solidFill>
+              <a:schemeClr val="tx1"/>
+            </a:solidFill>
+          </a:ln>
+        </p:spPr>
+      </p:pic>
+    </p:spTree>
+    <p:extLst>
+      <p:ext uri="{BB962C8B-B14F-4D97-AF65-F5344CB8AC3E}">
+        <p14:creationId xmlns:p14="http://schemas.microsoft.com/office/powerpoint/2010/main" val="3416797157"/>
+      </p:ext>
+    </p:extLst>
+  </p:cSld>
+  <p:clrMapOvr>
+    <a:masterClrMapping/>
+  </p:clrMapOvr>
+  <p:transition>
+    <p:fade/>
+  </p:transition>
+</p:sld>
+</file>
+
+<file path=ppt/slides/slide45.xml><?xml version="1.0" encoding="utf-8"?>
+<p:sld xmlns:a="http://schemas.openxmlformats.org/drawingml/2006/main" xmlns:r="http://schemas.openxmlformats.org/officeDocument/2006/relationships" xmlns:p="http://schemas.openxmlformats.org/presentationml/2006/main">
+  <p:cSld>
+    <p:spTree>
+      <p:nvGrpSpPr>
+        <p:cNvPr id="1" name=""/>
+        <p:cNvGrpSpPr/>
+        <p:nvPr/>
+      </p:nvGrpSpPr>
+      <p:grpSpPr>
+        <a:xfrm>
+          <a:off x="0" y="0"/>
+          <a:ext cx="0" cy="0"/>
+          <a:chOff x="0" y="0"/>
+          <a:chExt cx="0" cy="0"/>
+        </a:xfrm>
+      </p:grpSpPr>
+      <p:pic>
+        <p:nvPicPr>
+          <p:cNvPr id="12" name="Picture 11">
+            <a:extLst>
+              <a:ext uri="{FF2B5EF4-FFF2-40B4-BE49-F238E27FC236}">
+                <a16:creationId xmlns:a16="http://schemas.microsoft.com/office/drawing/2014/main" id="{8DB6E530-A653-DBDB-F8B4-EC82B216A148}"/>
+              </a:ext>
+            </a:extLst>
+          </p:cNvPr>
+          <p:cNvPicPr>
+            <a:picLocks noChangeAspect="1"/>
+          </p:cNvPicPr>
+          <p:nvPr/>
+        </p:nvPicPr>
+        <p:blipFill>
+          <a:blip r:embed="rId2"/>
+          <a:stretch>
+            <a:fillRect/>
+          </a:stretch>
+        </p:blipFill>
+        <p:spPr>
+          <a:xfrm>
+            <a:off x="1507284" y="877528"/>
+            <a:ext cx="9421906" cy="5239468"/>
+          </a:xfrm>
+          <a:prstGeom prst="rect">
+            <a:avLst/>
+          </a:prstGeom>
+          <a:ln>
+            <a:solidFill>
+              <a:schemeClr val="tx1"/>
+            </a:solidFill>
+          </a:ln>
+        </p:spPr>
+      </p:pic>
+    </p:spTree>
+    <p:extLst>
+      <p:ext uri="{BB962C8B-B14F-4D97-AF65-F5344CB8AC3E}">
+        <p14:creationId xmlns:p14="http://schemas.microsoft.com/office/powerpoint/2010/main" val="424151043"/>
+      </p:ext>
+    </p:extLst>
+  </p:cSld>
+  <p:clrMapOvr>
+    <a:masterClrMapping/>
+  </p:clrMapOvr>
+  <p:transition>
+    <p:fade/>
+  </p:transition>
+</p:sld>
+</file>
+
+<file path=ppt/slides/slide46.xml><?xml version="1.0" encoding="utf-8"?>
+<p:sld xmlns:a="http://schemas.openxmlformats.org/drawingml/2006/main" xmlns:r="http://schemas.openxmlformats.org/officeDocument/2006/relationships" xmlns:p="http://schemas.openxmlformats.org/presentationml/2006/main">
+  <p:cSld>
+    <p:spTree>
+      <p:nvGrpSpPr>
+        <p:cNvPr id="1" name=""/>
+        <p:cNvGrpSpPr/>
+        <p:nvPr/>
+      </p:nvGrpSpPr>
+      <p:grpSpPr>
+        <a:xfrm>
+          <a:off x="0" y="0"/>
+          <a:ext cx="0" cy="0"/>
+          <a:chOff x="0" y="0"/>
+          <a:chExt cx="0" cy="0"/>
+        </a:xfrm>
+      </p:grpSpPr>
       <p:sp>
         <p:nvSpPr>
           <p:cNvPr id="9" name="Rectangle 8">
@@ -22904,7 +25275,7 @@
 </p:sld>
 </file>
 
-<file path=ppt/slides/slide41.xml><?xml version="1.0" encoding="utf-8"?>
+<file path=ppt/slides/slide47.xml><?xml version="1.0" encoding="utf-8"?>
 <p:sld xmlns:a="http://schemas.openxmlformats.org/drawingml/2006/main" xmlns:r="http://schemas.openxmlformats.org/officeDocument/2006/relationships" xmlns:p="http://schemas.openxmlformats.org/presentationml/2006/main">
   <p:cSld>
     <p:spTree>
@@ -23554,7 +25925,7 @@
 </p:sld>
 </file>
 
-<file path=ppt/slides/slide42.xml><?xml version="1.0" encoding="utf-8"?>
+<file path=ppt/slides/slide48.xml><?xml version="1.0" encoding="utf-8"?>
 <p:sld xmlns:a="http://schemas.openxmlformats.org/drawingml/2006/main" xmlns:r="http://schemas.openxmlformats.org/officeDocument/2006/relationships" xmlns:p="http://schemas.openxmlformats.org/presentationml/2006/main">
   <p:cSld>
     <p:spTree>
@@ -24378,7 +26749,7 @@
 </p:sld>
 </file>
 
-<file path=ppt/slides/slide43.xml><?xml version="1.0" encoding="utf-8"?>
+<file path=ppt/slides/slide49.xml><?xml version="1.0" encoding="utf-8"?>
 <p:sld xmlns:a="http://schemas.openxmlformats.org/drawingml/2006/main" xmlns:r="http://schemas.openxmlformats.org/officeDocument/2006/relationships" xmlns:p="http://schemas.openxmlformats.org/presentationml/2006/main">
   <p:cSld>
     <p:spTree>
@@ -25189,7 +27560,488 @@
 </p:sld>
 </file>
 
-<file path=ppt/slides/slide44.xml><?xml version="1.0" encoding="utf-8"?>
+<file path=ppt/slides/slide5.xml><?xml version="1.0" encoding="utf-8"?>
+<p:sld xmlns:a="http://schemas.openxmlformats.org/drawingml/2006/main" xmlns:r="http://schemas.openxmlformats.org/officeDocument/2006/relationships" xmlns:p="http://schemas.openxmlformats.org/presentationml/2006/main">
+  <p:cSld>
+    <p:spTree>
+      <p:nvGrpSpPr>
+        <p:cNvPr id="1" name="">
+          <a:extLst>
+            <a:ext uri="{FF2B5EF4-FFF2-40B4-BE49-F238E27FC236}">
+              <a16:creationId xmlns:a16="http://schemas.microsoft.com/office/drawing/2014/main" id="{7F6304F1-DCE9-082B-4798-46EFB66DEBF7}"/>
+            </a:ext>
+          </a:extLst>
+        </p:cNvPr>
+        <p:cNvGrpSpPr/>
+        <p:nvPr/>
+      </p:nvGrpSpPr>
+      <p:grpSpPr>
+        <a:xfrm>
+          <a:off x="0" y="0"/>
+          <a:ext cx="0" cy="0"/>
+          <a:chOff x="0" y="0"/>
+          <a:chExt cx="0" cy="0"/>
+        </a:xfrm>
+      </p:grpSpPr>
+      <p:sp>
+        <p:nvSpPr>
+          <p:cNvPr id="5" name="Rectangle 4">
+            <a:extLst>
+              <a:ext uri="{FF2B5EF4-FFF2-40B4-BE49-F238E27FC236}">
+                <a16:creationId xmlns:a16="http://schemas.microsoft.com/office/drawing/2014/main" id="{F94004CB-49FD-026A-AF15-6EF2C9DF8122}"/>
+              </a:ext>
+            </a:extLst>
+          </p:cNvPr>
+          <p:cNvSpPr/>
+          <p:nvPr/>
+        </p:nvSpPr>
+        <p:spPr bwMode="auto">
+          <a:xfrm>
+            <a:off x="461168" y="387423"/>
+            <a:ext cx="11172031" cy="5190417"/>
+          </a:xfrm>
+          <a:prstGeom prst="rect">
+            <a:avLst/>
+          </a:prstGeom>
+          <a:solidFill>
+            <a:schemeClr val="bg1">
+              <a:lumMod val="85000"/>
+            </a:schemeClr>
+          </a:solidFill>
+          <a:ln>
+            <a:solidFill>
+              <a:schemeClr val="tx1">
+                <a:lumMod val="75000"/>
+              </a:schemeClr>
+            </a:solidFill>
+            <a:headEnd type="none" w="med" len="med"/>
+            <a:tailEnd type="none" w="med" len="med"/>
+          </a:ln>
+          <a:effectLst/>
+        </p:spPr>
+        <p:style>
+          <a:lnRef idx="1">
+            <a:schemeClr val="accent2"/>
+          </a:lnRef>
+          <a:fillRef idx="3">
+            <a:schemeClr val="accent2"/>
+          </a:fillRef>
+          <a:effectRef idx="2">
+            <a:schemeClr val="accent2"/>
+          </a:effectRef>
+          <a:fontRef idx="minor">
+            <a:schemeClr val="lt1"/>
+          </a:fontRef>
+        </p:style>
+        <p:txBody>
+          <a:bodyPr rot="0" spcFirstLastPara="0" vertOverflow="overflow" horzOverflow="overflow" vert="horz" wrap="square" lIns="182880" tIns="146304" rIns="182880" bIns="146304" numCol="1" spcCol="0" rtlCol="0" fromWordArt="0" anchor="t" anchorCtr="0" forceAA="0" compatLnSpc="1">
+            <a:prstTxWarp prst="textNoShape">
+              <a:avLst/>
+            </a:prstTxWarp>
+            <a:noAutofit/>
+          </a:bodyPr>
+          <a:lstStyle/>
+          <a:p>
+            <a:pPr algn="ctr" defTabSz="932472" fontAlgn="base">
+              <a:lnSpc>
+                <a:spcPct val="90000"/>
+              </a:lnSpc>
+              <a:spcBef>
+                <a:spcPct val="0"/>
+              </a:spcBef>
+              <a:spcAft>
+                <a:spcPct val="0"/>
+              </a:spcAft>
+            </a:pPr>
+            <a:endParaRPr lang="en-US" sz="2400" dirty="0" err="1">
+              <a:gradFill>
+                <a:gsLst>
+                  <a:gs pos="0">
+                    <a:srgbClr val="FFFFFF"/>
+                  </a:gs>
+                  <a:gs pos="100000">
+                    <a:srgbClr val="FFFFFF"/>
+                  </a:gs>
+                </a:gsLst>
+                <a:lin ang="5400000" scaled="0"/>
+              </a:gradFill>
+              <a:ea typeface="Segoe UI" pitchFamily="34" charset="0"/>
+              <a:cs typeface="Segoe UI" pitchFamily="34" charset="0"/>
+            </a:endParaRPr>
+          </a:p>
+        </p:txBody>
+      </p:sp>
+      <p:pic>
+        <p:nvPicPr>
+          <p:cNvPr id="10" name="Picture 9">
+            <a:extLst>
+              <a:ext uri="{FF2B5EF4-FFF2-40B4-BE49-F238E27FC236}">
+                <a16:creationId xmlns:a16="http://schemas.microsoft.com/office/drawing/2014/main" id="{3EA3BAF9-40E5-9A38-F7E2-0BF88B3707D6}"/>
+              </a:ext>
+            </a:extLst>
+          </p:cNvPr>
+          <p:cNvPicPr>
+            <a:picLocks noChangeAspect="1"/>
+          </p:cNvPicPr>
+          <p:nvPr/>
+        </p:nvPicPr>
+        <p:blipFill>
+          <a:blip r:embed="rId2"/>
+          <a:srcRect b="87577"/>
+          <a:stretch>
+            <a:fillRect/>
+          </a:stretch>
+        </p:blipFill>
+        <p:spPr>
+          <a:xfrm>
+            <a:off x="747632" y="992229"/>
+            <a:ext cx="5125165" cy="491131"/>
+          </a:xfrm>
+          <a:prstGeom prst="rect">
+            <a:avLst/>
+          </a:prstGeom>
+          <a:ln>
+            <a:solidFill>
+              <a:schemeClr val="bg1"/>
+            </a:solidFill>
+          </a:ln>
+        </p:spPr>
+      </p:pic>
+      <p:pic>
+        <p:nvPicPr>
+          <p:cNvPr id="12" name="Picture 11">
+            <a:extLst>
+              <a:ext uri="{FF2B5EF4-FFF2-40B4-BE49-F238E27FC236}">
+                <a16:creationId xmlns:a16="http://schemas.microsoft.com/office/drawing/2014/main" id="{2EBA7569-3965-E9AF-9DD1-7DE8793F763A}"/>
+              </a:ext>
+            </a:extLst>
+          </p:cNvPr>
+          <p:cNvPicPr>
+            <a:picLocks noChangeAspect="1"/>
+          </p:cNvPicPr>
+          <p:nvPr/>
+        </p:nvPicPr>
+        <p:blipFill>
+          <a:blip r:embed="rId3"/>
+          <a:srcRect l="1772" t="7965"/>
+          <a:stretch>
+            <a:fillRect/>
+          </a:stretch>
+        </p:blipFill>
+        <p:spPr>
+          <a:xfrm>
+            <a:off x="6364764" y="951589"/>
+            <a:ext cx="5053094" cy="4383794"/>
+          </a:xfrm>
+          <a:prstGeom prst="rect">
+            <a:avLst/>
+          </a:prstGeom>
+          <a:ln>
+            <a:solidFill>
+              <a:schemeClr val="tx1"/>
+            </a:solidFill>
+          </a:ln>
+        </p:spPr>
+      </p:pic>
+      <p:sp>
+        <p:nvSpPr>
+          <p:cNvPr id="14" name="Rectangle 13">
+            <a:extLst>
+              <a:ext uri="{FF2B5EF4-FFF2-40B4-BE49-F238E27FC236}">
+                <a16:creationId xmlns:a16="http://schemas.microsoft.com/office/drawing/2014/main" id="{18922431-F7AF-B822-6046-562224AE7F8C}"/>
+              </a:ext>
+            </a:extLst>
+          </p:cNvPr>
+          <p:cNvSpPr/>
+          <p:nvPr/>
+        </p:nvSpPr>
+        <p:spPr bwMode="auto">
+          <a:xfrm>
+            <a:off x="676511" y="607667"/>
+            <a:ext cx="5145486" cy="343922"/>
+          </a:xfrm>
+          <a:prstGeom prst="rect">
+            <a:avLst/>
+          </a:prstGeom>
+          <a:solidFill>
+            <a:schemeClr val="tx1"/>
+          </a:solidFill>
+          <a:ln>
+            <a:solidFill>
+              <a:schemeClr val="tx1">
+                <a:lumMod val="75000"/>
+              </a:schemeClr>
+            </a:solidFill>
+            <a:headEnd type="none" w="med" len="med"/>
+            <a:tailEnd type="none" w="med" len="med"/>
+          </a:ln>
+          <a:effectLst/>
+        </p:spPr>
+        <p:style>
+          <a:lnRef idx="1">
+            <a:schemeClr val="accent2"/>
+          </a:lnRef>
+          <a:fillRef idx="3">
+            <a:schemeClr val="accent2"/>
+          </a:fillRef>
+          <a:effectRef idx="2">
+            <a:schemeClr val="accent2"/>
+          </a:effectRef>
+          <a:fontRef idx="minor">
+            <a:schemeClr val="lt1"/>
+          </a:fontRef>
+        </p:style>
+        <p:txBody>
+          <a:bodyPr rot="0" spcFirstLastPara="0" vertOverflow="overflow" horzOverflow="overflow" vert="horz" wrap="square" lIns="91440" tIns="182880" rIns="182880" bIns="182880" numCol="1" spcCol="0" rtlCol="0" fromWordArt="0" anchor="ctr" anchorCtr="0" forceAA="0" compatLnSpc="1">
+            <a:prstTxWarp prst="textNoShape">
+              <a:avLst/>
+            </a:prstTxWarp>
+            <a:noAutofit/>
+          </a:bodyPr>
+          <a:lstStyle/>
+          <a:p>
+            <a:pPr algn="ctr" defTabSz="932472" fontAlgn="base">
+              <a:lnSpc>
+                <a:spcPct val="90000"/>
+              </a:lnSpc>
+              <a:spcBef>
+                <a:spcPct val="0"/>
+              </a:spcBef>
+              <a:spcAft>
+                <a:spcPct val="0"/>
+              </a:spcAft>
+            </a:pPr>
+            <a:r>
+              <a:rPr lang="en-US" sz="1400" b="1" dirty="0">
+                <a:solidFill>
+                  <a:schemeClr val="bg1"/>
+                </a:solidFill>
+                <a:latin typeface="Lucida Console" panose="020B0609040504020204" pitchFamily="49" charset="0"/>
+                <a:ea typeface="Segoe UI" pitchFamily="34" charset="0"/>
+                <a:cs typeface="Segoe UI" pitchFamily="34" charset="0"/>
+              </a:rPr>
+              <a:t>presentation workspace</a:t>
+            </a:r>
+          </a:p>
+        </p:txBody>
+      </p:sp>
+      <p:sp>
+        <p:nvSpPr>
+          <p:cNvPr id="2" name="Rectangle 1">
+            <a:extLst>
+              <a:ext uri="{FF2B5EF4-FFF2-40B4-BE49-F238E27FC236}">
+                <a16:creationId xmlns:a16="http://schemas.microsoft.com/office/drawing/2014/main" id="{D5982FEB-26F9-FB41-F171-0808CEC3094E}"/>
+              </a:ext>
+            </a:extLst>
+          </p:cNvPr>
+          <p:cNvSpPr/>
+          <p:nvPr/>
+        </p:nvSpPr>
+        <p:spPr bwMode="auto">
+          <a:xfrm>
+            <a:off x="6344442" y="599810"/>
+            <a:ext cx="5073415" cy="343922"/>
+          </a:xfrm>
+          <a:prstGeom prst="rect">
+            <a:avLst/>
+          </a:prstGeom>
+          <a:solidFill>
+            <a:schemeClr val="tx1"/>
+          </a:solidFill>
+          <a:ln>
+            <a:solidFill>
+              <a:schemeClr val="tx1">
+                <a:lumMod val="75000"/>
+              </a:schemeClr>
+            </a:solidFill>
+            <a:headEnd type="none" w="med" len="med"/>
+            <a:tailEnd type="none" w="med" len="med"/>
+          </a:ln>
+          <a:effectLst/>
+        </p:spPr>
+        <p:style>
+          <a:lnRef idx="1">
+            <a:schemeClr val="accent2"/>
+          </a:lnRef>
+          <a:fillRef idx="3">
+            <a:schemeClr val="accent2"/>
+          </a:fillRef>
+          <a:effectRef idx="2">
+            <a:schemeClr val="accent2"/>
+          </a:effectRef>
+          <a:fontRef idx="minor">
+            <a:schemeClr val="lt1"/>
+          </a:fontRef>
+        </p:style>
+        <p:txBody>
+          <a:bodyPr rot="0" spcFirstLastPara="0" vertOverflow="overflow" horzOverflow="overflow" vert="horz" wrap="square" lIns="91440" tIns="182880" rIns="182880" bIns="182880" numCol="1" spcCol="0" rtlCol="0" fromWordArt="0" anchor="ctr" anchorCtr="0" forceAA="0" compatLnSpc="1">
+            <a:prstTxWarp prst="textNoShape">
+              <a:avLst/>
+            </a:prstTxWarp>
+            <a:noAutofit/>
+          </a:bodyPr>
+          <a:lstStyle/>
+          <a:p>
+            <a:pPr algn="ctr" defTabSz="932472" fontAlgn="base">
+              <a:lnSpc>
+                <a:spcPct val="90000"/>
+              </a:lnSpc>
+              <a:spcBef>
+                <a:spcPct val="0"/>
+              </a:spcBef>
+              <a:spcAft>
+                <a:spcPct val="0"/>
+              </a:spcAft>
+            </a:pPr>
+            <a:r>
+              <a:rPr lang="en-US" sz="1400" b="1" dirty="0">
+                <a:solidFill>
+                  <a:schemeClr val="bg1"/>
+                </a:solidFill>
+                <a:latin typeface="Lucida Console" panose="020B0609040504020204" pitchFamily="49" charset="0"/>
+                <a:ea typeface="Segoe UI" pitchFamily="34" charset="0"/>
+                <a:cs typeface="Segoe UI" pitchFamily="34" charset="0"/>
+              </a:rPr>
+              <a:t>staging workspace</a:t>
+            </a:r>
+          </a:p>
+        </p:txBody>
+      </p:sp>
+      <p:pic>
+        <p:nvPicPr>
+          <p:cNvPr id="3" name="Picture 2">
+            <a:extLst>
+              <a:ext uri="{FF2B5EF4-FFF2-40B4-BE49-F238E27FC236}">
+                <a16:creationId xmlns:a16="http://schemas.microsoft.com/office/drawing/2014/main" id="{4EE35A62-78C7-D1B4-29EB-5407BDB83C00}"/>
+              </a:ext>
+            </a:extLst>
+          </p:cNvPr>
+          <p:cNvPicPr>
+            <a:picLocks noChangeAspect="1"/>
+          </p:cNvPicPr>
+          <p:nvPr/>
+        </p:nvPicPr>
+        <p:blipFill>
+          <a:blip r:embed="rId2"/>
+          <a:srcRect t="23474"/>
+          <a:stretch>
+            <a:fillRect/>
+          </a:stretch>
+        </p:blipFill>
+        <p:spPr>
+          <a:xfrm>
+            <a:off x="747632" y="1483360"/>
+            <a:ext cx="5125165" cy="3025416"/>
+          </a:xfrm>
+          <a:prstGeom prst="rect">
+            <a:avLst/>
+          </a:prstGeom>
+          <a:ln>
+            <a:solidFill>
+              <a:schemeClr val="bg1"/>
+            </a:solidFill>
+          </a:ln>
+        </p:spPr>
+      </p:pic>
+      <p:sp>
+        <p:nvSpPr>
+          <p:cNvPr id="4" name="Rectangle 3">
+            <a:extLst>
+              <a:ext uri="{FF2B5EF4-FFF2-40B4-BE49-F238E27FC236}">
+                <a16:creationId xmlns:a16="http://schemas.microsoft.com/office/drawing/2014/main" id="{B5FFF870-63D6-8984-6176-A39125C79AB2}"/>
+              </a:ext>
+            </a:extLst>
+          </p:cNvPr>
+          <p:cNvSpPr/>
+          <p:nvPr/>
+        </p:nvSpPr>
+        <p:spPr bwMode="auto">
+          <a:xfrm>
+            <a:off x="676511" y="951589"/>
+            <a:ext cx="5145486" cy="3557187"/>
+          </a:xfrm>
+          <a:prstGeom prst="rect">
+            <a:avLst/>
+          </a:prstGeom>
+          <a:noFill/>
+          <a:ln>
+            <a:solidFill>
+              <a:schemeClr val="tx1"/>
+            </a:solidFill>
+            <a:headEnd type="none" w="med" len="med"/>
+            <a:tailEnd type="none" w="med" len="med"/>
+          </a:ln>
+          <a:effectLst/>
+        </p:spPr>
+        <p:style>
+          <a:lnRef idx="1">
+            <a:schemeClr val="accent2"/>
+          </a:lnRef>
+          <a:fillRef idx="3">
+            <a:schemeClr val="accent2"/>
+          </a:fillRef>
+          <a:effectRef idx="2">
+            <a:schemeClr val="accent2"/>
+          </a:effectRef>
+          <a:fontRef idx="minor">
+            <a:schemeClr val="lt1"/>
+          </a:fontRef>
+        </p:style>
+        <p:txBody>
+          <a:bodyPr rot="0" spcFirstLastPara="0" vertOverflow="overflow" horzOverflow="overflow" vert="horz" wrap="square" lIns="182880" tIns="146304" rIns="182880" bIns="146304" numCol="1" spcCol="0" rtlCol="0" fromWordArt="0" anchor="t" anchorCtr="0" forceAA="0" compatLnSpc="1">
+            <a:prstTxWarp prst="textNoShape">
+              <a:avLst/>
+            </a:prstTxWarp>
+            <a:noAutofit/>
+          </a:bodyPr>
+          <a:lstStyle/>
+          <a:p>
+            <a:pPr algn="ctr" defTabSz="932472" fontAlgn="base">
+              <a:lnSpc>
+                <a:spcPct val="90000"/>
+              </a:lnSpc>
+              <a:spcBef>
+                <a:spcPct val="0"/>
+              </a:spcBef>
+              <a:spcAft>
+                <a:spcPct val="0"/>
+              </a:spcAft>
+            </a:pPr>
+            <a:endParaRPr lang="en-US" sz="2400" dirty="0" err="1">
+              <a:gradFill>
+                <a:gsLst>
+                  <a:gs pos="0">
+                    <a:srgbClr val="FFFFFF"/>
+                  </a:gs>
+                  <a:gs pos="100000">
+                    <a:srgbClr val="FFFFFF"/>
+                  </a:gs>
+                </a:gsLst>
+                <a:lin ang="5400000" scaled="0"/>
+              </a:gradFill>
+              <a:ea typeface="Segoe UI" pitchFamily="34" charset="0"/>
+              <a:cs typeface="Segoe UI" pitchFamily="34" charset="0"/>
+            </a:endParaRPr>
+          </a:p>
+        </p:txBody>
+      </p:sp>
+    </p:spTree>
+    <p:extLst>
+      <p:ext uri="{BB962C8B-B14F-4D97-AF65-F5344CB8AC3E}">
+        <p14:creationId xmlns:p14="http://schemas.microsoft.com/office/powerpoint/2010/main" val="3468166581"/>
+      </p:ext>
+    </p:extLst>
+  </p:cSld>
+  <p:clrMapOvr>
+    <a:masterClrMapping/>
+  </p:clrMapOvr>
+  <p:transition>
+    <p:fade/>
+  </p:transition>
+</p:sld>
+</file>
+
+<file path=ppt/slides/slide50.xml><?xml version="1.0" encoding="utf-8"?>
 <p:sld xmlns:a="http://schemas.openxmlformats.org/drawingml/2006/main" xmlns:r="http://schemas.openxmlformats.org/officeDocument/2006/relationships" xmlns:p="http://schemas.openxmlformats.org/presentationml/2006/main">
   <p:cSld>
     <p:spTree>
@@ -25260,7 +28112,7 @@
 </p:sld>
 </file>
 
-<file path=ppt/slides/slide45.xml><?xml version="1.0" encoding="utf-8"?>
+<file path=ppt/slides/slide51.xml><?xml version="1.0" encoding="utf-8"?>
 <p:sld xmlns:a="http://schemas.openxmlformats.org/drawingml/2006/main" xmlns:r="http://schemas.openxmlformats.org/officeDocument/2006/relationships" xmlns:p="http://schemas.openxmlformats.org/presentationml/2006/main">
   <p:cSld>
     <p:spTree>
@@ -25328,7 +28180,7 @@
 </p:sld>
 </file>
 
-<file path=ppt/slides/slide46.xml><?xml version="1.0" encoding="utf-8"?>
+<file path=ppt/slides/slide52.xml><?xml version="1.0" encoding="utf-8"?>
 <p:sld xmlns:a="http://schemas.openxmlformats.org/drawingml/2006/main" xmlns:r="http://schemas.openxmlformats.org/officeDocument/2006/relationships" xmlns:p="http://schemas.openxmlformats.org/presentationml/2006/main">
   <p:cSld>
     <p:spTree>
@@ -25624,7 +28476,7 @@
 </p:sld>
 </file>
 
-<file path=ppt/slides/slide47.xml><?xml version="1.0" encoding="utf-8"?>
+<file path=ppt/slides/slide53.xml><?xml version="1.0" encoding="utf-8"?>
 <p:sld xmlns:a="http://schemas.openxmlformats.org/drawingml/2006/main" xmlns:r="http://schemas.openxmlformats.org/officeDocument/2006/relationships" xmlns:p="http://schemas.openxmlformats.org/presentationml/2006/main">
   <p:cSld>
     <p:spTree>
@@ -27107,7 +29959,7 @@
 </p:sld>
 </file>
 
-<file path=ppt/slides/slide48.xml><?xml version="1.0" encoding="utf-8"?>
+<file path=ppt/slides/slide54.xml><?xml version="1.0" encoding="utf-8"?>
 <p:sld xmlns:a="http://schemas.openxmlformats.org/drawingml/2006/main" xmlns:r="http://schemas.openxmlformats.org/officeDocument/2006/relationships" xmlns:p="http://schemas.openxmlformats.org/presentationml/2006/main">
   <p:cSld>
     <p:spTree>
@@ -28805,7 +31657,7 @@
 </p:sld>
 </file>
 
-<file path=ppt/slides/slide49.xml><?xml version="1.0" encoding="utf-8"?>
+<file path=ppt/slides/slide55.xml><?xml version="1.0" encoding="utf-8"?>
 <p:sld xmlns:a="http://schemas.openxmlformats.org/drawingml/2006/main" xmlns:r="http://schemas.openxmlformats.org/officeDocument/2006/relationships" xmlns:p="http://schemas.openxmlformats.org/presentationml/2006/main">
   <p:cSld>
     <p:spTree>
@@ -29844,488 +32696,7 @@
 </p:sld>
 </file>
 
-<file path=ppt/slides/slide5.xml><?xml version="1.0" encoding="utf-8"?>
-<p:sld xmlns:a="http://schemas.openxmlformats.org/drawingml/2006/main" xmlns:r="http://schemas.openxmlformats.org/officeDocument/2006/relationships" xmlns:p="http://schemas.openxmlformats.org/presentationml/2006/main">
-  <p:cSld>
-    <p:spTree>
-      <p:nvGrpSpPr>
-        <p:cNvPr id="1" name="">
-          <a:extLst>
-            <a:ext uri="{FF2B5EF4-FFF2-40B4-BE49-F238E27FC236}">
-              <a16:creationId xmlns:a16="http://schemas.microsoft.com/office/drawing/2014/main" id="{7F6304F1-DCE9-082B-4798-46EFB66DEBF7}"/>
-            </a:ext>
-          </a:extLst>
-        </p:cNvPr>
-        <p:cNvGrpSpPr/>
-        <p:nvPr/>
-      </p:nvGrpSpPr>
-      <p:grpSpPr>
-        <a:xfrm>
-          <a:off x="0" y="0"/>
-          <a:ext cx="0" cy="0"/>
-          <a:chOff x="0" y="0"/>
-          <a:chExt cx="0" cy="0"/>
-        </a:xfrm>
-      </p:grpSpPr>
-      <p:sp>
-        <p:nvSpPr>
-          <p:cNvPr id="5" name="Rectangle 4">
-            <a:extLst>
-              <a:ext uri="{FF2B5EF4-FFF2-40B4-BE49-F238E27FC236}">
-                <a16:creationId xmlns:a16="http://schemas.microsoft.com/office/drawing/2014/main" id="{F94004CB-49FD-026A-AF15-6EF2C9DF8122}"/>
-              </a:ext>
-            </a:extLst>
-          </p:cNvPr>
-          <p:cNvSpPr/>
-          <p:nvPr/>
-        </p:nvSpPr>
-        <p:spPr bwMode="auto">
-          <a:xfrm>
-            <a:off x="461168" y="387423"/>
-            <a:ext cx="11172031" cy="5190417"/>
-          </a:xfrm>
-          <a:prstGeom prst="rect">
-            <a:avLst/>
-          </a:prstGeom>
-          <a:solidFill>
-            <a:schemeClr val="bg1">
-              <a:lumMod val="85000"/>
-            </a:schemeClr>
-          </a:solidFill>
-          <a:ln>
-            <a:solidFill>
-              <a:schemeClr val="tx1">
-                <a:lumMod val="75000"/>
-              </a:schemeClr>
-            </a:solidFill>
-            <a:headEnd type="none" w="med" len="med"/>
-            <a:tailEnd type="none" w="med" len="med"/>
-          </a:ln>
-          <a:effectLst/>
-        </p:spPr>
-        <p:style>
-          <a:lnRef idx="1">
-            <a:schemeClr val="accent2"/>
-          </a:lnRef>
-          <a:fillRef idx="3">
-            <a:schemeClr val="accent2"/>
-          </a:fillRef>
-          <a:effectRef idx="2">
-            <a:schemeClr val="accent2"/>
-          </a:effectRef>
-          <a:fontRef idx="minor">
-            <a:schemeClr val="lt1"/>
-          </a:fontRef>
-        </p:style>
-        <p:txBody>
-          <a:bodyPr rot="0" spcFirstLastPara="0" vertOverflow="overflow" horzOverflow="overflow" vert="horz" wrap="square" lIns="182880" tIns="146304" rIns="182880" bIns="146304" numCol="1" spcCol="0" rtlCol="0" fromWordArt="0" anchor="t" anchorCtr="0" forceAA="0" compatLnSpc="1">
-            <a:prstTxWarp prst="textNoShape">
-              <a:avLst/>
-            </a:prstTxWarp>
-            <a:noAutofit/>
-          </a:bodyPr>
-          <a:lstStyle/>
-          <a:p>
-            <a:pPr algn="ctr" defTabSz="932472" fontAlgn="base">
-              <a:lnSpc>
-                <a:spcPct val="90000"/>
-              </a:lnSpc>
-              <a:spcBef>
-                <a:spcPct val="0"/>
-              </a:spcBef>
-              <a:spcAft>
-                <a:spcPct val="0"/>
-              </a:spcAft>
-            </a:pPr>
-            <a:endParaRPr lang="en-US" sz="2400" dirty="0" err="1">
-              <a:gradFill>
-                <a:gsLst>
-                  <a:gs pos="0">
-                    <a:srgbClr val="FFFFFF"/>
-                  </a:gs>
-                  <a:gs pos="100000">
-                    <a:srgbClr val="FFFFFF"/>
-                  </a:gs>
-                </a:gsLst>
-                <a:lin ang="5400000" scaled="0"/>
-              </a:gradFill>
-              <a:ea typeface="Segoe UI" pitchFamily="34" charset="0"/>
-              <a:cs typeface="Segoe UI" pitchFamily="34" charset="0"/>
-            </a:endParaRPr>
-          </a:p>
-        </p:txBody>
-      </p:sp>
-      <p:pic>
-        <p:nvPicPr>
-          <p:cNvPr id="10" name="Picture 9">
-            <a:extLst>
-              <a:ext uri="{FF2B5EF4-FFF2-40B4-BE49-F238E27FC236}">
-                <a16:creationId xmlns:a16="http://schemas.microsoft.com/office/drawing/2014/main" id="{3EA3BAF9-40E5-9A38-F7E2-0BF88B3707D6}"/>
-              </a:ext>
-            </a:extLst>
-          </p:cNvPr>
-          <p:cNvPicPr>
-            <a:picLocks noChangeAspect="1"/>
-          </p:cNvPicPr>
-          <p:nvPr/>
-        </p:nvPicPr>
-        <p:blipFill>
-          <a:blip r:embed="rId2"/>
-          <a:srcRect b="87577"/>
-          <a:stretch>
-            <a:fillRect/>
-          </a:stretch>
-        </p:blipFill>
-        <p:spPr>
-          <a:xfrm>
-            <a:off x="747632" y="992229"/>
-            <a:ext cx="5125165" cy="491131"/>
-          </a:xfrm>
-          <a:prstGeom prst="rect">
-            <a:avLst/>
-          </a:prstGeom>
-          <a:ln>
-            <a:solidFill>
-              <a:schemeClr val="bg1"/>
-            </a:solidFill>
-          </a:ln>
-        </p:spPr>
-      </p:pic>
-      <p:pic>
-        <p:nvPicPr>
-          <p:cNvPr id="12" name="Picture 11">
-            <a:extLst>
-              <a:ext uri="{FF2B5EF4-FFF2-40B4-BE49-F238E27FC236}">
-                <a16:creationId xmlns:a16="http://schemas.microsoft.com/office/drawing/2014/main" id="{2EBA7569-3965-E9AF-9DD1-7DE8793F763A}"/>
-              </a:ext>
-            </a:extLst>
-          </p:cNvPr>
-          <p:cNvPicPr>
-            <a:picLocks noChangeAspect="1"/>
-          </p:cNvPicPr>
-          <p:nvPr/>
-        </p:nvPicPr>
-        <p:blipFill>
-          <a:blip r:embed="rId3"/>
-          <a:srcRect l="1772" t="7965"/>
-          <a:stretch>
-            <a:fillRect/>
-          </a:stretch>
-        </p:blipFill>
-        <p:spPr>
-          <a:xfrm>
-            <a:off x="6364764" y="951589"/>
-            <a:ext cx="5053094" cy="4383794"/>
-          </a:xfrm>
-          <a:prstGeom prst="rect">
-            <a:avLst/>
-          </a:prstGeom>
-          <a:ln>
-            <a:solidFill>
-              <a:schemeClr val="tx1"/>
-            </a:solidFill>
-          </a:ln>
-        </p:spPr>
-      </p:pic>
-      <p:sp>
-        <p:nvSpPr>
-          <p:cNvPr id="14" name="Rectangle 13">
-            <a:extLst>
-              <a:ext uri="{FF2B5EF4-FFF2-40B4-BE49-F238E27FC236}">
-                <a16:creationId xmlns:a16="http://schemas.microsoft.com/office/drawing/2014/main" id="{18922431-F7AF-B822-6046-562224AE7F8C}"/>
-              </a:ext>
-            </a:extLst>
-          </p:cNvPr>
-          <p:cNvSpPr/>
-          <p:nvPr/>
-        </p:nvSpPr>
-        <p:spPr bwMode="auto">
-          <a:xfrm>
-            <a:off x="676511" y="607667"/>
-            <a:ext cx="5145486" cy="343922"/>
-          </a:xfrm>
-          <a:prstGeom prst="rect">
-            <a:avLst/>
-          </a:prstGeom>
-          <a:solidFill>
-            <a:schemeClr val="tx1"/>
-          </a:solidFill>
-          <a:ln>
-            <a:solidFill>
-              <a:schemeClr val="tx1">
-                <a:lumMod val="75000"/>
-              </a:schemeClr>
-            </a:solidFill>
-            <a:headEnd type="none" w="med" len="med"/>
-            <a:tailEnd type="none" w="med" len="med"/>
-          </a:ln>
-          <a:effectLst/>
-        </p:spPr>
-        <p:style>
-          <a:lnRef idx="1">
-            <a:schemeClr val="accent2"/>
-          </a:lnRef>
-          <a:fillRef idx="3">
-            <a:schemeClr val="accent2"/>
-          </a:fillRef>
-          <a:effectRef idx="2">
-            <a:schemeClr val="accent2"/>
-          </a:effectRef>
-          <a:fontRef idx="minor">
-            <a:schemeClr val="lt1"/>
-          </a:fontRef>
-        </p:style>
-        <p:txBody>
-          <a:bodyPr rot="0" spcFirstLastPara="0" vertOverflow="overflow" horzOverflow="overflow" vert="horz" wrap="square" lIns="91440" tIns="182880" rIns="182880" bIns="182880" numCol="1" spcCol="0" rtlCol="0" fromWordArt="0" anchor="ctr" anchorCtr="0" forceAA="0" compatLnSpc="1">
-            <a:prstTxWarp prst="textNoShape">
-              <a:avLst/>
-            </a:prstTxWarp>
-            <a:noAutofit/>
-          </a:bodyPr>
-          <a:lstStyle/>
-          <a:p>
-            <a:pPr algn="ctr" defTabSz="932472" fontAlgn="base">
-              <a:lnSpc>
-                <a:spcPct val="90000"/>
-              </a:lnSpc>
-              <a:spcBef>
-                <a:spcPct val="0"/>
-              </a:spcBef>
-              <a:spcAft>
-                <a:spcPct val="0"/>
-              </a:spcAft>
-            </a:pPr>
-            <a:r>
-              <a:rPr lang="en-US" sz="1400" b="1" dirty="0">
-                <a:solidFill>
-                  <a:schemeClr val="bg1"/>
-                </a:solidFill>
-                <a:latin typeface="Lucida Console" panose="020B0609040504020204" pitchFamily="49" charset="0"/>
-                <a:ea typeface="Segoe UI" pitchFamily="34" charset="0"/>
-                <a:cs typeface="Segoe UI" pitchFamily="34" charset="0"/>
-              </a:rPr>
-              <a:t>presentation workspace</a:t>
-            </a:r>
-          </a:p>
-        </p:txBody>
-      </p:sp>
-      <p:sp>
-        <p:nvSpPr>
-          <p:cNvPr id="2" name="Rectangle 1">
-            <a:extLst>
-              <a:ext uri="{FF2B5EF4-FFF2-40B4-BE49-F238E27FC236}">
-                <a16:creationId xmlns:a16="http://schemas.microsoft.com/office/drawing/2014/main" id="{D5982FEB-26F9-FB41-F171-0808CEC3094E}"/>
-              </a:ext>
-            </a:extLst>
-          </p:cNvPr>
-          <p:cNvSpPr/>
-          <p:nvPr/>
-        </p:nvSpPr>
-        <p:spPr bwMode="auto">
-          <a:xfrm>
-            <a:off x="6344442" y="599810"/>
-            <a:ext cx="5073415" cy="343922"/>
-          </a:xfrm>
-          <a:prstGeom prst="rect">
-            <a:avLst/>
-          </a:prstGeom>
-          <a:solidFill>
-            <a:schemeClr val="tx1"/>
-          </a:solidFill>
-          <a:ln>
-            <a:solidFill>
-              <a:schemeClr val="tx1">
-                <a:lumMod val="75000"/>
-              </a:schemeClr>
-            </a:solidFill>
-            <a:headEnd type="none" w="med" len="med"/>
-            <a:tailEnd type="none" w="med" len="med"/>
-          </a:ln>
-          <a:effectLst/>
-        </p:spPr>
-        <p:style>
-          <a:lnRef idx="1">
-            <a:schemeClr val="accent2"/>
-          </a:lnRef>
-          <a:fillRef idx="3">
-            <a:schemeClr val="accent2"/>
-          </a:fillRef>
-          <a:effectRef idx="2">
-            <a:schemeClr val="accent2"/>
-          </a:effectRef>
-          <a:fontRef idx="minor">
-            <a:schemeClr val="lt1"/>
-          </a:fontRef>
-        </p:style>
-        <p:txBody>
-          <a:bodyPr rot="0" spcFirstLastPara="0" vertOverflow="overflow" horzOverflow="overflow" vert="horz" wrap="square" lIns="91440" tIns="182880" rIns="182880" bIns="182880" numCol="1" spcCol="0" rtlCol="0" fromWordArt="0" anchor="ctr" anchorCtr="0" forceAA="0" compatLnSpc="1">
-            <a:prstTxWarp prst="textNoShape">
-              <a:avLst/>
-            </a:prstTxWarp>
-            <a:noAutofit/>
-          </a:bodyPr>
-          <a:lstStyle/>
-          <a:p>
-            <a:pPr algn="ctr" defTabSz="932472" fontAlgn="base">
-              <a:lnSpc>
-                <a:spcPct val="90000"/>
-              </a:lnSpc>
-              <a:spcBef>
-                <a:spcPct val="0"/>
-              </a:spcBef>
-              <a:spcAft>
-                <a:spcPct val="0"/>
-              </a:spcAft>
-            </a:pPr>
-            <a:r>
-              <a:rPr lang="en-US" sz="1400" b="1" dirty="0">
-                <a:solidFill>
-                  <a:schemeClr val="bg1"/>
-                </a:solidFill>
-                <a:latin typeface="Lucida Console" panose="020B0609040504020204" pitchFamily="49" charset="0"/>
-                <a:ea typeface="Segoe UI" pitchFamily="34" charset="0"/>
-                <a:cs typeface="Segoe UI" pitchFamily="34" charset="0"/>
-              </a:rPr>
-              <a:t>staging workspace</a:t>
-            </a:r>
-          </a:p>
-        </p:txBody>
-      </p:sp>
-      <p:pic>
-        <p:nvPicPr>
-          <p:cNvPr id="3" name="Picture 2">
-            <a:extLst>
-              <a:ext uri="{FF2B5EF4-FFF2-40B4-BE49-F238E27FC236}">
-                <a16:creationId xmlns:a16="http://schemas.microsoft.com/office/drawing/2014/main" id="{4EE35A62-78C7-D1B4-29EB-5407BDB83C00}"/>
-              </a:ext>
-            </a:extLst>
-          </p:cNvPr>
-          <p:cNvPicPr>
-            <a:picLocks noChangeAspect="1"/>
-          </p:cNvPicPr>
-          <p:nvPr/>
-        </p:nvPicPr>
-        <p:blipFill>
-          <a:blip r:embed="rId2"/>
-          <a:srcRect t="23474"/>
-          <a:stretch>
-            <a:fillRect/>
-          </a:stretch>
-        </p:blipFill>
-        <p:spPr>
-          <a:xfrm>
-            <a:off x="747632" y="1483360"/>
-            <a:ext cx="5125165" cy="3025416"/>
-          </a:xfrm>
-          <a:prstGeom prst="rect">
-            <a:avLst/>
-          </a:prstGeom>
-          <a:ln>
-            <a:solidFill>
-              <a:schemeClr val="bg1"/>
-            </a:solidFill>
-          </a:ln>
-        </p:spPr>
-      </p:pic>
-      <p:sp>
-        <p:nvSpPr>
-          <p:cNvPr id="4" name="Rectangle 3">
-            <a:extLst>
-              <a:ext uri="{FF2B5EF4-FFF2-40B4-BE49-F238E27FC236}">
-                <a16:creationId xmlns:a16="http://schemas.microsoft.com/office/drawing/2014/main" id="{B5FFF870-63D6-8984-6176-A39125C79AB2}"/>
-              </a:ext>
-            </a:extLst>
-          </p:cNvPr>
-          <p:cNvSpPr/>
-          <p:nvPr/>
-        </p:nvSpPr>
-        <p:spPr bwMode="auto">
-          <a:xfrm>
-            <a:off x="676511" y="951589"/>
-            <a:ext cx="5145486" cy="3557187"/>
-          </a:xfrm>
-          <a:prstGeom prst="rect">
-            <a:avLst/>
-          </a:prstGeom>
-          <a:noFill/>
-          <a:ln>
-            <a:solidFill>
-              <a:schemeClr val="tx1"/>
-            </a:solidFill>
-            <a:headEnd type="none" w="med" len="med"/>
-            <a:tailEnd type="none" w="med" len="med"/>
-          </a:ln>
-          <a:effectLst/>
-        </p:spPr>
-        <p:style>
-          <a:lnRef idx="1">
-            <a:schemeClr val="accent2"/>
-          </a:lnRef>
-          <a:fillRef idx="3">
-            <a:schemeClr val="accent2"/>
-          </a:fillRef>
-          <a:effectRef idx="2">
-            <a:schemeClr val="accent2"/>
-          </a:effectRef>
-          <a:fontRef idx="minor">
-            <a:schemeClr val="lt1"/>
-          </a:fontRef>
-        </p:style>
-        <p:txBody>
-          <a:bodyPr rot="0" spcFirstLastPara="0" vertOverflow="overflow" horzOverflow="overflow" vert="horz" wrap="square" lIns="182880" tIns="146304" rIns="182880" bIns="146304" numCol="1" spcCol="0" rtlCol="0" fromWordArt="0" anchor="t" anchorCtr="0" forceAA="0" compatLnSpc="1">
-            <a:prstTxWarp prst="textNoShape">
-              <a:avLst/>
-            </a:prstTxWarp>
-            <a:noAutofit/>
-          </a:bodyPr>
-          <a:lstStyle/>
-          <a:p>
-            <a:pPr algn="ctr" defTabSz="932472" fontAlgn="base">
-              <a:lnSpc>
-                <a:spcPct val="90000"/>
-              </a:lnSpc>
-              <a:spcBef>
-                <a:spcPct val="0"/>
-              </a:spcBef>
-              <a:spcAft>
-                <a:spcPct val="0"/>
-              </a:spcAft>
-            </a:pPr>
-            <a:endParaRPr lang="en-US" sz="2400" dirty="0" err="1">
-              <a:gradFill>
-                <a:gsLst>
-                  <a:gs pos="0">
-                    <a:srgbClr val="FFFFFF"/>
-                  </a:gs>
-                  <a:gs pos="100000">
-                    <a:srgbClr val="FFFFFF"/>
-                  </a:gs>
-                </a:gsLst>
-                <a:lin ang="5400000" scaled="0"/>
-              </a:gradFill>
-              <a:ea typeface="Segoe UI" pitchFamily="34" charset="0"/>
-              <a:cs typeface="Segoe UI" pitchFamily="34" charset="0"/>
-            </a:endParaRPr>
-          </a:p>
-        </p:txBody>
-      </p:sp>
-    </p:spTree>
-    <p:extLst>
-      <p:ext uri="{BB962C8B-B14F-4D97-AF65-F5344CB8AC3E}">
-        <p14:creationId xmlns:p14="http://schemas.microsoft.com/office/powerpoint/2010/main" val="3468166581"/>
-      </p:ext>
-    </p:extLst>
-  </p:cSld>
-  <p:clrMapOvr>
-    <a:masterClrMapping/>
-  </p:clrMapOvr>
-  <p:transition>
-    <p:fade/>
-  </p:transition>
-</p:sld>
-</file>
-
-<file path=ppt/slides/slide50.xml><?xml version="1.0" encoding="utf-8"?>
+<file path=ppt/slides/slide56.xml><?xml version="1.0" encoding="utf-8"?>
 <p:sld xmlns:a="http://schemas.openxmlformats.org/drawingml/2006/main" xmlns:r="http://schemas.openxmlformats.org/officeDocument/2006/relationships" xmlns:p="http://schemas.openxmlformats.org/presentationml/2006/main">
   <p:cSld>
     <p:spTree>
@@ -31670,7 +34041,7 @@
 </p:sld>
 </file>
 
-<file path=ppt/slides/slide51.xml><?xml version="1.0" encoding="utf-8"?>
+<file path=ppt/slides/slide57.xml><?xml version="1.0" encoding="utf-8"?>
 <p:sld xmlns:a="http://schemas.openxmlformats.org/drawingml/2006/main" xmlns:r="http://schemas.openxmlformats.org/officeDocument/2006/relationships" xmlns:p="http://schemas.openxmlformats.org/presentationml/2006/main">
   <p:cSld>
     <p:spTree>
@@ -32219,7 +34590,7 @@
 </p:sld>
 </file>
 
-<file path=ppt/slides/slide52.xml><?xml version="1.0" encoding="utf-8"?>
+<file path=ppt/slides/slide58.xml><?xml version="1.0" encoding="utf-8"?>
 <p:sld xmlns:a="http://schemas.openxmlformats.org/drawingml/2006/main" xmlns:r="http://schemas.openxmlformats.org/officeDocument/2006/relationships" xmlns:p="http://schemas.openxmlformats.org/presentationml/2006/main">
   <p:cSld>
     <p:spTree>
@@ -32288,7 +34659,7 @@
 </p:sld>
 </file>
 
-<file path=ppt/slides/slide53.xml><?xml version="1.0" encoding="utf-8"?>
+<file path=ppt/slides/slide59.xml><?xml version="1.0" encoding="utf-8"?>
 <p:sld xmlns:a="http://schemas.openxmlformats.org/drawingml/2006/main" xmlns:r="http://schemas.openxmlformats.org/officeDocument/2006/relationships" xmlns:p="http://schemas.openxmlformats.org/presentationml/2006/main">
   <p:cSld>
     <p:spTree>
@@ -33571,7 +35942,758 @@
 </p:sld>
 </file>
 
-<file path=ppt/slides/slide54.xml><?xml version="1.0" encoding="utf-8"?>
+<file path=ppt/slides/slide6.xml><?xml version="1.0" encoding="utf-8"?>
+<p:sld xmlns:a="http://schemas.openxmlformats.org/drawingml/2006/main" xmlns:r="http://schemas.openxmlformats.org/officeDocument/2006/relationships" xmlns:p="http://schemas.openxmlformats.org/presentationml/2006/main">
+  <p:cSld>
+    <p:spTree>
+      <p:nvGrpSpPr>
+        <p:cNvPr id="1" name=""/>
+        <p:cNvGrpSpPr/>
+        <p:nvPr/>
+      </p:nvGrpSpPr>
+      <p:grpSpPr>
+        <a:xfrm>
+          <a:off x="0" y="0"/>
+          <a:ext cx="0" cy="0"/>
+          <a:chOff x="0" y="0"/>
+          <a:chExt cx="0" cy="0"/>
+        </a:xfrm>
+      </p:grpSpPr>
+      <p:grpSp>
+        <p:nvGrpSpPr>
+          <p:cNvPr id="27" name="Group 26">
+            <a:extLst>
+              <a:ext uri="{FF2B5EF4-FFF2-40B4-BE49-F238E27FC236}">
+                <a16:creationId xmlns:a16="http://schemas.microsoft.com/office/drawing/2014/main" id="{164F52B3-3A76-0930-C427-C3E8952DF810}"/>
+              </a:ext>
+            </a:extLst>
+          </p:cNvPr>
+          <p:cNvGrpSpPr/>
+          <p:nvPr/>
+        </p:nvGrpSpPr>
+        <p:grpSpPr>
+          <a:xfrm>
+            <a:off x="405816" y="578706"/>
+            <a:ext cx="10252024" cy="2444545"/>
+            <a:chOff x="101016" y="771746"/>
+            <a:chExt cx="11847144" cy="2824894"/>
+          </a:xfrm>
+        </p:grpSpPr>
+        <p:sp>
+          <p:nvSpPr>
+            <p:cNvPr id="2" name="Rectangle 1">
+              <a:extLst>
+                <a:ext uri="{FF2B5EF4-FFF2-40B4-BE49-F238E27FC236}">
+                  <a16:creationId xmlns:a16="http://schemas.microsoft.com/office/drawing/2014/main" id="{079A6CB7-1AA1-EF3C-8DBB-04F18D20A525}"/>
+                </a:ext>
+              </a:extLst>
+            </p:cNvPr>
+            <p:cNvSpPr/>
+            <p:nvPr/>
+          </p:nvSpPr>
+          <p:spPr bwMode="auto">
+            <a:xfrm>
+              <a:off x="101016" y="771746"/>
+              <a:ext cx="11847144" cy="2824894"/>
+            </a:xfrm>
+            <a:prstGeom prst="rect">
+              <a:avLst/>
+            </a:prstGeom>
+            <a:solidFill>
+              <a:schemeClr val="bg1">
+                <a:lumMod val="85000"/>
+              </a:schemeClr>
+            </a:solidFill>
+            <a:ln>
+              <a:solidFill>
+                <a:schemeClr val="tx1"/>
+              </a:solidFill>
+              <a:headEnd type="none" w="med" len="med"/>
+              <a:tailEnd type="none" w="med" len="med"/>
+            </a:ln>
+            <a:effectLst/>
+          </p:spPr>
+          <p:style>
+            <a:lnRef idx="1">
+              <a:schemeClr val="accent2"/>
+            </a:lnRef>
+            <a:fillRef idx="3">
+              <a:schemeClr val="accent2"/>
+            </a:fillRef>
+            <a:effectRef idx="2">
+              <a:schemeClr val="accent2"/>
+            </a:effectRef>
+            <a:fontRef idx="minor">
+              <a:schemeClr val="lt1"/>
+            </a:fontRef>
+          </p:style>
+          <p:txBody>
+            <a:bodyPr rot="0" spcFirstLastPara="0" vertOverflow="overflow" horzOverflow="overflow" vert="horz" wrap="square" lIns="0" tIns="0" rIns="0" bIns="0" numCol="1" spcCol="0" rtlCol="0" fromWordArt="0" anchor="ctr" anchorCtr="0" forceAA="0" compatLnSpc="1">
+              <a:prstTxWarp prst="textNoShape">
+                <a:avLst/>
+              </a:prstTxWarp>
+              <a:noAutofit/>
+            </a:bodyPr>
+            <a:lstStyle/>
+            <a:p>
+              <a:pPr algn="ctr" defTabSz="932472" fontAlgn="base">
+                <a:lnSpc>
+                  <a:spcPct val="90000"/>
+                </a:lnSpc>
+                <a:spcBef>
+                  <a:spcPct val="0"/>
+                </a:spcBef>
+                <a:spcAft>
+                  <a:spcPct val="0"/>
+                </a:spcAft>
+              </a:pPr>
+              <a:endParaRPr lang="en-US" sz="1200" b="1" dirty="0">
+                <a:gradFill>
+                  <a:gsLst>
+                    <a:gs pos="0">
+                      <a:srgbClr val="FFFFFF"/>
+                    </a:gs>
+                    <a:gs pos="100000">
+                      <a:srgbClr val="FFFFFF"/>
+                    </a:gs>
+                  </a:gsLst>
+                  <a:lin ang="5400000" scaled="0"/>
+                </a:gradFill>
+                <a:latin typeface="Lucida Console" panose="020B0609040504020204" pitchFamily="49" charset="0"/>
+                <a:ea typeface="Segoe UI" pitchFamily="34" charset="0"/>
+                <a:cs typeface="Segoe UI" pitchFamily="34" charset="0"/>
+              </a:endParaRPr>
+            </a:p>
+          </p:txBody>
+        </p:sp>
+        <p:sp>
+          <p:nvSpPr>
+            <p:cNvPr id="6" name="Arrow: Right 5">
+              <a:extLst>
+                <a:ext uri="{FF2B5EF4-FFF2-40B4-BE49-F238E27FC236}">
+                  <a16:creationId xmlns:a16="http://schemas.microsoft.com/office/drawing/2014/main" id="{4318084D-0D67-9F5C-7610-34F30F7E98B9}"/>
+                </a:ext>
+              </a:extLst>
+            </p:cNvPr>
+            <p:cNvSpPr/>
+            <p:nvPr/>
+          </p:nvSpPr>
+          <p:spPr bwMode="auto">
+            <a:xfrm>
+              <a:off x="3587955" y="1889828"/>
+              <a:ext cx="752617" cy="563590"/>
+            </a:xfrm>
+            <a:prstGeom prst="rightArrow">
+              <a:avLst>
+                <a:gd name="adj1" fmla="val 61383"/>
+                <a:gd name="adj2" fmla="val 50000"/>
+              </a:avLst>
+            </a:prstGeom>
+            <a:solidFill>
+              <a:srgbClr val="C00000"/>
+            </a:solidFill>
+            <a:ln>
+              <a:noFill/>
+              <a:headEnd type="none" w="med" len="med"/>
+              <a:tailEnd type="none" w="med" len="med"/>
+            </a:ln>
+            <a:effectLst/>
+          </p:spPr>
+          <p:style>
+            <a:lnRef idx="1">
+              <a:schemeClr val="accent2"/>
+            </a:lnRef>
+            <a:fillRef idx="3">
+              <a:schemeClr val="accent2"/>
+            </a:fillRef>
+            <a:effectRef idx="2">
+              <a:schemeClr val="accent2"/>
+            </a:effectRef>
+            <a:fontRef idx="minor">
+              <a:schemeClr val="lt1"/>
+            </a:fontRef>
+          </p:style>
+          <p:txBody>
+            <a:bodyPr rot="0" spcFirstLastPara="0" vertOverflow="overflow" horzOverflow="overflow" vert="horz" wrap="square" lIns="0" tIns="0" rIns="0" bIns="0" numCol="1" spcCol="0" rtlCol="0" fromWordArt="0" anchor="ctr" anchorCtr="0" forceAA="0" compatLnSpc="1">
+              <a:prstTxWarp prst="textNoShape">
+                <a:avLst/>
+              </a:prstTxWarp>
+              <a:noAutofit/>
+            </a:bodyPr>
+            <a:lstStyle/>
+            <a:p>
+              <a:pPr algn="ctr" defTabSz="932472" fontAlgn="base">
+                <a:lnSpc>
+                  <a:spcPct val="90000"/>
+                </a:lnSpc>
+                <a:spcBef>
+                  <a:spcPct val="0"/>
+                </a:spcBef>
+                <a:spcAft>
+                  <a:spcPct val="0"/>
+                </a:spcAft>
+              </a:pPr>
+              <a:endParaRPr lang="en-US" sz="1200" b="1" dirty="0">
+                <a:gradFill>
+                  <a:gsLst>
+                    <a:gs pos="0">
+                      <a:srgbClr val="FFFFFF"/>
+                    </a:gs>
+                    <a:gs pos="100000">
+                      <a:srgbClr val="FFFFFF"/>
+                    </a:gs>
+                  </a:gsLst>
+                  <a:lin ang="5400000" scaled="0"/>
+                </a:gradFill>
+                <a:latin typeface="Lucida Console" panose="020B0609040504020204" pitchFamily="49" charset="0"/>
+                <a:ea typeface="Segoe UI" pitchFamily="34" charset="0"/>
+                <a:cs typeface="Segoe UI" pitchFamily="34" charset="0"/>
+              </a:endParaRPr>
+            </a:p>
+          </p:txBody>
+        </p:sp>
+        <p:grpSp>
+          <p:nvGrpSpPr>
+            <p:cNvPr id="21" name="Group 20">
+              <a:extLst>
+                <a:ext uri="{FF2B5EF4-FFF2-40B4-BE49-F238E27FC236}">
+                  <a16:creationId xmlns:a16="http://schemas.microsoft.com/office/drawing/2014/main" id="{8141D90F-0997-31C5-CB00-C3FD03E40945}"/>
+                </a:ext>
+              </a:extLst>
+            </p:cNvPr>
+            <p:cNvGrpSpPr/>
+            <p:nvPr/>
+          </p:nvGrpSpPr>
+          <p:grpSpPr>
+            <a:xfrm>
+              <a:off x="254001" y="897388"/>
+              <a:ext cx="3261359" cy="2548470"/>
+              <a:chOff x="254001" y="824650"/>
+              <a:chExt cx="3261359" cy="2548470"/>
+            </a:xfrm>
+          </p:grpSpPr>
+          <p:sp>
+            <p:nvSpPr>
+              <p:cNvPr id="4" name="Rectangle 3">
+                <a:extLst>
+                  <a:ext uri="{FF2B5EF4-FFF2-40B4-BE49-F238E27FC236}">
+                    <a16:creationId xmlns:a16="http://schemas.microsoft.com/office/drawing/2014/main" id="{B2026257-22E9-C796-4ADD-3D7AFC0A1916}"/>
+                  </a:ext>
+                </a:extLst>
+              </p:cNvPr>
+              <p:cNvSpPr/>
+              <p:nvPr/>
+            </p:nvSpPr>
+            <p:spPr bwMode="auto">
+              <a:xfrm>
+                <a:off x="254001" y="824650"/>
+                <a:ext cx="3261359" cy="2548470"/>
+              </a:xfrm>
+              <a:prstGeom prst="rect">
+                <a:avLst/>
+              </a:prstGeom>
+              <a:solidFill>
+                <a:schemeClr val="accent4">
+                  <a:lumMod val="75000"/>
+                </a:schemeClr>
+              </a:solidFill>
+              <a:ln>
+                <a:noFill/>
+                <a:headEnd type="none" w="med" len="med"/>
+                <a:tailEnd type="none" w="med" len="med"/>
+              </a:ln>
+              <a:effectLst/>
+            </p:spPr>
+            <p:style>
+              <a:lnRef idx="1">
+                <a:schemeClr val="accent2"/>
+              </a:lnRef>
+              <a:fillRef idx="3">
+                <a:schemeClr val="accent2"/>
+              </a:fillRef>
+              <a:effectRef idx="2">
+                <a:schemeClr val="accent2"/>
+              </a:effectRef>
+              <a:fontRef idx="minor">
+                <a:schemeClr val="lt1"/>
+              </a:fontRef>
+            </p:style>
+            <p:txBody>
+              <a:bodyPr rot="0" spcFirstLastPara="0" vertOverflow="overflow" horzOverflow="overflow" vert="horz" wrap="square" lIns="0" tIns="91440" rIns="0" bIns="0" numCol="1" spcCol="0" rtlCol="0" fromWordArt="0" anchor="t" anchorCtr="0" forceAA="0" compatLnSpc="1">
+                <a:prstTxWarp prst="textNoShape">
+                  <a:avLst/>
+                </a:prstTxWarp>
+                <a:noAutofit/>
+              </a:bodyPr>
+              <a:lstStyle/>
+              <a:p>
+                <a:pPr algn="ctr" defTabSz="932472" fontAlgn="base">
+                  <a:lnSpc>
+                    <a:spcPct val="90000"/>
+                  </a:lnSpc>
+                  <a:spcBef>
+                    <a:spcPct val="0"/>
+                  </a:spcBef>
+                  <a:spcAft>
+                    <a:spcPct val="0"/>
+                  </a:spcAft>
+                </a:pPr>
+                <a:r>
+                  <a:rPr lang="en-US" sz="1200" b="1" dirty="0">
+                    <a:gradFill>
+                      <a:gsLst>
+                        <a:gs pos="0">
+                          <a:srgbClr val="FFFFFF"/>
+                        </a:gs>
+                        <a:gs pos="100000">
+                          <a:srgbClr val="FFFFFF"/>
+                        </a:gs>
+                      </a:gsLst>
+                      <a:lin ang="5400000" scaled="0"/>
+                    </a:gradFill>
+                    <a:latin typeface="Lucida Console" panose="020B0609040504020204" pitchFamily="49" charset="0"/>
+                    <a:ea typeface="Segoe UI" pitchFamily="34" charset="0"/>
+                    <a:cs typeface="Segoe UI" pitchFamily="34" charset="0"/>
+                  </a:rPr>
+                  <a:t>dev environment</a:t>
+                </a:r>
+              </a:p>
+            </p:txBody>
+          </p:sp>
+          <p:pic>
+            <p:nvPicPr>
+              <p:cNvPr id="13" name="Picture 12">
+                <a:extLst>
+                  <a:ext uri="{FF2B5EF4-FFF2-40B4-BE49-F238E27FC236}">
+                    <a16:creationId xmlns:a16="http://schemas.microsoft.com/office/drawing/2014/main" id="{D4873E3F-3C1A-6F6F-0930-3E5FCE14E809}"/>
+                  </a:ext>
+                </a:extLst>
+              </p:cNvPr>
+              <p:cNvPicPr>
+                <a:picLocks noChangeAspect="1"/>
+              </p:cNvPicPr>
+              <p:nvPr/>
+            </p:nvPicPr>
+            <p:blipFill>
+              <a:blip r:embed="rId2"/>
+              <a:stretch>
+                <a:fillRect/>
+              </a:stretch>
+            </p:blipFill>
+            <p:spPr>
+              <a:xfrm>
+                <a:off x="374315" y="1158076"/>
+                <a:ext cx="3030889" cy="2114574"/>
+              </a:xfrm>
+              <a:prstGeom prst="rect">
+                <a:avLst/>
+              </a:prstGeom>
+              <a:ln>
+                <a:solidFill>
+                  <a:schemeClr val="tx1">
+                    <a:lumMod val="75000"/>
+                  </a:schemeClr>
+                </a:solidFill>
+              </a:ln>
+            </p:spPr>
+          </p:pic>
+        </p:grpSp>
+        <p:grpSp>
+          <p:nvGrpSpPr>
+            <p:cNvPr id="20" name="Group 19">
+              <a:extLst>
+                <a:ext uri="{FF2B5EF4-FFF2-40B4-BE49-F238E27FC236}">
+                  <a16:creationId xmlns:a16="http://schemas.microsoft.com/office/drawing/2014/main" id="{596C10B5-CF4F-86BA-B6A3-7649EA8D5D1C}"/>
+                </a:ext>
+              </a:extLst>
+            </p:cNvPr>
+            <p:cNvGrpSpPr/>
+            <p:nvPr/>
+          </p:nvGrpSpPr>
+          <p:grpSpPr>
+            <a:xfrm>
+              <a:off x="4413167" y="897388"/>
+              <a:ext cx="3261359" cy="2548470"/>
+              <a:chOff x="4587557" y="3272650"/>
+              <a:chExt cx="3261359" cy="2548470"/>
+            </a:xfrm>
+          </p:grpSpPr>
+          <p:sp>
+            <p:nvSpPr>
+              <p:cNvPr id="18" name="Rectangle 17">
+                <a:extLst>
+                  <a:ext uri="{FF2B5EF4-FFF2-40B4-BE49-F238E27FC236}">
+                    <a16:creationId xmlns:a16="http://schemas.microsoft.com/office/drawing/2014/main" id="{828E7C84-7117-A395-D81D-663F93D1FC7B}"/>
+                  </a:ext>
+                </a:extLst>
+              </p:cNvPr>
+              <p:cNvSpPr/>
+              <p:nvPr/>
+            </p:nvSpPr>
+            <p:spPr bwMode="auto">
+              <a:xfrm>
+                <a:off x="4587557" y="3272650"/>
+                <a:ext cx="3261359" cy="2548470"/>
+              </a:xfrm>
+              <a:prstGeom prst="rect">
+                <a:avLst/>
+              </a:prstGeom>
+              <a:solidFill>
+                <a:schemeClr val="accent2">
+                  <a:lumMod val="50000"/>
+                </a:schemeClr>
+              </a:solidFill>
+              <a:ln>
+                <a:noFill/>
+                <a:headEnd type="none" w="med" len="med"/>
+                <a:tailEnd type="none" w="med" len="med"/>
+              </a:ln>
+              <a:effectLst/>
+            </p:spPr>
+            <p:style>
+              <a:lnRef idx="1">
+                <a:schemeClr val="accent2"/>
+              </a:lnRef>
+              <a:fillRef idx="3">
+                <a:schemeClr val="accent2"/>
+              </a:fillRef>
+              <a:effectRef idx="2">
+                <a:schemeClr val="accent2"/>
+              </a:effectRef>
+              <a:fontRef idx="minor">
+                <a:schemeClr val="lt1"/>
+              </a:fontRef>
+            </p:style>
+            <p:txBody>
+              <a:bodyPr rot="0" spcFirstLastPara="0" vertOverflow="overflow" horzOverflow="overflow" vert="horz" wrap="square" lIns="0" tIns="91440" rIns="0" bIns="0" numCol="1" spcCol="0" rtlCol="0" fromWordArt="0" anchor="t" anchorCtr="0" forceAA="0" compatLnSpc="1">
+                <a:prstTxWarp prst="textNoShape">
+                  <a:avLst/>
+                </a:prstTxWarp>
+                <a:noAutofit/>
+              </a:bodyPr>
+              <a:lstStyle/>
+              <a:p>
+                <a:pPr algn="ctr" defTabSz="932472" fontAlgn="base">
+                  <a:lnSpc>
+                    <a:spcPct val="90000"/>
+                  </a:lnSpc>
+                  <a:spcBef>
+                    <a:spcPct val="0"/>
+                  </a:spcBef>
+                  <a:spcAft>
+                    <a:spcPct val="0"/>
+                  </a:spcAft>
+                </a:pPr>
+                <a:r>
+                  <a:rPr lang="en-US" sz="1200" b="1" dirty="0">
+                    <a:gradFill>
+                      <a:gsLst>
+                        <a:gs pos="0">
+                          <a:srgbClr val="FFFFFF"/>
+                        </a:gs>
+                        <a:gs pos="100000">
+                          <a:srgbClr val="FFFFFF"/>
+                        </a:gs>
+                      </a:gsLst>
+                      <a:lin ang="5400000" scaled="0"/>
+                    </a:gradFill>
+                    <a:latin typeface="Lucida Console" panose="020B0609040504020204" pitchFamily="49" charset="0"/>
+                    <a:ea typeface="Segoe UI" pitchFamily="34" charset="0"/>
+                    <a:cs typeface="Segoe UI" pitchFamily="34" charset="0"/>
+                  </a:rPr>
+                  <a:t>test environment</a:t>
+                </a:r>
+              </a:p>
+            </p:txBody>
+          </p:sp>
+          <p:pic>
+            <p:nvPicPr>
+              <p:cNvPr id="19" name="Picture 18">
+                <a:extLst>
+                  <a:ext uri="{FF2B5EF4-FFF2-40B4-BE49-F238E27FC236}">
+                    <a16:creationId xmlns:a16="http://schemas.microsoft.com/office/drawing/2014/main" id="{2A9C3CAE-3007-917A-0A44-EA52141E1BF0}"/>
+                  </a:ext>
+                </a:extLst>
+              </p:cNvPr>
+              <p:cNvPicPr>
+                <a:picLocks noChangeAspect="1"/>
+              </p:cNvPicPr>
+              <p:nvPr/>
+            </p:nvPicPr>
+            <p:blipFill>
+              <a:blip r:embed="rId2"/>
+              <a:stretch>
+                <a:fillRect/>
+              </a:stretch>
+            </p:blipFill>
+            <p:spPr>
+              <a:xfrm>
+                <a:off x="4707871" y="3606076"/>
+                <a:ext cx="3030889" cy="2114574"/>
+              </a:xfrm>
+              <a:prstGeom prst="rect">
+                <a:avLst/>
+              </a:prstGeom>
+              <a:ln>
+                <a:solidFill>
+                  <a:schemeClr val="tx1">
+                    <a:lumMod val="75000"/>
+                  </a:schemeClr>
+                </a:solidFill>
+              </a:ln>
+            </p:spPr>
+          </p:pic>
+        </p:grpSp>
+        <p:grpSp>
+          <p:nvGrpSpPr>
+            <p:cNvPr id="22" name="Group 21">
+              <a:extLst>
+                <a:ext uri="{FF2B5EF4-FFF2-40B4-BE49-F238E27FC236}">
+                  <a16:creationId xmlns:a16="http://schemas.microsoft.com/office/drawing/2014/main" id="{C302D7FC-C25D-BEC1-A5BC-941CF189D637}"/>
+                </a:ext>
+              </a:extLst>
+            </p:cNvPr>
+            <p:cNvGrpSpPr/>
+            <p:nvPr/>
+          </p:nvGrpSpPr>
+          <p:grpSpPr>
+            <a:xfrm>
+              <a:off x="8572335" y="897388"/>
+              <a:ext cx="3261359" cy="2548470"/>
+              <a:chOff x="4587557" y="3272650"/>
+              <a:chExt cx="3261359" cy="2548470"/>
+            </a:xfrm>
+          </p:grpSpPr>
+          <p:sp>
+            <p:nvSpPr>
+              <p:cNvPr id="23" name="Rectangle 22">
+                <a:extLst>
+                  <a:ext uri="{FF2B5EF4-FFF2-40B4-BE49-F238E27FC236}">
+                    <a16:creationId xmlns:a16="http://schemas.microsoft.com/office/drawing/2014/main" id="{40295818-7845-1260-6965-B370D4DAF6C1}"/>
+                  </a:ext>
+                </a:extLst>
+              </p:cNvPr>
+              <p:cNvSpPr/>
+              <p:nvPr/>
+            </p:nvSpPr>
+            <p:spPr bwMode="auto">
+              <a:xfrm>
+                <a:off x="4587557" y="3272650"/>
+                <a:ext cx="3261359" cy="2548470"/>
+              </a:xfrm>
+              <a:prstGeom prst="rect">
+                <a:avLst/>
+              </a:prstGeom>
+              <a:solidFill>
+                <a:schemeClr val="accent1">
+                  <a:lumMod val="75000"/>
+                </a:schemeClr>
+              </a:solidFill>
+              <a:ln>
+                <a:noFill/>
+                <a:headEnd type="none" w="med" len="med"/>
+                <a:tailEnd type="none" w="med" len="med"/>
+              </a:ln>
+              <a:effectLst/>
+            </p:spPr>
+            <p:style>
+              <a:lnRef idx="1">
+                <a:schemeClr val="accent2"/>
+              </a:lnRef>
+              <a:fillRef idx="3">
+                <a:schemeClr val="accent2"/>
+              </a:fillRef>
+              <a:effectRef idx="2">
+                <a:schemeClr val="accent2"/>
+              </a:effectRef>
+              <a:fontRef idx="minor">
+                <a:schemeClr val="lt1"/>
+              </a:fontRef>
+            </p:style>
+            <p:txBody>
+              <a:bodyPr rot="0" spcFirstLastPara="0" vertOverflow="overflow" horzOverflow="overflow" vert="horz" wrap="square" lIns="0" tIns="91440" rIns="0" bIns="0" numCol="1" spcCol="0" rtlCol="0" fromWordArt="0" anchor="t" anchorCtr="0" forceAA="0" compatLnSpc="1">
+                <a:prstTxWarp prst="textNoShape">
+                  <a:avLst/>
+                </a:prstTxWarp>
+                <a:noAutofit/>
+              </a:bodyPr>
+              <a:lstStyle/>
+              <a:p>
+                <a:pPr algn="ctr" defTabSz="932472" fontAlgn="base">
+                  <a:lnSpc>
+                    <a:spcPct val="90000"/>
+                  </a:lnSpc>
+                  <a:spcBef>
+                    <a:spcPct val="0"/>
+                  </a:spcBef>
+                  <a:spcAft>
+                    <a:spcPct val="0"/>
+                  </a:spcAft>
+                </a:pPr>
+                <a:r>
+                  <a:rPr lang="en-US" sz="1200" b="1" dirty="0">
+                    <a:gradFill>
+                      <a:gsLst>
+                        <a:gs pos="0">
+                          <a:srgbClr val="FFFFFF"/>
+                        </a:gs>
+                        <a:gs pos="100000">
+                          <a:srgbClr val="FFFFFF"/>
+                        </a:gs>
+                      </a:gsLst>
+                      <a:lin ang="5400000" scaled="0"/>
+                    </a:gradFill>
+                    <a:latin typeface="Lucida Console" panose="020B0609040504020204" pitchFamily="49" charset="0"/>
+                    <a:ea typeface="Segoe UI" pitchFamily="34" charset="0"/>
+                    <a:cs typeface="Segoe UI" pitchFamily="34" charset="0"/>
+                  </a:rPr>
+                  <a:t>prod environment</a:t>
+                </a:r>
+              </a:p>
+            </p:txBody>
+          </p:sp>
+          <p:pic>
+            <p:nvPicPr>
+              <p:cNvPr id="24" name="Picture 23">
+                <a:extLst>
+                  <a:ext uri="{FF2B5EF4-FFF2-40B4-BE49-F238E27FC236}">
+                    <a16:creationId xmlns:a16="http://schemas.microsoft.com/office/drawing/2014/main" id="{59DAAD2B-DF9D-F879-7A69-56460D713AAA}"/>
+                  </a:ext>
+                </a:extLst>
+              </p:cNvPr>
+              <p:cNvPicPr>
+                <a:picLocks noChangeAspect="1"/>
+              </p:cNvPicPr>
+              <p:nvPr/>
+            </p:nvPicPr>
+            <p:blipFill>
+              <a:blip r:embed="rId2"/>
+              <a:stretch>
+                <a:fillRect/>
+              </a:stretch>
+            </p:blipFill>
+            <p:spPr>
+              <a:xfrm>
+                <a:off x="4707871" y="3606076"/>
+                <a:ext cx="3030889" cy="2114574"/>
+              </a:xfrm>
+              <a:prstGeom prst="rect">
+                <a:avLst/>
+              </a:prstGeom>
+              <a:ln>
+                <a:solidFill>
+                  <a:schemeClr val="tx1">
+                    <a:lumMod val="75000"/>
+                  </a:schemeClr>
+                </a:solidFill>
+              </a:ln>
+            </p:spPr>
+          </p:pic>
+        </p:grpSp>
+        <p:sp>
+          <p:nvSpPr>
+            <p:cNvPr id="26" name="Arrow: Right 25">
+              <a:extLst>
+                <a:ext uri="{FF2B5EF4-FFF2-40B4-BE49-F238E27FC236}">
+                  <a16:creationId xmlns:a16="http://schemas.microsoft.com/office/drawing/2014/main" id="{05531E5D-497F-0D54-827D-5927866DCABE}"/>
+                </a:ext>
+              </a:extLst>
+            </p:cNvPr>
+            <p:cNvSpPr/>
+            <p:nvPr/>
+          </p:nvSpPr>
+          <p:spPr bwMode="auto">
+            <a:xfrm>
+              <a:off x="7747121" y="1889828"/>
+              <a:ext cx="752617" cy="563590"/>
+            </a:xfrm>
+            <a:prstGeom prst="rightArrow">
+              <a:avLst>
+                <a:gd name="adj1" fmla="val 61383"/>
+                <a:gd name="adj2" fmla="val 50000"/>
+              </a:avLst>
+            </a:prstGeom>
+            <a:solidFill>
+              <a:srgbClr val="C00000"/>
+            </a:solidFill>
+            <a:ln>
+              <a:noFill/>
+              <a:headEnd type="none" w="med" len="med"/>
+              <a:tailEnd type="none" w="med" len="med"/>
+            </a:ln>
+            <a:effectLst/>
+          </p:spPr>
+          <p:style>
+            <a:lnRef idx="1">
+              <a:schemeClr val="accent2"/>
+            </a:lnRef>
+            <a:fillRef idx="3">
+              <a:schemeClr val="accent2"/>
+            </a:fillRef>
+            <a:effectRef idx="2">
+              <a:schemeClr val="accent2"/>
+            </a:effectRef>
+            <a:fontRef idx="minor">
+              <a:schemeClr val="lt1"/>
+            </a:fontRef>
+          </p:style>
+          <p:txBody>
+            <a:bodyPr rot="0" spcFirstLastPara="0" vertOverflow="overflow" horzOverflow="overflow" vert="horz" wrap="square" lIns="0" tIns="0" rIns="0" bIns="0" numCol="1" spcCol="0" rtlCol="0" fromWordArt="0" anchor="ctr" anchorCtr="0" forceAA="0" compatLnSpc="1">
+              <a:prstTxWarp prst="textNoShape">
+                <a:avLst/>
+              </a:prstTxWarp>
+              <a:noAutofit/>
+            </a:bodyPr>
+            <a:lstStyle/>
+            <a:p>
+              <a:pPr algn="ctr" defTabSz="932472" fontAlgn="base">
+                <a:lnSpc>
+                  <a:spcPct val="90000"/>
+                </a:lnSpc>
+                <a:spcBef>
+                  <a:spcPct val="0"/>
+                </a:spcBef>
+                <a:spcAft>
+                  <a:spcPct val="0"/>
+                </a:spcAft>
+              </a:pPr>
+              <a:endParaRPr lang="en-US" sz="1200" b="1" dirty="0">
+                <a:gradFill>
+                  <a:gsLst>
+                    <a:gs pos="0">
+                      <a:srgbClr val="FFFFFF"/>
+                    </a:gs>
+                    <a:gs pos="100000">
+                      <a:srgbClr val="FFFFFF"/>
+                    </a:gs>
+                  </a:gsLst>
+                  <a:lin ang="5400000" scaled="0"/>
+                </a:gradFill>
+                <a:latin typeface="Lucida Console" panose="020B0609040504020204" pitchFamily="49" charset="0"/>
+                <a:ea typeface="Segoe UI" pitchFamily="34" charset="0"/>
+                <a:cs typeface="Segoe UI" pitchFamily="34" charset="0"/>
+              </a:endParaRPr>
+            </a:p>
+          </p:txBody>
+        </p:sp>
+      </p:grpSp>
+    </p:spTree>
+    <p:extLst>
+      <p:ext uri="{BB962C8B-B14F-4D97-AF65-F5344CB8AC3E}">
+        <p14:creationId xmlns:p14="http://schemas.microsoft.com/office/powerpoint/2010/main" val="665866891"/>
+      </p:ext>
+    </p:extLst>
+  </p:cSld>
+  <p:clrMapOvr>
+    <a:masterClrMapping/>
+  </p:clrMapOvr>
+  <p:transition>
+    <p:fade/>
+  </p:transition>
+</p:sld>
+</file>
+
+<file path=ppt/slides/slide60.xml><?xml version="1.0" encoding="utf-8"?>
 <p:sld xmlns:a="http://schemas.openxmlformats.org/drawingml/2006/main" xmlns:r="http://schemas.openxmlformats.org/officeDocument/2006/relationships" xmlns:p="http://schemas.openxmlformats.org/presentationml/2006/main">
   <p:cSld>
     <p:spTree>
@@ -34436,7 +37558,7 @@
 </p:sld>
 </file>
 
-<file path=ppt/slides/slide55.xml><?xml version="1.0" encoding="utf-8"?>
+<file path=ppt/slides/slide61.xml><?xml version="1.0" encoding="utf-8"?>
 <p:sld xmlns:a="http://schemas.openxmlformats.org/drawingml/2006/main" xmlns:r="http://schemas.openxmlformats.org/officeDocument/2006/relationships" xmlns:p="http://schemas.openxmlformats.org/presentationml/2006/main">
   <p:cSld>
     <p:spTree>
@@ -35338,7 +38460,7 @@
 </p:sld>
 </file>
 
-<file path=ppt/slides/slide56.xml><?xml version="1.0" encoding="utf-8"?>
+<file path=ppt/slides/slide62.xml><?xml version="1.0" encoding="utf-8"?>
 <p:sld xmlns:a="http://schemas.openxmlformats.org/drawingml/2006/main" xmlns:r="http://schemas.openxmlformats.org/officeDocument/2006/relationships" xmlns:p="http://schemas.openxmlformats.org/presentationml/2006/main">
   <p:cSld>
     <p:spTree>
@@ -35408,7 +38530,7 @@
 </p:sld>
 </file>
 
-<file path=ppt/slides/slide57.xml><?xml version="1.0" encoding="utf-8"?>
+<file path=ppt/slides/slide63.xml><?xml version="1.0" encoding="utf-8"?>
 <p:sld xmlns:a="http://schemas.openxmlformats.org/drawingml/2006/main" xmlns:r="http://schemas.openxmlformats.org/officeDocument/2006/relationships" xmlns:p="http://schemas.openxmlformats.org/presentationml/2006/main">
   <p:cSld>
     <p:spTree>
@@ -35478,7 +38600,7 @@
 </p:sld>
 </file>
 
-<file path=ppt/slides/slide58.xml><?xml version="1.0" encoding="utf-8"?>
+<file path=ppt/slides/slide64.xml><?xml version="1.0" encoding="utf-8"?>
 <p:sld xmlns:a="http://schemas.openxmlformats.org/drawingml/2006/main" xmlns:r="http://schemas.openxmlformats.org/officeDocument/2006/relationships" xmlns:p="http://schemas.openxmlformats.org/presentationml/2006/main">
   <p:cSld>
     <p:spTree>
@@ -37054,7 +40176,7 @@
 </p:sld>
 </file>
 
-<file path=ppt/slides/slide59.xml><?xml version="1.0" encoding="utf-8"?>
+<file path=ppt/slides/slide65.xml><?xml version="1.0" encoding="utf-8"?>
 <p:sld xmlns:a="http://schemas.openxmlformats.org/drawingml/2006/main" xmlns:r="http://schemas.openxmlformats.org/officeDocument/2006/relationships" xmlns:p="http://schemas.openxmlformats.org/presentationml/2006/main">
   <p:cSld>
     <p:spTree>
@@ -37122,758 +40244,7 @@
 </p:sld>
 </file>
 
-<file path=ppt/slides/slide6.xml><?xml version="1.0" encoding="utf-8"?>
-<p:sld xmlns:a="http://schemas.openxmlformats.org/drawingml/2006/main" xmlns:r="http://schemas.openxmlformats.org/officeDocument/2006/relationships" xmlns:p="http://schemas.openxmlformats.org/presentationml/2006/main">
-  <p:cSld>
-    <p:spTree>
-      <p:nvGrpSpPr>
-        <p:cNvPr id="1" name=""/>
-        <p:cNvGrpSpPr/>
-        <p:nvPr/>
-      </p:nvGrpSpPr>
-      <p:grpSpPr>
-        <a:xfrm>
-          <a:off x="0" y="0"/>
-          <a:ext cx="0" cy="0"/>
-          <a:chOff x="0" y="0"/>
-          <a:chExt cx="0" cy="0"/>
-        </a:xfrm>
-      </p:grpSpPr>
-      <p:grpSp>
-        <p:nvGrpSpPr>
-          <p:cNvPr id="27" name="Group 26">
-            <a:extLst>
-              <a:ext uri="{FF2B5EF4-FFF2-40B4-BE49-F238E27FC236}">
-                <a16:creationId xmlns:a16="http://schemas.microsoft.com/office/drawing/2014/main" id="{164F52B3-3A76-0930-C427-C3E8952DF810}"/>
-              </a:ext>
-            </a:extLst>
-          </p:cNvPr>
-          <p:cNvGrpSpPr/>
-          <p:nvPr/>
-        </p:nvGrpSpPr>
-        <p:grpSpPr>
-          <a:xfrm>
-            <a:off x="405816" y="578706"/>
-            <a:ext cx="10252024" cy="2444545"/>
-            <a:chOff x="101016" y="771746"/>
-            <a:chExt cx="11847144" cy="2824894"/>
-          </a:xfrm>
-        </p:grpSpPr>
-        <p:sp>
-          <p:nvSpPr>
-            <p:cNvPr id="2" name="Rectangle 1">
-              <a:extLst>
-                <a:ext uri="{FF2B5EF4-FFF2-40B4-BE49-F238E27FC236}">
-                  <a16:creationId xmlns:a16="http://schemas.microsoft.com/office/drawing/2014/main" id="{079A6CB7-1AA1-EF3C-8DBB-04F18D20A525}"/>
-                </a:ext>
-              </a:extLst>
-            </p:cNvPr>
-            <p:cNvSpPr/>
-            <p:nvPr/>
-          </p:nvSpPr>
-          <p:spPr bwMode="auto">
-            <a:xfrm>
-              <a:off x="101016" y="771746"/>
-              <a:ext cx="11847144" cy="2824894"/>
-            </a:xfrm>
-            <a:prstGeom prst="rect">
-              <a:avLst/>
-            </a:prstGeom>
-            <a:solidFill>
-              <a:schemeClr val="bg1">
-                <a:lumMod val="85000"/>
-              </a:schemeClr>
-            </a:solidFill>
-            <a:ln>
-              <a:solidFill>
-                <a:schemeClr val="tx1"/>
-              </a:solidFill>
-              <a:headEnd type="none" w="med" len="med"/>
-              <a:tailEnd type="none" w="med" len="med"/>
-            </a:ln>
-            <a:effectLst/>
-          </p:spPr>
-          <p:style>
-            <a:lnRef idx="1">
-              <a:schemeClr val="accent2"/>
-            </a:lnRef>
-            <a:fillRef idx="3">
-              <a:schemeClr val="accent2"/>
-            </a:fillRef>
-            <a:effectRef idx="2">
-              <a:schemeClr val="accent2"/>
-            </a:effectRef>
-            <a:fontRef idx="minor">
-              <a:schemeClr val="lt1"/>
-            </a:fontRef>
-          </p:style>
-          <p:txBody>
-            <a:bodyPr rot="0" spcFirstLastPara="0" vertOverflow="overflow" horzOverflow="overflow" vert="horz" wrap="square" lIns="0" tIns="0" rIns="0" bIns="0" numCol="1" spcCol="0" rtlCol="0" fromWordArt="0" anchor="ctr" anchorCtr="0" forceAA="0" compatLnSpc="1">
-              <a:prstTxWarp prst="textNoShape">
-                <a:avLst/>
-              </a:prstTxWarp>
-              <a:noAutofit/>
-            </a:bodyPr>
-            <a:lstStyle/>
-            <a:p>
-              <a:pPr algn="ctr" defTabSz="932472" fontAlgn="base">
-                <a:lnSpc>
-                  <a:spcPct val="90000"/>
-                </a:lnSpc>
-                <a:spcBef>
-                  <a:spcPct val="0"/>
-                </a:spcBef>
-                <a:spcAft>
-                  <a:spcPct val="0"/>
-                </a:spcAft>
-              </a:pPr>
-              <a:endParaRPr lang="en-US" sz="1200" b="1" dirty="0">
-                <a:gradFill>
-                  <a:gsLst>
-                    <a:gs pos="0">
-                      <a:srgbClr val="FFFFFF"/>
-                    </a:gs>
-                    <a:gs pos="100000">
-                      <a:srgbClr val="FFFFFF"/>
-                    </a:gs>
-                  </a:gsLst>
-                  <a:lin ang="5400000" scaled="0"/>
-                </a:gradFill>
-                <a:latin typeface="Lucida Console" panose="020B0609040504020204" pitchFamily="49" charset="0"/>
-                <a:ea typeface="Segoe UI" pitchFamily="34" charset="0"/>
-                <a:cs typeface="Segoe UI" pitchFamily="34" charset="0"/>
-              </a:endParaRPr>
-            </a:p>
-          </p:txBody>
-        </p:sp>
-        <p:sp>
-          <p:nvSpPr>
-            <p:cNvPr id="6" name="Arrow: Right 5">
-              <a:extLst>
-                <a:ext uri="{FF2B5EF4-FFF2-40B4-BE49-F238E27FC236}">
-                  <a16:creationId xmlns:a16="http://schemas.microsoft.com/office/drawing/2014/main" id="{4318084D-0D67-9F5C-7610-34F30F7E98B9}"/>
-                </a:ext>
-              </a:extLst>
-            </p:cNvPr>
-            <p:cNvSpPr/>
-            <p:nvPr/>
-          </p:nvSpPr>
-          <p:spPr bwMode="auto">
-            <a:xfrm>
-              <a:off x="3587955" y="1889828"/>
-              <a:ext cx="752617" cy="563590"/>
-            </a:xfrm>
-            <a:prstGeom prst="rightArrow">
-              <a:avLst>
-                <a:gd name="adj1" fmla="val 61383"/>
-                <a:gd name="adj2" fmla="val 50000"/>
-              </a:avLst>
-            </a:prstGeom>
-            <a:solidFill>
-              <a:srgbClr val="C00000"/>
-            </a:solidFill>
-            <a:ln>
-              <a:noFill/>
-              <a:headEnd type="none" w="med" len="med"/>
-              <a:tailEnd type="none" w="med" len="med"/>
-            </a:ln>
-            <a:effectLst/>
-          </p:spPr>
-          <p:style>
-            <a:lnRef idx="1">
-              <a:schemeClr val="accent2"/>
-            </a:lnRef>
-            <a:fillRef idx="3">
-              <a:schemeClr val="accent2"/>
-            </a:fillRef>
-            <a:effectRef idx="2">
-              <a:schemeClr val="accent2"/>
-            </a:effectRef>
-            <a:fontRef idx="minor">
-              <a:schemeClr val="lt1"/>
-            </a:fontRef>
-          </p:style>
-          <p:txBody>
-            <a:bodyPr rot="0" spcFirstLastPara="0" vertOverflow="overflow" horzOverflow="overflow" vert="horz" wrap="square" lIns="0" tIns="0" rIns="0" bIns="0" numCol="1" spcCol="0" rtlCol="0" fromWordArt="0" anchor="ctr" anchorCtr="0" forceAA="0" compatLnSpc="1">
-              <a:prstTxWarp prst="textNoShape">
-                <a:avLst/>
-              </a:prstTxWarp>
-              <a:noAutofit/>
-            </a:bodyPr>
-            <a:lstStyle/>
-            <a:p>
-              <a:pPr algn="ctr" defTabSz="932472" fontAlgn="base">
-                <a:lnSpc>
-                  <a:spcPct val="90000"/>
-                </a:lnSpc>
-                <a:spcBef>
-                  <a:spcPct val="0"/>
-                </a:spcBef>
-                <a:spcAft>
-                  <a:spcPct val="0"/>
-                </a:spcAft>
-              </a:pPr>
-              <a:endParaRPr lang="en-US" sz="1200" b="1" dirty="0">
-                <a:gradFill>
-                  <a:gsLst>
-                    <a:gs pos="0">
-                      <a:srgbClr val="FFFFFF"/>
-                    </a:gs>
-                    <a:gs pos="100000">
-                      <a:srgbClr val="FFFFFF"/>
-                    </a:gs>
-                  </a:gsLst>
-                  <a:lin ang="5400000" scaled="0"/>
-                </a:gradFill>
-                <a:latin typeface="Lucida Console" panose="020B0609040504020204" pitchFamily="49" charset="0"/>
-                <a:ea typeface="Segoe UI" pitchFamily="34" charset="0"/>
-                <a:cs typeface="Segoe UI" pitchFamily="34" charset="0"/>
-              </a:endParaRPr>
-            </a:p>
-          </p:txBody>
-        </p:sp>
-        <p:grpSp>
-          <p:nvGrpSpPr>
-            <p:cNvPr id="21" name="Group 20">
-              <a:extLst>
-                <a:ext uri="{FF2B5EF4-FFF2-40B4-BE49-F238E27FC236}">
-                  <a16:creationId xmlns:a16="http://schemas.microsoft.com/office/drawing/2014/main" id="{8141D90F-0997-31C5-CB00-C3FD03E40945}"/>
-                </a:ext>
-              </a:extLst>
-            </p:cNvPr>
-            <p:cNvGrpSpPr/>
-            <p:nvPr/>
-          </p:nvGrpSpPr>
-          <p:grpSpPr>
-            <a:xfrm>
-              <a:off x="254001" y="897388"/>
-              <a:ext cx="3261359" cy="2548470"/>
-              <a:chOff x="254001" y="824650"/>
-              <a:chExt cx="3261359" cy="2548470"/>
-            </a:xfrm>
-          </p:grpSpPr>
-          <p:sp>
-            <p:nvSpPr>
-              <p:cNvPr id="4" name="Rectangle 3">
-                <a:extLst>
-                  <a:ext uri="{FF2B5EF4-FFF2-40B4-BE49-F238E27FC236}">
-                    <a16:creationId xmlns:a16="http://schemas.microsoft.com/office/drawing/2014/main" id="{B2026257-22E9-C796-4ADD-3D7AFC0A1916}"/>
-                  </a:ext>
-                </a:extLst>
-              </p:cNvPr>
-              <p:cNvSpPr/>
-              <p:nvPr/>
-            </p:nvSpPr>
-            <p:spPr bwMode="auto">
-              <a:xfrm>
-                <a:off x="254001" y="824650"/>
-                <a:ext cx="3261359" cy="2548470"/>
-              </a:xfrm>
-              <a:prstGeom prst="rect">
-                <a:avLst/>
-              </a:prstGeom>
-              <a:solidFill>
-                <a:schemeClr val="accent4">
-                  <a:lumMod val="75000"/>
-                </a:schemeClr>
-              </a:solidFill>
-              <a:ln>
-                <a:noFill/>
-                <a:headEnd type="none" w="med" len="med"/>
-                <a:tailEnd type="none" w="med" len="med"/>
-              </a:ln>
-              <a:effectLst/>
-            </p:spPr>
-            <p:style>
-              <a:lnRef idx="1">
-                <a:schemeClr val="accent2"/>
-              </a:lnRef>
-              <a:fillRef idx="3">
-                <a:schemeClr val="accent2"/>
-              </a:fillRef>
-              <a:effectRef idx="2">
-                <a:schemeClr val="accent2"/>
-              </a:effectRef>
-              <a:fontRef idx="minor">
-                <a:schemeClr val="lt1"/>
-              </a:fontRef>
-            </p:style>
-            <p:txBody>
-              <a:bodyPr rot="0" spcFirstLastPara="0" vertOverflow="overflow" horzOverflow="overflow" vert="horz" wrap="square" lIns="0" tIns="91440" rIns="0" bIns="0" numCol="1" spcCol="0" rtlCol="0" fromWordArt="0" anchor="t" anchorCtr="0" forceAA="0" compatLnSpc="1">
-                <a:prstTxWarp prst="textNoShape">
-                  <a:avLst/>
-                </a:prstTxWarp>
-                <a:noAutofit/>
-              </a:bodyPr>
-              <a:lstStyle/>
-              <a:p>
-                <a:pPr algn="ctr" defTabSz="932472" fontAlgn="base">
-                  <a:lnSpc>
-                    <a:spcPct val="90000"/>
-                  </a:lnSpc>
-                  <a:spcBef>
-                    <a:spcPct val="0"/>
-                  </a:spcBef>
-                  <a:spcAft>
-                    <a:spcPct val="0"/>
-                  </a:spcAft>
-                </a:pPr>
-                <a:r>
-                  <a:rPr lang="en-US" sz="1200" b="1" dirty="0">
-                    <a:gradFill>
-                      <a:gsLst>
-                        <a:gs pos="0">
-                          <a:srgbClr val="FFFFFF"/>
-                        </a:gs>
-                        <a:gs pos="100000">
-                          <a:srgbClr val="FFFFFF"/>
-                        </a:gs>
-                      </a:gsLst>
-                      <a:lin ang="5400000" scaled="0"/>
-                    </a:gradFill>
-                    <a:latin typeface="Lucida Console" panose="020B0609040504020204" pitchFamily="49" charset="0"/>
-                    <a:ea typeface="Segoe UI" pitchFamily="34" charset="0"/>
-                    <a:cs typeface="Segoe UI" pitchFamily="34" charset="0"/>
-                  </a:rPr>
-                  <a:t>dev environment</a:t>
-                </a:r>
-              </a:p>
-            </p:txBody>
-          </p:sp>
-          <p:pic>
-            <p:nvPicPr>
-              <p:cNvPr id="13" name="Picture 12">
-                <a:extLst>
-                  <a:ext uri="{FF2B5EF4-FFF2-40B4-BE49-F238E27FC236}">
-                    <a16:creationId xmlns:a16="http://schemas.microsoft.com/office/drawing/2014/main" id="{D4873E3F-3C1A-6F6F-0930-3E5FCE14E809}"/>
-                  </a:ext>
-                </a:extLst>
-              </p:cNvPr>
-              <p:cNvPicPr>
-                <a:picLocks noChangeAspect="1"/>
-              </p:cNvPicPr>
-              <p:nvPr/>
-            </p:nvPicPr>
-            <p:blipFill>
-              <a:blip r:embed="rId2"/>
-              <a:stretch>
-                <a:fillRect/>
-              </a:stretch>
-            </p:blipFill>
-            <p:spPr>
-              <a:xfrm>
-                <a:off x="374315" y="1158076"/>
-                <a:ext cx="3030889" cy="2114574"/>
-              </a:xfrm>
-              <a:prstGeom prst="rect">
-                <a:avLst/>
-              </a:prstGeom>
-              <a:ln>
-                <a:solidFill>
-                  <a:schemeClr val="tx1">
-                    <a:lumMod val="75000"/>
-                  </a:schemeClr>
-                </a:solidFill>
-              </a:ln>
-            </p:spPr>
-          </p:pic>
-        </p:grpSp>
-        <p:grpSp>
-          <p:nvGrpSpPr>
-            <p:cNvPr id="20" name="Group 19">
-              <a:extLst>
-                <a:ext uri="{FF2B5EF4-FFF2-40B4-BE49-F238E27FC236}">
-                  <a16:creationId xmlns:a16="http://schemas.microsoft.com/office/drawing/2014/main" id="{596C10B5-CF4F-86BA-B6A3-7649EA8D5D1C}"/>
-                </a:ext>
-              </a:extLst>
-            </p:cNvPr>
-            <p:cNvGrpSpPr/>
-            <p:nvPr/>
-          </p:nvGrpSpPr>
-          <p:grpSpPr>
-            <a:xfrm>
-              <a:off x="4413167" y="897388"/>
-              <a:ext cx="3261359" cy="2548470"/>
-              <a:chOff x="4587557" y="3272650"/>
-              <a:chExt cx="3261359" cy="2548470"/>
-            </a:xfrm>
-          </p:grpSpPr>
-          <p:sp>
-            <p:nvSpPr>
-              <p:cNvPr id="18" name="Rectangle 17">
-                <a:extLst>
-                  <a:ext uri="{FF2B5EF4-FFF2-40B4-BE49-F238E27FC236}">
-                    <a16:creationId xmlns:a16="http://schemas.microsoft.com/office/drawing/2014/main" id="{828E7C84-7117-A395-D81D-663F93D1FC7B}"/>
-                  </a:ext>
-                </a:extLst>
-              </p:cNvPr>
-              <p:cNvSpPr/>
-              <p:nvPr/>
-            </p:nvSpPr>
-            <p:spPr bwMode="auto">
-              <a:xfrm>
-                <a:off x="4587557" y="3272650"/>
-                <a:ext cx="3261359" cy="2548470"/>
-              </a:xfrm>
-              <a:prstGeom prst="rect">
-                <a:avLst/>
-              </a:prstGeom>
-              <a:solidFill>
-                <a:schemeClr val="accent2">
-                  <a:lumMod val="50000"/>
-                </a:schemeClr>
-              </a:solidFill>
-              <a:ln>
-                <a:noFill/>
-                <a:headEnd type="none" w="med" len="med"/>
-                <a:tailEnd type="none" w="med" len="med"/>
-              </a:ln>
-              <a:effectLst/>
-            </p:spPr>
-            <p:style>
-              <a:lnRef idx="1">
-                <a:schemeClr val="accent2"/>
-              </a:lnRef>
-              <a:fillRef idx="3">
-                <a:schemeClr val="accent2"/>
-              </a:fillRef>
-              <a:effectRef idx="2">
-                <a:schemeClr val="accent2"/>
-              </a:effectRef>
-              <a:fontRef idx="minor">
-                <a:schemeClr val="lt1"/>
-              </a:fontRef>
-            </p:style>
-            <p:txBody>
-              <a:bodyPr rot="0" spcFirstLastPara="0" vertOverflow="overflow" horzOverflow="overflow" vert="horz" wrap="square" lIns="0" tIns="91440" rIns="0" bIns="0" numCol="1" spcCol="0" rtlCol="0" fromWordArt="0" anchor="t" anchorCtr="0" forceAA="0" compatLnSpc="1">
-                <a:prstTxWarp prst="textNoShape">
-                  <a:avLst/>
-                </a:prstTxWarp>
-                <a:noAutofit/>
-              </a:bodyPr>
-              <a:lstStyle/>
-              <a:p>
-                <a:pPr algn="ctr" defTabSz="932472" fontAlgn="base">
-                  <a:lnSpc>
-                    <a:spcPct val="90000"/>
-                  </a:lnSpc>
-                  <a:spcBef>
-                    <a:spcPct val="0"/>
-                  </a:spcBef>
-                  <a:spcAft>
-                    <a:spcPct val="0"/>
-                  </a:spcAft>
-                </a:pPr>
-                <a:r>
-                  <a:rPr lang="en-US" sz="1200" b="1" dirty="0">
-                    <a:gradFill>
-                      <a:gsLst>
-                        <a:gs pos="0">
-                          <a:srgbClr val="FFFFFF"/>
-                        </a:gs>
-                        <a:gs pos="100000">
-                          <a:srgbClr val="FFFFFF"/>
-                        </a:gs>
-                      </a:gsLst>
-                      <a:lin ang="5400000" scaled="0"/>
-                    </a:gradFill>
-                    <a:latin typeface="Lucida Console" panose="020B0609040504020204" pitchFamily="49" charset="0"/>
-                    <a:ea typeface="Segoe UI" pitchFamily="34" charset="0"/>
-                    <a:cs typeface="Segoe UI" pitchFamily="34" charset="0"/>
-                  </a:rPr>
-                  <a:t>test environment</a:t>
-                </a:r>
-              </a:p>
-            </p:txBody>
-          </p:sp>
-          <p:pic>
-            <p:nvPicPr>
-              <p:cNvPr id="19" name="Picture 18">
-                <a:extLst>
-                  <a:ext uri="{FF2B5EF4-FFF2-40B4-BE49-F238E27FC236}">
-                    <a16:creationId xmlns:a16="http://schemas.microsoft.com/office/drawing/2014/main" id="{2A9C3CAE-3007-917A-0A44-EA52141E1BF0}"/>
-                  </a:ext>
-                </a:extLst>
-              </p:cNvPr>
-              <p:cNvPicPr>
-                <a:picLocks noChangeAspect="1"/>
-              </p:cNvPicPr>
-              <p:nvPr/>
-            </p:nvPicPr>
-            <p:blipFill>
-              <a:blip r:embed="rId2"/>
-              <a:stretch>
-                <a:fillRect/>
-              </a:stretch>
-            </p:blipFill>
-            <p:spPr>
-              <a:xfrm>
-                <a:off x="4707871" y="3606076"/>
-                <a:ext cx="3030889" cy="2114574"/>
-              </a:xfrm>
-              <a:prstGeom prst="rect">
-                <a:avLst/>
-              </a:prstGeom>
-              <a:ln>
-                <a:solidFill>
-                  <a:schemeClr val="tx1">
-                    <a:lumMod val="75000"/>
-                  </a:schemeClr>
-                </a:solidFill>
-              </a:ln>
-            </p:spPr>
-          </p:pic>
-        </p:grpSp>
-        <p:grpSp>
-          <p:nvGrpSpPr>
-            <p:cNvPr id="22" name="Group 21">
-              <a:extLst>
-                <a:ext uri="{FF2B5EF4-FFF2-40B4-BE49-F238E27FC236}">
-                  <a16:creationId xmlns:a16="http://schemas.microsoft.com/office/drawing/2014/main" id="{C302D7FC-C25D-BEC1-A5BC-941CF189D637}"/>
-                </a:ext>
-              </a:extLst>
-            </p:cNvPr>
-            <p:cNvGrpSpPr/>
-            <p:nvPr/>
-          </p:nvGrpSpPr>
-          <p:grpSpPr>
-            <a:xfrm>
-              <a:off x="8572335" y="897388"/>
-              <a:ext cx="3261359" cy="2548470"/>
-              <a:chOff x="4587557" y="3272650"/>
-              <a:chExt cx="3261359" cy="2548470"/>
-            </a:xfrm>
-          </p:grpSpPr>
-          <p:sp>
-            <p:nvSpPr>
-              <p:cNvPr id="23" name="Rectangle 22">
-                <a:extLst>
-                  <a:ext uri="{FF2B5EF4-FFF2-40B4-BE49-F238E27FC236}">
-                    <a16:creationId xmlns:a16="http://schemas.microsoft.com/office/drawing/2014/main" id="{40295818-7845-1260-6965-B370D4DAF6C1}"/>
-                  </a:ext>
-                </a:extLst>
-              </p:cNvPr>
-              <p:cNvSpPr/>
-              <p:nvPr/>
-            </p:nvSpPr>
-            <p:spPr bwMode="auto">
-              <a:xfrm>
-                <a:off x="4587557" y="3272650"/>
-                <a:ext cx="3261359" cy="2548470"/>
-              </a:xfrm>
-              <a:prstGeom prst="rect">
-                <a:avLst/>
-              </a:prstGeom>
-              <a:solidFill>
-                <a:schemeClr val="accent1">
-                  <a:lumMod val="75000"/>
-                </a:schemeClr>
-              </a:solidFill>
-              <a:ln>
-                <a:noFill/>
-                <a:headEnd type="none" w="med" len="med"/>
-                <a:tailEnd type="none" w="med" len="med"/>
-              </a:ln>
-              <a:effectLst/>
-            </p:spPr>
-            <p:style>
-              <a:lnRef idx="1">
-                <a:schemeClr val="accent2"/>
-              </a:lnRef>
-              <a:fillRef idx="3">
-                <a:schemeClr val="accent2"/>
-              </a:fillRef>
-              <a:effectRef idx="2">
-                <a:schemeClr val="accent2"/>
-              </a:effectRef>
-              <a:fontRef idx="minor">
-                <a:schemeClr val="lt1"/>
-              </a:fontRef>
-            </p:style>
-            <p:txBody>
-              <a:bodyPr rot="0" spcFirstLastPara="0" vertOverflow="overflow" horzOverflow="overflow" vert="horz" wrap="square" lIns="0" tIns="91440" rIns="0" bIns="0" numCol="1" spcCol="0" rtlCol="0" fromWordArt="0" anchor="t" anchorCtr="0" forceAA="0" compatLnSpc="1">
-                <a:prstTxWarp prst="textNoShape">
-                  <a:avLst/>
-                </a:prstTxWarp>
-                <a:noAutofit/>
-              </a:bodyPr>
-              <a:lstStyle/>
-              <a:p>
-                <a:pPr algn="ctr" defTabSz="932472" fontAlgn="base">
-                  <a:lnSpc>
-                    <a:spcPct val="90000"/>
-                  </a:lnSpc>
-                  <a:spcBef>
-                    <a:spcPct val="0"/>
-                  </a:spcBef>
-                  <a:spcAft>
-                    <a:spcPct val="0"/>
-                  </a:spcAft>
-                </a:pPr>
-                <a:r>
-                  <a:rPr lang="en-US" sz="1200" b="1" dirty="0">
-                    <a:gradFill>
-                      <a:gsLst>
-                        <a:gs pos="0">
-                          <a:srgbClr val="FFFFFF"/>
-                        </a:gs>
-                        <a:gs pos="100000">
-                          <a:srgbClr val="FFFFFF"/>
-                        </a:gs>
-                      </a:gsLst>
-                      <a:lin ang="5400000" scaled="0"/>
-                    </a:gradFill>
-                    <a:latin typeface="Lucida Console" panose="020B0609040504020204" pitchFamily="49" charset="0"/>
-                    <a:ea typeface="Segoe UI" pitchFamily="34" charset="0"/>
-                    <a:cs typeface="Segoe UI" pitchFamily="34" charset="0"/>
-                  </a:rPr>
-                  <a:t>prod environment</a:t>
-                </a:r>
-              </a:p>
-            </p:txBody>
-          </p:sp>
-          <p:pic>
-            <p:nvPicPr>
-              <p:cNvPr id="24" name="Picture 23">
-                <a:extLst>
-                  <a:ext uri="{FF2B5EF4-FFF2-40B4-BE49-F238E27FC236}">
-                    <a16:creationId xmlns:a16="http://schemas.microsoft.com/office/drawing/2014/main" id="{59DAAD2B-DF9D-F879-7A69-56460D713AAA}"/>
-                  </a:ext>
-                </a:extLst>
-              </p:cNvPr>
-              <p:cNvPicPr>
-                <a:picLocks noChangeAspect="1"/>
-              </p:cNvPicPr>
-              <p:nvPr/>
-            </p:nvPicPr>
-            <p:blipFill>
-              <a:blip r:embed="rId2"/>
-              <a:stretch>
-                <a:fillRect/>
-              </a:stretch>
-            </p:blipFill>
-            <p:spPr>
-              <a:xfrm>
-                <a:off x="4707871" y="3606076"/>
-                <a:ext cx="3030889" cy="2114574"/>
-              </a:xfrm>
-              <a:prstGeom prst="rect">
-                <a:avLst/>
-              </a:prstGeom>
-              <a:ln>
-                <a:solidFill>
-                  <a:schemeClr val="tx1">
-                    <a:lumMod val="75000"/>
-                  </a:schemeClr>
-                </a:solidFill>
-              </a:ln>
-            </p:spPr>
-          </p:pic>
-        </p:grpSp>
-        <p:sp>
-          <p:nvSpPr>
-            <p:cNvPr id="26" name="Arrow: Right 25">
-              <a:extLst>
-                <a:ext uri="{FF2B5EF4-FFF2-40B4-BE49-F238E27FC236}">
-                  <a16:creationId xmlns:a16="http://schemas.microsoft.com/office/drawing/2014/main" id="{05531E5D-497F-0D54-827D-5927866DCABE}"/>
-                </a:ext>
-              </a:extLst>
-            </p:cNvPr>
-            <p:cNvSpPr/>
-            <p:nvPr/>
-          </p:nvSpPr>
-          <p:spPr bwMode="auto">
-            <a:xfrm>
-              <a:off x="7747121" y="1889828"/>
-              <a:ext cx="752617" cy="563590"/>
-            </a:xfrm>
-            <a:prstGeom prst="rightArrow">
-              <a:avLst>
-                <a:gd name="adj1" fmla="val 61383"/>
-                <a:gd name="adj2" fmla="val 50000"/>
-              </a:avLst>
-            </a:prstGeom>
-            <a:solidFill>
-              <a:srgbClr val="C00000"/>
-            </a:solidFill>
-            <a:ln>
-              <a:noFill/>
-              <a:headEnd type="none" w="med" len="med"/>
-              <a:tailEnd type="none" w="med" len="med"/>
-            </a:ln>
-            <a:effectLst/>
-          </p:spPr>
-          <p:style>
-            <a:lnRef idx="1">
-              <a:schemeClr val="accent2"/>
-            </a:lnRef>
-            <a:fillRef idx="3">
-              <a:schemeClr val="accent2"/>
-            </a:fillRef>
-            <a:effectRef idx="2">
-              <a:schemeClr val="accent2"/>
-            </a:effectRef>
-            <a:fontRef idx="minor">
-              <a:schemeClr val="lt1"/>
-            </a:fontRef>
-          </p:style>
-          <p:txBody>
-            <a:bodyPr rot="0" spcFirstLastPara="0" vertOverflow="overflow" horzOverflow="overflow" vert="horz" wrap="square" lIns="0" tIns="0" rIns="0" bIns="0" numCol="1" spcCol="0" rtlCol="0" fromWordArt="0" anchor="ctr" anchorCtr="0" forceAA="0" compatLnSpc="1">
-              <a:prstTxWarp prst="textNoShape">
-                <a:avLst/>
-              </a:prstTxWarp>
-              <a:noAutofit/>
-            </a:bodyPr>
-            <a:lstStyle/>
-            <a:p>
-              <a:pPr algn="ctr" defTabSz="932472" fontAlgn="base">
-                <a:lnSpc>
-                  <a:spcPct val="90000"/>
-                </a:lnSpc>
-                <a:spcBef>
-                  <a:spcPct val="0"/>
-                </a:spcBef>
-                <a:spcAft>
-                  <a:spcPct val="0"/>
-                </a:spcAft>
-              </a:pPr>
-              <a:endParaRPr lang="en-US" sz="1200" b="1" dirty="0">
-                <a:gradFill>
-                  <a:gsLst>
-                    <a:gs pos="0">
-                      <a:srgbClr val="FFFFFF"/>
-                    </a:gs>
-                    <a:gs pos="100000">
-                      <a:srgbClr val="FFFFFF"/>
-                    </a:gs>
-                  </a:gsLst>
-                  <a:lin ang="5400000" scaled="0"/>
-                </a:gradFill>
-                <a:latin typeface="Lucida Console" panose="020B0609040504020204" pitchFamily="49" charset="0"/>
-                <a:ea typeface="Segoe UI" pitchFamily="34" charset="0"/>
-                <a:cs typeface="Segoe UI" pitchFamily="34" charset="0"/>
-              </a:endParaRPr>
-            </a:p>
-          </p:txBody>
-        </p:sp>
-      </p:grpSp>
-    </p:spTree>
-    <p:extLst>
-      <p:ext uri="{BB962C8B-B14F-4D97-AF65-F5344CB8AC3E}">
-        <p14:creationId xmlns:p14="http://schemas.microsoft.com/office/powerpoint/2010/main" val="665866891"/>
-      </p:ext>
-    </p:extLst>
-  </p:cSld>
-  <p:clrMapOvr>
-    <a:masterClrMapping/>
-  </p:clrMapOvr>
-  <p:transition>
-    <p:fade/>
-  </p:transition>
-</p:sld>
-</file>
-
-<file path=ppt/slides/slide60.xml><?xml version="1.0" encoding="utf-8"?>
+<file path=ppt/slides/slide66.xml><?xml version="1.0" encoding="utf-8"?>
 <p:sld xmlns:a="http://schemas.openxmlformats.org/drawingml/2006/main" xmlns:r="http://schemas.openxmlformats.org/officeDocument/2006/relationships" xmlns:p="http://schemas.openxmlformats.org/presentationml/2006/main">
   <p:cSld>
     <p:spTree>
@@ -38824,7 +41195,7 @@
 </p:sld>
 </file>
 
-<file path=ppt/slides/slide61.xml><?xml version="1.0" encoding="utf-8"?>
+<file path=ppt/slides/slide67.xml><?xml version="1.0" encoding="utf-8"?>
 <p:sld xmlns:a="http://schemas.openxmlformats.org/drawingml/2006/main" xmlns:r="http://schemas.openxmlformats.org/officeDocument/2006/relationships" xmlns:p="http://schemas.openxmlformats.org/presentationml/2006/main">
   <p:cSld>
     <p:spTree>
@@ -38887,7 +41258,7 @@
 </p:sld>
 </file>
 
-<file path=ppt/slides/slide62.xml><?xml version="1.0" encoding="utf-8"?>
+<file path=ppt/slides/slide68.xml><?xml version="1.0" encoding="utf-8"?>
 <p:sld xmlns:a="http://schemas.openxmlformats.org/drawingml/2006/main" xmlns:r="http://schemas.openxmlformats.org/officeDocument/2006/relationships" xmlns:p="http://schemas.openxmlformats.org/presentationml/2006/main">
   <p:cSld>
     <p:spTree>
@@ -38955,7 +41326,7 @@
 </p:sld>
 </file>
 
-<file path=ppt/slides/slide63.xml><?xml version="1.0" encoding="utf-8"?>
+<file path=ppt/slides/slide69.xml><?xml version="1.0" encoding="utf-8"?>
 <p:sld xmlns:a="http://schemas.openxmlformats.org/drawingml/2006/main" xmlns:r="http://schemas.openxmlformats.org/officeDocument/2006/relationships" xmlns:p="http://schemas.openxmlformats.org/presentationml/2006/main">
   <p:cSld>
     <p:spTree>
@@ -39023,7 +41394,812 @@
 </p:sld>
 </file>
 
-<file path=ppt/slides/slide64.xml><?xml version="1.0" encoding="utf-8"?>
+<file path=ppt/slides/slide7.xml><?xml version="1.0" encoding="utf-8"?>
+<p:sld xmlns:a="http://schemas.openxmlformats.org/drawingml/2006/main" xmlns:r="http://schemas.openxmlformats.org/officeDocument/2006/relationships" xmlns:p="http://schemas.openxmlformats.org/presentationml/2006/main">
+  <p:cSld>
+    <p:spTree>
+      <p:nvGrpSpPr>
+        <p:cNvPr id="1" name=""/>
+        <p:cNvGrpSpPr/>
+        <p:nvPr/>
+      </p:nvGrpSpPr>
+      <p:grpSpPr>
+        <a:xfrm>
+          <a:off x="0" y="0"/>
+          <a:ext cx="0" cy="0"/>
+          <a:chOff x="0" y="0"/>
+          <a:chExt cx="0" cy="0"/>
+        </a:xfrm>
+      </p:grpSpPr>
+      <p:sp>
+        <p:nvSpPr>
+          <p:cNvPr id="2" name="Rectangle 1">
+            <a:extLst>
+              <a:ext uri="{FF2B5EF4-FFF2-40B4-BE49-F238E27FC236}">
+                <a16:creationId xmlns:a16="http://schemas.microsoft.com/office/drawing/2014/main" id="{326DEB0D-84D8-05A6-1192-3AFFB02D3339}"/>
+              </a:ext>
+            </a:extLst>
+          </p:cNvPr>
+          <p:cNvSpPr/>
+          <p:nvPr/>
+        </p:nvSpPr>
+        <p:spPr bwMode="auto">
+          <a:xfrm>
+            <a:off x="367171" y="590155"/>
+            <a:ext cx="3695245" cy="1794458"/>
+          </a:xfrm>
+          <a:prstGeom prst="rect">
+            <a:avLst/>
+          </a:prstGeom>
+          <a:solidFill>
+            <a:schemeClr val="accent4">
+              <a:lumMod val="75000"/>
+            </a:schemeClr>
+          </a:solidFill>
+          <a:ln>
+            <a:solidFill>
+              <a:schemeClr val="tx1"/>
+            </a:solidFill>
+            <a:headEnd type="none" w="med" len="med"/>
+            <a:tailEnd type="none" w="med" len="med"/>
+          </a:ln>
+          <a:effectLst/>
+        </p:spPr>
+        <p:style>
+          <a:lnRef idx="1">
+            <a:schemeClr val="accent2"/>
+          </a:lnRef>
+          <a:fillRef idx="3">
+            <a:schemeClr val="accent2"/>
+          </a:fillRef>
+          <a:effectRef idx="2">
+            <a:schemeClr val="accent2"/>
+          </a:effectRef>
+          <a:fontRef idx="minor">
+            <a:schemeClr val="lt1"/>
+          </a:fontRef>
+        </p:style>
+        <p:txBody>
+          <a:bodyPr rot="0" spcFirstLastPara="0" vertOverflow="overflow" horzOverflow="overflow" vert="horz" wrap="square" lIns="0" tIns="137160" rIns="0" bIns="137160" numCol="1" spcCol="0" rtlCol="0" fromWordArt="0" anchor="t" anchorCtr="0" forceAA="0" compatLnSpc="1">
+            <a:prstTxWarp prst="textNoShape">
+              <a:avLst/>
+            </a:prstTxWarp>
+            <a:noAutofit/>
+          </a:bodyPr>
+          <a:lstStyle/>
+          <a:p>
+            <a:pPr algn="ctr" defTabSz="932472" fontAlgn="base">
+              <a:lnSpc>
+                <a:spcPct val="90000"/>
+              </a:lnSpc>
+              <a:spcBef>
+                <a:spcPct val="0"/>
+              </a:spcBef>
+              <a:spcAft>
+                <a:spcPct val="0"/>
+              </a:spcAft>
+            </a:pPr>
+            <a:r>
+              <a:rPr lang="en-US" sz="1600" b="1" dirty="0">
+                <a:solidFill>
+                  <a:schemeClr val="bg1"/>
+                </a:solidFill>
+                <a:latin typeface="Lucida Console" panose="020B0609040504020204" pitchFamily="49" charset="0"/>
+                <a:ea typeface="Segoe UI" pitchFamily="34" charset="0"/>
+                <a:cs typeface="Segoe UI" pitchFamily="34" charset="0"/>
+              </a:rPr>
+              <a:t>dev environment</a:t>
+            </a:r>
+          </a:p>
+        </p:txBody>
+      </p:sp>
+      <p:sp>
+        <p:nvSpPr>
+          <p:cNvPr id="5" name="Rectangle 4">
+            <a:extLst>
+              <a:ext uri="{FF2B5EF4-FFF2-40B4-BE49-F238E27FC236}">
+                <a16:creationId xmlns:a16="http://schemas.microsoft.com/office/drawing/2014/main" id="{70C9560D-64AC-48D2-C6DC-30DD84EF2BBC}"/>
+              </a:ext>
+            </a:extLst>
+          </p:cNvPr>
+          <p:cNvSpPr/>
+          <p:nvPr/>
+        </p:nvSpPr>
+        <p:spPr bwMode="auto">
+          <a:xfrm>
+            <a:off x="581278" y="1689040"/>
+            <a:ext cx="3267030" cy="521370"/>
+          </a:xfrm>
+          <a:prstGeom prst="rect">
+            <a:avLst/>
+          </a:prstGeom>
+          <a:solidFill>
+            <a:schemeClr val="bg1"/>
+          </a:solidFill>
+          <a:ln>
+            <a:solidFill>
+              <a:schemeClr val="tx1"/>
+            </a:solidFill>
+            <a:headEnd type="none" w="med" len="med"/>
+            <a:tailEnd type="none" w="med" len="med"/>
+          </a:ln>
+          <a:effectLst/>
+        </p:spPr>
+        <p:style>
+          <a:lnRef idx="1">
+            <a:schemeClr val="accent2"/>
+          </a:lnRef>
+          <a:fillRef idx="3">
+            <a:schemeClr val="accent2"/>
+          </a:fillRef>
+          <a:effectRef idx="2">
+            <a:schemeClr val="accent2"/>
+          </a:effectRef>
+          <a:fontRef idx="minor">
+            <a:schemeClr val="lt1"/>
+          </a:fontRef>
+        </p:style>
+        <p:txBody>
+          <a:bodyPr rot="0" spcFirstLastPara="0" vertOverflow="overflow" horzOverflow="overflow" vert="horz" wrap="square" lIns="0" tIns="0" rIns="0" bIns="0" numCol="1" spcCol="0" rtlCol="0" fromWordArt="0" anchor="ctr" anchorCtr="0" forceAA="0" compatLnSpc="1">
+            <a:prstTxWarp prst="textNoShape">
+              <a:avLst/>
+            </a:prstTxWarp>
+            <a:noAutofit/>
+          </a:bodyPr>
+          <a:lstStyle/>
+          <a:p>
+            <a:pPr algn="ctr" defTabSz="932472" fontAlgn="base">
+              <a:lnSpc>
+                <a:spcPct val="90000"/>
+              </a:lnSpc>
+              <a:spcBef>
+                <a:spcPct val="0"/>
+              </a:spcBef>
+              <a:spcAft>
+                <a:spcPct val="0"/>
+              </a:spcAft>
+            </a:pPr>
+            <a:r>
+              <a:rPr lang="en-US" sz="1400" b="1" dirty="0">
+                <a:solidFill>
+                  <a:schemeClr val="tx1"/>
+                </a:solidFill>
+                <a:latin typeface="Lucida Console" panose="020B0609040504020204" pitchFamily="49" charset="0"/>
+                <a:ea typeface="Segoe UI" pitchFamily="34" charset="0"/>
+                <a:cs typeface="Segoe UI" pitchFamily="34" charset="0"/>
+              </a:rPr>
+              <a:t>Fabric capacity (F4)</a:t>
+            </a:r>
+            <a:endParaRPr lang="en-US" sz="1400" dirty="0">
+              <a:solidFill>
+                <a:schemeClr val="tx1"/>
+              </a:solidFill>
+              <a:latin typeface="Lucida Console" panose="020B0609040504020204" pitchFamily="49" charset="0"/>
+              <a:ea typeface="Segoe UI" pitchFamily="34" charset="0"/>
+              <a:cs typeface="Segoe UI" pitchFamily="34" charset="0"/>
+            </a:endParaRPr>
+          </a:p>
+        </p:txBody>
+      </p:sp>
+      <p:sp>
+        <p:nvSpPr>
+          <p:cNvPr id="9" name="Rectangle 8">
+            <a:extLst>
+              <a:ext uri="{FF2B5EF4-FFF2-40B4-BE49-F238E27FC236}">
+                <a16:creationId xmlns:a16="http://schemas.microsoft.com/office/drawing/2014/main" id="{1565DDEF-7F48-5E25-1570-C0ADF6801E9E}"/>
+              </a:ext>
+            </a:extLst>
+          </p:cNvPr>
+          <p:cNvSpPr/>
+          <p:nvPr/>
+        </p:nvSpPr>
+        <p:spPr bwMode="auto">
+          <a:xfrm>
+            <a:off x="581278" y="1049494"/>
+            <a:ext cx="3267030" cy="521370"/>
+          </a:xfrm>
+          <a:prstGeom prst="rect">
+            <a:avLst/>
+          </a:prstGeom>
+          <a:solidFill>
+            <a:schemeClr val="bg1"/>
+          </a:solidFill>
+          <a:ln>
+            <a:solidFill>
+              <a:schemeClr val="tx1"/>
+            </a:solidFill>
+            <a:headEnd type="none" w="med" len="med"/>
+            <a:tailEnd type="none" w="med" len="med"/>
+          </a:ln>
+          <a:effectLst/>
+        </p:spPr>
+        <p:style>
+          <a:lnRef idx="1">
+            <a:schemeClr val="accent2"/>
+          </a:lnRef>
+          <a:fillRef idx="3">
+            <a:schemeClr val="accent2"/>
+          </a:fillRef>
+          <a:effectRef idx="2">
+            <a:schemeClr val="accent2"/>
+          </a:effectRef>
+          <a:fontRef idx="minor">
+            <a:schemeClr val="lt1"/>
+          </a:fontRef>
+        </p:style>
+        <p:txBody>
+          <a:bodyPr rot="0" spcFirstLastPara="0" vertOverflow="overflow" horzOverflow="overflow" vert="horz" wrap="square" lIns="0" tIns="0" rIns="0" bIns="0" numCol="1" spcCol="0" rtlCol="0" fromWordArt="0" anchor="ctr" anchorCtr="0" forceAA="0" compatLnSpc="1">
+            <a:prstTxWarp prst="textNoShape">
+              <a:avLst/>
+            </a:prstTxWarp>
+            <a:noAutofit/>
+          </a:bodyPr>
+          <a:lstStyle/>
+          <a:p>
+            <a:pPr algn="ctr" defTabSz="932472" fontAlgn="base">
+              <a:lnSpc>
+                <a:spcPct val="90000"/>
+              </a:lnSpc>
+              <a:spcBef>
+                <a:spcPct val="0"/>
+              </a:spcBef>
+              <a:spcAft>
+                <a:spcPct val="0"/>
+              </a:spcAft>
+            </a:pPr>
+            <a:r>
+              <a:rPr lang="en-US" sz="1400" b="1" dirty="0">
+                <a:solidFill>
+                  <a:schemeClr val="tx1"/>
+                </a:solidFill>
+                <a:latin typeface="Lucida Console" panose="020B0609040504020204" pitchFamily="49" charset="0"/>
+                <a:ea typeface="Segoe UI" pitchFamily="34" charset="0"/>
+                <a:cs typeface="Segoe UI" pitchFamily="34" charset="0"/>
+              </a:rPr>
+              <a:t>Fabric Workspace</a:t>
+            </a:r>
+            <a:endParaRPr lang="en-US" sz="1400" dirty="0">
+              <a:solidFill>
+                <a:schemeClr val="tx1"/>
+              </a:solidFill>
+              <a:latin typeface="Lucida Console" panose="020B0609040504020204" pitchFamily="49" charset="0"/>
+              <a:ea typeface="Segoe UI" pitchFamily="34" charset="0"/>
+              <a:cs typeface="Segoe UI" pitchFamily="34" charset="0"/>
+            </a:endParaRPr>
+          </a:p>
+        </p:txBody>
+      </p:sp>
+      <p:sp>
+        <p:nvSpPr>
+          <p:cNvPr id="30" name="Rectangle 29">
+            <a:extLst>
+              <a:ext uri="{FF2B5EF4-FFF2-40B4-BE49-F238E27FC236}">
+                <a16:creationId xmlns:a16="http://schemas.microsoft.com/office/drawing/2014/main" id="{B3DC9BCE-6015-0059-97C7-BE2AC020554C}"/>
+              </a:ext>
+            </a:extLst>
+          </p:cNvPr>
+          <p:cNvSpPr/>
+          <p:nvPr/>
+        </p:nvSpPr>
+        <p:spPr bwMode="auto">
+          <a:xfrm>
+            <a:off x="4276523" y="590155"/>
+            <a:ext cx="3695245" cy="1794458"/>
+          </a:xfrm>
+          <a:prstGeom prst="rect">
+            <a:avLst/>
+          </a:prstGeom>
+          <a:solidFill>
+            <a:schemeClr val="accent2"/>
+          </a:solidFill>
+          <a:ln>
+            <a:solidFill>
+              <a:schemeClr val="tx1"/>
+            </a:solidFill>
+            <a:headEnd type="none" w="med" len="med"/>
+            <a:tailEnd type="none" w="med" len="med"/>
+          </a:ln>
+          <a:effectLst/>
+        </p:spPr>
+        <p:style>
+          <a:lnRef idx="1">
+            <a:schemeClr val="accent2"/>
+          </a:lnRef>
+          <a:fillRef idx="3">
+            <a:schemeClr val="accent2"/>
+          </a:fillRef>
+          <a:effectRef idx="2">
+            <a:schemeClr val="accent2"/>
+          </a:effectRef>
+          <a:fontRef idx="minor">
+            <a:schemeClr val="lt1"/>
+          </a:fontRef>
+        </p:style>
+        <p:txBody>
+          <a:bodyPr rot="0" spcFirstLastPara="0" vertOverflow="overflow" horzOverflow="overflow" vert="horz" wrap="square" lIns="0" tIns="137160" rIns="0" bIns="137160" numCol="1" spcCol="0" rtlCol="0" fromWordArt="0" anchor="t" anchorCtr="0" forceAA="0" compatLnSpc="1">
+            <a:prstTxWarp prst="textNoShape">
+              <a:avLst/>
+            </a:prstTxWarp>
+            <a:noAutofit/>
+          </a:bodyPr>
+          <a:lstStyle/>
+          <a:p>
+            <a:pPr algn="ctr" defTabSz="932472" fontAlgn="base">
+              <a:lnSpc>
+                <a:spcPct val="90000"/>
+              </a:lnSpc>
+              <a:spcBef>
+                <a:spcPct val="0"/>
+              </a:spcBef>
+              <a:spcAft>
+                <a:spcPct val="0"/>
+              </a:spcAft>
+            </a:pPr>
+            <a:r>
+              <a:rPr lang="en-US" sz="1600" b="1" dirty="0">
+                <a:solidFill>
+                  <a:schemeClr val="bg1"/>
+                </a:solidFill>
+                <a:latin typeface="Lucida Console" panose="020B0609040504020204" pitchFamily="49" charset="0"/>
+                <a:ea typeface="Segoe UI" pitchFamily="34" charset="0"/>
+                <a:cs typeface="Segoe UI" pitchFamily="34" charset="0"/>
+              </a:rPr>
+              <a:t>test environment</a:t>
+            </a:r>
+          </a:p>
+        </p:txBody>
+      </p:sp>
+      <p:sp>
+        <p:nvSpPr>
+          <p:cNvPr id="31" name="Rectangle 30">
+            <a:extLst>
+              <a:ext uri="{FF2B5EF4-FFF2-40B4-BE49-F238E27FC236}">
+                <a16:creationId xmlns:a16="http://schemas.microsoft.com/office/drawing/2014/main" id="{0457AA95-0F2A-00F2-B7D9-C7E8D2F74078}"/>
+              </a:ext>
+            </a:extLst>
+          </p:cNvPr>
+          <p:cNvSpPr/>
+          <p:nvPr/>
+        </p:nvSpPr>
+        <p:spPr bwMode="auto">
+          <a:xfrm>
+            <a:off x="4490630" y="1689040"/>
+            <a:ext cx="3267030" cy="521370"/>
+          </a:xfrm>
+          <a:prstGeom prst="rect">
+            <a:avLst/>
+          </a:prstGeom>
+          <a:solidFill>
+            <a:schemeClr val="bg1"/>
+          </a:solidFill>
+          <a:ln>
+            <a:solidFill>
+              <a:schemeClr val="tx1"/>
+            </a:solidFill>
+            <a:headEnd type="none" w="med" len="med"/>
+            <a:tailEnd type="none" w="med" len="med"/>
+          </a:ln>
+          <a:effectLst/>
+        </p:spPr>
+        <p:style>
+          <a:lnRef idx="1">
+            <a:schemeClr val="accent2"/>
+          </a:lnRef>
+          <a:fillRef idx="3">
+            <a:schemeClr val="accent2"/>
+          </a:fillRef>
+          <a:effectRef idx="2">
+            <a:schemeClr val="accent2"/>
+          </a:effectRef>
+          <a:fontRef idx="minor">
+            <a:schemeClr val="lt1"/>
+          </a:fontRef>
+        </p:style>
+        <p:txBody>
+          <a:bodyPr rot="0" spcFirstLastPara="0" vertOverflow="overflow" horzOverflow="overflow" vert="horz" wrap="square" lIns="0" tIns="0" rIns="0" bIns="0" numCol="1" spcCol="0" rtlCol="0" fromWordArt="0" anchor="ctr" anchorCtr="0" forceAA="0" compatLnSpc="1">
+            <a:prstTxWarp prst="textNoShape">
+              <a:avLst/>
+            </a:prstTxWarp>
+            <a:noAutofit/>
+          </a:bodyPr>
+          <a:lstStyle/>
+          <a:p>
+            <a:pPr algn="ctr" defTabSz="932472" fontAlgn="base">
+              <a:lnSpc>
+                <a:spcPct val="90000"/>
+              </a:lnSpc>
+              <a:spcBef>
+                <a:spcPct val="0"/>
+              </a:spcBef>
+              <a:spcAft>
+                <a:spcPct val="0"/>
+              </a:spcAft>
+            </a:pPr>
+            <a:r>
+              <a:rPr lang="en-US" sz="1400" b="1" dirty="0">
+                <a:solidFill>
+                  <a:schemeClr val="tx1"/>
+                </a:solidFill>
+                <a:latin typeface="Lucida Console" panose="020B0609040504020204" pitchFamily="49" charset="0"/>
+                <a:ea typeface="Segoe UI" pitchFamily="34" charset="0"/>
+                <a:cs typeface="Segoe UI" pitchFamily="34" charset="0"/>
+              </a:rPr>
+              <a:t>Fabric capacity (F16)</a:t>
+            </a:r>
+            <a:endParaRPr lang="en-US" sz="1400" dirty="0">
+              <a:solidFill>
+                <a:schemeClr val="tx1"/>
+              </a:solidFill>
+              <a:latin typeface="Lucida Console" panose="020B0609040504020204" pitchFamily="49" charset="0"/>
+              <a:ea typeface="Segoe UI" pitchFamily="34" charset="0"/>
+              <a:cs typeface="Segoe UI" pitchFamily="34" charset="0"/>
+            </a:endParaRPr>
+          </a:p>
+        </p:txBody>
+      </p:sp>
+      <p:sp>
+        <p:nvSpPr>
+          <p:cNvPr id="33" name="Rectangle 32">
+            <a:extLst>
+              <a:ext uri="{FF2B5EF4-FFF2-40B4-BE49-F238E27FC236}">
+                <a16:creationId xmlns:a16="http://schemas.microsoft.com/office/drawing/2014/main" id="{2C48FFFD-FF7F-26D0-8C79-F6C1C0A30ABC}"/>
+              </a:ext>
+            </a:extLst>
+          </p:cNvPr>
+          <p:cNvSpPr/>
+          <p:nvPr/>
+        </p:nvSpPr>
+        <p:spPr bwMode="auto">
+          <a:xfrm>
+            <a:off x="4490630" y="1049494"/>
+            <a:ext cx="3267030" cy="521370"/>
+          </a:xfrm>
+          <a:prstGeom prst="rect">
+            <a:avLst/>
+          </a:prstGeom>
+          <a:solidFill>
+            <a:schemeClr val="bg1"/>
+          </a:solidFill>
+          <a:ln>
+            <a:solidFill>
+              <a:schemeClr val="tx1"/>
+            </a:solidFill>
+            <a:headEnd type="none" w="med" len="med"/>
+            <a:tailEnd type="none" w="med" len="med"/>
+          </a:ln>
+          <a:effectLst/>
+        </p:spPr>
+        <p:style>
+          <a:lnRef idx="1">
+            <a:schemeClr val="accent2"/>
+          </a:lnRef>
+          <a:fillRef idx="3">
+            <a:schemeClr val="accent2"/>
+          </a:fillRef>
+          <a:effectRef idx="2">
+            <a:schemeClr val="accent2"/>
+          </a:effectRef>
+          <a:fontRef idx="minor">
+            <a:schemeClr val="lt1"/>
+          </a:fontRef>
+        </p:style>
+        <p:txBody>
+          <a:bodyPr rot="0" spcFirstLastPara="0" vertOverflow="overflow" horzOverflow="overflow" vert="horz" wrap="square" lIns="0" tIns="0" rIns="0" bIns="0" numCol="1" spcCol="0" rtlCol="0" fromWordArt="0" anchor="ctr" anchorCtr="0" forceAA="0" compatLnSpc="1">
+            <a:prstTxWarp prst="textNoShape">
+              <a:avLst/>
+            </a:prstTxWarp>
+            <a:noAutofit/>
+          </a:bodyPr>
+          <a:lstStyle/>
+          <a:p>
+            <a:pPr algn="ctr" defTabSz="932472" fontAlgn="base">
+              <a:lnSpc>
+                <a:spcPct val="90000"/>
+              </a:lnSpc>
+              <a:spcBef>
+                <a:spcPct val="0"/>
+              </a:spcBef>
+              <a:spcAft>
+                <a:spcPct val="0"/>
+              </a:spcAft>
+            </a:pPr>
+            <a:r>
+              <a:rPr lang="en-US" sz="1400" b="1" dirty="0">
+                <a:solidFill>
+                  <a:schemeClr val="tx1"/>
+                </a:solidFill>
+                <a:latin typeface="Lucida Console" panose="020B0609040504020204" pitchFamily="49" charset="0"/>
+                <a:ea typeface="Segoe UI" pitchFamily="34" charset="0"/>
+                <a:cs typeface="Segoe UI" pitchFamily="34" charset="0"/>
+              </a:rPr>
+              <a:t>Fabric Workspace</a:t>
+            </a:r>
+            <a:endParaRPr lang="en-US" sz="1400" dirty="0">
+              <a:solidFill>
+                <a:schemeClr val="tx1"/>
+              </a:solidFill>
+              <a:latin typeface="Lucida Console" panose="020B0609040504020204" pitchFamily="49" charset="0"/>
+              <a:ea typeface="Segoe UI" pitchFamily="34" charset="0"/>
+              <a:cs typeface="Segoe UI" pitchFamily="34" charset="0"/>
+            </a:endParaRPr>
+          </a:p>
+        </p:txBody>
+      </p:sp>
+      <p:sp>
+        <p:nvSpPr>
+          <p:cNvPr id="35" name="Rectangle 34">
+            <a:extLst>
+              <a:ext uri="{FF2B5EF4-FFF2-40B4-BE49-F238E27FC236}">
+                <a16:creationId xmlns:a16="http://schemas.microsoft.com/office/drawing/2014/main" id="{F447EE76-D4D9-A92B-07E6-0F2CB4917821}"/>
+              </a:ext>
+            </a:extLst>
+          </p:cNvPr>
+          <p:cNvSpPr/>
+          <p:nvPr/>
+        </p:nvSpPr>
+        <p:spPr bwMode="auto">
+          <a:xfrm>
+            <a:off x="8159952" y="590155"/>
+            <a:ext cx="3695245" cy="1794458"/>
+          </a:xfrm>
+          <a:prstGeom prst="rect">
+            <a:avLst/>
+          </a:prstGeom>
+          <a:solidFill>
+            <a:schemeClr val="accent1">
+              <a:lumMod val="75000"/>
+            </a:schemeClr>
+          </a:solidFill>
+          <a:ln>
+            <a:solidFill>
+              <a:schemeClr val="tx1"/>
+            </a:solidFill>
+            <a:headEnd type="none" w="med" len="med"/>
+            <a:tailEnd type="none" w="med" len="med"/>
+          </a:ln>
+          <a:effectLst/>
+        </p:spPr>
+        <p:style>
+          <a:lnRef idx="1">
+            <a:schemeClr val="accent2"/>
+          </a:lnRef>
+          <a:fillRef idx="3">
+            <a:schemeClr val="accent2"/>
+          </a:fillRef>
+          <a:effectRef idx="2">
+            <a:schemeClr val="accent2"/>
+          </a:effectRef>
+          <a:fontRef idx="minor">
+            <a:schemeClr val="lt1"/>
+          </a:fontRef>
+        </p:style>
+        <p:txBody>
+          <a:bodyPr rot="0" spcFirstLastPara="0" vertOverflow="overflow" horzOverflow="overflow" vert="horz" wrap="square" lIns="0" tIns="137160" rIns="0" bIns="137160" numCol="1" spcCol="0" rtlCol="0" fromWordArt="0" anchor="t" anchorCtr="0" forceAA="0" compatLnSpc="1">
+            <a:prstTxWarp prst="textNoShape">
+              <a:avLst/>
+            </a:prstTxWarp>
+            <a:noAutofit/>
+          </a:bodyPr>
+          <a:lstStyle/>
+          <a:p>
+            <a:pPr algn="ctr" defTabSz="932472" fontAlgn="base">
+              <a:lnSpc>
+                <a:spcPct val="90000"/>
+              </a:lnSpc>
+              <a:spcBef>
+                <a:spcPct val="0"/>
+              </a:spcBef>
+              <a:spcAft>
+                <a:spcPct val="0"/>
+              </a:spcAft>
+            </a:pPr>
+            <a:r>
+              <a:rPr lang="en-US" sz="1600" b="1" dirty="0">
+                <a:solidFill>
+                  <a:schemeClr val="bg1"/>
+                </a:solidFill>
+                <a:latin typeface="Lucida Console" panose="020B0609040504020204" pitchFamily="49" charset="0"/>
+                <a:ea typeface="Segoe UI" pitchFamily="34" charset="0"/>
+                <a:cs typeface="Segoe UI" pitchFamily="34" charset="0"/>
+              </a:rPr>
+              <a:t>prod environment</a:t>
+            </a:r>
+          </a:p>
+        </p:txBody>
+      </p:sp>
+      <p:sp>
+        <p:nvSpPr>
+          <p:cNvPr id="36" name="Rectangle 35">
+            <a:extLst>
+              <a:ext uri="{FF2B5EF4-FFF2-40B4-BE49-F238E27FC236}">
+                <a16:creationId xmlns:a16="http://schemas.microsoft.com/office/drawing/2014/main" id="{3C1B7C5D-8BC3-8081-5058-5C5F6C9145CE}"/>
+              </a:ext>
+            </a:extLst>
+          </p:cNvPr>
+          <p:cNvSpPr/>
+          <p:nvPr/>
+        </p:nvSpPr>
+        <p:spPr bwMode="auto">
+          <a:xfrm>
+            <a:off x="8374059" y="1689040"/>
+            <a:ext cx="3267030" cy="521370"/>
+          </a:xfrm>
+          <a:prstGeom prst="rect">
+            <a:avLst/>
+          </a:prstGeom>
+          <a:solidFill>
+            <a:schemeClr val="bg1"/>
+          </a:solidFill>
+          <a:ln>
+            <a:solidFill>
+              <a:schemeClr val="tx1"/>
+            </a:solidFill>
+            <a:headEnd type="none" w="med" len="med"/>
+            <a:tailEnd type="none" w="med" len="med"/>
+          </a:ln>
+          <a:effectLst/>
+        </p:spPr>
+        <p:style>
+          <a:lnRef idx="1">
+            <a:schemeClr val="accent2"/>
+          </a:lnRef>
+          <a:fillRef idx="3">
+            <a:schemeClr val="accent2"/>
+          </a:fillRef>
+          <a:effectRef idx="2">
+            <a:schemeClr val="accent2"/>
+          </a:effectRef>
+          <a:fontRef idx="minor">
+            <a:schemeClr val="lt1"/>
+          </a:fontRef>
+        </p:style>
+        <p:txBody>
+          <a:bodyPr rot="0" spcFirstLastPara="0" vertOverflow="overflow" horzOverflow="overflow" vert="horz" wrap="square" lIns="0" tIns="0" rIns="0" bIns="0" numCol="1" spcCol="0" rtlCol="0" fromWordArt="0" anchor="ctr" anchorCtr="0" forceAA="0" compatLnSpc="1">
+            <a:prstTxWarp prst="textNoShape">
+              <a:avLst/>
+            </a:prstTxWarp>
+            <a:noAutofit/>
+          </a:bodyPr>
+          <a:lstStyle/>
+          <a:p>
+            <a:pPr algn="ctr" defTabSz="932472" fontAlgn="base">
+              <a:lnSpc>
+                <a:spcPct val="90000"/>
+              </a:lnSpc>
+              <a:spcBef>
+                <a:spcPct val="0"/>
+              </a:spcBef>
+              <a:spcAft>
+                <a:spcPct val="0"/>
+              </a:spcAft>
+            </a:pPr>
+            <a:r>
+              <a:rPr lang="en-US" sz="1400" b="1" dirty="0">
+                <a:solidFill>
+                  <a:schemeClr val="tx1"/>
+                </a:solidFill>
+                <a:latin typeface="Lucida Console" panose="020B0609040504020204" pitchFamily="49" charset="0"/>
+                <a:ea typeface="Segoe UI" pitchFamily="34" charset="0"/>
+                <a:cs typeface="Segoe UI" pitchFamily="34" charset="0"/>
+              </a:rPr>
+              <a:t>Fabric capacity (F64)</a:t>
+            </a:r>
+            <a:endParaRPr lang="en-US" sz="1400" dirty="0">
+              <a:solidFill>
+                <a:schemeClr val="tx1"/>
+              </a:solidFill>
+              <a:latin typeface="Lucida Console" panose="020B0609040504020204" pitchFamily="49" charset="0"/>
+              <a:ea typeface="Segoe UI" pitchFamily="34" charset="0"/>
+              <a:cs typeface="Segoe UI" pitchFamily="34" charset="0"/>
+            </a:endParaRPr>
+          </a:p>
+        </p:txBody>
+      </p:sp>
+      <p:sp>
+        <p:nvSpPr>
+          <p:cNvPr id="38" name="Rectangle 37">
+            <a:extLst>
+              <a:ext uri="{FF2B5EF4-FFF2-40B4-BE49-F238E27FC236}">
+                <a16:creationId xmlns:a16="http://schemas.microsoft.com/office/drawing/2014/main" id="{E91CEC61-EB4F-670F-65E3-CD60A6ECC845}"/>
+              </a:ext>
+            </a:extLst>
+          </p:cNvPr>
+          <p:cNvSpPr/>
+          <p:nvPr/>
+        </p:nvSpPr>
+        <p:spPr bwMode="auto">
+          <a:xfrm>
+            <a:off x="8374059" y="1049494"/>
+            <a:ext cx="3267030" cy="521370"/>
+          </a:xfrm>
+          <a:prstGeom prst="rect">
+            <a:avLst/>
+          </a:prstGeom>
+          <a:solidFill>
+            <a:schemeClr val="bg1"/>
+          </a:solidFill>
+          <a:ln>
+            <a:solidFill>
+              <a:schemeClr val="tx1"/>
+            </a:solidFill>
+            <a:headEnd type="none" w="med" len="med"/>
+            <a:tailEnd type="none" w="med" len="med"/>
+          </a:ln>
+          <a:effectLst/>
+        </p:spPr>
+        <p:style>
+          <a:lnRef idx="1">
+            <a:schemeClr val="accent2"/>
+          </a:lnRef>
+          <a:fillRef idx="3">
+            <a:schemeClr val="accent2"/>
+          </a:fillRef>
+          <a:effectRef idx="2">
+            <a:schemeClr val="accent2"/>
+          </a:effectRef>
+          <a:fontRef idx="minor">
+            <a:schemeClr val="lt1"/>
+          </a:fontRef>
+        </p:style>
+        <p:txBody>
+          <a:bodyPr rot="0" spcFirstLastPara="0" vertOverflow="overflow" horzOverflow="overflow" vert="horz" wrap="square" lIns="0" tIns="0" rIns="0" bIns="0" numCol="1" spcCol="0" rtlCol="0" fromWordArt="0" anchor="ctr" anchorCtr="0" forceAA="0" compatLnSpc="1">
+            <a:prstTxWarp prst="textNoShape">
+              <a:avLst/>
+            </a:prstTxWarp>
+            <a:noAutofit/>
+          </a:bodyPr>
+          <a:lstStyle/>
+          <a:p>
+            <a:pPr algn="ctr" defTabSz="932472" fontAlgn="base">
+              <a:lnSpc>
+                <a:spcPct val="90000"/>
+              </a:lnSpc>
+              <a:spcBef>
+                <a:spcPct val="0"/>
+              </a:spcBef>
+              <a:spcAft>
+                <a:spcPct val="0"/>
+              </a:spcAft>
+            </a:pPr>
+            <a:r>
+              <a:rPr lang="en-US" sz="1400" b="1" dirty="0">
+                <a:solidFill>
+                  <a:schemeClr val="tx1"/>
+                </a:solidFill>
+                <a:latin typeface="Lucida Console" panose="020B0609040504020204" pitchFamily="49" charset="0"/>
+                <a:ea typeface="Segoe UI" pitchFamily="34" charset="0"/>
+                <a:cs typeface="Segoe UI" pitchFamily="34" charset="0"/>
+              </a:rPr>
+              <a:t>Fabric Workspace</a:t>
+            </a:r>
+            <a:endParaRPr lang="en-US" sz="1400" dirty="0">
+              <a:solidFill>
+                <a:schemeClr val="tx1"/>
+              </a:solidFill>
+              <a:latin typeface="Lucida Console" panose="020B0609040504020204" pitchFamily="49" charset="0"/>
+              <a:ea typeface="Segoe UI" pitchFamily="34" charset="0"/>
+              <a:cs typeface="Segoe UI" pitchFamily="34" charset="0"/>
+            </a:endParaRPr>
+          </a:p>
+        </p:txBody>
+      </p:sp>
+    </p:spTree>
+    <p:extLst>
+      <p:ext uri="{BB962C8B-B14F-4D97-AF65-F5344CB8AC3E}">
+        <p14:creationId xmlns:p14="http://schemas.microsoft.com/office/powerpoint/2010/main" val="661829549"/>
+      </p:ext>
+    </p:extLst>
+  </p:cSld>
+  <p:clrMapOvr>
+    <a:masterClrMapping/>
+  </p:clrMapOvr>
+  <p:transition>
+    <p:fade/>
+  </p:transition>
+</p:sld>
+</file>
+
+<file path=ppt/slides/slide70.xml><?xml version="1.0" encoding="utf-8"?>
 <p:sld xmlns:a="http://schemas.openxmlformats.org/drawingml/2006/main" xmlns:r="http://schemas.openxmlformats.org/officeDocument/2006/relationships" xmlns:p="http://schemas.openxmlformats.org/presentationml/2006/main">
   <p:cSld>
     <p:spTree>
@@ -39091,7 +42267,7 @@
 </p:sld>
 </file>
 
-<file path=ppt/slides/slide65.xml><?xml version="1.0" encoding="utf-8"?>
+<file path=ppt/slides/slide71.xml><?xml version="1.0" encoding="utf-8"?>
 <p:sld xmlns:a="http://schemas.openxmlformats.org/drawingml/2006/main" xmlns:r="http://schemas.openxmlformats.org/officeDocument/2006/relationships" xmlns:p="http://schemas.openxmlformats.org/presentationml/2006/main">
   <p:cSld>
     <p:spTree>
@@ -39240,7 +42416,7 @@
 </p:sld>
 </file>
 
-<file path=ppt/slides/slide66.xml><?xml version="1.0" encoding="utf-8"?>
+<file path=ppt/slides/slide72.xml><?xml version="1.0" encoding="utf-8"?>
 <p:sld xmlns:a="http://schemas.openxmlformats.org/drawingml/2006/main" xmlns:r="http://schemas.openxmlformats.org/officeDocument/2006/relationships" xmlns:p="http://schemas.openxmlformats.org/presentationml/2006/main">
   <p:cSld>
     <p:spTree>
@@ -39309,7 +42485,7 @@
 </p:sld>
 </file>
 
-<file path=ppt/slides/slide67.xml><?xml version="1.0" encoding="utf-8"?>
+<file path=ppt/slides/slide73.xml><?xml version="1.0" encoding="utf-8"?>
 <p:sld xmlns:a="http://schemas.openxmlformats.org/drawingml/2006/main" xmlns:r="http://schemas.openxmlformats.org/officeDocument/2006/relationships" xmlns:p="http://schemas.openxmlformats.org/presentationml/2006/main">
   <p:cSld>
     <p:spTree>
@@ -39377,7 +42553,7 @@
 </p:sld>
 </file>
 
-<file path=ppt/slides/slide68.xml><?xml version="1.0" encoding="utf-8"?>
+<file path=ppt/slides/slide74.xml><?xml version="1.0" encoding="utf-8"?>
 <p:sld xmlns:a="http://schemas.openxmlformats.org/drawingml/2006/main" xmlns:r="http://schemas.openxmlformats.org/officeDocument/2006/relationships" xmlns:p="http://schemas.openxmlformats.org/presentationml/2006/main">
   <p:cSld>
     <p:spTree>
@@ -39445,7 +42621,7 @@
 </p:sld>
 </file>
 
-<file path=ppt/slides/slide69.xml><?xml version="1.0" encoding="utf-8"?>
+<file path=ppt/slides/slide75.xml><?xml version="1.0" encoding="utf-8"?>
 <p:sld xmlns:a="http://schemas.openxmlformats.org/drawingml/2006/main" xmlns:r="http://schemas.openxmlformats.org/officeDocument/2006/relationships" xmlns:p="http://schemas.openxmlformats.org/presentationml/2006/main">
   <p:cSld>
     <p:spTree>
@@ -39513,812 +42689,7 @@
 </p:sld>
 </file>
 
-<file path=ppt/slides/slide7.xml><?xml version="1.0" encoding="utf-8"?>
-<p:sld xmlns:a="http://schemas.openxmlformats.org/drawingml/2006/main" xmlns:r="http://schemas.openxmlformats.org/officeDocument/2006/relationships" xmlns:p="http://schemas.openxmlformats.org/presentationml/2006/main">
-  <p:cSld>
-    <p:spTree>
-      <p:nvGrpSpPr>
-        <p:cNvPr id="1" name=""/>
-        <p:cNvGrpSpPr/>
-        <p:nvPr/>
-      </p:nvGrpSpPr>
-      <p:grpSpPr>
-        <a:xfrm>
-          <a:off x="0" y="0"/>
-          <a:ext cx="0" cy="0"/>
-          <a:chOff x="0" y="0"/>
-          <a:chExt cx="0" cy="0"/>
-        </a:xfrm>
-      </p:grpSpPr>
-      <p:sp>
-        <p:nvSpPr>
-          <p:cNvPr id="2" name="Rectangle 1">
-            <a:extLst>
-              <a:ext uri="{FF2B5EF4-FFF2-40B4-BE49-F238E27FC236}">
-                <a16:creationId xmlns:a16="http://schemas.microsoft.com/office/drawing/2014/main" id="{326DEB0D-84D8-05A6-1192-3AFFB02D3339}"/>
-              </a:ext>
-            </a:extLst>
-          </p:cNvPr>
-          <p:cNvSpPr/>
-          <p:nvPr/>
-        </p:nvSpPr>
-        <p:spPr bwMode="auto">
-          <a:xfrm>
-            <a:off x="367171" y="590155"/>
-            <a:ext cx="3695245" cy="1794458"/>
-          </a:xfrm>
-          <a:prstGeom prst="rect">
-            <a:avLst/>
-          </a:prstGeom>
-          <a:solidFill>
-            <a:schemeClr val="accent4">
-              <a:lumMod val="75000"/>
-            </a:schemeClr>
-          </a:solidFill>
-          <a:ln>
-            <a:solidFill>
-              <a:schemeClr val="tx1"/>
-            </a:solidFill>
-            <a:headEnd type="none" w="med" len="med"/>
-            <a:tailEnd type="none" w="med" len="med"/>
-          </a:ln>
-          <a:effectLst/>
-        </p:spPr>
-        <p:style>
-          <a:lnRef idx="1">
-            <a:schemeClr val="accent2"/>
-          </a:lnRef>
-          <a:fillRef idx="3">
-            <a:schemeClr val="accent2"/>
-          </a:fillRef>
-          <a:effectRef idx="2">
-            <a:schemeClr val="accent2"/>
-          </a:effectRef>
-          <a:fontRef idx="minor">
-            <a:schemeClr val="lt1"/>
-          </a:fontRef>
-        </p:style>
-        <p:txBody>
-          <a:bodyPr rot="0" spcFirstLastPara="0" vertOverflow="overflow" horzOverflow="overflow" vert="horz" wrap="square" lIns="0" tIns="137160" rIns="0" bIns="137160" numCol="1" spcCol="0" rtlCol="0" fromWordArt="0" anchor="t" anchorCtr="0" forceAA="0" compatLnSpc="1">
-            <a:prstTxWarp prst="textNoShape">
-              <a:avLst/>
-            </a:prstTxWarp>
-            <a:noAutofit/>
-          </a:bodyPr>
-          <a:lstStyle/>
-          <a:p>
-            <a:pPr algn="ctr" defTabSz="932472" fontAlgn="base">
-              <a:lnSpc>
-                <a:spcPct val="90000"/>
-              </a:lnSpc>
-              <a:spcBef>
-                <a:spcPct val="0"/>
-              </a:spcBef>
-              <a:spcAft>
-                <a:spcPct val="0"/>
-              </a:spcAft>
-            </a:pPr>
-            <a:r>
-              <a:rPr lang="en-US" sz="1600" b="1" dirty="0">
-                <a:solidFill>
-                  <a:schemeClr val="bg1"/>
-                </a:solidFill>
-                <a:latin typeface="Lucida Console" panose="020B0609040504020204" pitchFamily="49" charset="0"/>
-                <a:ea typeface="Segoe UI" pitchFamily="34" charset="0"/>
-                <a:cs typeface="Segoe UI" pitchFamily="34" charset="0"/>
-              </a:rPr>
-              <a:t>dev environment</a:t>
-            </a:r>
-          </a:p>
-        </p:txBody>
-      </p:sp>
-      <p:sp>
-        <p:nvSpPr>
-          <p:cNvPr id="5" name="Rectangle 4">
-            <a:extLst>
-              <a:ext uri="{FF2B5EF4-FFF2-40B4-BE49-F238E27FC236}">
-                <a16:creationId xmlns:a16="http://schemas.microsoft.com/office/drawing/2014/main" id="{70C9560D-64AC-48D2-C6DC-30DD84EF2BBC}"/>
-              </a:ext>
-            </a:extLst>
-          </p:cNvPr>
-          <p:cNvSpPr/>
-          <p:nvPr/>
-        </p:nvSpPr>
-        <p:spPr bwMode="auto">
-          <a:xfrm>
-            <a:off x="581278" y="1689040"/>
-            <a:ext cx="3267030" cy="521370"/>
-          </a:xfrm>
-          <a:prstGeom prst="rect">
-            <a:avLst/>
-          </a:prstGeom>
-          <a:solidFill>
-            <a:schemeClr val="bg1"/>
-          </a:solidFill>
-          <a:ln>
-            <a:solidFill>
-              <a:schemeClr val="tx1"/>
-            </a:solidFill>
-            <a:headEnd type="none" w="med" len="med"/>
-            <a:tailEnd type="none" w="med" len="med"/>
-          </a:ln>
-          <a:effectLst/>
-        </p:spPr>
-        <p:style>
-          <a:lnRef idx="1">
-            <a:schemeClr val="accent2"/>
-          </a:lnRef>
-          <a:fillRef idx="3">
-            <a:schemeClr val="accent2"/>
-          </a:fillRef>
-          <a:effectRef idx="2">
-            <a:schemeClr val="accent2"/>
-          </a:effectRef>
-          <a:fontRef idx="minor">
-            <a:schemeClr val="lt1"/>
-          </a:fontRef>
-        </p:style>
-        <p:txBody>
-          <a:bodyPr rot="0" spcFirstLastPara="0" vertOverflow="overflow" horzOverflow="overflow" vert="horz" wrap="square" lIns="0" tIns="0" rIns="0" bIns="0" numCol="1" spcCol="0" rtlCol="0" fromWordArt="0" anchor="ctr" anchorCtr="0" forceAA="0" compatLnSpc="1">
-            <a:prstTxWarp prst="textNoShape">
-              <a:avLst/>
-            </a:prstTxWarp>
-            <a:noAutofit/>
-          </a:bodyPr>
-          <a:lstStyle/>
-          <a:p>
-            <a:pPr algn="ctr" defTabSz="932472" fontAlgn="base">
-              <a:lnSpc>
-                <a:spcPct val="90000"/>
-              </a:lnSpc>
-              <a:spcBef>
-                <a:spcPct val="0"/>
-              </a:spcBef>
-              <a:spcAft>
-                <a:spcPct val="0"/>
-              </a:spcAft>
-            </a:pPr>
-            <a:r>
-              <a:rPr lang="en-US" sz="1400" b="1" dirty="0">
-                <a:solidFill>
-                  <a:schemeClr val="tx1"/>
-                </a:solidFill>
-                <a:latin typeface="Lucida Console" panose="020B0609040504020204" pitchFamily="49" charset="0"/>
-                <a:ea typeface="Segoe UI" pitchFamily="34" charset="0"/>
-                <a:cs typeface="Segoe UI" pitchFamily="34" charset="0"/>
-              </a:rPr>
-              <a:t>Fabric capacity (F4)</a:t>
-            </a:r>
-            <a:endParaRPr lang="en-US" sz="1400" dirty="0">
-              <a:solidFill>
-                <a:schemeClr val="tx1"/>
-              </a:solidFill>
-              <a:latin typeface="Lucida Console" panose="020B0609040504020204" pitchFamily="49" charset="0"/>
-              <a:ea typeface="Segoe UI" pitchFamily="34" charset="0"/>
-              <a:cs typeface="Segoe UI" pitchFamily="34" charset="0"/>
-            </a:endParaRPr>
-          </a:p>
-        </p:txBody>
-      </p:sp>
-      <p:sp>
-        <p:nvSpPr>
-          <p:cNvPr id="9" name="Rectangle 8">
-            <a:extLst>
-              <a:ext uri="{FF2B5EF4-FFF2-40B4-BE49-F238E27FC236}">
-                <a16:creationId xmlns:a16="http://schemas.microsoft.com/office/drawing/2014/main" id="{1565DDEF-7F48-5E25-1570-C0ADF6801E9E}"/>
-              </a:ext>
-            </a:extLst>
-          </p:cNvPr>
-          <p:cNvSpPr/>
-          <p:nvPr/>
-        </p:nvSpPr>
-        <p:spPr bwMode="auto">
-          <a:xfrm>
-            <a:off x="581278" y="1049494"/>
-            <a:ext cx="3267030" cy="521370"/>
-          </a:xfrm>
-          <a:prstGeom prst="rect">
-            <a:avLst/>
-          </a:prstGeom>
-          <a:solidFill>
-            <a:schemeClr val="bg1"/>
-          </a:solidFill>
-          <a:ln>
-            <a:solidFill>
-              <a:schemeClr val="tx1"/>
-            </a:solidFill>
-            <a:headEnd type="none" w="med" len="med"/>
-            <a:tailEnd type="none" w="med" len="med"/>
-          </a:ln>
-          <a:effectLst/>
-        </p:spPr>
-        <p:style>
-          <a:lnRef idx="1">
-            <a:schemeClr val="accent2"/>
-          </a:lnRef>
-          <a:fillRef idx="3">
-            <a:schemeClr val="accent2"/>
-          </a:fillRef>
-          <a:effectRef idx="2">
-            <a:schemeClr val="accent2"/>
-          </a:effectRef>
-          <a:fontRef idx="minor">
-            <a:schemeClr val="lt1"/>
-          </a:fontRef>
-        </p:style>
-        <p:txBody>
-          <a:bodyPr rot="0" spcFirstLastPara="0" vertOverflow="overflow" horzOverflow="overflow" vert="horz" wrap="square" lIns="0" tIns="0" rIns="0" bIns="0" numCol="1" spcCol="0" rtlCol="0" fromWordArt="0" anchor="ctr" anchorCtr="0" forceAA="0" compatLnSpc="1">
-            <a:prstTxWarp prst="textNoShape">
-              <a:avLst/>
-            </a:prstTxWarp>
-            <a:noAutofit/>
-          </a:bodyPr>
-          <a:lstStyle/>
-          <a:p>
-            <a:pPr algn="ctr" defTabSz="932472" fontAlgn="base">
-              <a:lnSpc>
-                <a:spcPct val="90000"/>
-              </a:lnSpc>
-              <a:spcBef>
-                <a:spcPct val="0"/>
-              </a:spcBef>
-              <a:spcAft>
-                <a:spcPct val="0"/>
-              </a:spcAft>
-            </a:pPr>
-            <a:r>
-              <a:rPr lang="en-US" sz="1400" b="1" dirty="0">
-                <a:solidFill>
-                  <a:schemeClr val="tx1"/>
-                </a:solidFill>
-                <a:latin typeface="Lucida Console" panose="020B0609040504020204" pitchFamily="49" charset="0"/>
-                <a:ea typeface="Segoe UI" pitchFamily="34" charset="0"/>
-                <a:cs typeface="Segoe UI" pitchFamily="34" charset="0"/>
-              </a:rPr>
-              <a:t>Fabric Workspace</a:t>
-            </a:r>
-            <a:endParaRPr lang="en-US" sz="1400" dirty="0">
-              <a:solidFill>
-                <a:schemeClr val="tx1"/>
-              </a:solidFill>
-              <a:latin typeface="Lucida Console" panose="020B0609040504020204" pitchFamily="49" charset="0"/>
-              <a:ea typeface="Segoe UI" pitchFamily="34" charset="0"/>
-              <a:cs typeface="Segoe UI" pitchFamily="34" charset="0"/>
-            </a:endParaRPr>
-          </a:p>
-        </p:txBody>
-      </p:sp>
-      <p:sp>
-        <p:nvSpPr>
-          <p:cNvPr id="30" name="Rectangle 29">
-            <a:extLst>
-              <a:ext uri="{FF2B5EF4-FFF2-40B4-BE49-F238E27FC236}">
-                <a16:creationId xmlns:a16="http://schemas.microsoft.com/office/drawing/2014/main" id="{B3DC9BCE-6015-0059-97C7-BE2AC020554C}"/>
-              </a:ext>
-            </a:extLst>
-          </p:cNvPr>
-          <p:cNvSpPr/>
-          <p:nvPr/>
-        </p:nvSpPr>
-        <p:spPr bwMode="auto">
-          <a:xfrm>
-            <a:off x="4276523" y="590155"/>
-            <a:ext cx="3695245" cy="1794458"/>
-          </a:xfrm>
-          <a:prstGeom prst="rect">
-            <a:avLst/>
-          </a:prstGeom>
-          <a:solidFill>
-            <a:schemeClr val="accent2"/>
-          </a:solidFill>
-          <a:ln>
-            <a:solidFill>
-              <a:schemeClr val="tx1"/>
-            </a:solidFill>
-            <a:headEnd type="none" w="med" len="med"/>
-            <a:tailEnd type="none" w="med" len="med"/>
-          </a:ln>
-          <a:effectLst/>
-        </p:spPr>
-        <p:style>
-          <a:lnRef idx="1">
-            <a:schemeClr val="accent2"/>
-          </a:lnRef>
-          <a:fillRef idx="3">
-            <a:schemeClr val="accent2"/>
-          </a:fillRef>
-          <a:effectRef idx="2">
-            <a:schemeClr val="accent2"/>
-          </a:effectRef>
-          <a:fontRef idx="minor">
-            <a:schemeClr val="lt1"/>
-          </a:fontRef>
-        </p:style>
-        <p:txBody>
-          <a:bodyPr rot="0" spcFirstLastPara="0" vertOverflow="overflow" horzOverflow="overflow" vert="horz" wrap="square" lIns="0" tIns="137160" rIns="0" bIns="137160" numCol="1" spcCol="0" rtlCol="0" fromWordArt="0" anchor="t" anchorCtr="0" forceAA="0" compatLnSpc="1">
-            <a:prstTxWarp prst="textNoShape">
-              <a:avLst/>
-            </a:prstTxWarp>
-            <a:noAutofit/>
-          </a:bodyPr>
-          <a:lstStyle/>
-          <a:p>
-            <a:pPr algn="ctr" defTabSz="932472" fontAlgn="base">
-              <a:lnSpc>
-                <a:spcPct val="90000"/>
-              </a:lnSpc>
-              <a:spcBef>
-                <a:spcPct val="0"/>
-              </a:spcBef>
-              <a:spcAft>
-                <a:spcPct val="0"/>
-              </a:spcAft>
-            </a:pPr>
-            <a:r>
-              <a:rPr lang="en-US" sz="1600" b="1" dirty="0">
-                <a:solidFill>
-                  <a:schemeClr val="bg1"/>
-                </a:solidFill>
-                <a:latin typeface="Lucida Console" panose="020B0609040504020204" pitchFamily="49" charset="0"/>
-                <a:ea typeface="Segoe UI" pitchFamily="34" charset="0"/>
-                <a:cs typeface="Segoe UI" pitchFamily="34" charset="0"/>
-              </a:rPr>
-              <a:t>test environment</a:t>
-            </a:r>
-          </a:p>
-        </p:txBody>
-      </p:sp>
-      <p:sp>
-        <p:nvSpPr>
-          <p:cNvPr id="31" name="Rectangle 30">
-            <a:extLst>
-              <a:ext uri="{FF2B5EF4-FFF2-40B4-BE49-F238E27FC236}">
-                <a16:creationId xmlns:a16="http://schemas.microsoft.com/office/drawing/2014/main" id="{0457AA95-0F2A-00F2-B7D9-C7E8D2F74078}"/>
-              </a:ext>
-            </a:extLst>
-          </p:cNvPr>
-          <p:cNvSpPr/>
-          <p:nvPr/>
-        </p:nvSpPr>
-        <p:spPr bwMode="auto">
-          <a:xfrm>
-            <a:off x="4490630" y="1689040"/>
-            <a:ext cx="3267030" cy="521370"/>
-          </a:xfrm>
-          <a:prstGeom prst="rect">
-            <a:avLst/>
-          </a:prstGeom>
-          <a:solidFill>
-            <a:schemeClr val="bg1"/>
-          </a:solidFill>
-          <a:ln>
-            <a:solidFill>
-              <a:schemeClr val="tx1"/>
-            </a:solidFill>
-            <a:headEnd type="none" w="med" len="med"/>
-            <a:tailEnd type="none" w="med" len="med"/>
-          </a:ln>
-          <a:effectLst/>
-        </p:spPr>
-        <p:style>
-          <a:lnRef idx="1">
-            <a:schemeClr val="accent2"/>
-          </a:lnRef>
-          <a:fillRef idx="3">
-            <a:schemeClr val="accent2"/>
-          </a:fillRef>
-          <a:effectRef idx="2">
-            <a:schemeClr val="accent2"/>
-          </a:effectRef>
-          <a:fontRef idx="minor">
-            <a:schemeClr val="lt1"/>
-          </a:fontRef>
-        </p:style>
-        <p:txBody>
-          <a:bodyPr rot="0" spcFirstLastPara="0" vertOverflow="overflow" horzOverflow="overflow" vert="horz" wrap="square" lIns="0" tIns="0" rIns="0" bIns="0" numCol="1" spcCol="0" rtlCol="0" fromWordArt="0" anchor="ctr" anchorCtr="0" forceAA="0" compatLnSpc="1">
-            <a:prstTxWarp prst="textNoShape">
-              <a:avLst/>
-            </a:prstTxWarp>
-            <a:noAutofit/>
-          </a:bodyPr>
-          <a:lstStyle/>
-          <a:p>
-            <a:pPr algn="ctr" defTabSz="932472" fontAlgn="base">
-              <a:lnSpc>
-                <a:spcPct val="90000"/>
-              </a:lnSpc>
-              <a:spcBef>
-                <a:spcPct val="0"/>
-              </a:spcBef>
-              <a:spcAft>
-                <a:spcPct val="0"/>
-              </a:spcAft>
-            </a:pPr>
-            <a:r>
-              <a:rPr lang="en-US" sz="1400" b="1" dirty="0">
-                <a:solidFill>
-                  <a:schemeClr val="tx1"/>
-                </a:solidFill>
-                <a:latin typeface="Lucida Console" panose="020B0609040504020204" pitchFamily="49" charset="0"/>
-                <a:ea typeface="Segoe UI" pitchFamily="34" charset="0"/>
-                <a:cs typeface="Segoe UI" pitchFamily="34" charset="0"/>
-              </a:rPr>
-              <a:t>Fabric capacity (F16)</a:t>
-            </a:r>
-            <a:endParaRPr lang="en-US" sz="1400" dirty="0">
-              <a:solidFill>
-                <a:schemeClr val="tx1"/>
-              </a:solidFill>
-              <a:latin typeface="Lucida Console" panose="020B0609040504020204" pitchFamily="49" charset="0"/>
-              <a:ea typeface="Segoe UI" pitchFamily="34" charset="0"/>
-              <a:cs typeface="Segoe UI" pitchFamily="34" charset="0"/>
-            </a:endParaRPr>
-          </a:p>
-        </p:txBody>
-      </p:sp>
-      <p:sp>
-        <p:nvSpPr>
-          <p:cNvPr id="33" name="Rectangle 32">
-            <a:extLst>
-              <a:ext uri="{FF2B5EF4-FFF2-40B4-BE49-F238E27FC236}">
-                <a16:creationId xmlns:a16="http://schemas.microsoft.com/office/drawing/2014/main" id="{2C48FFFD-FF7F-26D0-8C79-F6C1C0A30ABC}"/>
-              </a:ext>
-            </a:extLst>
-          </p:cNvPr>
-          <p:cNvSpPr/>
-          <p:nvPr/>
-        </p:nvSpPr>
-        <p:spPr bwMode="auto">
-          <a:xfrm>
-            <a:off x="4490630" y="1049494"/>
-            <a:ext cx="3267030" cy="521370"/>
-          </a:xfrm>
-          <a:prstGeom prst="rect">
-            <a:avLst/>
-          </a:prstGeom>
-          <a:solidFill>
-            <a:schemeClr val="bg1"/>
-          </a:solidFill>
-          <a:ln>
-            <a:solidFill>
-              <a:schemeClr val="tx1"/>
-            </a:solidFill>
-            <a:headEnd type="none" w="med" len="med"/>
-            <a:tailEnd type="none" w="med" len="med"/>
-          </a:ln>
-          <a:effectLst/>
-        </p:spPr>
-        <p:style>
-          <a:lnRef idx="1">
-            <a:schemeClr val="accent2"/>
-          </a:lnRef>
-          <a:fillRef idx="3">
-            <a:schemeClr val="accent2"/>
-          </a:fillRef>
-          <a:effectRef idx="2">
-            <a:schemeClr val="accent2"/>
-          </a:effectRef>
-          <a:fontRef idx="minor">
-            <a:schemeClr val="lt1"/>
-          </a:fontRef>
-        </p:style>
-        <p:txBody>
-          <a:bodyPr rot="0" spcFirstLastPara="0" vertOverflow="overflow" horzOverflow="overflow" vert="horz" wrap="square" lIns="0" tIns="0" rIns="0" bIns="0" numCol="1" spcCol="0" rtlCol="0" fromWordArt="0" anchor="ctr" anchorCtr="0" forceAA="0" compatLnSpc="1">
-            <a:prstTxWarp prst="textNoShape">
-              <a:avLst/>
-            </a:prstTxWarp>
-            <a:noAutofit/>
-          </a:bodyPr>
-          <a:lstStyle/>
-          <a:p>
-            <a:pPr algn="ctr" defTabSz="932472" fontAlgn="base">
-              <a:lnSpc>
-                <a:spcPct val="90000"/>
-              </a:lnSpc>
-              <a:spcBef>
-                <a:spcPct val="0"/>
-              </a:spcBef>
-              <a:spcAft>
-                <a:spcPct val="0"/>
-              </a:spcAft>
-            </a:pPr>
-            <a:r>
-              <a:rPr lang="en-US" sz="1400" b="1" dirty="0">
-                <a:solidFill>
-                  <a:schemeClr val="tx1"/>
-                </a:solidFill>
-                <a:latin typeface="Lucida Console" panose="020B0609040504020204" pitchFamily="49" charset="0"/>
-                <a:ea typeface="Segoe UI" pitchFamily="34" charset="0"/>
-                <a:cs typeface="Segoe UI" pitchFamily="34" charset="0"/>
-              </a:rPr>
-              <a:t>Fabric Workspace</a:t>
-            </a:r>
-            <a:endParaRPr lang="en-US" sz="1400" dirty="0">
-              <a:solidFill>
-                <a:schemeClr val="tx1"/>
-              </a:solidFill>
-              <a:latin typeface="Lucida Console" panose="020B0609040504020204" pitchFamily="49" charset="0"/>
-              <a:ea typeface="Segoe UI" pitchFamily="34" charset="0"/>
-              <a:cs typeface="Segoe UI" pitchFamily="34" charset="0"/>
-            </a:endParaRPr>
-          </a:p>
-        </p:txBody>
-      </p:sp>
-      <p:sp>
-        <p:nvSpPr>
-          <p:cNvPr id="35" name="Rectangle 34">
-            <a:extLst>
-              <a:ext uri="{FF2B5EF4-FFF2-40B4-BE49-F238E27FC236}">
-                <a16:creationId xmlns:a16="http://schemas.microsoft.com/office/drawing/2014/main" id="{F447EE76-D4D9-A92B-07E6-0F2CB4917821}"/>
-              </a:ext>
-            </a:extLst>
-          </p:cNvPr>
-          <p:cNvSpPr/>
-          <p:nvPr/>
-        </p:nvSpPr>
-        <p:spPr bwMode="auto">
-          <a:xfrm>
-            <a:off x="8159952" y="590155"/>
-            <a:ext cx="3695245" cy="1794458"/>
-          </a:xfrm>
-          <a:prstGeom prst="rect">
-            <a:avLst/>
-          </a:prstGeom>
-          <a:solidFill>
-            <a:schemeClr val="accent1">
-              <a:lumMod val="75000"/>
-            </a:schemeClr>
-          </a:solidFill>
-          <a:ln>
-            <a:solidFill>
-              <a:schemeClr val="tx1"/>
-            </a:solidFill>
-            <a:headEnd type="none" w="med" len="med"/>
-            <a:tailEnd type="none" w="med" len="med"/>
-          </a:ln>
-          <a:effectLst/>
-        </p:spPr>
-        <p:style>
-          <a:lnRef idx="1">
-            <a:schemeClr val="accent2"/>
-          </a:lnRef>
-          <a:fillRef idx="3">
-            <a:schemeClr val="accent2"/>
-          </a:fillRef>
-          <a:effectRef idx="2">
-            <a:schemeClr val="accent2"/>
-          </a:effectRef>
-          <a:fontRef idx="minor">
-            <a:schemeClr val="lt1"/>
-          </a:fontRef>
-        </p:style>
-        <p:txBody>
-          <a:bodyPr rot="0" spcFirstLastPara="0" vertOverflow="overflow" horzOverflow="overflow" vert="horz" wrap="square" lIns="0" tIns="137160" rIns="0" bIns="137160" numCol="1" spcCol="0" rtlCol="0" fromWordArt="0" anchor="t" anchorCtr="0" forceAA="0" compatLnSpc="1">
-            <a:prstTxWarp prst="textNoShape">
-              <a:avLst/>
-            </a:prstTxWarp>
-            <a:noAutofit/>
-          </a:bodyPr>
-          <a:lstStyle/>
-          <a:p>
-            <a:pPr algn="ctr" defTabSz="932472" fontAlgn="base">
-              <a:lnSpc>
-                <a:spcPct val="90000"/>
-              </a:lnSpc>
-              <a:spcBef>
-                <a:spcPct val="0"/>
-              </a:spcBef>
-              <a:spcAft>
-                <a:spcPct val="0"/>
-              </a:spcAft>
-            </a:pPr>
-            <a:r>
-              <a:rPr lang="en-US" sz="1600" b="1" dirty="0">
-                <a:solidFill>
-                  <a:schemeClr val="bg1"/>
-                </a:solidFill>
-                <a:latin typeface="Lucida Console" panose="020B0609040504020204" pitchFamily="49" charset="0"/>
-                <a:ea typeface="Segoe UI" pitchFamily="34" charset="0"/>
-                <a:cs typeface="Segoe UI" pitchFamily="34" charset="0"/>
-              </a:rPr>
-              <a:t>prod environment</a:t>
-            </a:r>
-          </a:p>
-        </p:txBody>
-      </p:sp>
-      <p:sp>
-        <p:nvSpPr>
-          <p:cNvPr id="36" name="Rectangle 35">
-            <a:extLst>
-              <a:ext uri="{FF2B5EF4-FFF2-40B4-BE49-F238E27FC236}">
-                <a16:creationId xmlns:a16="http://schemas.microsoft.com/office/drawing/2014/main" id="{3C1B7C5D-8BC3-8081-5058-5C5F6C9145CE}"/>
-              </a:ext>
-            </a:extLst>
-          </p:cNvPr>
-          <p:cNvSpPr/>
-          <p:nvPr/>
-        </p:nvSpPr>
-        <p:spPr bwMode="auto">
-          <a:xfrm>
-            <a:off x="8374059" y="1689040"/>
-            <a:ext cx="3267030" cy="521370"/>
-          </a:xfrm>
-          <a:prstGeom prst="rect">
-            <a:avLst/>
-          </a:prstGeom>
-          <a:solidFill>
-            <a:schemeClr val="bg1"/>
-          </a:solidFill>
-          <a:ln>
-            <a:solidFill>
-              <a:schemeClr val="tx1"/>
-            </a:solidFill>
-            <a:headEnd type="none" w="med" len="med"/>
-            <a:tailEnd type="none" w="med" len="med"/>
-          </a:ln>
-          <a:effectLst/>
-        </p:spPr>
-        <p:style>
-          <a:lnRef idx="1">
-            <a:schemeClr val="accent2"/>
-          </a:lnRef>
-          <a:fillRef idx="3">
-            <a:schemeClr val="accent2"/>
-          </a:fillRef>
-          <a:effectRef idx="2">
-            <a:schemeClr val="accent2"/>
-          </a:effectRef>
-          <a:fontRef idx="minor">
-            <a:schemeClr val="lt1"/>
-          </a:fontRef>
-        </p:style>
-        <p:txBody>
-          <a:bodyPr rot="0" spcFirstLastPara="0" vertOverflow="overflow" horzOverflow="overflow" vert="horz" wrap="square" lIns="0" tIns="0" rIns="0" bIns="0" numCol="1" spcCol="0" rtlCol="0" fromWordArt="0" anchor="ctr" anchorCtr="0" forceAA="0" compatLnSpc="1">
-            <a:prstTxWarp prst="textNoShape">
-              <a:avLst/>
-            </a:prstTxWarp>
-            <a:noAutofit/>
-          </a:bodyPr>
-          <a:lstStyle/>
-          <a:p>
-            <a:pPr algn="ctr" defTabSz="932472" fontAlgn="base">
-              <a:lnSpc>
-                <a:spcPct val="90000"/>
-              </a:lnSpc>
-              <a:spcBef>
-                <a:spcPct val="0"/>
-              </a:spcBef>
-              <a:spcAft>
-                <a:spcPct val="0"/>
-              </a:spcAft>
-            </a:pPr>
-            <a:r>
-              <a:rPr lang="en-US" sz="1400" b="1" dirty="0">
-                <a:solidFill>
-                  <a:schemeClr val="tx1"/>
-                </a:solidFill>
-                <a:latin typeface="Lucida Console" panose="020B0609040504020204" pitchFamily="49" charset="0"/>
-                <a:ea typeface="Segoe UI" pitchFamily="34" charset="0"/>
-                <a:cs typeface="Segoe UI" pitchFamily="34" charset="0"/>
-              </a:rPr>
-              <a:t>Fabric capacity (F64)</a:t>
-            </a:r>
-            <a:endParaRPr lang="en-US" sz="1400" dirty="0">
-              <a:solidFill>
-                <a:schemeClr val="tx1"/>
-              </a:solidFill>
-              <a:latin typeface="Lucida Console" panose="020B0609040504020204" pitchFamily="49" charset="0"/>
-              <a:ea typeface="Segoe UI" pitchFamily="34" charset="0"/>
-              <a:cs typeface="Segoe UI" pitchFamily="34" charset="0"/>
-            </a:endParaRPr>
-          </a:p>
-        </p:txBody>
-      </p:sp>
-      <p:sp>
-        <p:nvSpPr>
-          <p:cNvPr id="38" name="Rectangle 37">
-            <a:extLst>
-              <a:ext uri="{FF2B5EF4-FFF2-40B4-BE49-F238E27FC236}">
-                <a16:creationId xmlns:a16="http://schemas.microsoft.com/office/drawing/2014/main" id="{E91CEC61-EB4F-670F-65E3-CD60A6ECC845}"/>
-              </a:ext>
-            </a:extLst>
-          </p:cNvPr>
-          <p:cNvSpPr/>
-          <p:nvPr/>
-        </p:nvSpPr>
-        <p:spPr bwMode="auto">
-          <a:xfrm>
-            <a:off x="8374059" y="1049494"/>
-            <a:ext cx="3267030" cy="521370"/>
-          </a:xfrm>
-          <a:prstGeom prst="rect">
-            <a:avLst/>
-          </a:prstGeom>
-          <a:solidFill>
-            <a:schemeClr val="bg1"/>
-          </a:solidFill>
-          <a:ln>
-            <a:solidFill>
-              <a:schemeClr val="tx1"/>
-            </a:solidFill>
-            <a:headEnd type="none" w="med" len="med"/>
-            <a:tailEnd type="none" w="med" len="med"/>
-          </a:ln>
-          <a:effectLst/>
-        </p:spPr>
-        <p:style>
-          <a:lnRef idx="1">
-            <a:schemeClr val="accent2"/>
-          </a:lnRef>
-          <a:fillRef idx="3">
-            <a:schemeClr val="accent2"/>
-          </a:fillRef>
-          <a:effectRef idx="2">
-            <a:schemeClr val="accent2"/>
-          </a:effectRef>
-          <a:fontRef idx="minor">
-            <a:schemeClr val="lt1"/>
-          </a:fontRef>
-        </p:style>
-        <p:txBody>
-          <a:bodyPr rot="0" spcFirstLastPara="0" vertOverflow="overflow" horzOverflow="overflow" vert="horz" wrap="square" lIns="0" tIns="0" rIns="0" bIns="0" numCol="1" spcCol="0" rtlCol="0" fromWordArt="0" anchor="ctr" anchorCtr="0" forceAA="0" compatLnSpc="1">
-            <a:prstTxWarp prst="textNoShape">
-              <a:avLst/>
-            </a:prstTxWarp>
-            <a:noAutofit/>
-          </a:bodyPr>
-          <a:lstStyle/>
-          <a:p>
-            <a:pPr algn="ctr" defTabSz="932472" fontAlgn="base">
-              <a:lnSpc>
-                <a:spcPct val="90000"/>
-              </a:lnSpc>
-              <a:spcBef>
-                <a:spcPct val="0"/>
-              </a:spcBef>
-              <a:spcAft>
-                <a:spcPct val="0"/>
-              </a:spcAft>
-            </a:pPr>
-            <a:r>
-              <a:rPr lang="en-US" sz="1400" b="1" dirty="0">
-                <a:solidFill>
-                  <a:schemeClr val="tx1"/>
-                </a:solidFill>
-                <a:latin typeface="Lucida Console" panose="020B0609040504020204" pitchFamily="49" charset="0"/>
-                <a:ea typeface="Segoe UI" pitchFamily="34" charset="0"/>
-                <a:cs typeface="Segoe UI" pitchFamily="34" charset="0"/>
-              </a:rPr>
-              <a:t>Fabric Workspace</a:t>
-            </a:r>
-            <a:endParaRPr lang="en-US" sz="1400" dirty="0">
-              <a:solidFill>
-                <a:schemeClr val="tx1"/>
-              </a:solidFill>
-              <a:latin typeface="Lucida Console" panose="020B0609040504020204" pitchFamily="49" charset="0"/>
-              <a:ea typeface="Segoe UI" pitchFamily="34" charset="0"/>
-              <a:cs typeface="Segoe UI" pitchFamily="34" charset="0"/>
-            </a:endParaRPr>
-          </a:p>
-        </p:txBody>
-      </p:sp>
-    </p:spTree>
-    <p:extLst>
-      <p:ext uri="{BB962C8B-B14F-4D97-AF65-F5344CB8AC3E}">
-        <p14:creationId xmlns:p14="http://schemas.microsoft.com/office/powerpoint/2010/main" val="661829549"/>
-      </p:ext>
-    </p:extLst>
-  </p:cSld>
-  <p:clrMapOvr>
-    <a:masterClrMapping/>
-  </p:clrMapOvr>
-  <p:transition>
-    <p:fade/>
-  </p:transition>
-</p:sld>
-</file>
-
-<file path=ppt/slides/slide70.xml><?xml version="1.0" encoding="utf-8"?>
+<file path=ppt/slides/slide76.xml><?xml version="1.0" encoding="utf-8"?>
 <p:sld xmlns:a="http://schemas.openxmlformats.org/drawingml/2006/main" xmlns:r="http://schemas.openxmlformats.org/officeDocument/2006/relationships" xmlns:p="http://schemas.openxmlformats.org/presentationml/2006/main">
   <p:cSld>
     <p:spTree>
@@ -40386,7 +42757,7 @@
 </p:sld>
 </file>
 
-<file path=ppt/slides/slide71.xml><?xml version="1.0" encoding="utf-8"?>
+<file path=ppt/slides/slide77.xml><?xml version="1.0" encoding="utf-8"?>
 <p:sld xmlns:a="http://schemas.openxmlformats.org/drawingml/2006/main" xmlns:r="http://schemas.openxmlformats.org/officeDocument/2006/relationships" xmlns:p="http://schemas.openxmlformats.org/presentationml/2006/main">
   <p:cSld>
     <p:spTree>
@@ -40454,7 +42825,7 @@
 </p:sld>
 </file>
 
-<file path=ppt/slides/slide72.xml><?xml version="1.0" encoding="utf-8"?>
+<file path=ppt/slides/slide78.xml><?xml version="1.0" encoding="utf-8"?>
 <p:sld xmlns:a="http://schemas.openxmlformats.org/drawingml/2006/main" xmlns:r="http://schemas.openxmlformats.org/officeDocument/2006/relationships" xmlns:p="http://schemas.openxmlformats.org/presentationml/2006/main">
   <p:cSld>
     <p:spTree>
@@ -40522,7 +42893,7 @@
 </p:sld>
 </file>
 
-<file path=ppt/slides/slide73.xml><?xml version="1.0" encoding="utf-8"?>
+<file path=ppt/slides/slide79.xml><?xml version="1.0" encoding="utf-8"?>
 <p:sld xmlns:a="http://schemas.openxmlformats.org/drawingml/2006/main" xmlns:r="http://schemas.openxmlformats.org/officeDocument/2006/relationships" xmlns:p="http://schemas.openxmlformats.org/presentationml/2006/main">
   <p:cSld>
     <p:spTree>
@@ -40578,273 +42949,6 @@
     <p:extLst>
       <p:ext uri="{BB962C8B-B14F-4D97-AF65-F5344CB8AC3E}">
         <p14:creationId xmlns:p14="http://schemas.microsoft.com/office/powerpoint/2010/main" val="1186910088"/>
-      </p:ext>
-    </p:extLst>
-  </p:cSld>
-  <p:clrMapOvr>
-    <a:masterClrMapping/>
-  </p:clrMapOvr>
-  <p:transition>
-    <p:fade/>
-  </p:transition>
-</p:sld>
-</file>
-
-<file path=ppt/slides/slide74.xml><?xml version="1.0" encoding="utf-8"?>
-<p:sld xmlns:a="http://schemas.openxmlformats.org/drawingml/2006/main" xmlns:r="http://schemas.openxmlformats.org/officeDocument/2006/relationships" xmlns:p="http://schemas.openxmlformats.org/presentationml/2006/main">
-  <p:cSld>
-    <p:spTree>
-      <p:nvGrpSpPr>
-        <p:cNvPr id="1" name=""/>
-        <p:cNvGrpSpPr/>
-        <p:nvPr/>
-      </p:nvGrpSpPr>
-      <p:grpSpPr>
-        <a:xfrm>
-          <a:off x="0" y="0"/>
-          <a:ext cx="0" cy="0"/>
-          <a:chOff x="0" y="0"/>
-          <a:chExt cx="0" cy="0"/>
-        </a:xfrm>
-      </p:grpSpPr>
-      <p:pic>
-        <p:nvPicPr>
-          <p:cNvPr id="4" name="Picture 3">
-            <a:extLst>
-              <a:ext uri="{FF2B5EF4-FFF2-40B4-BE49-F238E27FC236}">
-                <a16:creationId xmlns:a16="http://schemas.microsoft.com/office/drawing/2014/main" id="{41C06D11-EC22-0347-C4C8-0F29CADD3E06}"/>
-              </a:ext>
-            </a:extLst>
-          </p:cNvPr>
-          <p:cNvPicPr>
-            <a:picLocks noChangeAspect="1"/>
-          </p:cNvPicPr>
-          <p:nvPr/>
-        </p:nvPicPr>
-        <p:blipFill>
-          <a:blip r:embed="rId2"/>
-          <a:stretch>
-            <a:fillRect/>
-          </a:stretch>
-        </p:blipFill>
-        <p:spPr>
-          <a:xfrm>
-            <a:off x="1098255" y="1133175"/>
-            <a:ext cx="8249801" cy="2953162"/>
-          </a:xfrm>
-          <a:prstGeom prst="rect">
-            <a:avLst/>
-          </a:prstGeom>
-          <a:ln>
-            <a:solidFill>
-              <a:schemeClr val="tx1"/>
-            </a:solidFill>
-          </a:ln>
-        </p:spPr>
-      </p:pic>
-    </p:spTree>
-    <p:extLst>
-      <p:ext uri="{BB962C8B-B14F-4D97-AF65-F5344CB8AC3E}">
-        <p14:creationId xmlns:p14="http://schemas.microsoft.com/office/powerpoint/2010/main" val="3283614765"/>
-      </p:ext>
-    </p:extLst>
-  </p:cSld>
-  <p:clrMapOvr>
-    <a:masterClrMapping/>
-  </p:clrMapOvr>
-  <p:transition>
-    <p:fade/>
-  </p:transition>
-</p:sld>
-</file>
-
-<file path=ppt/slides/slide75.xml><?xml version="1.0" encoding="utf-8"?>
-<p:sld xmlns:a="http://schemas.openxmlformats.org/drawingml/2006/main" xmlns:r="http://schemas.openxmlformats.org/officeDocument/2006/relationships" xmlns:p="http://schemas.openxmlformats.org/presentationml/2006/main">
-  <p:cSld>
-    <p:spTree>
-      <p:nvGrpSpPr>
-        <p:cNvPr id="1" name=""/>
-        <p:cNvGrpSpPr/>
-        <p:nvPr/>
-      </p:nvGrpSpPr>
-      <p:grpSpPr>
-        <a:xfrm>
-          <a:off x="0" y="0"/>
-          <a:ext cx="0" cy="0"/>
-          <a:chOff x="0" y="0"/>
-          <a:chExt cx="0" cy="0"/>
-        </a:xfrm>
-      </p:grpSpPr>
-      <p:pic>
-        <p:nvPicPr>
-          <p:cNvPr id="3" name="Picture 2">
-            <a:extLst>
-              <a:ext uri="{FF2B5EF4-FFF2-40B4-BE49-F238E27FC236}">
-                <a16:creationId xmlns:a16="http://schemas.microsoft.com/office/drawing/2014/main" id="{2DE2BF71-C119-FB27-2C28-766CD764C503}"/>
-              </a:ext>
-            </a:extLst>
-          </p:cNvPr>
-          <p:cNvPicPr>
-            <a:picLocks noChangeAspect="1"/>
-          </p:cNvPicPr>
-          <p:nvPr/>
-        </p:nvPicPr>
-        <p:blipFill>
-          <a:blip r:embed="rId2"/>
-          <a:stretch>
-            <a:fillRect/>
-          </a:stretch>
-        </p:blipFill>
-        <p:spPr>
-          <a:xfrm>
-            <a:off x="770964" y="533930"/>
-            <a:ext cx="9187735" cy="5663029"/>
-          </a:xfrm>
-          <a:prstGeom prst="rect">
-            <a:avLst/>
-          </a:prstGeom>
-          <a:ln>
-            <a:solidFill>
-              <a:schemeClr val="tx1"/>
-            </a:solidFill>
-          </a:ln>
-        </p:spPr>
-      </p:pic>
-    </p:spTree>
-    <p:extLst>
-      <p:ext uri="{BB962C8B-B14F-4D97-AF65-F5344CB8AC3E}">
-        <p14:creationId xmlns:p14="http://schemas.microsoft.com/office/powerpoint/2010/main" val="1487455031"/>
-      </p:ext>
-    </p:extLst>
-  </p:cSld>
-  <p:clrMapOvr>
-    <a:masterClrMapping/>
-  </p:clrMapOvr>
-  <p:transition>
-    <p:fade/>
-  </p:transition>
-</p:sld>
-</file>
-
-<file path=ppt/slides/slide76.xml><?xml version="1.0" encoding="utf-8"?>
-<p:sld xmlns:a="http://schemas.openxmlformats.org/drawingml/2006/main" xmlns:r="http://schemas.openxmlformats.org/officeDocument/2006/relationships" xmlns:p="http://schemas.openxmlformats.org/presentationml/2006/main">
-  <p:cSld>
-    <p:spTree>
-      <p:nvGrpSpPr>
-        <p:cNvPr id="1" name=""/>
-        <p:cNvGrpSpPr/>
-        <p:nvPr/>
-      </p:nvGrpSpPr>
-      <p:grpSpPr>
-        <a:xfrm>
-          <a:off x="0" y="0"/>
-          <a:ext cx="0" cy="0"/>
-          <a:chOff x="0" y="0"/>
-          <a:chExt cx="0" cy="0"/>
-        </a:xfrm>
-      </p:grpSpPr>
-      <p:pic>
-        <p:nvPicPr>
-          <p:cNvPr id="2" name="Picture 1">
-            <a:extLst>
-              <a:ext uri="{FF2B5EF4-FFF2-40B4-BE49-F238E27FC236}">
-                <a16:creationId xmlns:a16="http://schemas.microsoft.com/office/drawing/2014/main" id="{F46C67E7-2B52-73C5-5AFD-176FAF53B524}"/>
-              </a:ext>
-            </a:extLst>
-          </p:cNvPr>
-          <p:cNvPicPr>
-            <a:picLocks noChangeAspect="1"/>
-          </p:cNvPicPr>
-          <p:nvPr/>
-        </p:nvPicPr>
-        <p:blipFill>
-          <a:blip r:embed="rId2"/>
-          <a:stretch>
-            <a:fillRect/>
-          </a:stretch>
-        </p:blipFill>
-        <p:spPr>
-          <a:xfrm>
-            <a:off x="1567703" y="808355"/>
-            <a:ext cx="2442876" cy="2302398"/>
-          </a:xfrm>
-          <a:prstGeom prst="rect">
-            <a:avLst/>
-          </a:prstGeom>
-        </p:spPr>
-      </p:pic>
-    </p:spTree>
-    <p:extLst>
-      <p:ext uri="{BB962C8B-B14F-4D97-AF65-F5344CB8AC3E}">
-        <p14:creationId xmlns:p14="http://schemas.microsoft.com/office/powerpoint/2010/main" val="1337774511"/>
-      </p:ext>
-    </p:extLst>
-  </p:cSld>
-  <p:clrMapOvr>
-    <a:masterClrMapping/>
-  </p:clrMapOvr>
-  <p:transition>
-    <p:fade/>
-  </p:transition>
-</p:sld>
-</file>
-
-<file path=ppt/slides/slide77.xml><?xml version="1.0" encoding="utf-8"?>
-<p:sld xmlns:a="http://schemas.openxmlformats.org/drawingml/2006/main" xmlns:r="http://schemas.openxmlformats.org/officeDocument/2006/relationships" xmlns:p="http://schemas.openxmlformats.org/presentationml/2006/main">
-  <p:cSld>
-    <p:spTree>
-      <p:nvGrpSpPr>
-        <p:cNvPr id="1" name=""/>
-        <p:cNvGrpSpPr/>
-        <p:nvPr/>
-      </p:nvGrpSpPr>
-      <p:grpSpPr>
-        <a:xfrm>
-          <a:off x="0" y="0"/>
-          <a:ext cx="0" cy="0"/>
-          <a:chOff x="0" y="0"/>
-          <a:chExt cx="0" cy="0"/>
-        </a:xfrm>
-      </p:grpSpPr>
-      <p:pic>
-        <p:nvPicPr>
-          <p:cNvPr id="3" name="Picture 2">
-            <a:extLst>
-              <a:ext uri="{FF2B5EF4-FFF2-40B4-BE49-F238E27FC236}">
-                <a16:creationId xmlns:a16="http://schemas.microsoft.com/office/drawing/2014/main" id="{ABDCC9FE-FDF8-87B1-D54D-34AF76D23B87}"/>
-              </a:ext>
-            </a:extLst>
-          </p:cNvPr>
-          <p:cNvPicPr>
-            <a:picLocks noChangeAspect="1"/>
-          </p:cNvPicPr>
-          <p:nvPr/>
-        </p:nvPicPr>
-        <p:blipFill>
-          <a:blip r:embed="rId2"/>
-          <a:stretch>
-            <a:fillRect/>
-          </a:stretch>
-        </p:blipFill>
-        <p:spPr>
-          <a:xfrm>
-            <a:off x="1781618" y="1246094"/>
-            <a:ext cx="8873237" cy="4078104"/>
-          </a:xfrm>
-          <a:prstGeom prst="rect">
-            <a:avLst/>
-          </a:prstGeom>
-          <a:ln>
-            <a:solidFill>
-              <a:schemeClr val="tx1"/>
-            </a:solidFill>
-          </a:ln>
-        </p:spPr>
-      </p:pic>
-    </p:spTree>
-    <p:extLst>
-      <p:ext uri="{BB962C8B-B14F-4D97-AF65-F5344CB8AC3E}">
-        <p14:creationId xmlns:p14="http://schemas.microsoft.com/office/powerpoint/2010/main" val="3016333041"/>
       </p:ext>
     </p:extLst>
   </p:cSld>
@@ -42328,6 +44432,273 @@
     <p:extLst>
       <p:ext uri="{BB962C8B-B14F-4D97-AF65-F5344CB8AC3E}">
         <p14:creationId xmlns:p14="http://schemas.microsoft.com/office/powerpoint/2010/main" val="2567375893"/>
+      </p:ext>
+    </p:extLst>
+  </p:cSld>
+  <p:clrMapOvr>
+    <a:masterClrMapping/>
+  </p:clrMapOvr>
+  <p:transition>
+    <p:fade/>
+  </p:transition>
+</p:sld>
+</file>
+
+<file path=ppt/slides/slide80.xml><?xml version="1.0" encoding="utf-8"?>
+<p:sld xmlns:a="http://schemas.openxmlformats.org/drawingml/2006/main" xmlns:r="http://schemas.openxmlformats.org/officeDocument/2006/relationships" xmlns:p="http://schemas.openxmlformats.org/presentationml/2006/main">
+  <p:cSld>
+    <p:spTree>
+      <p:nvGrpSpPr>
+        <p:cNvPr id="1" name=""/>
+        <p:cNvGrpSpPr/>
+        <p:nvPr/>
+      </p:nvGrpSpPr>
+      <p:grpSpPr>
+        <a:xfrm>
+          <a:off x="0" y="0"/>
+          <a:ext cx="0" cy="0"/>
+          <a:chOff x="0" y="0"/>
+          <a:chExt cx="0" cy="0"/>
+        </a:xfrm>
+      </p:grpSpPr>
+      <p:pic>
+        <p:nvPicPr>
+          <p:cNvPr id="4" name="Picture 3">
+            <a:extLst>
+              <a:ext uri="{FF2B5EF4-FFF2-40B4-BE49-F238E27FC236}">
+                <a16:creationId xmlns:a16="http://schemas.microsoft.com/office/drawing/2014/main" id="{41C06D11-EC22-0347-C4C8-0F29CADD3E06}"/>
+              </a:ext>
+            </a:extLst>
+          </p:cNvPr>
+          <p:cNvPicPr>
+            <a:picLocks noChangeAspect="1"/>
+          </p:cNvPicPr>
+          <p:nvPr/>
+        </p:nvPicPr>
+        <p:blipFill>
+          <a:blip r:embed="rId2"/>
+          <a:stretch>
+            <a:fillRect/>
+          </a:stretch>
+        </p:blipFill>
+        <p:spPr>
+          <a:xfrm>
+            <a:off x="1098255" y="1133175"/>
+            <a:ext cx="8249801" cy="2953162"/>
+          </a:xfrm>
+          <a:prstGeom prst="rect">
+            <a:avLst/>
+          </a:prstGeom>
+          <a:ln>
+            <a:solidFill>
+              <a:schemeClr val="tx1"/>
+            </a:solidFill>
+          </a:ln>
+        </p:spPr>
+      </p:pic>
+    </p:spTree>
+    <p:extLst>
+      <p:ext uri="{BB962C8B-B14F-4D97-AF65-F5344CB8AC3E}">
+        <p14:creationId xmlns:p14="http://schemas.microsoft.com/office/powerpoint/2010/main" val="3283614765"/>
+      </p:ext>
+    </p:extLst>
+  </p:cSld>
+  <p:clrMapOvr>
+    <a:masterClrMapping/>
+  </p:clrMapOvr>
+  <p:transition>
+    <p:fade/>
+  </p:transition>
+</p:sld>
+</file>
+
+<file path=ppt/slides/slide81.xml><?xml version="1.0" encoding="utf-8"?>
+<p:sld xmlns:a="http://schemas.openxmlformats.org/drawingml/2006/main" xmlns:r="http://schemas.openxmlformats.org/officeDocument/2006/relationships" xmlns:p="http://schemas.openxmlformats.org/presentationml/2006/main">
+  <p:cSld>
+    <p:spTree>
+      <p:nvGrpSpPr>
+        <p:cNvPr id="1" name=""/>
+        <p:cNvGrpSpPr/>
+        <p:nvPr/>
+      </p:nvGrpSpPr>
+      <p:grpSpPr>
+        <a:xfrm>
+          <a:off x="0" y="0"/>
+          <a:ext cx="0" cy="0"/>
+          <a:chOff x="0" y="0"/>
+          <a:chExt cx="0" cy="0"/>
+        </a:xfrm>
+      </p:grpSpPr>
+      <p:pic>
+        <p:nvPicPr>
+          <p:cNvPr id="3" name="Picture 2">
+            <a:extLst>
+              <a:ext uri="{FF2B5EF4-FFF2-40B4-BE49-F238E27FC236}">
+                <a16:creationId xmlns:a16="http://schemas.microsoft.com/office/drawing/2014/main" id="{2DE2BF71-C119-FB27-2C28-766CD764C503}"/>
+              </a:ext>
+            </a:extLst>
+          </p:cNvPr>
+          <p:cNvPicPr>
+            <a:picLocks noChangeAspect="1"/>
+          </p:cNvPicPr>
+          <p:nvPr/>
+        </p:nvPicPr>
+        <p:blipFill>
+          <a:blip r:embed="rId2"/>
+          <a:stretch>
+            <a:fillRect/>
+          </a:stretch>
+        </p:blipFill>
+        <p:spPr>
+          <a:xfrm>
+            <a:off x="770964" y="533930"/>
+            <a:ext cx="9187735" cy="5663029"/>
+          </a:xfrm>
+          <a:prstGeom prst="rect">
+            <a:avLst/>
+          </a:prstGeom>
+          <a:ln>
+            <a:solidFill>
+              <a:schemeClr val="tx1"/>
+            </a:solidFill>
+          </a:ln>
+        </p:spPr>
+      </p:pic>
+    </p:spTree>
+    <p:extLst>
+      <p:ext uri="{BB962C8B-B14F-4D97-AF65-F5344CB8AC3E}">
+        <p14:creationId xmlns:p14="http://schemas.microsoft.com/office/powerpoint/2010/main" val="1487455031"/>
+      </p:ext>
+    </p:extLst>
+  </p:cSld>
+  <p:clrMapOvr>
+    <a:masterClrMapping/>
+  </p:clrMapOvr>
+  <p:transition>
+    <p:fade/>
+  </p:transition>
+</p:sld>
+</file>
+
+<file path=ppt/slides/slide82.xml><?xml version="1.0" encoding="utf-8"?>
+<p:sld xmlns:a="http://schemas.openxmlformats.org/drawingml/2006/main" xmlns:r="http://schemas.openxmlformats.org/officeDocument/2006/relationships" xmlns:p="http://schemas.openxmlformats.org/presentationml/2006/main">
+  <p:cSld>
+    <p:spTree>
+      <p:nvGrpSpPr>
+        <p:cNvPr id="1" name=""/>
+        <p:cNvGrpSpPr/>
+        <p:nvPr/>
+      </p:nvGrpSpPr>
+      <p:grpSpPr>
+        <a:xfrm>
+          <a:off x="0" y="0"/>
+          <a:ext cx="0" cy="0"/>
+          <a:chOff x="0" y="0"/>
+          <a:chExt cx="0" cy="0"/>
+        </a:xfrm>
+      </p:grpSpPr>
+      <p:pic>
+        <p:nvPicPr>
+          <p:cNvPr id="2" name="Picture 1">
+            <a:extLst>
+              <a:ext uri="{FF2B5EF4-FFF2-40B4-BE49-F238E27FC236}">
+                <a16:creationId xmlns:a16="http://schemas.microsoft.com/office/drawing/2014/main" id="{F46C67E7-2B52-73C5-5AFD-176FAF53B524}"/>
+              </a:ext>
+            </a:extLst>
+          </p:cNvPr>
+          <p:cNvPicPr>
+            <a:picLocks noChangeAspect="1"/>
+          </p:cNvPicPr>
+          <p:nvPr/>
+        </p:nvPicPr>
+        <p:blipFill>
+          <a:blip r:embed="rId2"/>
+          <a:stretch>
+            <a:fillRect/>
+          </a:stretch>
+        </p:blipFill>
+        <p:spPr>
+          <a:xfrm>
+            <a:off x="1567703" y="808355"/>
+            <a:ext cx="2442876" cy="2302398"/>
+          </a:xfrm>
+          <a:prstGeom prst="rect">
+            <a:avLst/>
+          </a:prstGeom>
+        </p:spPr>
+      </p:pic>
+    </p:spTree>
+    <p:extLst>
+      <p:ext uri="{BB962C8B-B14F-4D97-AF65-F5344CB8AC3E}">
+        <p14:creationId xmlns:p14="http://schemas.microsoft.com/office/powerpoint/2010/main" val="1337774511"/>
+      </p:ext>
+    </p:extLst>
+  </p:cSld>
+  <p:clrMapOvr>
+    <a:masterClrMapping/>
+  </p:clrMapOvr>
+  <p:transition>
+    <p:fade/>
+  </p:transition>
+</p:sld>
+</file>
+
+<file path=ppt/slides/slide83.xml><?xml version="1.0" encoding="utf-8"?>
+<p:sld xmlns:a="http://schemas.openxmlformats.org/drawingml/2006/main" xmlns:r="http://schemas.openxmlformats.org/officeDocument/2006/relationships" xmlns:p="http://schemas.openxmlformats.org/presentationml/2006/main">
+  <p:cSld>
+    <p:spTree>
+      <p:nvGrpSpPr>
+        <p:cNvPr id="1" name=""/>
+        <p:cNvGrpSpPr/>
+        <p:nvPr/>
+      </p:nvGrpSpPr>
+      <p:grpSpPr>
+        <a:xfrm>
+          <a:off x="0" y="0"/>
+          <a:ext cx="0" cy="0"/>
+          <a:chOff x="0" y="0"/>
+          <a:chExt cx="0" cy="0"/>
+        </a:xfrm>
+      </p:grpSpPr>
+      <p:pic>
+        <p:nvPicPr>
+          <p:cNvPr id="3" name="Picture 2">
+            <a:extLst>
+              <a:ext uri="{FF2B5EF4-FFF2-40B4-BE49-F238E27FC236}">
+                <a16:creationId xmlns:a16="http://schemas.microsoft.com/office/drawing/2014/main" id="{ABDCC9FE-FDF8-87B1-D54D-34AF76D23B87}"/>
+              </a:ext>
+            </a:extLst>
+          </p:cNvPr>
+          <p:cNvPicPr>
+            <a:picLocks noChangeAspect="1"/>
+          </p:cNvPicPr>
+          <p:nvPr/>
+        </p:nvPicPr>
+        <p:blipFill>
+          <a:blip r:embed="rId2"/>
+          <a:stretch>
+            <a:fillRect/>
+          </a:stretch>
+        </p:blipFill>
+        <p:spPr>
+          <a:xfrm>
+            <a:off x="1781618" y="1246094"/>
+            <a:ext cx="8873237" cy="4078104"/>
+          </a:xfrm>
+          <a:prstGeom prst="rect">
+            <a:avLst/>
+          </a:prstGeom>
+          <a:ln>
+            <a:solidFill>
+              <a:schemeClr val="tx1"/>
+            </a:solidFill>
+          </a:ln>
+        </p:spPr>
+      </p:pic>
+    </p:spTree>
+    <p:extLst>
+      <p:ext uri="{BB962C8B-B14F-4D97-AF65-F5344CB8AC3E}">
+        <p14:creationId xmlns:p14="http://schemas.microsoft.com/office/powerpoint/2010/main" val="3016333041"/>
       </p:ext>
     </p:extLst>
   </p:cSld>
@@ -43599,6 +45970,15 @@
 </file>
 
 <file path=customXml/item1.xml><?xml version="1.0" encoding="utf-8"?>
+<?mso-contentType ?>
+<FormTemplates xmlns="http://schemas.microsoft.com/sharepoint/v3/contenttype/forms">
+  <Display>DocumentLibraryForm</Display>
+  <Edit>DocumentLibraryForm</Edit>
+  <New>DocumentLibraryForm</New>
+</FormTemplates>
+</file>
+
+<file path=customXml/item2.xml><?xml version="1.0" encoding="utf-8"?>
 <ct:contentTypeSchema xmlns:ct="http://schemas.microsoft.com/office/2006/metadata/contentType" xmlns:ma="http://schemas.microsoft.com/office/2006/metadata/properties/metaAttributes" ct:_="" ma:_="" ma:contentTypeName="Document" ma:contentTypeID="0x010100B63AD2D799A0384499DFA8618B2D06C3" ma:contentTypeVersion="19" ma:contentTypeDescription="Create a new document." ma:contentTypeScope="" ma:versionID="4ad8bb11041bccc4900be347311affd5">
   <xsd:schema xmlns:xsd="http://www.w3.org/2001/XMLSchema" xmlns:xs="http://www.w3.org/2001/XMLSchema" xmlns:p="http://schemas.microsoft.com/office/2006/metadata/properties" xmlns:ns1="http://schemas.microsoft.com/sharepoint/v3" xmlns:ns3="3c10a0e8-556e-4c2d-9121-1181542ea83c" xmlns:ns4="91f22b01-9196-48cc-8d58-ee179122dd75" targetNamespace="http://schemas.microsoft.com/office/2006/metadata/properties" ma:root="true" ma:fieldsID="55cc422832b79ebb748bec44d447ca3b" ns1:_="" ns3:_="" ns4:_="">
     <xsd:import namespace="http://schemas.microsoft.com/sharepoint/v3"/>
@@ -43862,7 +46242,7 @@
 </ct:contentTypeSchema>
 </file>
 
-<file path=customXml/item2.xml><?xml version="1.0" encoding="utf-8"?>
+<file path=customXml/item3.xml><?xml version="1.0" encoding="utf-8"?>
 <p:properties xmlns:p="http://schemas.microsoft.com/office/2006/metadata/properties" xmlns:xsi="http://www.w3.org/2001/XMLSchema-instance" xmlns:pc="http://schemas.microsoft.com/office/infopath/2007/PartnerControls">
   <documentManagement>
     <_ip_UnifiedCompliancePolicyUIAction xmlns="http://schemas.microsoft.com/sharepoint/v3" xsi:nil="true"/>
@@ -43872,16 +46252,15 @@
 </p:properties>
 </file>
 
-<file path=customXml/item3.xml><?xml version="1.0" encoding="utf-8"?>
-<?mso-contentType ?>
-<FormTemplates xmlns="http://schemas.microsoft.com/sharepoint/v3/contenttype/forms">
-  <Display>DocumentLibraryForm</Display>
-  <Edit>DocumentLibraryForm</Edit>
-  <New>DocumentLibraryForm</New>
-</FormTemplates>
+<file path=customXml/itemProps1.xml><?xml version="1.0" encoding="utf-8"?>
+<ds:datastoreItem xmlns:ds="http://schemas.openxmlformats.org/officeDocument/2006/customXml" ds:itemID="{758FDAC0-319D-4A54-8D8E-1D42CB1F8004}">
+  <ds:schemaRefs>
+    <ds:schemaRef ds:uri="http://schemas.microsoft.com/sharepoint/v3/contenttype/forms"/>
+  </ds:schemaRefs>
+</ds:datastoreItem>
 </file>
 
-<file path=customXml/itemProps1.xml><?xml version="1.0" encoding="utf-8"?>
+<file path=customXml/itemProps2.xml><?xml version="1.0" encoding="utf-8"?>
 <ds:datastoreItem xmlns:ds="http://schemas.openxmlformats.org/officeDocument/2006/customXml" ds:itemID="{C2411704-DA91-4A2A-81D1-00044852D0BE}">
   <ds:schemaRefs>
     <ds:schemaRef ds:uri="3c10a0e8-556e-4c2d-9121-1181542ea83c"/>
@@ -43901,7 +46280,7 @@
 </ds:datastoreItem>
 </file>
 
-<file path=customXml/itemProps2.xml><?xml version="1.0" encoding="utf-8"?>
+<file path=customXml/itemProps3.xml><?xml version="1.0" encoding="utf-8"?>
 <ds:datastoreItem xmlns:ds="http://schemas.openxmlformats.org/officeDocument/2006/customXml" ds:itemID="{F990F116-B58F-4255-B05B-DA3808E0E5C6}">
   <ds:schemaRefs>
     <ds:schemaRef ds:uri="http://schemas.openxmlformats.org/package/2006/metadata/core-properties"/>
@@ -43919,14 +46298,6 @@
 </ds:datastoreItem>
 </file>
 
-<file path=customXml/itemProps3.xml><?xml version="1.0" encoding="utf-8"?>
-<ds:datastoreItem xmlns:ds="http://schemas.openxmlformats.org/officeDocument/2006/customXml" ds:itemID="{758FDAC0-319D-4A54-8D8E-1D42CB1F8004}">
-  <ds:schemaRefs>
-    <ds:schemaRef ds:uri="http://schemas.microsoft.com/sharepoint/v3/contenttype/forms"/>
-  </ds:schemaRefs>
-</ds:datastoreItem>
-</file>
-
 <file path=docMetadata/LabelInfo.xml><?xml version="1.0" encoding="utf-8"?>
 <clbl:labelList xmlns:clbl="http://schemas.microsoft.com/office/2020/mipLabelMetadata">
   <clbl:label id="{87867195-f2b8-4ac2-b0b6-6bb73cb33afc}" enabled="1" method="Privileged" siteId="{72f988bf-86f1-41af-91ab-2d7cd011db47}" removed="0"/>

--- a/pptx/Best Practices with Fabric CI-CD.pptx
+++ b/pptx/Best Practices with Fabric CI-CD.pptx
@@ -632,7 +632,7 @@
           <a:p>
             <a:fld id="{DCE60099-03E7-4FA1-8A7F-E6E6CFB0F855}" type="datetime8">
               <a:rPr lang="en-US" smtClean="0"/>
-              <a:t>5/25/2026 12:51 PM</a:t>
+              <a:t>5/31/2026 2:46 PM</a:t>
             </a:fld>
             <a:endParaRPr lang="en-US"/>
           </a:p>
@@ -11740,8 +11740,8 @@
         </p:nvSpPr>
         <p:spPr bwMode="auto">
           <a:xfrm>
-            <a:off x="677510" y="756685"/>
-            <a:ext cx="4626011" cy="1346435"/>
+            <a:off x="677510" y="550498"/>
+            <a:ext cx="4626011" cy="1346436"/>
           </a:xfrm>
           <a:prstGeom prst="rect">
             <a:avLst/>
@@ -11775,7 +11775,7 @@
           </a:fontRef>
         </p:style>
         <p:txBody>
-          <a:bodyPr rot="0" spcFirstLastPara="0" vertOverflow="overflow" horzOverflow="overflow" vert="horz" wrap="square" lIns="0" tIns="91440" rIns="0" bIns="91440" numCol="1" spcCol="0" rtlCol="0" fromWordArt="0" anchor="b" anchorCtr="0" forceAA="0" compatLnSpc="1">
+          <a:bodyPr rot="0" spcFirstLastPara="0" vertOverflow="overflow" horzOverflow="overflow" vert="horz" wrap="square" lIns="0" tIns="91440" rIns="0" bIns="91440" numCol="1" spcCol="0" rtlCol="0" fromWordArt="0" anchor="t" anchorCtr="0" forceAA="0" compatLnSpc="1">
             <a:prstTxWarp prst="textNoShape">
               <a:avLst/>
             </a:prstTxWarp>
@@ -12153,8 +12153,8 @@
         </p:nvSpPr>
         <p:spPr bwMode="auto">
           <a:xfrm>
-            <a:off x="5958790" y="765655"/>
-            <a:ext cx="1910650" cy="1346435"/>
+            <a:off x="5958790" y="559469"/>
+            <a:ext cx="1910650" cy="1337466"/>
           </a:xfrm>
           <a:prstGeom prst="rect">
             <a:avLst/>
@@ -12188,7 +12188,7 @@
           </a:fontRef>
         </p:style>
         <p:txBody>
-          <a:bodyPr rot="0" spcFirstLastPara="0" vertOverflow="overflow" horzOverflow="overflow" vert="horz" wrap="square" lIns="0" tIns="91440" rIns="0" bIns="91440" numCol="1" spcCol="0" rtlCol="0" fromWordArt="0" anchor="b" anchorCtr="0" forceAA="0" compatLnSpc="1">
+          <a:bodyPr rot="0" spcFirstLastPara="0" vertOverflow="overflow" horzOverflow="overflow" vert="horz" wrap="square" lIns="0" tIns="91440" rIns="0" bIns="91440" numCol="1" spcCol="0" rtlCol="0" fromWordArt="0" anchor="t" anchorCtr="0" forceAA="0" compatLnSpc="1">
             <a:prstTxWarp prst="textNoShape">
               <a:avLst/>
             </a:prstTxWarp>
@@ -12303,56 +12303,8 @@
                 <a:ea typeface="Segoe UI" pitchFamily="34" charset="0"/>
                 <a:cs typeface="Segoe UI" pitchFamily="34" charset="0"/>
               </a:rPr>
-              <a:t>local</a:t>
+              <a:t>local folder</a:t>
             </a:r>
-          </a:p>
-          <a:p>
-            <a:pPr algn="ctr" defTabSz="932472" fontAlgn="base">
-              <a:lnSpc>
-                <a:spcPct val="90000"/>
-              </a:lnSpc>
-              <a:spcBef>
-                <a:spcPct val="0"/>
-              </a:spcBef>
-              <a:spcAft>
-                <a:spcPct val="0"/>
-              </a:spcAft>
-            </a:pPr>
-            <a:r>
-              <a:rPr lang="en-US" sz="1200" b="1" dirty="0">
-                <a:gradFill>
-                  <a:gsLst>
-                    <a:gs pos="0">
-                      <a:srgbClr val="FFFFFF"/>
-                    </a:gs>
-                    <a:gs pos="100000">
-                      <a:srgbClr val="FFFFFF"/>
-                    </a:gs>
-                  </a:gsLst>
-                  <a:lin ang="5400000" scaled="0"/>
-                </a:gradFill>
-                <a:latin typeface="Lucida Console" panose="020B0609040504020204" pitchFamily="49" charset="0"/>
-                <a:ea typeface="Segoe UI" pitchFamily="34" charset="0"/>
-                <a:cs typeface="Segoe UI" pitchFamily="34" charset="0"/>
-              </a:rPr>
-              <a:t>files</a:t>
-            </a:r>
-            <a:endParaRPr lang="en-US" sz="1200" dirty="0">
-              <a:gradFill>
-                <a:gsLst>
-                  <a:gs pos="0">
-                    <a:srgbClr val="FFFFFF"/>
-                  </a:gs>
-                  <a:gs pos="100000">
-                    <a:srgbClr val="FFFFFF"/>
-                  </a:gs>
-                </a:gsLst>
-                <a:lin ang="5400000" scaled="0"/>
-              </a:gradFill>
-              <a:latin typeface="Lucida Console" panose="020B0609040504020204" pitchFamily="49" charset="0"/>
-              <a:ea typeface="Segoe UI" pitchFamily="34" charset="0"/>
-              <a:cs typeface="Segoe UI" pitchFamily="34" charset="0"/>
-            </a:endParaRPr>
           </a:p>
         </p:txBody>
       </p:sp>
@@ -12704,8 +12656,8 @@
         </p:nvSpPr>
         <p:spPr bwMode="auto">
           <a:xfrm>
-            <a:off x="5379666" y="1567924"/>
-            <a:ext cx="4626011" cy="3045061"/>
+            <a:off x="5352771" y="1572566"/>
+            <a:ext cx="4626011" cy="2790812"/>
           </a:xfrm>
           <a:prstGeom prst="rect">
             <a:avLst/>
@@ -12739,7 +12691,7 @@
           </a:fontRef>
         </p:style>
         <p:txBody>
-          <a:bodyPr rot="0" spcFirstLastPara="0" vertOverflow="overflow" horzOverflow="overflow" vert="horz" wrap="square" lIns="0" tIns="91440" rIns="0" bIns="91440" numCol="1" spcCol="0" rtlCol="0" fromWordArt="0" anchor="b" anchorCtr="0" forceAA="0" compatLnSpc="1">
+          <a:bodyPr rot="0" spcFirstLastPara="0" vertOverflow="overflow" horzOverflow="overflow" vert="horz" wrap="square" lIns="0" tIns="91440" rIns="0" bIns="91440" numCol="1" spcCol="0" rtlCol="0" fromWordArt="0" anchor="t" anchorCtr="0" forceAA="0" compatLnSpc="1">
             <a:prstTxWarp prst="textNoShape">
               <a:avLst/>
             </a:prstTxWarp>
@@ -12758,16 +12710,13 @@
                 <a:spcPct val="0"/>
               </a:spcAft>
             </a:pPr>
-            <a:r>
-              <a:rPr lang="en-US" sz="1200" b="1" dirty="0">
-                <a:solidFill>
-                  <a:schemeClr val="tx1"/>
-                </a:solidFill>
-                <a:ea typeface="Segoe UI" pitchFamily="34" charset="0"/>
-                <a:cs typeface="Segoe UI" pitchFamily="34" charset="0"/>
-              </a:rPr>
-              <a:t>Origin GIT Repository</a:t>
-            </a:r>
+            <a:endParaRPr lang="en-US" sz="1200" b="1" dirty="0">
+              <a:solidFill>
+                <a:schemeClr val="tx1"/>
+              </a:solidFill>
+              <a:ea typeface="Segoe UI" pitchFamily="34" charset="0"/>
+              <a:cs typeface="Segoe UI" pitchFamily="34" charset="0"/>
+            </a:endParaRPr>
           </a:p>
         </p:txBody>
       </p:sp>
@@ -12785,7 +12734,7 @@
         </p:nvSpPr>
         <p:spPr bwMode="auto">
           <a:xfrm>
-            <a:off x="7053536" y="3521009"/>
+            <a:off x="7026641" y="3506949"/>
             <a:ext cx="1333597" cy="528569"/>
           </a:xfrm>
           <a:prstGeom prst="rightArrow">
@@ -12873,7 +12822,7 @@
         </p:nvSpPr>
         <p:spPr bwMode="auto">
           <a:xfrm>
-            <a:off x="5670283" y="3379307"/>
+            <a:off x="5643388" y="3365247"/>
             <a:ext cx="1343228" cy="811973"/>
           </a:xfrm>
           <a:prstGeom prst="rect">
@@ -12993,7 +12942,7 @@
         </p:nvSpPr>
         <p:spPr bwMode="auto">
           <a:xfrm>
-            <a:off x="8426795" y="3379307"/>
+            <a:off x="8399900" y="3365247"/>
             <a:ext cx="1343228" cy="811973"/>
           </a:xfrm>
           <a:prstGeom prst="rect">
@@ -13117,8 +13066,8 @@
         </p:nvSpPr>
         <p:spPr bwMode="auto">
           <a:xfrm>
-            <a:off x="1681655" y="1567924"/>
-            <a:ext cx="3357419" cy="2962036"/>
+            <a:off x="2967318" y="1572566"/>
+            <a:ext cx="1936384" cy="2790812"/>
           </a:xfrm>
           <a:prstGeom prst="rect">
             <a:avLst/>
@@ -13152,7 +13101,7 @@
           </a:fontRef>
         </p:style>
         <p:txBody>
-          <a:bodyPr rot="0" spcFirstLastPara="0" vertOverflow="overflow" horzOverflow="overflow" vert="horz" wrap="square" lIns="0" tIns="91440" rIns="0" bIns="91440" numCol="1" spcCol="0" rtlCol="0" fromWordArt="0" anchor="b" anchorCtr="0" forceAA="0" compatLnSpc="1">
+          <a:bodyPr rot="0" spcFirstLastPara="0" vertOverflow="overflow" horzOverflow="overflow" vert="horz" wrap="square" lIns="0" tIns="91440" rIns="0" bIns="91440" numCol="1" spcCol="0" rtlCol="0" fromWordArt="0" anchor="t" anchorCtr="0" forceAA="0" compatLnSpc="1">
             <a:prstTxWarp prst="textNoShape">
               <a:avLst/>
             </a:prstTxWarp>
@@ -13171,16 +13120,13 @@
                 <a:spcPct val="0"/>
               </a:spcAft>
             </a:pPr>
-            <a:r>
-              <a:rPr lang="en-US" sz="1200" b="1" dirty="0">
-                <a:solidFill>
-                  <a:schemeClr val="tx1"/>
-                </a:solidFill>
-                <a:ea typeface="Segoe UI" pitchFamily="34" charset="0"/>
-                <a:cs typeface="Segoe UI" pitchFamily="34" charset="0"/>
-              </a:rPr>
-              <a:t>Developer Desktop</a:t>
-            </a:r>
+            <a:endParaRPr lang="en-US" sz="1200" b="1" dirty="0">
+              <a:solidFill>
+                <a:schemeClr val="tx1"/>
+              </a:solidFill>
+              <a:ea typeface="Segoe UI" pitchFamily="34" charset="0"/>
+              <a:cs typeface="Segoe UI" pitchFamily="34" charset="0"/>
+            </a:endParaRPr>
           </a:p>
         </p:txBody>
       </p:sp>
@@ -13198,8 +13144,8 @@
         </p:nvSpPr>
         <p:spPr bwMode="auto">
           <a:xfrm>
-            <a:off x="2406872" y="3379307"/>
-            <a:ext cx="1681069" cy="811973"/>
+            <a:off x="3254931" y="3365247"/>
+            <a:ext cx="1343228" cy="811973"/>
           </a:xfrm>
           <a:prstGeom prst="rect">
             <a:avLst/>
@@ -13322,94 +13268,6 @@
       </p:sp>
       <p:sp>
         <p:nvSpPr>
-          <p:cNvPr id="23" name="Arrow: Right 22">
-            <a:extLst>
-              <a:ext uri="{FF2B5EF4-FFF2-40B4-BE49-F238E27FC236}">
-                <a16:creationId xmlns:a16="http://schemas.microsoft.com/office/drawing/2014/main" id="{31E0F7B1-A1A2-845B-9CE1-3BEBB7DD0CEF}"/>
-              </a:ext>
-            </a:extLst>
-          </p:cNvPr>
-          <p:cNvSpPr/>
-          <p:nvPr/>
-        </p:nvSpPr>
-        <p:spPr bwMode="auto">
-          <a:xfrm>
-            <a:off x="4127602" y="3521009"/>
-            <a:ext cx="1481105" cy="528569"/>
-          </a:xfrm>
-          <a:prstGeom prst="rightArrow">
-            <a:avLst>
-              <a:gd name="adj1" fmla="val 62678"/>
-              <a:gd name="adj2" fmla="val 84775"/>
-            </a:avLst>
-          </a:prstGeom>
-          <a:solidFill>
-            <a:srgbClr val="8A0000"/>
-          </a:solidFill>
-          <a:ln>
-            <a:noFill/>
-            <a:headEnd type="none" w="med" len="med"/>
-            <a:tailEnd type="none" w="med" len="med"/>
-          </a:ln>
-          <a:effectLst/>
-        </p:spPr>
-        <p:style>
-          <a:lnRef idx="1">
-            <a:schemeClr val="accent2"/>
-          </a:lnRef>
-          <a:fillRef idx="3">
-            <a:schemeClr val="accent2"/>
-          </a:fillRef>
-          <a:effectRef idx="2">
-            <a:schemeClr val="accent2"/>
-          </a:effectRef>
-          <a:fontRef idx="minor">
-            <a:schemeClr val="lt1"/>
-          </a:fontRef>
-        </p:style>
-        <p:txBody>
-          <a:bodyPr rot="0" spcFirstLastPara="0" vertOverflow="overflow" horzOverflow="overflow" vert="horz" wrap="square" lIns="0" tIns="0" rIns="0" bIns="0" numCol="1" spcCol="0" rtlCol="0" fromWordArt="0" anchor="ctr" anchorCtr="0" forceAA="0" compatLnSpc="1">
-            <a:prstTxWarp prst="textNoShape">
-              <a:avLst/>
-            </a:prstTxWarp>
-            <a:noAutofit/>
-          </a:bodyPr>
-          <a:lstStyle/>
-          <a:p>
-            <a:pPr algn="ctr" defTabSz="932472" fontAlgn="base">
-              <a:lnSpc>
-                <a:spcPct val="90000"/>
-              </a:lnSpc>
-              <a:spcBef>
-                <a:spcPct val="0"/>
-              </a:spcBef>
-              <a:spcAft>
-                <a:spcPct val="0"/>
-              </a:spcAft>
-            </a:pPr>
-            <a:r>
-              <a:rPr lang="en-US" sz="1100" b="1" dirty="0">
-                <a:gradFill>
-                  <a:gsLst>
-                    <a:gs pos="0">
-                      <a:srgbClr val="FFFFFF"/>
-                    </a:gs>
-                    <a:gs pos="100000">
-                      <a:srgbClr val="FFFFFF"/>
-                    </a:gs>
-                  </a:gsLst>
-                  <a:lin ang="5400000" scaled="0"/>
-                </a:gradFill>
-                <a:ea typeface="Segoe UI" pitchFamily="34" charset="0"/>
-                <a:cs typeface="Segoe UI" pitchFamily="34" charset="0"/>
-              </a:rPr>
-              <a:t>git push</a:t>
-            </a:r>
-          </a:p>
-        </p:txBody>
-      </p:sp>
-      <p:sp>
-        <p:nvSpPr>
           <p:cNvPr id="4" name="Rectangle 3">
             <a:extLst>
               <a:ext uri="{FF2B5EF4-FFF2-40B4-BE49-F238E27FC236}">
@@ -13422,7 +13280,7 @@
         </p:nvSpPr>
         <p:spPr bwMode="auto">
           <a:xfrm>
-            <a:off x="5670283" y="1731489"/>
+            <a:off x="5643388" y="1731489"/>
             <a:ext cx="1343228" cy="899269"/>
           </a:xfrm>
           <a:prstGeom prst="rect">
@@ -13526,7 +13384,7 @@
         </p:nvSpPr>
         <p:spPr bwMode="auto">
           <a:xfrm>
-            <a:off x="5973163" y="2683230"/>
+            <a:off x="5946268" y="2683230"/>
             <a:ext cx="737468" cy="643605"/>
           </a:xfrm>
           <a:prstGeom prst="upArrow">
@@ -13631,96 +13489,6 @@
           </a:p>
         </p:txBody>
       </p:sp>
-      <p:cxnSp>
-        <p:nvCxnSpPr>
-          <p:cNvPr id="24" name="Straight Arrow Connector 23">
-            <a:extLst>
-              <a:ext uri="{FF2B5EF4-FFF2-40B4-BE49-F238E27FC236}">
-                <a16:creationId xmlns:a16="http://schemas.microsoft.com/office/drawing/2014/main" id="{1A835A39-F449-CE92-7829-1CD940557538}"/>
-              </a:ext>
-            </a:extLst>
-          </p:cNvPr>
-          <p:cNvCxnSpPr>
-            <a:cxnSpLocks/>
-          </p:cNvCxnSpPr>
-          <p:nvPr/>
-        </p:nvCxnSpPr>
-        <p:spPr>
-          <a:xfrm>
-            <a:off x="2469724" y="2288717"/>
-            <a:ext cx="400050" cy="1062470"/>
-          </a:xfrm>
-          <a:prstGeom prst="straightConnector1">
-            <a:avLst/>
-          </a:prstGeom>
-          <a:ln w="76200">
-            <a:solidFill>
-              <a:srgbClr val="C00000"/>
-            </a:solidFill>
-            <a:headEnd type="none"/>
-            <a:tailEnd type="triangle"/>
-          </a:ln>
-        </p:spPr>
-        <p:style>
-          <a:lnRef idx="1">
-            <a:schemeClr val="accent1"/>
-          </a:lnRef>
-          <a:fillRef idx="0">
-            <a:schemeClr val="accent1"/>
-          </a:fillRef>
-          <a:effectRef idx="0">
-            <a:schemeClr val="accent1"/>
-          </a:effectRef>
-          <a:fontRef idx="minor">
-            <a:schemeClr val="tx1"/>
-          </a:fontRef>
-        </p:style>
-      </p:cxnSp>
-      <p:cxnSp>
-        <p:nvCxnSpPr>
-          <p:cNvPr id="25" name="Straight Arrow Connector 24">
-            <a:extLst>
-              <a:ext uri="{FF2B5EF4-FFF2-40B4-BE49-F238E27FC236}">
-                <a16:creationId xmlns:a16="http://schemas.microsoft.com/office/drawing/2014/main" id="{8C911DCF-62BD-3791-1A0C-190A9AC9FC0F}"/>
-              </a:ext>
-            </a:extLst>
-          </p:cNvPr>
-          <p:cNvCxnSpPr>
-            <a:cxnSpLocks/>
-          </p:cNvCxnSpPr>
-          <p:nvPr/>
-        </p:nvCxnSpPr>
-        <p:spPr>
-          <a:xfrm flipH="1">
-            <a:off x="3595850" y="2486144"/>
-            <a:ext cx="389659" cy="865043"/>
-          </a:xfrm>
-          <a:prstGeom prst="straightConnector1">
-            <a:avLst/>
-          </a:prstGeom>
-          <a:ln w="76200">
-            <a:solidFill>
-              <a:srgbClr val="C00000"/>
-            </a:solidFill>
-            <a:headEnd type="none"/>
-            <a:tailEnd type="triangle"/>
-          </a:ln>
-        </p:spPr>
-        <p:style>
-          <a:lnRef idx="1">
-            <a:schemeClr val="accent1"/>
-          </a:lnRef>
-          <a:fillRef idx="0">
-            <a:schemeClr val="accent1"/>
-          </a:fillRef>
-          <a:effectRef idx="0">
-            <a:schemeClr val="accent1"/>
-          </a:effectRef>
-          <a:fontRef idx="minor">
-            <a:schemeClr val="tx1"/>
-          </a:fontRef>
-        </p:style>
-      </p:cxnSp>
       <p:grpSp>
         <p:nvGrpSpPr>
           <p:cNvPr id="20" name="Group 19">
@@ -13735,7 +13503,7 @@
         </p:nvGrpSpPr>
         <p:grpSpPr>
           <a:xfrm>
-            <a:off x="1839336" y="1726778"/>
+            <a:off x="3257699" y="1727405"/>
             <a:ext cx="1337692" cy="908691"/>
             <a:chOff x="6687092" y="5040219"/>
             <a:chExt cx="1337692" cy="908691"/>
@@ -13852,137 +13620,213 @@
           </p:spPr>
         </p:pic>
       </p:grpSp>
-      <p:grpSp>
-        <p:nvGrpSpPr>
-          <p:cNvPr id="18" name="Group 17">
+      <p:sp>
+        <p:nvSpPr>
+          <p:cNvPr id="12" name="Arrow: Down 11">
             <a:extLst>
               <a:ext uri="{FF2B5EF4-FFF2-40B4-BE49-F238E27FC236}">
-                <a16:creationId xmlns:a16="http://schemas.microsoft.com/office/drawing/2014/main" id="{20578ADB-7FB4-1A18-A6AB-003B41DFD930}"/>
+                <a16:creationId xmlns:a16="http://schemas.microsoft.com/office/drawing/2014/main" id="{B6A92A04-E48D-0625-4131-FCA165DAE481}"/>
               </a:ext>
             </a:extLst>
           </p:cNvPr>
-          <p:cNvGrpSpPr/>
+          <p:cNvSpPr/>
           <p:nvPr/>
-        </p:nvGrpSpPr>
-        <p:grpSpPr>
+        </p:nvSpPr>
+        <p:spPr bwMode="auto">
           <a:xfrm>
-            <a:off x="3439205" y="1726778"/>
-            <a:ext cx="1337692" cy="908691"/>
-            <a:chOff x="8583549" y="5040219"/>
-            <a:chExt cx="1337692" cy="908691"/>
+            <a:off x="3534629" y="2630758"/>
+            <a:ext cx="783832" cy="696077"/>
           </a:xfrm>
-        </p:grpSpPr>
-        <p:sp>
-          <p:nvSpPr>
-            <p:cNvPr id="16" name="Rectangle 15">
-              <a:extLst>
-                <a:ext uri="{FF2B5EF4-FFF2-40B4-BE49-F238E27FC236}">
-                  <a16:creationId xmlns:a16="http://schemas.microsoft.com/office/drawing/2014/main" id="{A1993B70-6124-B31E-D5A5-2234E0F9FA7A}"/>
-                </a:ext>
-              </a:extLst>
-            </p:cNvPr>
-            <p:cNvSpPr/>
-            <p:nvPr/>
-          </p:nvSpPr>
-          <p:spPr bwMode="auto">
-            <a:xfrm>
-              <a:off x="8583549" y="5040219"/>
-              <a:ext cx="1337692" cy="908691"/>
-            </a:xfrm>
-            <a:prstGeom prst="rect">
+          <a:prstGeom prst="downArrow">
+            <a:avLst>
+              <a:gd name="adj1" fmla="val 76918"/>
+              <a:gd name="adj2" fmla="val 50000"/>
+            </a:avLst>
+          </a:prstGeom>
+          <a:solidFill>
+            <a:srgbClr val="8A0000"/>
+          </a:solidFill>
+          <a:ln>
+            <a:noFill/>
+            <a:headEnd type="none" w="med" len="med"/>
+            <a:tailEnd type="none" w="med" len="med"/>
+          </a:ln>
+          <a:effectLst/>
+        </p:spPr>
+        <p:style>
+          <a:lnRef idx="1">
+            <a:schemeClr val="accent2"/>
+          </a:lnRef>
+          <a:fillRef idx="3">
+            <a:schemeClr val="accent2"/>
+          </a:fillRef>
+          <a:effectRef idx="2">
+            <a:schemeClr val="accent2"/>
+          </a:effectRef>
+          <a:fontRef idx="minor">
+            <a:schemeClr val="lt1"/>
+          </a:fontRef>
+        </p:style>
+        <p:txBody>
+          <a:bodyPr rot="0" spcFirstLastPara="0" vertOverflow="overflow" horzOverflow="overflow" vert="horz" wrap="square" lIns="0" tIns="0" rIns="0" bIns="0" numCol="1" spcCol="0" rtlCol="0" fromWordArt="0" anchor="b" anchorCtr="0" forceAA="0" compatLnSpc="1">
+            <a:prstTxWarp prst="textNoShape">
               <a:avLst/>
-            </a:prstGeom>
-            <a:solidFill>
-              <a:schemeClr val="bg1"/>
-            </a:solidFill>
-            <a:ln>
-              <a:solidFill>
-                <a:schemeClr val="tx1"/>
-              </a:solidFill>
-              <a:headEnd type="none" w="med" len="med"/>
-              <a:tailEnd type="none" w="med" len="med"/>
-            </a:ln>
-            <a:effectLst/>
-          </p:spPr>
-          <p:style>
-            <a:lnRef idx="1">
-              <a:schemeClr val="accent2"/>
-            </a:lnRef>
-            <a:fillRef idx="3">
-              <a:schemeClr val="accent2"/>
-            </a:fillRef>
-            <a:effectRef idx="2">
-              <a:schemeClr val="accent2"/>
-            </a:effectRef>
-            <a:fontRef idx="minor">
-              <a:schemeClr val="lt1"/>
-            </a:fontRef>
-          </p:style>
-          <p:txBody>
-            <a:bodyPr rot="0" spcFirstLastPara="0" vertOverflow="overflow" horzOverflow="overflow" vert="horz" wrap="square" lIns="0" tIns="91440" rIns="0" bIns="91440" numCol="1" spcCol="0" rtlCol="0" fromWordArt="0" anchor="t" anchorCtr="0" forceAA="0" compatLnSpc="1">
-              <a:prstTxWarp prst="textNoShape">
-                <a:avLst/>
-              </a:prstTxWarp>
-              <a:noAutofit/>
-            </a:bodyPr>
-            <a:lstStyle/>
-            <a:p>
-              <a:pPr algn="ctr" defTabSz="932472" fontAlgn="base">
-                <a:lnSpc>
-                  <a:spcPct val="90000"/>
-                </a:lnSpc>
-                <a:spcBef>
-                  <a:spcPct val="0"/>
-                </a:spcBef>
-                <a:spcAft>
-                  <a:spcPct val="0"/>
-                </a:spcAft>
-              </a:pPr>
-              <a:r>
-                <a:rPr lang="en-US" sz="800" b="1" dirty="0">
-                  <a:solidFill>
-                    <a:schemeClr val="tx1"/>
-                  </a:solidFill>
-                  <a:latin typeface="Lucida Console" panose="020B0609040504020204" pitchFamily="49" charset="0"/>
-                  <a:ea typeface="Segoe UI" pitchFamily="34" charset="0"/>
-                  <a:cs typeface="Segoe UI" pitchFamily="34" charset="0"/>
-                </a:rPr>
-                <a:t>Power BI Desktop</a:t>
-              </a:r>
-            </a:p>
-          </p:txBody>
-        </p:sp>
-        <p:pic>
-          <p:nvPicPr>
-            <p:cNvPr id="10" name="Picture 9" descr="Power-BI.png">
-              <a:extLst>
-                <a:ext uri="{FF2B5EF4-FFF2-40B4-BE49-F238E27FC236}">
-                  <a16:creationId xmlns:a16="http://schemas.microsoft.com/office/drawing/2014/main" id="{5D591FD8-7EA8-2EAE-064F-88190967BC7C}"/>
-                </a:ext>
-              </a:extLst>
-            </p:cNvPr>
-            <p:cNvPicPr>
-              <a:picLocks noChangeAspect="1"/>
-            </p:cNvPicPr>
-            <p:nvPr/>
-          </p:nvPicPr>
-          <p:blipFill>
-            <a:blip r:embed="rId3"/>
-            <a:stretch>
-              <a:fillRect/>
-            </a:stretch>
-          </p:blipFill>
-          <p:spPr>
-            <a:xfrm>
-              <a:off x="8982241" y="5298115"/>
-              <a:ext cx="422625" cy="563499"/>
-            </a:xfrm>
-            <a:prstGeom prst="rect">
+            </a:prstTxWarp>
+            <a:noAutofit/>
+          </a:bodyPr>
+          <a:lstStyle/>
+          <a:p>
+            <a:pPr algn="ctr" defTabSz="932472" fontAlgn="base">
+              <a:lnSpc>
+                <a:spcPct val="90000"/>
+              </a:lnSpc>
+              <a:spcBef>
+                <a:spcPct val="0"/>
+              </a:spcBef>
+              <a:spcAft>
+                <a:spcPct val="0"/>
+              </a:spcAft>
+            </a:pPr>
+            <a:r>
+              <a:rPr lang="en-US" sz="900" b="1" dirty="0">
+                <a:gradFill>
+                  <a:gsLst>
+                    <a:gs pos="0">
+                      <a:srgbClr val="FFFFFF"/>
+                    </a:gs>
+                    <a:gs pos="100000">
+                      <a:srgbClr val="FFFFFF"/>
+                    </a:gs>
+                  </a:gsLst>
+                  <a:lin ang="5400000" scaled="0"/>
+                </a:gradFill>
+                <a:ea typeface="Segoe UI" pitchFamily="34" charset="0"/>
+                <a:cs typeface="Segoe UI" pitchFamily="34" charset="0"/>
+              </a:rPr>
+              <a:t>manual</a:t>
+            </a:r>
+          </a:p>
+          <a:p>
+            <a:pPr algn="ctr" defTabSz="932472" fontAlgn="base">
+              <a:lnSpc>
+                <a:spcPct val="90000"/>
+              </a:lnSpc>
+              <a:spcBef>
+                <a:spcPct val="0"/>
+              </a:spcBef>
+              <a:spcAft>
+                <a:spcPct val="0"/>
+              </a:spcAft>
+            </a:pPr>
+            <a:r>
+              <a:rPr lang="en-US" sz="900" b="1" dirty="0">
+                <a:gradFill>
+                  <a:gsLst>
+                    <a:gs pos="0">
+                      <a:srgbClr val="FFFFFF"/>
+                    </a:gs>
+                    <a:gs pos="100000">
+                      <a:srgbClr val="FFFFFF"/>
+                    </a:gs>
+                  </a:gsLst>
+                  <a:lin ang="5400000" scaled="0"/>
+                </a:gradFill>
+                <a:ea typeface="Segoe UI" pitchFamily="34" charset="0"/>
+                <a:cs typeface="Segoe UI" pitchFamily="34" charset="0"/>
+              </a:rPr>
+              <a:t>edits</a:t>
+            </a:r>
+          </a:p>
+        </p:txBody>
+      </p:sp>
+      <p:sp>
+        <p:nvSpPr>
+          <p:cNvPr id="15" name="Arrow: Right 14">
+            <a:extLst>
+              <a:ext uri="{FF2B5EF4-FFF2-40B4-BE49-F238E27FC236}">
+                <a16:creationId xmlns:a16="http://schemas.microsoft.com/office/drawing/2014/main" id="{4ED4DCD6-55BF-FF87-578D-E4683FA248F5}"/>
+              </a:ext>
+            </a:extLst>
+          </p:cNvPr>
+          <p:cNvSpPr/>
+          <p:nvPr/>
+        </p:nvSpPr>
+        <p:spPr bwMode="auto">
+          <a:xfrm>
+            <a:off x="4630805" y="3506949"/>
+            <a:ext cx="988503" cy="528569"/>
+          </a:xfrm>
+          <a:prstGeom prst="rightArrow">
+            <a:avLst>
+              <a:gd name="adj1" fmla="val 62678"/>
+              <a:gd name="adj2" fmla="val 58330"/>
+            </a:avLst>
+          </a:prstGeom>
+          <a:solidFill>
+            <a:srgbClr val="8A0000"/>
+          </a:solidFill>
+          <a:ln>
+            <a:noFill/>
+            <a:headEnd type="none" w="med" len="med"/>
+            <a:tailEnd type="none" w="med" len="med"/>
+          </a:ln>
+          <a:effectLst/>
+        </p:spPr>
+        <p:style>
+          <a:lnRef idx="1">
+            <a:schemeClr val="accent2"/>
+          </a:lnRef>
+          <a:fillRef idx="3">
+            <a:schemeClr val="accent2"/>
+          </a:fillRef>
+          <a:effectRef idx="2">
+            <a:schemeClr val="accent2"/>
+          </a:effectRef>
+          <a:fontRef idx="minor">
+            <a:schemeClr val="lt1"/>
+          </a:fontRef>
+        </p:style>
+        <p:txBody>
+          <a:bodyPr rot="0" spcFirstLastPara="0" vertOverflow="overflow" horzOverflow="overflow" vert="horz" wrap="square" lIns="0" tIns="0" rIns="0" bIns="0" numCol="1" spcCol="0" rtlCol="0" fromWordArt="0" anchor="ctr" anchorCtr="0" forceAA="0" compatLnSpc="1">
+            <a:prstTxWarp prst="textNoShape">
               <a:avLst/>
-            </a:prstGeom>
-          </p:spPr>
-        </p:pic>
-      </p:grpSp>
+            </a:prstTxWarp>
+            <a:noAutofit/>
+          </a:bodyPr>
+          <a:lstStyle/>
+          <a:p>
+            <a:pPr algn="ctr" defTabSz="932472" fontAlgn="base">
+              <a:lnSpc>
+                <a:spcPct val="90000"/>
+              </a:lnSpc>
+              <a:spcBef>
+                <a:spcPct val="0"/>
+              </a:spcBef>
+              <a:spcAft>
+                <a:spcPct val="0"/>
+              </a:spcAft>
+            </a:pPr>
+            <a:r>
+              <a:rPr lang="en-US" sz="1100" b="1" dirty="0">
+                <a:gradFill>
+                  <a:gsLst>
+                    <a:gs pos="0">
+                      <a:srgbClr val="FFFFFF"/>
+                    </a:gs>
+                    <a:gs pos="100000">
+                      <a:srgbClr val="FFFFFF"/>
+                    </a:gs>
+                  </a:gsLst>
+                  <a:lin ang="5400000" scaled="0"/>
+                </a:gradFill>
+                <a:ea typeface="Segoe UI" pitchFamily="34" charset="0"/>
+                <a:cs typeface="Segoe UI" pitchFamily="34" charset="0"/>
+              </a:rPr>
+              <a:t>git push</a:t>
+            </a:r>
+          </a:p>
+        </p:txBody>
+      </p:sp>
     </p:spTree>
     <p:extLst>
       <p:ext uri="{BB962C8B-B14F-4D97-AF65-F5344CB8AC3E}">
@@ -24658,163 +24502,97 @@
           <a:chExt cx="0" cy="0"/>
         </a:xfrm>
       </p:grpSpPr>
-      <p:sp>
-        <p:nvSpPr>
-          <p:cNvPr id="9" name="Rectangle 8">
+      <p:grpSp>
+        <p:nvGrpSpPr>
+          <p:cNvPr id="11" name="Group 10">
             <a:extLst>
               <a:ext uri="{FF2B5EF4-FFF2-40B4-BE49-F238E27FC236}">
-                <a16:creationId xmlns:a16="http://schemas.microsoft.com/office/drawing/2014/main" id="{003E1A49-4F88-73FD-E183-80FA8F345C86}"/>
+                <a16:creationId xmlns:a16="http://schemas.microsoft.com/office/drawing/2014/main" id="{D601545A-8B50-58D1-F0DD-563AAD8D9854}"/>
               </a:ext>
             </a:extLst>
           </p:cNvPr>
-          <p:cNvSpPr/>
+          <p:cNvGrpSpPr/>
           <p:nvPr/>
-        </p:nvSpPr>
-        <p:spPr bwMode="auto">
+        </p:nvGrpSpPr>
+        <p:grpSpPr>
           <a:xfrm>
-            <a:off x="573741" y="1452283"/>
-            <a:ext cx="10049435" cy="1981199"/>
+            <a:off x="251013" y="421343"/>
+            <a:ext cx="10883152" cy="1882586"/>
+            <a:chOff x="251012" y="421342"/>
+            <a:chExt cx="11806697" cy="1873623"/>
           </a:xfrm>
-          <a:prstGeom prst="rect">
-            <a:avLst/>
-          </a:prstGeom>
-          <a:solidFill>
-            <a:schemeClr val="bg1">
-              <a:lumMod val="85000"/>
-            </a:schemeClr>
-          </a:solidFill>
-          <a:ln>
+        </p:grpSpPr>
+        <p:sp>
+          <p:nvSpPr>
+            <p:cNvPr id="9" name="Rectangle 8">
+              <a:extLst>
+                <a:ext uri="{FF2B5EF4-FFF2-40B4-BE49-F238E27FC236}">
+                  <a16:creationId xmlns:a16="http://schemas.microsoft.com/office/drawing/2014/main" id="{003E1A49-4F88-73FD-E183-80FA8F345C86}"/>
+                </a:ext>
+              </a:extLst>
+            </p:cNvPr>
+            <p:cNvSpPr/>
+            <p:nvPr/>
+          </p:nvSpPr>
+          <p:spPr bwMode="auto">
+            <a:xfrm>
+              <a:off x="251012" y="421342"/>
+              <a:ext cx="11806697" cy="1873623"/>
+            </a:xfrm>
+            <a:prstGeom prst="rect">
+              <a:avLst/>
+            </a:prstGeom>
             <a:solidFill>
-              <a:schemeClr val="tx1">
-                <a:lumMod val="75000"/>
+              <a:schemeClr val="bg1">
+                <a:lumMod val="85000"/>
               </a:schemeClr>
             </a:solidFill>
-            <a:headEnd type="none" w="med" len="med"/>
-            <a:tailEnd type="none" w="med" len="med"/>
-          </a:ln>
-          <a:effectLst/>
-        </p:spPr>
-        <p:style>
-          <a:lnRef idx="1">
-            <a:schemeClr val="accent2"/>
-          </a:lnRef>
-          <a:fillRef idx="3">
-            <a:schemeClr val="accent2"/>
-          </a:fillRef>
-          <a:effectRef idx="2">
-            <a:schemeClr val="accent2"/>
-          </a:effectRef>
-          <a:fontRef idx="minor">
-            <a:schemeClr val="lt1"/>
-          </a:fontRef>
-        </p:style>
-        <p:txBody>
-          <a:bodyPr rot="0" spcFirstLastPara="0" vertOverflow="overflow" horzOverflow="overflow" vert="horz" wrap="square" lIns="182880" tIns="146304" rIns="182880" bIns="146304" numCol="1" spcCol="0" rtlCol="0" fromWordArt="0" anchor="t" anchorCtr="0" forceAA="0" compatLnSpc="1">
-            <a:prstTxWarp prst="textNoShape">
-              <a:avLst/>
-            </a:prstTxWarp>
-            <a:noAutofit/>
-          </a:bodyPr>
-          <a:lstStyle/>
-          <a:p>
-            <a:pPr algn="ctr" defTabSz="932472" fontAlgn="base">
-              <a:lnSpc>
-                <a:spcPct val="90000"/>
-              </a:lnSpc>
-              <a:spcBef>
-                <a:spcPct val="0"/>
-              </a:spcBef>
-              <a:spcAft>
-                <a:spcPct val="0"/>
-              </a:spcAft>
-            </a:pPr>
-            <a:endParaRPr lang="en-US" sz="2400" dirty="0" err="1">
-              <a:gradFill>
-                <a:gsLst>
-                  <a:gs pos="0">
-                    <a:srgbClr val="FFFFFF"/>
-                  </a:gs>
-                  <a:gs pos="100000">
-                    <a:srgbClr val="FFFFFF"/>
-                  </a:gs>
-                </a:gsLst>
-                <a:lin ang="5400000" scaled="0"/>
-              </a:gradFill>
-              <a:ea typeface="Segoe UI" pitchFamily="34" charset="0"/>
-              <a:cs typeface="Segoe UI" pitchFamily="34" charset="0"/>
-            </a:endParaRPr>
-          </a:p>
-        </p:txBody>
-      </p:sp>
-      <p:sp>
-        <p:nvSpPr>
-          <p:cNvPr id="2" name="Rectangle 1">
-            <a:extLst>
-              <a:ext uri="{FF2B5EF4-FFF2-40B4-BE49-F238E27FC236}">
-                <a16:creationId xmlns:a16="http://schemas.microsoft.com/office/drawing/2014/main" id="{B67B11CD-8461-F939-3EA7-1F96F8460DB3}"/>
-              </a:ext>
-            </a:extLst>
-          </p:cNvPr>
-          <p:cNvSpPr/>
-          <p:nvPr/>
-        </p:nvSpPr>
-        <p:spPr bwMode="auto">
-          <a:xfrm>
-            <a:off x="771143" y="2542428"/>
-            <a:ext cx="9735671" cy="699247"/>
-          </a:xfrm>
-          <a:prstGeom prst="rect">
-            <a:avLst/>
-          </a:prstGeom>
-          <a:solidFill>
-            <a:schemeClr val="tx2">
-              <a:lumMod val="90000"/>
-              <a:lumOff val="10000"/>
-            </a:schemeClr>
-          </a:solidFill>
-          <a:ln>
-            <a:noFill/>
-            <a:headEnd type="none" w="med" len="med"/>
-            <a:tailEnd type="none" w="med" len="med"/>
-          </a:ln>
-          <a:effectLst/>
-        </p:spPr>
-        <p:style>
-          <a:lnRef idx="1">
-            <a:schemeClr val="accent2"/>
-          </a:lnRef>
-          <a:fillRef idx="3">
-            <a:schemeClr val="accent2"/>
-          </a:fillRef>
-          <a:effectRef idx="2">
-            <a:schemeClr val="accent2"/>
-          </a:effectRef>
-          <a:fontRef idx="minor">
-            <a:schemeClr val="lt1"/>
-          </a:fontRef>
-        </p:style>
-        <p:txBody>
-          <a:bodyPr rot="0" spcFirstLastPara="0" vertOverflow="overflow" horzOverflow="overflow" vert="horz" wrap="square" lIns="182880" tIns="146304" rIns="182880" bIns="146304" numCol="1" spcCol="0" rtlCol="0" fromWordArt="0" anchor="ctr" anchorCtr="0" forceAA="0" compatLnSpc="1">
-            <a:prstTxWarp prst="textNoShape">
-              <a:avLst/>
-            </a:prstTxWarp>
-            <a:noAutofit/>
-          </a:bodyPr>
-          <a:lstStyle/>
-          <a:p>
-            <a:pPr algn="ctr" defTabSz="932472" fontAlgn="base">
-              <a:lnSpc>
-                <a:spcPct val="90000"/>
-              </a:lnSpc>
-              <a:spcBef>
-                <a:spcPct val="0"/>
-              </a:spcBef>
-              <a:spcAft>
-                <a:spcPct val="0"/>
-              </a:spcAft>
-            </a:pPr>
-            <a:r>
-              <a:rPr lang="en-US" sz="2400" b="1" dirty="0">
+            <a:ln>
+              <a:solidFill>
+                <a:schemeClr val="tx1">
+                  <a:lumMod val="75000"/>
+                </a:schemeClr>
+              </a:solidFill>
+              <a:headEnd type="none" w="med" len="med"/>
+              <a:tailEnd type="none" w="med" len="med"/>
+            </a:ln>
+            <a:effectLst/>
+          </p:spPr>
+          <p:style>
+            <a:lnRef idx="1">
+              <a:schemeClr val="accent2"/>
+            </a:lnRef>
+            <a:fillRef idx="3">
+              <a:schemeClr val="accent2"/>
+            </a:fillRef>
+            <a:effectRef idx="2">
+              <a:schemeClr val="accent2"/>
+            </a:effectRef>
+            <a:fontRef idx="minor">
+              <a:schemeClr val="lt1"/>
+            </a:fontRef>
+          </p:style>
+          <p:txBody>
+            <a:bodyPr rot="0" spcFirstLastPara="0" vertOverflow="overflow" horzOverflow="overflow" vert="horz" wrap="square" lIns="182880" tIns="146304" rIns="182880" bIns="146304" numCol="1" spcCol="0" rtlCol="0" fromWordArt="0" anchor="t" anchorCtr="0" forceAA="0" compatLnSpc="1">
+              <a:prstTxWarp prst="textNoShape">
+                <a:avLst/>
+              </a:prstTxWarp>
+              <a:noAutofit/>
+            </a:bodyPr>
+            <a:lstStyle/>
+            <a:p>
+              <a:pPr algn="ctr" defTabSz="932472" fontAlgn="base">
+                <a:lnSpc>
+                  <a:spcPct val="90000"/>
+                </a:lnSpc>
+                <a:spcBef>
+                  <a:spcPct val="0"/>
+                </a:spcBef>
+                <a:spcAft>
+                  <a:spcPct val="0"/>
+                </a:spcAft>
+              </a:pPr>
+              <a:endParaRPr lang="en-US" sz="2400" dirty="0" err="1">
                 <a:gradFill>
                   <a:gsLst>
                     <a:gs pos="0">
@@ -24828,437 +24606,609 @@
                 </a:gradFill>
                 <a:ea typeface="Segoe UI" pitchFamily="34" charset="0"/>
                 <a:cs typeface="Segoe UI" pitchFamily="34" charset="0"/>
-              </a:rPr>
-              <a:t>Fabric REST APIs</a:t>
-            </a:r>
-          </a:p>
-        </p:txBody>
-      </p:sp>
-      <p:sp>
-        <p:nvSpPr>
-          <p:cNvPr id="3" name="Rectangle 2">
-            <a:extLst>
-              <a:ext uri="{FF2B5EF4-FFF2-40B4-BE49-F238E27FC236}">
-                <a16:creationId xmlns:a16="http://schemas.microsoft.com/office/drawing/2014/main" id="{FAEE0CB5-88C2-12A6-9319-BA18F4BC73E5}"/>
-              </a:ext>
-            </a:extLst>
-          </p:cNvPr>
-          <p:cNvSpPr/>
-          <p:nvPr/>
-        </p:nvSpPr>
-        <p:spPr bwMode="auto">
-          <a:xfrm>
-            <a:off x="771143" y="1635922"/>
-            <a:ext cx="1810871" cy="699247"/>
-          </a:xfrm>
-          <a:prstGeom prst="rect">
-            <a:avLst/>
-          </a:prstGeom>
-          <a:solidFill>
-            <a:schemeClr val="accent1"/>
-          </a:solidFill>
-          <a:ln>
-            <a:noFill/>
-            <a:headEnd type="none" w="med" len="med"/>
-            <a:tailEnd type="none" w="med" len="med"/>
-          </a:ln>
-          <a:effectLst/>
-        </p:spPr>
-        <p:style>
-          <a:lnRef idx="1">
-            <a:schemeClr val="accent2"/>
-          </a:lnRef>
-          <a:fillRef idx="3">
-            <a:schemeClr val="accent2"/>
-          </a:fillRef>
-          <a:effectRef idx="2">
-            <a:schemeClr val="accent2"/>
-          </a:effectRef>
-          <a:fontRef idx="minor">
-            <a:schemeClr val="lt1"/>
-          </a:fontRef>
-        </p:style>
-        <p:txBody>
-          <a:bodyPr rot="0" spcFirstLastPara="0" vertOverflow="overflow" horzOverflow="overflow" vert="horz" wrap="square" lIns="182880" tIns="146304" rIns="182880" bIns="146304" numCol="1" spcCol="0" rtlCol="0" fromWordArt="0" anchor="ctr" anchorCtr="0" forceAA="0" compatLnSpc="1">
-            <a:prstTxWarp prst="textNoShape">
+              </a:endParaRPr>
+            </a:p>
+          </p:txBody>
+        </p:sp>
+        <p:sp>
+          <p:nvSpPr>
+            <p:cNvPr id="2" name="Rectangle 1">
+              <a:extLst>
+                <a:ext uri="{FF2B5EF4-FFF2-40B4-BE49-F238E27FC236}">
+                  <a16:creationId xmlns:a16="http://schemas.microsoft.com/office/drawing/2014/main" id="{B67B11CD-8461-F939-3EA7-1F96F8460DB3}"/>
+                </a:ext>
+              </a:extLst>
+            </p:cNvPr>
+            <p:cNvSpPr/>
+            <p:nvPr/>
+          </p:nvSpPr>
+          <p:spPr bwMode="auto">
+            <a:xfrm>
+              <a:off x="439449" y="1439766"/>
+              <a:ext cx="11492753" cy="699247"/>
+            </a:xfrm>
+            <a:prstGeom prst="rect">
               <a:avLst/>
-            </a:prstTxWarp>
-            <a:noAutofit/>
-          </a:bodyPr>
-          <a:lstStyle/>
-          <a:p>
-            <a:pPr algn="ctr" defTabSz="932472" fontAlgn="base">
-              <a:lnSpc>
-                <a:spcPct val="90000"/>
-              </a:lnSpc>
-              <a:spcBef>
-                <a:spcPct val="0"/>
-              </a:spcBef>
-              <a:spcAft>
-                <a:spcPct val="0"/>
-              </a:spcAft>
-            </a:pPr>
-            <a:r>
-              <a:rPr lang="en-US" sz="2000" b="1" dirty="0">
-                <a:gradFill>
-                  <a:gsLst>
-                    <a:gs pos="0">
-                      <a:srgbClr val="FFFFFF"/>
-                    </a:gs>
-                    <a:gs pos="100000">
-                      <a:srgbClr val="FFFFFF"/>
-                    </a:gs>
-                  </a:gsLst>
-                  <a:lin ang="5400000" scaled="0"/>
-                </a:gradFill>
-                <a:ea typeface="Segoe UI" pitchFamily="34" charset="0"/>
-                <a:cs typeface="Segoe UI" pitchFamily="34" charset="0"/>
-              </a:rPr>
-              <a:t>Terraform</a:t>
-            </a:r>
-          </a:p>
-        </p:txBody>
-      </p:sp>
-      <p:sp>
-        <p:nvSpPr>
-          <p:cNvPr id="4" name="Rectangle 3">
-            <a:extLst>
-              <a:ext uri="{FF2B5EF4-FFF2-40B4-BE49-F238E27FC236}">
-                <a16:creationId xmlns:a16="http://schemas.microsoft.com/office/drawing/2014/main" id="{93E50489-39F1-BB99-A6C2-5ECBEB640F59}"/>
-              </a:ext>
-            </a:extLst>
-          </p:cNvPr>
-          <p:cNvSpPr/>
-          <p:nvPr/>
-        </p:nvSpPr>
-        <p:spPr bwMode="auto">
-          <a:xfrm>
-            <a:off x="2752343" y="1635922"/>
-            <a:ext cx="1810871" cy="699247"/>
-          </a:xfrm>
-          <a:prstGeom prst="rect">
-            <a:avLst/>
-          </a:prstGeom>
-          <a:solidFill>
-            <a:schemeClr val="accent1"/>
-          </a:solidFill>
-          <a:ln>
-            <a:noFill/>
-            <a:headEnd type="none" w="med" len="med"/>
-            <a:tailEnd type="none" w="med" len="med"/>
-          </a:ln>
-          <a:effectLst/>
-        </p:spPr>
-        <p:style>
-          <a:lnRef idx="1">
-            <a:schemeClr val="accent2"/>
-          </a:lnRef>
-          <a:fillRef idx="3">
-            <a:schemeClr val="accent2"/>
-          </a:fillRef>
-          <a:effectRef idx="2">
-            <a:schemeClr val="accent2"/>
-          </a:effectRef>
-          <a:fontRef idx="minor">
-            <a:schemeClr val="lt1"/>
-          </a:fontRef>
-        </p:style>
-        <p:txBody>
-          <a:bodyPr rot="0" spcFirstLastPara="0" vertOverflow="overflow" horzOverflow="overflow" vert="horz" wrap="square" lIns="182880" tIns="146304" rIns="182880" bIns="146304" numCol="1" spcCol="0" rtlCol="0" fromWordArt="0" anchor="ctr" anchorCtr="0" forceAA="0" compatLnSpc="1">
-            <a:prstTxWarp prst="textNoShape">
+            </a:prstGeom>
+            <a:solidFill>
+              <a:schemeClr val="tx2">
+                <a:lumMod val="90000"/>
+                <a:lumOff val="10000"/>
+              </a:schemeClr>
+            </a:solidFill>
+            <a:ln>
+              <a:noFill/>
+              <a:headEnd type="none" w="med" len="med"/>
+              <a:tailEnd type="none" w="med" len="med"/>
+            </a:ln>
+            <a:effectLst/>
+          </p:spPr>
+          <p:style>
+            <a:lnRef idx="1">
+              <a:schemeClr val="accent2"/>
+            </a:lnRef>
+            <a:fillRef idx="3">
+              <a:schemeClr val="accent2"/>
+            </a:fillRef>
+            <a:effectRef idx="2">
+              <a:schemeClr val="accent2"/>
+            </a:effectRef>
+            <a:fontRef idx="minor">
+              <a:schemeClr val="lt1"/>
+            </a:fontRef>
+          </p:style>
+          <p:txBody>
+            <a:bodyPr rot="0" spcFirstLastPara="0" vertOverflow="overflow" horzOverflow="overflow" vert="horz" wrap="square" lIns="182880" tIns="146304" rIns="182880" bIns="146304" numCol="1" spcCol="0" rtlCol="0" fromWordArt="0" anchor="ctr" anchorCtr="0" forceAA="0" compatLnSpc="1">
+              <a:prstTxWarp prst="textNoShape">
+                <a:avLst/>
+              </a:prstTxWarp>
+              <a:noAutofit/>
+            </a:bodyPr>
+            <a:lstStyle/>
+            <a:p>
+              <a:pPr algn="ctr" defTabSz="932472" fontAlgn="base">
+                <a:lnSpc>
+                  <a:spcPct val="90000"/>
+                </a:lnSpc>
+                <a:spcBef>
+                  <a:spcPct val="0"/>
+                </a:spcBef>
+                <a:spcAft>
+                  <a:spcPct val="0"/>
+                </a:spcAft>
+              </a:pPr>
+              <a:r>
+                <a:rPr lang="en-US" sz="2000" b="1" dirty="0">
+                  <a:gradFill>
+                    <a:gsLst>
+                      <a:gs pos="0">
+                        <a:srgbClr val="FFFFFF"/>
+                      </a:gs>
+                      <a:gs pos="100000">
+                        <a:srgbClr val="FFFFFF"/>
+                      </a:gs>
+                    </a:gsLst>
+                    <a:lin ang="5400000" scaled="0"/>
+                  </a:gradFill>
+                  <a:ea typeface="Segoe UI" pitchFamily="34" charset="0"/>
+                  <a:cs typeface="Segoe UI" pitchFamily="34" charset="0"/>
+                </a:rPr>
+                <a:t>Fabric REST APIs</a:t>
+              </a:r>
+            </a:p>
+          </p:txBody>
+        </p:sp>
+        <p:sp>
+          <p:nvSpPr>
+            <p:cNvPr id="3" name="Rectangle 2">
+              <a:extLst>
+                <a:ext uri="{FF2B5EF4-FFF2-40B4-BE49-F238E27FC236}">
+                  <a16:creationId xmlns:a16="http://schemas.microsoft.com/office/drawing/2014/main" id="{FAEE0CB5-88C2-12A6-9319-BA18F4BC73E5}"/>
+                </a:ext>
+              </a:extLst>
+            </p:cNvPr>
+            <p:cNvSpPr/>
+            <p:nvPr/>
+          </p:nvSpPr>
+          <p:spPr bwMode="auto">
+            <a:xfrm>
+              <a:off x="439449" y="631875"/>
+              <a:ext cx="1810871" cy="699247"/>
+            </a:xfrm>
+            <a:prstGeom prst="rect">
               <a:avLst/>
-            </a:prstTxWarp>
-            <a:noAutofit/>
-          </a:bodyPr>
-          <a:lstStyle/>
-          <a:p>
-            <a:pPr algn="ctr" defTabSz="932472" fontAlgn="base">
-              <a:lnSpc>
-                <a:spcPct val="90000"/>
-              </a:lnSpc>
-              <a:spcBef>
-                <a:spcPct val="0"/>
-              </a:spcBef>
-              <a:spcAft>
-                <a:spcPct val="0"/>
-              </a:spcAft>
-            </a:pPr>
-            <a:r>
-              <a:rPr lang="en-US" sz="2000" b="1" dirty="0">
-                <a:gradFill>
-                  <a:gsLst>
-                    <a:gs pos="0">
-                      <a:srgbClr val="FFFFFF"/>
-                    </a:gs>
-                    <a:gs pos="100000">
-                      <a:srgbClr val="FFFFFF"/>
-                    </a:gs>
-                  </a:gsLst>
-                  <a:lin ang="5400000" scaled="0"/>
-                </a:gradFill>
-                <a:ea typeface="Segoe UI" pitchFamily="34" charset="0"/>
-                <a:cs typeface="Segoe UI" pitchFamily="34" charset="0"/>
-              </a:rPr>
-              <a:t>Fabric CLI</a:t>
-            </a:r>
-          </a:p>
-        </p:txBody>
-      </p:sp>
-      <p:sp>
-        <p:nvSpPr>
-          <p:cNvPr id="5" name="Rectangle 4">
-            <a:extLst>
-              <a:ext uri="{FF2B5EF4-FFF2-40B4-BE49-F238E27FC236}">
-                <a16:creationId xmlns:a16="http://schemas.microsoft.com/office/drawing/2014/main" id="{0E7316A7-FC76-37FA-C31F-B2D5D2A41FA5}"/>
-              </a:ext>
-            </a:extLst>
-          </p:cNvPr>
-          <p:cNvSpPr/>
-          <p:nvPr/>
-        </p:nvSpPr>
-        <p:spPr bwMode="auto">
-          <a:xfrm>
-            <a:off x="4706649" y="1635920"/>
-            <a:ext cx="1810871" cy="699247"/>
-          </a:xfrm>
-          <a:prstGeom prst="rect">
-            <a:avLst/>
-          </a:prstGeom>
-          <a:solidFill>
-            <a:schemeClr val="accent1"/>
-          </a:solidFill>
-          <a:ln>
-            <a:noFill/>
-            <a:headEnd type="none" w="med" len="med"/>
-            <a:tailEnd type="none" w="med" len="med"/>
-          </a:ln>
-          <a:effectLst/>
-        </p:spPr>
-        <p:style>
-          <a:lnRef idx="1">
-            <a:schemeClr val="accent2"/>
-          </a:lnRef>
-          <a:fillRef idx="3">
-            <a:schemeClr val="accent2"/>
-          </a:fillRef>
-          <a:effectRef idx="2">
-            <a:schemeClr val="accent2"/>
-          </a:effectRef>
-          <a:fontRef idx="minor">
-            <a:schemeClr val="lt1"/>
-          </a:fontRef>
-        </p:style>
-        <p:txBody>
-          <a:bodyPr rot="0" spcFirstLastPara="0" vertOverflow="overflow" horzOverflow="overflow" vert="horz" wrap="square" lIns="182880" tIns="146304" rIns="182880" bIns="146304" numCol="1" spcCol="0" rtlCol="0" fromWordArt="0" anchor="ctr" anchorCtr="0" forceAA="0" compatLnSpc="1">
-            <a:prstTxWarp prst="textNoShape">
+            </a:prstGeom>
+            <a:solidFill>
+              <a:schemeClr val="accent1"/>
+            </a:solidFill>
+            <a:ln>
+              <a:noFill/>
+              <a:headEnd type="none" w="med" len="med"/>
+              <a:tailEnd type="none" w="med" len="med"/>
+            </a:ln>
+            <a:effectLst/>
+          </p:spPr>
+          <p:style>
+            <a:lnRef idx="1">
+              <a:schemeClr val="accent2"/>
+            </a:lnRef>
+            <a:fillRef idx="3">
+              <a:schemeClr val="accent2"/>
+            </a:fillRef>
+            <a:effectRef idx="2">
+              <a:schemeClr val="accent2"/>
+            </a:effectRef>
+            <a:fontRef idx="minor">
+              <a:schemeClr val="lt1"/>
+            </a:fontRef>
+          </p:style>
+          <p:txBody>
+            <a:bodyPr rot="0" spcFirstLastPara="0" vertOverflow="overflow" horzOverflow="overflow" vert="horz" wrap="square" lIns="182880" tIns="146304" rIns="182880" bIns="146304" numCol="1" spcCol="0" rtlCol="0" fromWordArt="0" anchor="ctr" anchorCtr="0" forceAA="0" compatLnSpc="1">
+              <a:prstTxWarp prst="textNoShape">
+                <a:avLst/>
+              </a:prstTxWarp>
+              <a:noAutofit/>
+            </a:bodyPr>
+            <a:lstStyle/>
+            <a:p>
+              <a:pPr algn="ctr" defTabSz="932472" fontAlgn="base">
+                <a:lnSpc>
+                  <a:spcPct val="90000"/>
+                </a:lnSpc>
+                <a:spcBef>
+                  <a:spcPct val="0"/>
+                </a:spcBef>
+                <a:spcAft>
+                  <a:spcPct val="0"/>
+                </a:spcAft>
+              </a:pPr>
+              <a:r>
+                <a:rPr lang="en-US" sz="1600" b="1" dirty="0">
+                  <a:gradFill>
+                    <a:gsLst>
+                      <a:gs pos="0">
+                        <a:srgbClr val="FFFFFF"/>
+                      </a:gs>
+                      <a:gs pos="100000">
+                        <a:srgbClr val="FFFFFF"/>
+                      </a:gs>
+                    </a:gsLst>
+                    <a:lin ang="5400000" scaled="0"/>
+                  </a:gradFill>
+                  <a:ea typeface="Segoe UI" pitchFamily="34" charset="0"/>
+                  <a:cs typeface="Segoe UI" pitchFamily="34" charset="0"/>
+                </a:rPr>
+                <a:t>Terraform</a:t>
+              </a:r>
+            </a:p>
+          </p:txBody>
+        </p:sp>
+        <p:sp>
+          <p:nvSpPr>
+            <p:cNvPr id="4" name="Rectangle 3">
+              <a:extLst>
+                <a:ext uri="{FF2B5EF4-FFF2-40B4-BE49-F238E27FC236}">
+                  <a16:creationId xmlns:a16="http://schemas.microsoft.com/office/drawing/2014/main" id="{93E50489-39F1-BB99-A6C2-5ECBEB640F59}"/>
+                </a:ext>
+              </a:extLst>
+            </p:cNvPr>
+            <p:cNvSpPr/>
+            <p:nvPr/>
+          </p:nvSpPr>
+          <p:spPr bwMode="auto">
+            <a:xfrm>
+              <a:off x="2375825" y="631875"/>
+              <a:ext cx="1810871" cy="699247"/>
+            </a:xfrm>
+            <a:prstGeom prst="rect">
               <a:avLst/>
-            </a:prstTxWarp>
-            <a:noAutofit/>
-          </a:bodyPr>
-          <a:lstStyle/>
-          <a:p>
-            <a:pPr algn="ctr" defTabSz="932472" fontAlgn="base">
-              <a:lnSpc>
-                <a:spcPct val="90000"/>
-              </a:lnSpc>
-              <a:spcBef>
-                <a:spcPct val="0"/>
-              </a:spcBef>
-              <a:spcAft>
-                <a:spcPct val="0"/>
-              </a:spcAft>
-            </a:pPr>
-            <a:r>
-              <a:rPr lang="en-US" sz="2000" b="1" dirty="0">
-                <a:gradFill>
-                  <a:gsLst>
-                    <a:gs pos="0">
-                      <a:srgbClr val="FFFFFF"/>
-                    </a:gs>
-                    <a:gs pos="100000">
-                      <a:srgbClr val="FFFFFF"/>
-                    </a:gs>
-                  </a:gsLst>
-                  <a:lin ang="5400000" scaled="0"/>
-                </a:gradFill>
-                <a:ea typeface="Segoe UI" pitchFamily="34" charset="0"/>
-                <a:cs typeface="Segoe UI" pitchFamily="34" charset="0"/>
-              </a:rPr>
-              <a:t>fabric-cicd</a:t>
-            </a:r>
-          </a:p>
-        </p:txBody>
-      </p:sp>
-      <p:sp>
-        <p:nvSpPr>
-          <p:cNvPr id="6" name="Rectangle 5">
-            <a:extLst>
-              <a:ext uri="{FF2B5EF4-FFF2-40B4-BE49-F238E27FC236}">
-                <a16:creationId xmlns:a16="http://schemas.microsoft.com/office/drawing/2014/main" id="{92707ABE-3FD8-72DE-FF76-950B1020B531}"/>
-              </a:ext>
-            </a:extLst>
-          </p:cNvPr>
-          <p:cNvSpPr/>
-          <p:nvPr/>
-        </p:nvSpPr>
-        <p:spPr bwMode="auto">
-          <a:xfrm>
-            <a:off x="8642155" y="1635922"/>
-            <a:ext cx="1810871" cy="699247"/>
-          </a:xfrm>
-          <a:prstGeom prst="rect">
-            <a:avLst/>
-          </a:prstGeom>
-          <a:solidFill>
-            <a:schemeClr val="accent1"/>
-          </a:solidFill>
-          <a:ln>
-            <a:noFill/>
-            <a:headEnd type="none" w="med" len="med"/>
-            <a:tailEnd type="none" w="med" len="med"/>
-          </a:ln>
-          <a:effectLst/>
-        </p:spPr>
-        <p:style>
-          <a:lnRef idx="1">
-            <a:schemeClr val="accent2"/>
-          </a:lnRef>
-          <a:fillRef idx="3">
-            <a:schemeClr val="accent2"/>
-          </a:fillRef>
-          <a:effectRef idx="2">
-            <a:schemeClr val="accent2"/>
-          </a:effectRef>
-          <a:fontRef idx="minor">
-            <a:schemeClr val="lt1"/>
-          </a:fontRef>
-        </p:style>
-        <p:txBody>
-          <a:bodyPr rot="0" spcFirstLastPara="0" vertOverflow="overflow" horzOverflow="overflow" vert="horz" wrap="square" lIns="182880" tIns="146304" rIns="182880" bIns="146304" numCol="1" spcCol="0" rtlCol="0" fromWordArt="0" anchor="ctr" anchorCtr="0" forceAA="0" compatLnSpc="1">
-            <a:prstTxWarp prst="textNoShape">
+            </a:prstGeom>
+            <a:solidFill>
+              <a:schemeClr val="accent1"/>
+            </a:solidFill>
+            <a:ln>
+              <a:noFill/>
+              <a:headEnd type="none" w="med" len="med"/>
+              <a:tailEnd type="none" w="med" len="med"/>
+            </a:ln>
+            <a:effectLst/>
+          </p:spPr>
+          <p:style>
+            <a:lnRef idx="1">
+              <a:schemeClr val="accent2"/>
+            </a:lnRef>
+            <a:fillRef idx="3">
+              <a:schemeClr val="accent2"/>
+            </a:fillRef>
+            <a:effectRef idx="2">
+              <a:schemeClr val="accent2"/>
+            </a:effectRef>
+            <a:fontRef idx="minor">
+              <a:schemeClr val="lt1"/>
+            </a:fontRef>
+          </p:style>
+          <p:txBody>
+            <a:bodyPr rot="0" spcFirstLastPara="0" vertOverflow="overflow" horzOverflow="overflow" vert="horz" wrap="square" lIns="182880" tIns="146304" rIns="182880" bIns="146304" numCol="1" spcCol="0" rtlCol="0" fromWordArt="0" anchor="ctr" anchorCtr="0" forceAA="0" compatLnSpc="1">
+              <a:prstTxWarp prst="textNoShape">
+                <a:avLst/>
+              </a:prstTxWarp>
+              <a:noAutofit/>
+            </a:bodyPr>
+            <a:lstStyle/>
+            <a:p>
+              <a:pPr algn="ctr" defTabSz="932472" fontAlgn="base">
+                <a:lnSpc>
+                  <a:spcPct val="90000"/>
+                </a:lnSpc>
+                <a:spcBef>
+                  <a:spcPct val="0"/>
+                </a:spcBef>
+                <a:spcAft>
+                  <a:spcPct val="0"/>
+                </a:spcAft>
+              </a:pPr>
+              <a:r>
+                <a:rPr lang="en-US" sz="1600" b="1" dirty="0">
+                  <a:gradFill>
+                    <a:gsLst>
+                      <a:gs pos="0">
+                        <a:srgbClr val="FFFFFF"/>
+                      </a:gs>
+                      <a:gs pos="100000">
+                        <a:srgbClr val="FFFFFF"/>
+                      </a:gs>
+                    </a:gsLst>
+                    <a:lin ang="5400000" scaled="0"/>
+                  </a:gradFill>
+                  <a:ea typeface="Segoe UI" pitchFamily="34" charset="0"/>
+                  <a:cs typeface="Segoe UI" pitchFamily="34" charset="0"/>
+                </a:rPr>
+                <a:t>Fabric CLI</a:t>
+              </a:r>
+            </a:p>
+          </p:txBody>
+        </p:sp>
+        <p:sp>
+          <p:nvSpPr>
+            <p:cNvPr id="5" name="Rectangle 4">
+              <a:extLst>
+                <a:ext uri="{FF2B5EF4-FFF2-40B4-BE49-F238E27FC236}">
+                  <a16:creationId xmlns:a16="http://schemas.microsoft.com/office/drawing/2014/main" id="{0E7316A7-FC76-37FA-C31F-B2D5D2A41FA5}"/>
+                </a:ext>
+              </a:extLst>
+            </p:cNvPr>
+            <p:cNvSpPr/>
+            <p:nvPr/>
+          </p:nvSpPr>
+          <p:spPr bwMode="auto">
+            <a:xfrm>
+              <a:off x="6248577" y="631875"/>
+              <a:ext cx="1810871" cy="699247"/>
+            </a:xfrm>
+            <a:prstGeom prst="rect">
               <a:avLst/>
-            </a:prstTxWarp>
-            <a:noAutofit/>
-          </a:bodyPr>
-          <a:lstStyle/>
-          <a:p>
-            <a:pPr algn="ctr" defTabSz="932472" fontAlgn="base">
-              <a:lnSpc>
-                <a:spcPct val="90000"/>
-              </a:lnSpc>
-              <a:spcBef>
-                <a:spcPct val="0"/>
-              </a:spcBef>
-              <a:spcAft>
-                <a:spcPct val="0"/>
-              </a:spcAft>
-            </a:pPr>
-            <a:r>
-              <a:rPr lang="en-US" sz="2000" b="1" dirty="0">
-                <a:gradFill>
-                  <a:gsLst>
-                    <a:gs pos="0">
-                      <a:srgbClr val="FFFFFF"/>
-                    </a:gs>
-                    <a:gs pos="100000">
-                      <a:srgbClr val="FFFFFF"/>
-                    </a:gs>
-                  </a:gsLst>
-                  <a:lin ang="5400000" scaled="0"/>
-                </a:gradFill>
-                <a:ea typeface="Segoe UI" pitchFamily="34" charset="0"/>
-                <a:cs typeface="Segoe UI" pitchFamily="34" charset="0"/>
-              </a:rPr>
-              <a:t>Python SDK</a:t>
-            </a:r>
-          </a:p>
-        </p:txBody>
-      </p:sp>
-      <p:sp>
-        <p:nvSpPr>
-          <p:cNvPr id="7" name="Rectangle 6">
-            <a:extLst>
-              <a:ext uri="{FF2B5EF4-FFF2-40B4-BE49-F238E27FC236}">
-                <a16:creationId xmlns:a16="http://schemas.microsoft.com/office/drawing/2014/main" id="{BFB5EFF7-8952-8BC7-6830-DD035DB6E45B}"/>
-              </a:ext>
-            </a:extLst>
-          </p:cNvPr>
-          <p:cNvSpPr/>
-          <p:nvPr/>
-        </p:nvSpPr>
-        <p:spPr bwMode="auto">
-          <a:xfrm>
-            <a:off x="6660955" y="1635921"/>
-            <a:ext cx="1810871" cy="699247"/>
-          </a:xfrm>
-          <a:prstGeom prst="rect">
-            <a:avLst/>
-          </a:prstGeom>
-          <a:solidFill>
-            <a:schemeClr val="accent1"/>
-          </a:solidFill>
-          <a:ln>
-            <a:noFill/>
-            <a:headEnd type="none" w="med" len="med"/>
-            <a:tailEnd type="none" w="med" len="med"/>
-          </a:ln>
-          <a:effectLst/>
-        </p:spPr>
-        <p:style>
-          <a:lnRef idx="1">
-            <a:schemeClr val="accent2"/>
-          </a:lnRef>
-          <a:fillRef idx="3">
-            <a:schemeClr val="accent2"/>
-          </a:fillRef>
-          <a:effectRef idx="2">
-            <a:schemeClr val="accent2"/>
-          </a:effectRef>
-          <a:fontRef idx="minor">
-            <a:schemeClr val="lt1"/>
-          </a:fontRef>
-        </p:style>
-        <p:txBody>
-          <a:bodyPr rot="0" spcFirstLastPara="0" vertOverflow="overflow" horzOverflow="overflow" vert="horz" wrap="square" lIns="182880" tIns="146304" rIns="182880" bIns="146304" numCol="1" spcCol="0" rtlCol="0" fromWordArt="0" anchor="ctr" anchorCtr="0" forceAA="0" compatLnSpc="1">
-            <a:prstTxWarp prst="textNoShape">
+            </a:prstGeom>
+            <a:solidFill>
+              <a:schemeClr val="accent1"/>
+            </a:solidFill>
+            <a:ln>
+              <a:noFill/>
+              <a:headEnd type="none" w="med" len="med"/>
+              <a:tailEnd type="none" w="med" len="med"/>
+            </a:ln>
+            <a:effectLst/>
+          </p:spPr>
+          <p:style>
+            <a:lnRef idx="1">
+              <a:schemeClr val="accent2"/>
+            </a:lnRef>
+            <a:fillRef idx="3">
+              <a:schemeClr val="accent2"/>
+            </a:fillRef>
+            <a:effectRef idx="2">
+              <a:schemeClr val="accent2"/>
+            </a:effectRef>
+            <a:fontRef idx="minor">
+              <a:schemeClr val="lt1"/>
+            </a:fontRef>
+          </p:style>
+          <p:txBody>
+            <a:bodyPr rot="0" spcFirstLastPara="0" vertOverflow="overflow" horzOverflow="overflow" vert="horz" wrap="square" lIns="182880" tIns="146304" rIns="182880" bIns="146304" numCol="1" spcCol="0" rtlCol="0" fromWordArt="0" anchor="ctr" anchorCtr="0" forceAA="0" compatLnSpc="1">
+              <a:prstTxWarp prst="textNoShape">
+                <a:avLst/>
+              </a:prstTxWarp>
+              <a:noAutofit/>
+            </a:bodyPr>
+            <a:lstStyle/>
+            <a:p>
+              <a:pPr algn="ctr" defTabSz="932472" fontAlgn="base">
+                <a:lnSpc>
+                  <a:spcPct val="90000"/>
+                </a:lnSpc>
+                <a:spcBef>
+                  <a:spcPct val="0"/>
+                </a:spcBef>
+                <a:spcAft>
+                  <a:spcPct val="0"/>
+                </a:spcAft>
+              </a:pPr>
+              <a:r>
+                <a:rPr lang="en-US" sz="1600" b="1" dirty="0">
+                  <a:gradFill>
+                    <a:gsLst>
+                      <a:gs pos="0">
+                        <a:srgbClr val="FFFFFF"/>
+                      </a:gs>
+                      <a:gs pos="100000">
+                        <a:srgbClr val="FFFFFF"/>
+                      </a:gs>
+                    </a:gsLst>
+                    <a:lin ang="5400000" scaled="0"/>
+                  </a:gradFill>
+                  <a:ea typeface="Segoe UI" pitchFamily="34" charset="0"/>
+                  <a:cs typeface="Segoe UI" pitchFamily="34" charset="0"/>
+                </a:rPr>
+                <a:t>fabric-cicd</a:t>
+              </a:r>
+            </a:p>
+          </p:txBody>
+        </p:sp>
+        <p:sp>
+          <p:nvSpPr>
+            <p:cNvPr id="6" name="Rectangle 5">
+              <a:extLst>
+                <a:ext uri="{FF2B5EF4-FFF2-40B4-BE49-F238E27FC236}">
+                  <a16:creationId xmlns:a16="http://schemas.microsoft.com/office/drawing/2014/main" id="{92707ABE-3FD8-72DE-FF76-950B1020B531}"/>
+                </a:ext>
+              </a:extLst>
+            </p:cNvPr>
+            <p:cNvSpPr/>
+            <p:nvPr/>
+          </p:nvSpPr>
+          <p:spPr bwMode="auto">
+            <a:xfrm>
+              <a:off x="10121331" y="631875"/>
+              <a:ext cx="1810871" cy="699247"/>
+            </a:xfrm>
+            <a:prstGeom prst="rect">
               <a:avLst/>
-            </a:prstTxWarp>
-            <a:noAutofit/>
-          </a:bodyPr>
-          <a:lstStyle/>
-          <a:p>
-            <a:pPr algn="ctr" defTabSz="932472" fontAlgn="base">
-              <a:lnSpc>
-                <a:spcPct val="90000"/>
-              </a:lnSpc>
-              <a:spcBef>
-                <a:spcPct val="0"/>
-              </a:spcBef>
-              <a:spcAft>
-                <a:spcPct val="0"/>
-              </a:spcAft>
-            </a:pPr>
-            <a:r>
-              <a:rPr lang="en-US" sz="2000" b="1" dirty="0">
-                <a:gradFill>
-                  <a:gsLst>
-                    <a:gs pos="0">
-                      <a:srgbClr val="FFFFFF"/>
-                    </a:gs>
-                    <a:gs pos="100000">
-                      <a:srgbClr val="FFFFFF"/>
-                    </a:gs>
-                  </a:gsLst>
-                  <a:lin ang="5400000" scaled="0"/>
-                </a:gradFill>
-                <a:ea typeface="Segoe UI" pitchFamily="34" charset="0"/>
-                <a:cs typeface="Segoe UI" pitchFamily="34" charset="0"/>
-              </a:rPr>
-              <a:t>.NET SDK</a:t>
-            </a:r>
-          </a:p>
-        </p:txBody>
-      </p:sp>
+            </a:prstGeom>
+            <a:solidFill>
+              <a:schemeClr val="accent1"/>
+            </a:solidFill>
+            <a:ln>
+              <a:noFill/>
+              <a:headEnd type="none" w="med" len="med"/>
+              <a:tailEnd type="none" w="med" len="med"/>
+            </a:ln>
+            <a:effectLst/>
+          </p:spPr>
+          <p:style>
+            <a:lnRef idx="1">
+              <a:schemeClr val="accent2"/>
+            </a:lnRef>
+            <a:fillRef idx="3">
+              <a:schemeClr val="accent2"/>
+            </a:fillRef>
+            <a:effectRef idx="2">
+              <a:schemeClr val="accent2"/>
+            </a:effectRef>
+            <a:fontRef idx="minor">
+              <a:schemeClr val="lt1"/>
+            </a:fontRef>
+          </p:style>
+          <p:txBody>
+            <a:bodyPr rot="0" spcFirstLastPara="0" vertOverflow="overflow" horzOverflow="overflow" vert="horz" wrap="square" lIns="182880" tIns="146304" rIns="182880" bIns="146304" numCol="1" spcCol="0" rtlCol="0" fromWordArt="0" anchor="ctr" anchorCtr="0" forceAA="0" compatLnSpc="1">
+              <a:prstTxWarp prst="textNoShape">
+                <a:avLst/>
+              </a:prstTxWarp>
+              <a:noAutofit/>
+            </a:bodyPr>
+            <a:lstStyle/>
+            <a:p>
+              <a:pPr algn="ctr" defTabSz="932472" fontAlgn="base">
+                <a:lnSpc>
+                  <a:spcPct val="90000"/>
+                </a:lnSpc>
+                <a:spcBef>
+                  <a:spcPct val="0"/>
+                </a:spcBef>
+                <a:spcAft>
+                  <a:spcPct val="0"/>
+                </a:spcAft>
+              </a:pPr>
+              <a:r>
+                <a:rPr lang="en-US" sz="1600" b="1" dirty="0">
+                  <a:gradFill>
+                    <a:gsLst>
+                      <a:gs pos="0">
+                        <a:srgbClr val="FFFFFF"/>
+                      </a:gs>
+                      <a:gs pos="100000">
+                        <a:srgbClr val="FFFFFF"/>
+                      </a:gs>
+                    </a:gsLst>
+                    <a:lin ang="5400000" scaled="0"/>
+                  </a:gradFill>
+                  <a:ea typeface="Segoe UI" pitchFamily="34" charset="0"/>
+                  <a:cs typeface="Segoe UI" pitchFamily="34" charset="0"/>
+                </a:rPr>
+                <a:t>Python SDK</a:t>
+              </a:r>
+            </a:p>
+          </p:txBody>
+        </p:sp>
+        <p:sp>
+          <p:nvSpPr>
+            <p:cNvPr id="7" name="Rectangle 6">
+              <a:extLst>
+                <a:ext uri="{FF2B5EF4-FFF2-40B4-BE49-F238E27FC236}">
+                  <a16:creationId xmlns:a16="http://schemas.microsoft.com/office/drawing/2014/main" id="{BFB5EFF7-8952-8BC7-6830-DD035DB6E45B}"/>
+                </a:ext>
+              </a:extLst>
+            </p:cNvPr>
+            <p:cNvSpPr/>
+            <p:nvPr/>
+          </p:nvSpPr>
+          <p:spPr bwMode="auto">
+            <a:xfrm>
+              <a:off x="8184953" y="631875"/>
+              <a:ext cx="1810871" cy="699247"/>
+            </a:xfrm>
+            <a:prstGeom prst="rect">
+              <a:avLst/>
+            </a:prstGeom>
+            <a:solidFill>
+              <a:schemeClr val="accent1"/>
+            </a:solidFill>
+            <a:ln>
+              <a:noFill/>
+              <a:headEnd type="none" w="med" len="med"/>
+              <a:tailEnd type="none" w="med" len="med"/>
+            </a:ln>
+            <a:effectLst/>
+          </p:spPr>
+          <p:style>
+            <a:lnRef idx="1">
+              <a:schemeClr val="accent2"/>
+            </a:lnRef>
+            <a:fillRef idx="3">
+              <a:schemeClr val="accent2"/>
+            </a:fillRef>
+            <a:effectRef idx="2">
+              <a:schemeClr val="accent2"/>
+            </a:effectRef>
+            <a:fontRef idx="minor">
+              <a:schemeClr val="lt1"/>
+            </a:fontRef>
+          </p:style>
+          <p:txBody>
+            <a:bodyPr rot="0" spcFirstLastPara="0" vertOverflow="overflow" horzOverflow="overflow" vert="horz" wrap="square" lIns="182880" tIns="146304" rIns="182880" bIns="146304" numCol="1" spcCol="0" rtlCol="0" fromWordArt="0" anchor="ctr" anchorCtr="0" forceAA="0" compatLnSpc="1">
+              <a:prstTxWarp prst="textNoShape">
+                <a:avLst/>
+              </a:prstTxWarp>
+              <a:noAutofit/>
+            </a:bodyPr>
+            <a:lstStyle/>
+            <a:p>
+              <a:pPr algn="ctr" defTabSz="932472" fontAlgn="base">
+                <a:lnSpc>
+                  <a:spcPct val="90000"/>
+                </a:lnSpc>
+                <a:spcBef>
+                  <a:spcPct val="0"/>
+                </a:spcBef>
+                <a:spcAft>
+                  <a:spcPct val="0"/>
+                </a:spcAft>
+              </a:pPr>
+              <a:r>
+                <a:rPr lang="en-US" sz="1600" b="1" dirty="0">
+                  <a:gradFill>
+                    <a:gsLst>
+                      <a:gs pos="0">
+                        <a:srgbClr val="FFFFFF"/>
+                      </a:gs>
+                      <a:gs pos="100000">
+                        <a:srgbClr val="FFFFFF"/>
+                      </a:gs>
+                    </a:gsLst>
+                    <a:lin ang="5400000" scaled="0"/>
+                  </a:gradFill>
+                  <a:ea typeface="Segoe UI" pitchFamily="34" charset="0"/>
+                  <a:cs typeface="Segoe UI" pitchFamily="34" charset="0"/>
+                </a:rPr>
+                <a:t>.NET SDK</a:t>
+              </a:r>
+            </a:p>
+          </p:txBody>
+        </p:sp>
+        <p:sp>
+          <p:nvSpPr>
+            <p:cNvPr id="10" name="Rectangle 9">
+              <a:extLst>
+                <a:ext uri="{FF2B5EF4-FFF2-40B4-BE49-F238E27FC236}">
+                  <a16:creationId xmlns:a16="http://schemas.microsoft.com/office/drawing/2014/main" id="{862BC465-3046-1B1C-43F1-316AD1B8E419}"/>
+                </a:ext>
+              </a:extLst>
+            </p:cNvPr>
+            <p:cNvSpPr/>
+            <p:nvPr/>
+          </p:nvSpPr>
+          <p:spPr bwMode="auto">
+            <a:xfrm>
+              <a:off x="4312201" y="631875"/>
+              <a:ext cx="1810871" cy="699247"/>
+            </a:xfrm>
+            <a:prstGeom prst="rect">
+              <a:avLst/>
+            </a:prstGeom>
+            <a:solidFill>
+              <a:schemeClr val="accent1"/>
+            </a:solidFill>
+            <a:ln>
+              <a:noFill/>
+              <a:headEnd type="none" w="med" len="med"/>
+              <a:tailEnd type="none" w="med" len="med"/>
+            </a:ln>
+            <a:effectLst/>
+          </p:spPr>
+          <p:style>
+            <a:lnRef idx="1">
+              <a:schemeClr val="accent2"/>
+            </a:lnRef>
+            <a:fillRef idx="3">
+              <a:schemeClr val="accent2"/>
+            </a:fillRef>
+            <a:effectRef idx="2">
+              <a:schemeClr val="accent2"/>
+            </a:effectRef>
+            <a:fontRef idx="minor">
+              <a:schemeClr val="lt1"/>
+            </a:fontRef>
+          </p:style>
+          <p:txBody>
+            <a:bodyPr rot="0" spcFirstLastPara="0" vertOverflow="overflow" horzOverflow="overflow" vert="horz" wrap="square" lIns="182880" tIns="146304" rIns="182880" bIns="146304" numCol="1" spcCol="0" rtlCol="0" fromWordArt="0" anchor="ctr" anchorCtr="0" forceAA="0" compatLnSpc="1">
+              <a:prstTxWarp prst="textNoShape">
+                <a:avLst/>
+              </a:prstTxWarp>
+              <a:noAutofit/>
+            </a:bodyPr>
+            <a:lstStyle/>
+            <a:p>
+              <a:pPr algn="ctr" defTabSz="932472" fontAlgn="base">
+                <a:lnSpc>
+                  <a:spcPct val="90000"/>
+                </a:lnSpc>
+                <a:spcBef>
+                  <a:spcPct val="0"/>
+                </a:spcBef>
+                <a:spcAft>
+                  <a:spcPct val="0"/>
+                </a:spcAft>
+              </a:pPr>
+              <a:r>
+                <a:rPr lang="en-US" sz="1600" b="1" dirty="0">
+                  <a:gradFill>
+                    <a:gsLst>
+                      <a:gs pos="0">
+                        <a:srgbClr val="FFFFFF"/>
+                      </a:gs>
+                      <a:gs pos="100000">
+                        <a:srgbClr val="FFFFFF"/>
+                      </a:gs>
+                    </a:gsLst>
+                    <a:lin ang="5400000" scaled="0"/>
+                  </a:gradFill>
+                  <a:ea typeface="Segoe UI" pitchFamily="34" charset="0"/>
+                  <a:cs typeface="Segoe UI" pitchFamily="34" charset="0"/>
+                </a:rPr>
+                <a:t>Semantic Link Labs</a:t>
+              </a:r>
+            </a:p>
+          </p:txBody>
+        </p:sp>
+      </p:grpSp>
     </p:spTree>
     <p:extLst>
       <p:ext uri="{BB962C8B-B14F-4D97-AF65-F5344CB8AC3E}">
@@ -25719,6 +25669,110 @@
       </p:sp>
       <p:sp>
         <p:nvSpPr>
+          <p:cNvPr id="11" name="Rectangle 10">
+            <a:extLst>
+              <a:ext uri="{FF2B5EF4-FFF2-40B4-BE49-F238E27FC236}">
+                <a16:creationId xmlns:a16="http://schemas.microsoft.com/office/drawing/2014/main" id="{33713FDD-73A1-0061-1F3E-ED687457327E}"/>
+              </a:ext>
+            </a:extLst>
+          </p:cNvPr>
+          <p:cNvSpPr/>
+          <p:nvPr/>
+        </p:nvSpPr>
+        <p:spPr bwMode="auto">
+          <a:xfrm>
+            <a:off x="7783281" y="743543"/>
+            <a:ext cx="1343228" cy="811973"/>
+          </a:xfrm>
+          <a:prstGeom prst="rect">
+            <a:avLst/>
+          </a:prstGeom>
+          <a:solidFill>
+            <a:schemeClr val="bg1"/>
+          </a:solidFill>
+          <a:ln>
+            <a:solidFill>
+              <a:schemeClr val="tx1"/>
+            </a:solidFill>
+            <a:headEnd type="none" w="med" len="med"/>
+            <a:tailEnd type="none" w="med" len="med"/>
+          </a:ln>
+          <a:effectLst/>
+        </p:spPr>
+        <p:style>
+          <a:lnRef idx="1">
+            <a:schemeClr val="accent2"/>
+          </a:lnRef>
+          <a:fillRef idx="3">
+            <a:schemeClr val="accent2"/>
+          </a:fillRef>
+          <a:effectRef idx="2">
+            <a:schemeClr val="accent2"/>
+          </a:effectRef>
+          <a:fontRef idx="minor">
+            <a:schemeClr val="lt1"/>
+          </a:fontRef>
+        </p:style>
+        <p:txBody>
+          <a:bodyPr rot="0" spcFirstLastPara="0" vertOverflow="overflow" horzOverflow="overflow" vert="horz" wrap="square" lIns="0" tIns="0" rIns="0" bIns="0" numCol="1" spcCol="0" rtlCol="0" fromWordArt="0" anchor="ctr" anchorCtr="0" forceAA="0" compatLnSpc="1">
+            <a:prstTxWarp prst="textNoShape">
+              <a:avLst/>
+            </a:prstTxWarp>
+            <a:noAutofit/>
+          </a:bodyPr>
+          <a:lstStyle/>
+          <a:p>
+            <a:pPr algn="ctr" defTabSz="932472" fontAlgn="base">
+              <a:lnSpc>
+                <a:spcPct val="90000"/>
+              </a:lnSpc>
+              <a:spcBef>
+                <a:spcPct val="0"/>
+              </a:spcBef>
+              <a:spcAft>
+                <a:spcPct val="0"/>
+              </a:spcAft>
+            </a:pPr>
+            <a:r>
+              <a:rPr lang="en-US" sz="1200" b="1" dirty="0">
+                <a:solidFill>
+                  <a:schemeClr val="tx1"/>
+                </a:solidFill>
+                <a:latin typeface="Lucida Console" panose="020B0609040504020204" pitchFamily="49" charset="0"/>
+                <a:ea typeface="Segoe UI" pitchFamily="34" charset="0"/>
+                <a:cs typeface="Segoe UI" pitchFamily="34" charset="0"/>
+              </a:rPr>
+              <a:t>feature</a:t>
+            </a:r>
+          </a:p>
+          <a:p>
+            <a:pPr algn="ctr" defTabSz="932472" fontAlgn="base">
+              <a:lnSpc>
+                <a:spcPct val="90000"/>
+              </a:lnSpc>
+              <a:spcBef>
+                <a:spcPct val="0"/>
+              </a:spcBef>
+              <a:spcAft>
+                <a:spcPct val="0"/>
+              </a:spcAft>
+            </a:pPr>
+            <a:r>
+              <a:rPr lang="en-US" sz="1200" dirty="0">
+                <a:solidFill>
+                  <a:schemeClr val="tx1"/>
+                </a:solidFill>
+                <a:latin typeface="Lucida Console" panose="020B0609040504020204" pitchFamily="49" charset="0"/>
+                <a:ea typeface="Segoe UI" pitchFamily="34" charset="0"/>
+                <a:cs typeface="Segoe UI" pitchFamily="34" charset="0"/>
+              </a:rPr>
+              <a:t>workspace</a:t>
+            </a:r>
+          </a:p>
+        </p:txBody>
+      </p:sp>
+      <p:sp>
+        <p:nvSpPr>
           <p:cNvPr id="9" name="Arrow: Right 8">
             <a:extLst>
               <a:ext uri="{FF2B5EF4-FFF2-40B4-BE49-F238E27FC236}">
@@ -25801,110 +25855,6 @@
                 <a:cs typeface="Segoe UI" pitchFamily="34" charset="0"/>
               </a:rPr>
               <a:t>Update from GIT</a:t>
-            </a:r>
-          </a:p>
-        </p:txBody>
-      </p:sp>
-      <p:sp>
-        <p:nvSpPr>
-          <p:cNvPr id="11" name="Rectangle 10">
-            <a:extLst>
-              <a:ext uri="{FF2B5EF4-FFF2-40B4-BE49-F238E27FC236}">
-                <a16:creationId xmlns:a16="http://schemas.microsoft.com/office/drawing/2014/main" id="{33713FDD-73A1-0061-1F3E-ED687457327E}"/>
-              </a:ext>
-            </a:extLst>
-          </p:cNvPr>
-          <p:cNvSpPr/>
-          <p:nvPr/>
-        </p:nvSpPr>
-        <p:spPr bwMode="auto">
-          <a:xfrm>
-            <a:off x="7783281" y="743543"/>
-            <a:ext cx="1343228" cy="811973"/>
-          </a:xfrm>
-          <a:prstGeom prst="rect">
-            <a:avLst/>
-          </a:prstGeom>
-          <a:solidFill>
-            <a:schemeClr val="bg1"/>
-          </a:solidFill>
-          <a:ln>
-            <a:solidFill>
-              <a:schemeClr val="tx1"/>
-            </a:solidFill>
-            <a:headEnd type="none" w="med" len="med"/>
-            <a:tailEnd type="none" w="med" len="med"/>
-          </a:ln>
-          <a:effectLst/>
-        </p:spPr>
-        <p:style>
-          <a:lnRef idx="1">
-            <a:schemeClr val="accent2"/>
-          </a:lnRef>
-          <a:fillRef idx="3">
-            <a:schemeClr val="accent2"/>
-          </a:fillRef>
-          <a:effectRef idx="2">
-            <a:schemeClr val="accent2"/>
-          </a:effectRef>
-          <a:fontRef idx="minor">
-            <a:schemeClr val="lt1"/>
-          </a:fontRef>
-        </p:style>
-        <p:txBody>
-          <a:bodyPr rot="0" spcFirstLastPara="0" vertOverflow="overflow" horzOverflow="overflow" vert="horz" wrap="square" lIns="0" tIns="0" rIns="0" bIns="0" numCol="1" spcCol="0" rtlCol="0" fromWordArt="0" anchor="ctr" anchorCtr="0" forceAA="0" compatLnSpc="1">
-            <a:prstTxWarp prst="textNoShape">
-              <a:avLst/>
-            </a:prstTxWarp>
-            <a:noAutofit/>
-          </a:bodyPr>
-          <a:lstStyle/>
-          <a:p>
-            <a:pPr algn="ctr" defTabSz="932472" fontAlgn="base">
-              <a:lnSpc>
-                <a:spcPct val="90000"/>
-              </a:lnSpc>
-              <a:spcBef>
-                <a:spcPct val="0"/>
-              </a:spcBef>
-              <a:spcAft>
-                <a:spcPct val="0"/>
-              </a:spcAft>
-            </a:pPr>
-            <a:r>
-              <a:rPr lang="en-US" sz="1200" b="1" dirty="0">
-                <a:solidFill>
-                  <a:schemeClr val="tx1"/>
-                </a:solidFill>
-                <a:latin typeface="Lucida Console" panose="020B0609040504020204" pitchFamily="49" charset="0"/>
-                <a:ea typeface="Segoe UI" pitchFamily="34" charset="0"/>
-                <a:cs typeface="Segoe UI" pitchFamily="34" charset="0"/>
-              </a:rPr>
-              <a:t>feature</a:t>
-            </a:r>
-          </a:p>
-          <a:p>
-            <a:pPr algn="ctr" defTabSz="932472" fontAlgn="base">
-              <a:lnSpc>
-                <a:spcPct val="90000"/>
-              </a:lnSpc>
-              <a:spcBef>
-                <a:spcPct val="0"/>
-              </a:spcBef>
-              <a:spcAft>
-                <a:spcPct val="0"/>
-              </a:spcAft>
-            </a:pPr>
-            <a:r>
-              <a:rPr lang="en-US" sz="1200" dirty="0">
-                <a:solidFill>
-                  <a:schemeClr val="tx1"/>
-                </a:solidFill>
-                <a:latin typeface="Lucida Console" panose="020B0609040504020204" pitchFamily="49" charset="0"/>
-                <a:ea typeface="Segoe UI" pitchFamily="34" charset="0"/>
-                <a:cs typeface="Segoe UI" pitchFamily="34" charset="0"/>
-              </a:rPr>
-              <a:t>workspace</a:t>
             </a:r>
           </a:p>
         </p:txBody>
@@ -25962,8 +25912,8 @@
         </p:nvSpPr>
         <p:spPr bwMode="auto">
           <a:xfrm>
-            <a:off x="1355460" y="849630"/>
-            <a:ext cx="9384258" cy="934346"/>
+            <a:off x="825351" y="2571973"/>
+            <a:ext cx="5636410" cy="1461547"/>
           </a:xfrm>
           <a:prstGeom prst="rect">
             <a:avLst/>
@@ -26016,31 +25966,34 @@
                 <a:spcPct val="0"/>
               </a:spcAft>
             </a:pPr>
-            <a:endParaRPr lang="en-US" sz="1200" b="1" dirty="0">
-              <a:gradFill>
-                <a:gsLst>
-                  <a:gs pos="0">
-                    <a:srgbClr val="FFFFFF"/>
-                  </a:gs>
-                  <a:gs pos="100000">
-                    <a:srgbClr val="FFFFFF"/>
-                  </a:gs>
-                </a:gsLst>
-                <a:lin ang="5400000" scaled="0"/>
-              </a:gradFill>
-              <a:latin typeface="Lucida Console" panose="020B0609040504020204" pitchFamily="49" charset="0"/>
-              <a:ea typeface="Segoe UI" pitchFamily="34" charset="0"/>
-              <a:cs typeface="Segoe UI" pitchFamily="34" charset="0"/>
-            </a:endParaRPr>
+            <a:r>
+              <a:rPr lang="en-US" sz="1200" b="1" dirty="0">
+                <a:gradFill>
+                  <a:gsLst>
+                    <a:gs pos="0">
+                      <a:srgbClr val="FFFFFF"/>
+                    </a:gs>
+                    <a:gs pos="100000">
+                      <a:srgbClr val="FFFFFF"/>
+                    </a:gs>
+                  </a:gsLst>
+                  <a:lin ang="5400000" scaled="0"/>
+                </a:gradFill>
+                <a:latin typeface="Lucida Console" panose="020B0609040504020204" pitchFamily="49" charset="0"/>
+                <a:ea typeface="Segoe UI" pitchFamily="34" charset="0"/>
+                <a:cs typeface="Segoe UI" pitchFamily="34" charset="0"/>
+              </a:rPr>
+              <a:t>z</a:t>
+            </a:r>
           </a:p>
         </p:txBody>
       </p:sp>
       <p:sp>
         <p:nvSpPr>
-          <p:cNvPr id="17" name="Arrow: Right 16">
+          <p:cNvPr id="25" name="Rectangle 24">
             <a:extLst>
               <a:ext uri="{FF2B5EF4-FFF2-40B4-BE49-F238E27FC236}">
-                <a16:creationId xmlns:a16="http://schemas.microsoft.com/office/drawing/2014/main" id="{A9129EE1-6B91-2CB3-7B1D-95D01A018AFD}"/>
+                <a16:creationId xmlns:a16="http://schemas.microsoft.com/office/drawing/2014/main" id="{E7637F13-E84B-43AD-DCDD-BBE15BBC2A43}"/>
               </a:ext>
             </a:extLst>
           </p:cNvPr>
@@ -26049,7 +26002,610 @@
         </p:nvSpPr>
         <p:spPr bwMode="auto">
           <a:xfrm>
-            <a:off x="2690117" y="1076798"/>
+            <a:off x="936571" y="2686267"/>
+            <a:ext cx="1694222" cy="1174532"/>
+          </a:xfrm>
+          <a:prstGeom prst="rect">
+            <a:avLst/>
+          </a:prstGeom>
+          <a:solidFill>
+            <a:schemeClr val="accent4">
+              <a:lumMod val="75000"/>
+            </a:schemeClr>
+          </a:solidFill>
+          <a:ln>
+            <a:solidFill>
+              <a:schemeClr val="tx1"/>
+            </a:solidFill>
+            <a:headEnd type="none" w="med" len="med"/>
+            <a:tailEnd type="none" w="med" len="med"/>
+          </a:ln>
+          <a:effectLst/>
+        </p:spPr>
+        <p:style>
+          <a:lnRef idx="1">
+            <a:schemeClr val="accent2"/>
+          </a:lnRef>
+          <a:fillRef idx="3">
+            <a:schemeClr val="accent2"/>
+          </a:fillRef>
+          <a:effectRef idx="2">
+            <a:schemeClr val="accent2"/>
+          </a:effectRef>
+          <a:fontRef idx="minor">
+            <a:schemeClr val="lt1"/>
+          </a:fontRef>
+        </p:style>
+        <p:txBody>
+          <a:bodyPr rot="0" spcFirstLastPara="0" vertOverflow="overflow" horzOverflow="overflow" vert="horz" wrap="square" lIns="0" tIns="0" rIns="0" bIns="0" numCol="1" spcCol="0" rtlCol="0" fromWordArt="0" anchor="ctr" anchorCtr="0" forceAA="0" compatLnSpc="1">
+            <a:prstTxWarp prst="textNoShape">
+              <a:avLst/>
+            </a:prstTxWarp>
+            <a:noAutofit/>
+          </a:bodyPr>
+          <a:lstStyle/>
+          <a:p>
+            <a:pPr algn="ctr" defTabSz="932472" fontAlgn="base">
+              <a:lnSpc>
+                <a:spcPct val="90000"/>
+              </a:lnSpc>
+              <a:spcBef>
+                <a:spcPct val="0"/>
+              </a:spcBef>
+              <a:spcAft>
+                <a:spcPct val="0"/>
+              </a:spcAft>
+            </a:pPr>
+            <a:r>
+              <a:rPr lang="en-US" sz="1200" dirty="0">
+                <a:solidFill>
+                  <a:schemeClr val="bg1"/>
+                </a:solidFill>
+                <a:latin typeface="Lucida Console" panose="020B0609040504020204" pitchFamily="49" charset="0"/>
+                <a:ea typeface="Segoe UI" pitchFamily="34" charset="0"/>
+                <a:cs typeface="Segoe UI" pitchFamily="34" charset="0"/>
+              </a:rPr>
+              <a:t>integration</a:t>
+            </a:r>
+          </a:p>
+          <a:p>
+            <a:pPr algn="ctr" defTabSz="932472" fontAlgn="base">
+              <a:lnSpc>
+                <a:spcPct val="90000"/>
+              </a:lnSpc>
+              <a:spcBef>
+                <a:spcPct val="0"/>
+              </a:spcBef>
+              <a:spcAft>
+                <a:spcPct val="0"/>
+              </a:spcAft>
+            </a:pPr>
+            <a:r>
+              <a:rPr lang="en-US" sz="1200" dirty="0">
+                <a:solidFill>
+                  <a:schemeClr val="bg1"/>
+                </a:solidFill>
+                <a:latin typeface="Lucida Console" panose="020B0609040504020204" pitchFamily="49" charset="0"/>
+                <a:ea typeface="Segoe UI" pitchFamily="34" charset="0"/>
+                <a:cs typeface="Segoe UI" pitchFamily="34" charset="0"/>
+              </a:rPr>
+              <a:t>branch</a:t>
+            </a:r>
+          </a:p>
+        </p:txBody>
+      </p:sp>
+      <p:sp>
+        <p:nvSpPr>
+          <p:cNvPr id="5" name="Rectangle 4">
+            <a:extLst>
+              <a:ext uri="{FF2B5EF4-FFF2-40B4-BE49-F238E27FC236}">
+                <a16:creationId xmlns:a16="http://schemas.microsoft.com/office/drawing/2014/main" id="{351E4A48-4AFE-14C4-C949-99E29A33E27D}"/>
+              </a:ext>
+            </a:extLst>
+          </p:cNvPr>
+          <p:cNvSpPr/>
+          <p:nvPr/>
+        </p:nvSpPr>
+        <p:spPr bwMode="auto">
+          <a:xfrm>
+            <a:off x="4607712" y="2709961"/>
+            <a:ext cx="1694222" cy="1150838"/>
+          </a:xfrm>
+          <a:prstGeom prst="rect">
+            <a:avLst/>
+          </a:prstGeom>
+          <a:solidFill>
+            <a:schemeClr val="bg1"/>
+          </a:solidFill>
+          <a:ln>
+            <a:solidFill>
+              <a:schemeClr val="tx1"/>
+            </a:solidFill>
+            <a:headEnd type="none" w="med" len="med"/>
+            <a:tailEnd type="none" w="med" len="med"/>
+          </a:ln>
+          <a:effectLst/>
+        </p:spPr>
+        <p:style>
+          <a:lnRef idx="1">
+            <a:schemeClr val="accent2"/>
+          </a:lnRef>
+          <a:fillRef idx="3">
+            <a:schemeClr val="accent2"/>
+          </a:fillRef>
+          <a:effectRef idx="2">
+            <a:schemeClr val="accent2"/>
+          </a:effectRef>
+          <a:fontRef idx="minor">
+            <a:schemeClr val="lt1"/>
+          </a:fontRef>
+        </p:style>
+        <p:txBody>
+          <a:bodyPr rot="0" spcFirstLastPara="0" vertOverflow="overflow" horzOverflow="overflow" vert="horz" wrap="square" lIns="0" tIns="0" rIns="0" bIns="0" numCol="1" spcCol="0" rtlCol="0" fromWordArt="0" anchor="ctr" anchorCtr="0" forceAA="0" compatLnSpc="1">
+            <a:prstTxWarp prst="textNoShape">
+              <a:avLst/>
+            </a:prstTxWarp>
+            <a:noAutofit/>
+          </a:bodyPr>
+          <a:lstStyle/>
+          <a:p>
+            <a:pPr algn="ctr" defTabSz="932472" fontAlgn="base">
+              <a:lnSpc>
+                <a:spcPct val="90000"/>
+              </a:lnSpc>
+              <a:spcBef>
+                <a:spcPct val="0"/>
+              </a:spcBef>
+              <a:spcAft>
+                <a:spcPct val="0"/>
+              </a:spcAft>
+            </a:pPr>
+            <a:r>
+              <a:rPr lang="en-US" sz="1200" dirty="0">
+                <a:solidFill>
+                  <a:schemeClr val="tx1"/>
+                </a:solidFill>
+                <a:latin typeface="Lucida Console" panose="020B0609040504020204" pitchFamily="49" charset="0"/>
+                <a:ea typeface="Segoe UI" pitchFamily="34" charset="0"/>
+                <a:cs typeface="Segoe UI" pitchFamily="34" charset="0"/>
+              </a:rPr>
+              <a:t>dev</a:t>
+            </a:r>
+          </a:p>
+          <a:p>
+            <a:pPr algn="ctr" defTabSz="932472" fontAlgn="base">
+              <a:lnSpc>
+                <a:spcPct val="90000"/>
+              </a:lnSpc>
+              <a:spcBef>
+                <a:spcPct val="0"/>
+              </a:spcBef>
+              <a:spcAft>
+                <a:spcPct val="0"/>
+              </a:spcAft>
+            </a:pPr>
+            <a:r>
+              <a:rPr lang="en-US" sz="1200" dirty="0">
+                <a:solidFill>
+                  <a:schemeClr val="tx1"/>
+                </a:solidFill>
+                <a:latin typeface="Lucida Console" panose="020B0609040504020204" pitchFamily="49" charset="0"/>
+                <a:ea typeface="Segoe UI" pitchFamily="34" charset="0"/>
+                <a:cs typeface="Segoe UI" pitchFamily="34" charset="0"/>
+              </a:rPr>
+              <a:t>workspace</a:t>
+            </a:r>
+          </a:p>
+        </p:txBody>
+      </p:sp>
+      <p:grpSp>
+        <p:nvGrpSpPr>
+          <p:cNvPr id="35" name="Group 34">
+            <a:extLst>
+              <a:ext uri="{FF2B5EF4-FFF2-40B4-BE49-F238E27FC236}">
+                <a16:creationId xmlns:a16="http://schemas.microsoft.com/office/drawing/2014/main" id="{8EAB5EFC-17E8-D886-F4C2-57F69C90FCDC}"/>
+              </a:ext>
+            </a:extLst>
+          </p:cNvPr>
+          <p:cNvGrpSpPr/>
+          <p:nvPr/>
+        </p:nvGrpSpPr>
+        <p:grpSpPr>
+          <a:xfrm>
+            <a:off x="2772141" y="2709960"/>
+            <a:ext cx="1694222" cy="1150839"/>
+            <a:chOff x="2867466" y="2709960"/>
+            <a:chExt cx="1694222" cy="1150839"/>
+          </a:xfrm>
+        </p:grpSpPr>
+        <p:sp>
+          <p:nvSpPr>
+            <p:cNvPr id="34" name="Rectangle 33">
+              <a:extLst>
+                <a:ext uri="{FF2B5EF4-FFF2-40B4-BE49-F238E27FC236}">
+                  <a16:creationId xmlns:a16="http://schemas.microsoft.com/office/drawing/2014/main" id="{E3BEC9B5-18D6-D082-5303-C6310F1CA8FE}"/>
+                </a:ext>
+              </a:extLst>
+            </p:cNvPr>
+            <p:cNvSpPr/>
+            <p:nvPr/>
+          </p:nvSpPr>
+          <p:spPr bwMode="auto">
+            <a:xfrm>
+              <a:off x="2867466" y="2709960"/>
+              <a:ext cx="1694222" cy="1150839"/>
+            </a:xfrm>
+            <a:prstGeom prst="rect">
+              <a:avLst/>
+            </a:prstGeom>
+            <a:solidFill>
+              <a:schemeClr val="accent3"/>
+            </a:solidFill>
+            <a:ln>
+              <a:solidFill>
+                <a:schemeClr val="tx1"/>
+              </a:solidFill>
+              <a:headEnd type="none" w="med" len="med"/>
+              <a:tailEnd type="none" w="med" len="med"/>
+            </a:ln>
+            <a:effectLst/>
+          </p:spPr>
+          <p:style>
+            <a:lnRef idx="1">
+              <a:schemeClr val="accent2"/>
+            </a:lnRef>
+            <a:fillRef idx="3">
+              <a:schemeClr val="accent2"/>
+            </a:fillRef>
+            <a:effectRef idx="2">
+              <a:schemeClr val="accent2"/>
+            </a:effectRef>
+            <a:fontRef idx="minor">
+              <a:schemeClr val="lt1"/>
+            </a:fontRef>
+          </p:style>
+          <p:txBody>
+            <a:bodyPr rot="0" spcFirstLastPara="0" vertOverflow="overflow" horzOverflow="overflow" vert="horz" wrap="square" lIns="0" tIns="91440" rIns="0" bIns="0" numCol="1" spcCol="0" rtlCol="0" fromWordArt="0" anchor="t" anchorCtr="0" forceAA="0" compatLnSpc="1">
+              <a:prstTxWarp prst="textNoShape">
+                <a:avLst/>
+              </a:prstTxWarp>
+              <a:noAutofit/>
+            </a:bodyPr>
+            <a:lstStyle/>
+            <a:p>
+              <a:pPr algn="ctr" defTabSz="932472" fontAlgn="base">
+                <a:lnSpc>
+                  <a:spcPct val="90000"/>
+                </a:lnSpc>
+                <a:spcBef>
+                  <a:spcPct val="0"/>
+                </a:spcBef>
+                <a:spcAft>
+                  <a:spcPct val="0"/>
+                </a:spcAft>
+              </a:pPr>
+              <a:r>
+                <a:rPr lang="en-US" sz="1200" dirty="0">
+                  <a:solidFill>
+                    <a:schemeClr val="tx1">
+                      <a:lumMod val="60000"/>
+                      <a:lumOff val="40000"/>
+                    </a:schemeClr>
+                  </a:solidFill>
+                  <a:latin typeface="+mj-lt"/>
+                  <a:ea typeface="Segoe UI" pitchFamily="34" charset="0"/>
+                  <a:cs typeface="Segoe UI" pitchFamily="34" charset="0"/>
+                </a:rPr>
+                <a:t>custom workflow</a:t>
+              </a:r>
+            </a:p>
+          </p:txBody>
+        </p:sp>
+        <p:grpSp>
+          <p:nvGrpSpPr>
+            <p:cNvPr id="18" name="Group 17">
+              <a:extLst>
+                <a:ext uri="{FF2B5EF4-FFF2-40B4-BE49-F238E27FC236}">
+                  <a16:creationId xmlns:a16="http://schemas.microsoft.com/office/drawing/2014/main" id="{EAE9A8D8-7AA4-1CE3-FF19-566B361BC02B}"/>
+                </a:ext>
+              </a:extLst>
+            </p:cNvPr>
+            <p:cNvGrpSpPr/>
+            <p:nvPr/>
+          </p:nvGrpSpPr>
+          <p:grpSpPr>
+            <a:xfrm>
+              <a:off x="3011977" y="2993373"/>
+              <a:ext cx="1393609" cy="736239"/>
+              <a:chOff x="7990583" y="1076799"/>
+              <a:chExt cx="1393609" cy="736239"/>
+            </a:xfrm>
+          </p:grpSpPr>
+          <p:sp>
+            <p:nvSpPr>
+              <p:cNvPr id="3" name="Arrow: Right 2">
+                <a:extLst>
+                  <a:ext uri="{FF2B5EF4-FFF2-40B4-BE49-F238E27FC236}">
+                    <a16:creationId xmlns:a16="http://schemas.microsoft.com/office/drawing/2014/main" id="{F8DD27C2-B90A-BD11-0E57-7542BD7968E5}"/>
+                  </a:ext>
+                </a:extLst>
+              </p:cNvPr>
+              <p:cNvSpPr/>
+              <p:nvPr/>
+            </p:nvSpPr>
+            <p:spPr bwMode="auto">
+              <a:xfrm>
+                <a:off x="7990583" y="1076799"/>
+                <a:ext cx="1393609" cy="343030"/>
+              </a:xfrm>
+              <a:prstGeom prst="rightArrow">
+                <a:avLst>
+                  <a:gd name="adj1" fmla="val 68047"/>
+                  <a:gd name="adj2" fmla="val 58330"/>
+                </a:avLst>
+              </a:prstGeom>
+              <a:solidFill>
+                <a:srgbClr val="8A0000"/>
+              </a:solidFill>
+              <a:ln>
+                <a:noFill/>
+                <a:headEnd type="none" w="med" len="med"/>
+                <a:tailEnd type="none" w="med" len="med"/>
+              </a:ln>
+              <a:effectLst/>
+            </p:spPr>
+            <p:style>
+              <a:lnRef idx="1">
+                <a:schemeClr val="accent2"/>
+              </a:lnRef>
+              <a:fillRef idx="3">
+                <a:schemeClr val="accent2"/>
+              </a:fillRef>
+              <a:effectRef idx="2">
+                <a:schemeClr val="accent2"/>
+              </a:effectRef>
+              <a:fontRef idx="minor">
+                <a:schemeClr val="lt1"/>
+              </a:fontRef>
+            </p:style>
+            <p:txBody>
+              <a:bodyPr rot="0" spcFirstLastPara="0" vertOverflow="overflow" horzOverflow="overflow" vert="horz" wrap="square" lIns="0" tIns="0" rIns="0" bIns="0" numCol="1" spcCol="0" rtlCol="0" fromWordArt="0" anchor="ctr" anchorCtr="0" forceAA="0" compatLnSpc="1">
+                <a:prstTxWarp prst="textNoShape">
+                  <a:avLst/>
+                </a:prstTxWarp>
+                <a:noAutofit/>
+              </a:bodyPr>
+              <a:lstStyle/>
+              <a:p>
+                <a:pPr algn="ctr" defTabSz="932472" fontAlgn="base">
+                  <a:lnSpc>
+                    <a:spcPct val="90000"/>
+                  </a:lnSpc>
+                  <a:spcBef>
+                    <a:spcPct val="0"/>
+                  </a:spcBef>
+                  <a:spcAft>
+                    <a:spcPct val="0"/>
+                  </a:spcAft>
+                </a:pPr>
+                <a:r>
+                  <a:rPr lang="en-US" sz="1000" b="1" dirty="0">
+                    <a:gradFill>
+                      <a:gsLst>
+                        <a:gs pos="0">
+                          <a:srgbClr val="FFFFFF"/>
+                        </a:gs>
+                        <a:gs pos="100000">
+                          <a:srgbClr val="FFFFFF"/>
+                        </a:gs>
+                      </a:gsLst>
+                      <a:lin ang="5400000" scaled="0"/>
+                    </a:gradFill>
+                    <a:latin typeface="+mj-lt"/>
+                    <a:ea typeface="Segoe UI" pitchFamily="34" charset="0"/>
+                    <a:cs typeface="Segoe UI" pitchFamily="34" charset="0"/>
+                  </a:rPr>
+                  <a:t>Update from GIT</a:t>
+                </a:r>
+              </a:p>
+            </p:txBody>
+          </p:sp>
+          <p:sp>
+            <p:nvSpPr>
+              <p:cNvPr id="16" name="Arrow: Right 15">
+                <a:extLst>
+                  <a:ext uri="{FF2B5EF4-FFF2-40B4-BE49-F238E27FC236}">
+                    <a16:creationId xmlns:a16="http://schemas.microsoft.com/office/drawing/2014/main" id="{14FDCF3A-3080-4367-9AA1-6A83089B55B6}"/>
+                  </a:ext>
+                </a:extLst>
+              </p:cNvPr>
+              <p:cNvSpPr/>
+              <p:nvPr/>
+            </p:nvSpPr>
+            <p:spPr bwMode="auto">
+              <a:xfrm>
+                <a:off x="7990583" y="1470008"/>
+                <a:ext cx="1393609" cy="343030"/>
+              </a:xfrm>
+              <a:prstGeom prst="rightArrow">
+                <a:avLst>
+                  <a:gd name="adj1" fmla="val 68047"/>
+                  <a:gd name="adj2" fmla="val 58330"/>
+                </a:avLst>
+              </a:prstGeom>
+              <a:solidFill>
+                <a:srgbClr val="8A0000"/>
+              </a:solidFill>
+              <a:ln>
+                <a:noFill/>
+                <a:headEnd type="none" w="med" len="med"/>
+                <a:tailEnd type="none" w="med" len="med"/>
+              </a:ln>
+              <a:effectLst/>
+            </p:spPr>
+            <p:style>
+              <a:lnRef idx="1">
+                <a:schemeClr val="accent2"/>
+              </a:lnRef>
+              <a:fillRef idx="3">
+                <a:schemeClr val="accent2"/>
+              </a:fillRef>
+              <a:effectRef idx="2">
+                <a:schemeClr val="accent2"/>
+              </a:effectRef>
+              <a:fontRef idx="minor">
+                <a:schemeClr val="lt1"/>
+              </a:fontRef>
+            </p:style>
+            <p:txBody>
+              <a:bodyPr rot="0" spcFirstLastPara="0" vertOverflow="overflow" horzOverflow="overflow" vert="horz" wrap="square" lIns="0" tIns="0" rIns="0" bIns="0" numCol="1" spcCol="0" rtlCol="0" fromWordArt="0" anchor="ctr" anchorCtr="0" forceAA="0" compatLnSpc="1">
+                <a:prstTxWarp prst="textNoShape">
+                  <a:avLst/>
+                </a:prstTxWarp>
+                <a:noAutofit/>
+              </a:bodyPr>
+              <a:lstStyle/>
+              <a:p>
+                <a:pPr algn="ctr" defTabSz="932472" fontAlgn="base">
+                  <a:lnSpc>
+                    <a:spcPct val="90000"/>
+                  </a:lnSpc>
+                  <a:spcBef>
+                    <a:spcPct val="0"/>
+                  </a:spcBef>
+                  <a:spcAft>
+                    <a:spcPct val="0"/>
+                  </a:spcAft>
+                </a:pPr>
+                <a:r>
+                  <a:rPr lang="en-US" sz="1000" b="1" dirty="0">
+                    <a:gradFill>
+                      <a:gsLst>
+                        <a:gs pos="0">
+                          <a:srgbClr val="FFFFFF"/>
+                        </a:gs>
+                        <a:gs pos="100000">
+                          <a:srgbClr val="FFFFFF"/>
+                        </a:gs>
+                      </a:gsLst>
+                      <a:lin ang="5400000" scaled="0"/>
+                    </a:gradFill>
+                    <a:latin typeface="+mj-lt"/>
+                    <a:ea typeface="Segoe UI" pitchFamily="34" charset="0"/>
+                    <a:cs typeface="Segoe UI" pitchFamily="34" charset="0"/>
+                  </a:rPr>
+                  <a:t>Run post-sync job</a:t>
+                </a:r>
+              </a:p>
+            </p:txBody>
+          </p:sp>
+        </p:grpSp>
+      </p:grpSp>
+      <p:sp>
+        <p:nvSpPr>
+          <p:cNvPr id="20" name="Rectangle 19">
+            <a:extLst>
+              <a:ext uri="{FF2B5EF4-FFF2-40B4-BE49-F238E27FC236}">
+                <a16:creationId xmlns:a16="http://schemas.microsoft.com/office/drawing/2014/main" id="{05F1C993-15CC-BEC0-D006-7CADAA7FBCA7}"/>
+              </a:ext>
+            </a:extLst>
+          </p:cNvPr>
+          <p:cNvSpPr/>
+          <p:nvPr/>
+        </p:nvSpPr>
+        <p:spPr bwMode="auto">
+          <a:xfrm>
+            <a:off x="1185450" y="748824"/>
+            <a:ext cx="6712456" cy="945505"/>
+          </a:xfrm>
+          <a:prstGeom prst="rect">
+            <a:avLst/>
+          </a:prstGeom>
+          <a:solidFill>
+            <a:schemeClr val="bg1">
+              <a:lumMod val="85000"/>
+            </a:schemeClr>
+          </a:solidFill>
+          <a:ln>
+            <a:solidFill>
+              <a:schemeClr val="tx1"/>
+            </a:solidFill>
+            <a:headEnd type="none" w="med" len="med"/>
+            <a:tailEnd type="none" w="med" len="med"/>
+          </a:ln>
+          <a:effectLst/>
+        </p:spPr>
+        <p:style>
+          <a:lnRef idx="1">
+            <a:schemeClr val="accent2"/>
+          </a:lnRef>
+          <a:fillRef idx="3">
+            <a:schemeClr val="accent2"/>
+          </a:fillRef>
+          <a:effectRef idx="2">
+            <a:schemeClr val="accent2"/>
+          </a:effectRef>
+          <a:fontRef idx="minor">
+            <a:schemeClr val="lt1"/>
+          </a:fontRef>
+        </p:style>
+        <p:txBody>
+          <a:bodyPr rot="0" spcFirstLastPara="0" vertOverflow="overflow" horzOverflow="overflow" vert="horz" wrap="square" lIns="0" tIns="0" rIns="0" bIns="0" numCol="1" spcCol="0" rtlCol="0" fromWordArt="0" anchor="ctr" anchorCtr="0" forceAA="0" compatLnSpc="1">
+            <a:prstTxWarp prst="textNoShape">
+              <a:avLst/>
+            </a:prstTxWarp>
+            <a:noAutofit/>
+          </a:bodyPr>
+          <a:lstStyle/>
+          <a:p>
+            <a:pPr algn="ctr" defTabSz="932472" fontAlgn="base">
+              <a:lnSpc>
+                <a:spcPct val="90000"/>
+              </a:lnSpc>
+              <a:spcBef>
+                <a:spcPct val="0"/>
+              </a:spcBef>
+              <a:spcAft>
+                <a:spcPct val="0"/>
+              </a:spcAft>
+            </a:pPr>
+            <a:r>
+              <a:rPr lang="en-US" sz="1200" b="1" dirty="0">
+                <a:gradFill>
+                  <a:gsLst>
+                    <a:gs pos="0">
+                      <a:srgbClr val="FFFFFF"/>
+                    </a:gs>
+                    <a:gs pos="100000">
+                      <a:srgbClr val="FFFFFF"/>
+                    </a:gs>
+                  </a:gsLst>
+                  <a:lin ang="5400000" scaled="0"/>
+                </a:gradFill>
+                <a:latin typeface="Lucida Console" panose="020B0609040504020204" pitchFamily="49" charset="0"/>
+                <a:ea typeface="Segoe UI" pitchFamily="34" charset="0"/>
+                <a:cs typeface="Segoe UI" pitchFamily="34" charset="0"/>
+              </a:rPr>
+              <a:t>z</a:t>
+            </a:r>
+          </a:p>
+        </p:txBody>
+      </p:sp>
+      <p:sp>
+        <p:nvSpPr>
+          <p:cNvPr id="22" name="Arrow: Right 21">
+            <a:extLst>
+              <a:ext uri="{FF2B5EF4-FFF2-40B4-BE49-F238E27FC236}">
+                <a16:creationId xmlns:a16="http://schemas.microsoft.com/office/drawing/2014/main" id="{151A3747-41CD-A708-5900-F14E87117D3C}"/>
+              </a:ext>
+            </a:extLst>
+          </p:cNvPr>
+          <p:cNvSpPr/>
+          <p:nvPr/>
+        </p:nvSpPr>
+        <p:spPr bwMode="auto">
+          <a:xfrm>
+            <a:off x="2530542" y="1005988"/>
             <a:ext cx="1393609" cy="431177"/>
           </a:xfrm>
           <a:prstGeom prst="rightArrow">
@@ -26125,10 +26681,10 @@
       </p:sp>
       <p:sp>
         <p:nvSpPr>
-          <p:cNvPr id="19" name="Rectangle 18">
+          <p:cNvPr id="24" name="Rectangle 23">
             <a:extLst>
               <a:ext uri="{FF2B5EF4-FFF2-40B4-BE49-F238E27FC236}">
-                <a16:creationId xmlns:a16="http://schemas.microsoft.com/office/drawing/2014/main" id="{8D3BA717-2C43-68C0-4023-86B2D99915A4}"/>
+                <a16:creationId xmlns:a16="http://schemas.microsoft.com/office/drawing/2014/main" id="{3F6A0244-19DE-1D17-C79F-33D4527ED812}"/>
               </a:ext>
             </a:extLst>
           </p:cNvPr>
@@ -26137,8 +26693,8 @@
         </p:nvSpPr>
         <p:spPr bwMode="auto">
           <a:xfrm>
-            <a:off x="4122150" y="961205"/>
-            <a:ext cx="1198226" cy="662363"/>
+            <a:off x="3962575" y="874471"/>
+            <a:ext cx="1198226" cy="694210"/>
           </a:xfrm>
           <a:prstGeom prst="rect">
             <a:avLst/>
@@ -26245,10 +26801,10 @@
       </p:sp>
       <p:sp>
         <p:nvSpPr>
-          <p:cNvPr id="21" name="Rectangle 20">
+          <p:cNvPr id="26" name="Rectangle 25">
             <a:extLst>
               <a:ext uri="{FF2B5EF4-FFF2-40B4-BE49-F238E27FC236}">
-                <a16:creationId xmlns:a16="http://schemas.microsoft.com/office/drawing/2014/main" id="{C093A881-CE3F-D1CA-F7B3-2CF3127E3D02}"/>
+                <a16:creationId xmlns:a16="http://schemas.microsoft.com/office/drawing/2014/main" id="{F850CA31-AD89-69D0-5A4A-68F9013D16B1}"/>
               </a:ext>
             </a:extLst>
           </p:cNvPr>
@@ -26257,8 +26813,8 @@
         </p:nvSpPr>
         <p:spPr bwMode="auto">
           <a:xfrm>
-            <a:off x="1453467" y="961205"/>
-            <a:ext cx="1198226" cy="662363"/>
+            <a:off x="1293892" y="874471"/>
+            <a:ext cx="1198226" cy="694210"/>
           </a:xfrm>
           <a:prstGeom prst="rect">
             <a:avLst/>
@@ -26349,10 +26905,10 @@
       </p:sp>
       <p:sp>
         <p:nvSpPr>
-          <p:cNvPr id="23" name="Arrow: Right 22">
+          <p:cNvPr id="27" name="Arrow: Right 26">
             <a:extLst>
               <a:ext uri="{FF2B5EF4-FFF2-40B4-BE49-F238E27FC236}">
-                <a16:creationId xmlns:a16="http://schemas.microsoft.com/office/drawing/2014/main" id="{81939891-4BDB-735D-0010-1D3F680655A8}"/>
+                <a16:creationId xmlns:a16="http://schemas.microsoft.com/office/drawing/2014/main" id="{FD76F6EE-7171-3053-F7B7-A4200C3CFB30}"/>
               </a:ext>
             </a:extLst>
           </p:cNvPr>
@@ -26361,7 +26917,7 @@
         </p:nvSpPr>
         <p:spPr bwMode="auto">
           <a:xfrm>
-            <a:off x="5358800" y="1076798"/>
+            <a:off x="5199225" y="1005988"/>
             <a:ext cx="1356709" cy="431177"/>
           </a:xfrm>
           <a:prstGeom prst="rightArrow">
@@ -26437,10 +26993,10 @@
       </p:sp>
       <p:sp>
         <p:nvSpPr>
-          <p:cNvPr id="25" name="Rectangle 24">
+          <p:cNvPr id="28" name="Rectangle 27">
             <a:extLst>
               <a:ext uri="{FF2B5EF4-FFF2-40B4-BE49-F238E27FC236}">
-                <a16:creationId xmlns:a16="http://schemas.microsoft.com/office/drawing/2014/main" id="{E7637F13-E84B-43AD-DCDD-BBE15BBC2A43}"/>
+                <a16:creationId xmlns:a16="http://schemas.microsoft.com/office/drawing/2014/main" id="{FFD53A50-8727-7477-4957-261E38F724F7}"/>
               </a:ext>
             </a:extLst>
           </p:cNvPr>
@@ -26449,8 +27005,8 @@
         </p:nvSpPr>
         <p:spPr bwMode="auto">
           <a:xfrm>
-            <a:off x="6753933" y="961205"/>
-            <a:ext cx="1198226" cy="662363"/>
+            <a:off x="6594358" y="874471"/>
+            <a:ext cx="1198226" cy="694210"/>
           </a:xfrm>
           <a:prstGeom prst="rect">
             <a:avLst/>
@@ -26537,198 +27093,6 @@
                 <a:cs typeface="Segoe UI" pitchFamily="34" charset="0"/>
               </a:rPr>
               <a:t>branch</a:t>
-            </a:r>
-          </a:p>
-        </p:txBody>
-      </p:sp>
-      <p:sp>
-        <p:nvSpPr>
-          <p:cNvPr id="3" name="Arrow: Right 2">
-            <a:extLst>
-              <a:ext uri="{FF2B5EF4-FFF2-40B4-BE49-F238E27FC236}">
-                <a16:creationId xmlns:a16="http://schemas.microsoft.com/office/drawing/2014/main" id="{F8DD27C2-B90A-BD11-0E57-7542BD7968E5}"/>
-              </a:ext>
-            </a:extLst>
-          </p:cNvPr>
-          <p:cNvSpPr/>
-          <p:nvPr/>
-        </p:nvSpPr>
-        <p:spPr bwMode="auto">
-          <a:xfrm>
-            <a:off x="7990583" y="1076798"/>
-            <a:ext cx="1393609" cy="431177"/>
-          </a:xfrm>
-          <a:prstGeom prst="rightArrow">
-            <a:avLst>
-              <a:gd name="adj1" fmla="val 62678"/>
-              <a:gd name="adj2" fmla="val 58330"/>
-            </a:avLst>
-          </a:prstGeom>
-          <a:solidFill>
-            <a:srgbClr val="8A0000"/>
-          </a:solidFill>
-          <a:ln>
-            <a:noFill/>
-            <a:headEnd type="none" w="med" len="med"/>
-            <a:tailEnd type="none" w="med" len="med"/>
-          </a:ln>
-          <a:effectLst/>
-        </p:spPr>
-        <p:style>
-          <a:lnRef idx="1">
-            <a:schemeClr val="accent2"/>
-          </a:lnRef>
-          <a:fillRef idx="3">
-            <a:schemeClr val="accent2"/>
-          </a:fillRef>
-          <a:effectRef idx="2">
-            <a:schemeClr val="accent2"/>
-          </a:effectRef>
-          <a:fontRef idx="minor">
-            <a:schemeClr val="lt1"/>
-          </a:fontRef>
-        </p:style>
-        <p:txBody>
-          <a:bodyPr rot="0" spcFirstLastPara="0" vertOverflow="overflow" horzOverflow="overflow" vert="horz" wrap="square" lIns="0" tIns="0" rIns="0" bIns="0" numCol="1" spcCol="0" rtlCol="0" fromWordArt="0" anchor="ctr" anchorCtr="0" forceAA="0" compatLnSpc="1">
-            <a:prstTxWarp prst="textNoShape">
-              <a:avLst/>
-            </a:prstTxWarp>
-            <a:noAutofit/>
-          </a:bodyPr>
-          <a:lstStyle/>
-          <a:p>
-            <a:pPr algn="ctr" defTabSz="932472" fontAlgn="base">
-              <a:lnSpc>
-                <a:spcPct val="90000"/>
-              </a:lnSpc>
-              <a:spcBef>
-                <a:spcPct val="0"/>
-              </a:spcBef>
-              <a:spcAft>
-                <a:spcPct val="0"/>
-              </a:spcAft>
-            </a:pPr>
-            <a:r>
-              <a:rPr lang="en-US" sz="1050" b="1" dirty="0">
-                <a:gradFill>
-                  <a:gsLst>
-                    <a:gs pos="0">
-                      <a:srgbClr val="FFFFFF"/>
-                    </a:gs>
-                    <a:gs pos="100000">
-                      <a:srgbClr val="FFFFFF"/>
-                    </a:gs>
-                  </a:gsLst>
-                  <a:lin ang="5400000" scaled="0"/>
-                </a:gradFill>
-                <a:ea typeface="Segoe UI" pitchFamily="34" charset="0"/>
-                <a:cs typeface="Segoe UI" pitchFamily="34" charset="0"/>
-              </a:rPr>
-              <a:t>Update from GIT</a:t>
-            </a:r>
-          </a:p>
-        </p:txBody>
-      </p:sp>
-      <p:sp>
-        <p:nvSpPr>
-          <p:cNvPr id="5" name="Rectangle 4">
-            <a:extLst>
-              <a:ext uri="{FF2B5EF4-FFF2-40B4-BE49-F238E27FC236}">
-                <a16:creationId xmlns:a16="http://schemas.microsoft.com/office/drawing/2014/main" id="{351E4A48-4AFE-14C4-C949-99E29A33E27D}"/>
-              </a:ext>
-            </a:extLst>
-          </p:cNvPr>
-          <p:cNvSpPr/>
-          <p:nvPr/>
-        </p:nvSpPr>
-        <p:spPr bwMode="auto">
-          <a:xfrm>
-            <a:off x="9422615" y="961205"/>
-            <a:ext cx="1198226" cy="662363"/>
-          </a:xfrm>
-          <a:prstGeom prst="rect">
-            <a:avLst/>
-          </a:prstGeom>
-          <a:solidFill>
-            <a:schemeClr val="bg1"/>
-          </a:solidFill>
-          <a:ln>
-            <a:solidFill>
-              <a:schemeClr val="tx1"/>
-            </a:solidFill>
-            <a:headEnd type="none" w="med" len="med"/>
-            <a:tailEnd type="none" w="med" len="med"/>
-          </a:ln>
-          <a:effectLst/>
-        </p:spPr>
-        <p:style>
-          <a:lnRef idx="1">
-            <a:schemeClr val="accent2"/>
-          </a:lnRef>
-          <a:fillRef idx="3">
-            <a:schemeClr val="accent2"/>
-          </a:fillRef>
-          <a:effectRef idx="2">
-            <a:schemeClr val="accent2"/>
-          </a:effectRef>
-          <a:fontRef idx="minor">
-            <a:schemeClr val="lt1"/>
-          </a:fontRef>
-        </p:style>
-        <p:txBody>
-          <a:bodyPr rot="0" spcFirstLastPara="0" vertOverflow="overflow" horzOverflow="overflow" vert="horz" wrap="square" lIns="0" tIns="0" rIns="0" bIns="0" numCol="1" spcCol="0" rtlCol="0" fromWordArt="0" anchor="ctr" anchorCtr="0" forceAA="0" compatLnSpc="1">
-            <a:prstTxWarp prst="textNoShape">
-              <a:avLst/>
-            </a:prstTxWarp>
-            <a:noAutofit/>
-          </a:bodyPr>
-          <a:lstStyle/>
-          <a:p>
-            <a:pPr algn="ctr" defTabSz="932472" fontAlgn="base">
-              <a:lnSpc>
-                <a:spcPct val="90000"/>
-              </a:lnSpc>
-              <a:spcBef>
-                <a:spcPct val="0"/>
-              </a:spcBef>
-              <a:spcAft>
-                <a:spcPct val="0"/>
-              </a:spcAft>
-            </a:pPr>
-            <a:r>
-              <a:rPr lang="en-US" sz="1200" dirty="0">
-                <a:solidFill>
-                  <a:schemeClr val="tx1"/>
-                </a:solidFill>
-                <a:latin typeface="Lucida Console" panose="020B0609040504020204" pitchFamily="49" charset="0"/>
-                <a:ea typeface="Segoe UI" pitchFamily="34" charset="0"/>
-                <a:cs typeface="Segoe UI" pitchFamily="34" charset="0"/>
-              </a:rPr>
-              <a:t>dev</a:t>
-            </a:r>
-          </a:p>
-          <a:p>
-            <a:pPr algn="ctr" defTabSz="932472" fontAlgn="base">
-              <a:lnSpc>
-                <a:spcPct val="90000"/>
-              </a:lnSpc>
-              <a:spcBef>
-                <a:spcPct val="0"/>
-              </a:spcBef>
-              <a:spcAft>
-                <a:spcPct val="0"/>
-              </a:spcAft>
-            </a:pPr>
-            <a:r>
-              <a:rPr lang="en-US" sz="1200" dirty="0">
-                <a:solidFill>
-                  <a:schemeClr val="tx1"/>
-                </a:solidFill>
-                <a:latin typeface="Lucida Console" panose="020B0609040504020204" pitchFamily="49" charset="0"/>
-                <a:ea typeface="Segoe UI" pitchFamily="34" charset="0"/>
-                <a:cs typeface="Segoe UI" pitchFamily="34" charset="0"/>
-              </a:rPr>
-              <a:t>workspace</a:t>
             </a:r>
           </a:p>
         </p:txBody>
@@ -34066,10 +34430,10 @@
       </p:grpSpPr>
       <p:sp>
         <p:nvSpPr>
-          <p:cNvPr id="2" name="Rectangle 1">
+          <p:cNvPr id="4" name="Rectangle 3">
             <a:extLst>
               <a:ext uri="{FF2B5EF4-FFF2-40B4-BE49-F238E27FC236}">
-                <a16:creationId xmlns:a16="http://schemas.microsoft.com/office/drawing/2014/main" id="{B5B3CE59-91FB-FD1E-5254-1F02B3829DB1}"/>
+                <a16:creationId xmlns:a16="http://schemas.microsoft.com/office/drawing/2014/main" id="{7AA865D4-674C-1401-5745-398CF1FD4C8A}"/>
               </a:ext>
             </a:extLst>
           </p:cNvPr>
@@ -34078,8 +34442,8 @@
         </p:nvSpPr>
         <p:spPr bwMode="auto">
           <a:xfrm>
-            <a:off x="2698376" y="2481404"/>
-            <a:ext cx="6171304" cy="1263275"/>
+            <a:off x="968787" y="812631"/>
+            <a:ext cx="6077472" cy="1392688"/>
           </a:xfrm>
           <a:prstGeom prst="rect">
             <a:avLst/>
@@ -34132,31 +34496,34 @@
                 <a:spcPct val="0"/>
               </a:spcAft>
             </a:pPr>
-            <a:endParaRPr lang="en-US" sz="1400" b="1" dirty="0">
-              <a:gradFill>
-                <a:gsLst>
-                  <a:gs pos="0">
-                    <a:srgbClr val="FFFFFF"/>
-                  </a:gs>
-                  <a:gs pos="100000">
-                    <a:srgbClr val="FFFFFF"/>
-                  </a:gs>
-                </a:gsLst>
-                <a:lin ang="5400000" scaled="0"/>
-              </a:gradFill>
-              <a:latin typeface="Lucida Console" panose="020B0609040504020204" pitchFamily="49" charset="0"/>
-              <a:ea typeface="Segoe UI" pitchFamily="34" charset="0"/>
-              <a:cs typeface="Segoe UI" pitchFamily="34" charset="0"/>
-            </a:endParaRPr>
+            <a:r>
+              <a:rPr lang="en-US" sz="1200" b="1" dirty="0">
+                <a:gradFill>
+                  <a:gsLst>
+                    <a:gs pos="0">
+                      <a:srgbClr val="FFFFFF"/>
+                    </a:gs>
+                    <a:gs pos="100000">
+                      <a:srgbClr val="FFFFFF"/>
+                    </a:gs>
+                  </a:gsLst>
+                  <a:lin ang="5400000" scaled="0"/>
+                </a:gradFill>
+                <a:latin typeface="Lucida Console" panose="020B0609040504020204" pitchFamily="49" charset="0"/>
+                <a:ea typeface="Segoe UI" pitchFamily="34" charset="0"/>
+                <a:cs typeface="Segoe UI" pitchFamily="34" charset="0"/>
+              </a:rPr>
+              <a:t>z</a:t>
+            </a:r>
           </a:p>
         </p:txBody>
       </p:sp>
       <p:sp>
         <p:nvSpPr>
-          <p:cNvPr id="24" name="Rectangle 23">
+          <p:cNvPr id="6" name="Rectangle 5">
             <a:extLst>
               <a:ext uri="{FF2B5EF4-FFF2-40B4-BE49-F238E27FC236}">
-                <a16:creationId xmlns:a16="http://schemas.microsoft.com/office/drawing/2014/main" id="{EA716621-77CA-1DAA-EF81-07D7C1ABA7AB}"/>
+                <a16:creationId xmlns:a16="http://schemas.microsoft.com/office/drawing/2014/main" id="{617F785B-0CDA-4255-E079-B8152C6873CD}"/>
               </a:ext>
             </a:extLst>
           </p:cNvPr>
@@ -34165,17 +34532,21 @@
         </p:nvSpPr>
         <p:spPr bwMode="auto">
           <a:xfrm>
-            <a:off x="2841812" y="2591375"/>
-            <a:ext cx="1951490" cy="1043333"/>
+            <a:off x="1088972" y="926924"/>
+            <a:ext cx="1694222" cy="1174532"/>
           </a:xfrm>
           <a:prstGeom prst="rect">
             <a:avLst/>
           </a:prstGeom>
           <a:solidFill>
-            <a:schemeClr val="accent1"/>
+            <a:schemeClr val="accent1">
+              <a:lumMod val="75000"/>
+            </a:schemeClr>
           </a:solidFill>
           <a:ln>
-            <a:noFill/>
+            <a:solidFill>
+              <a:schemeClr val="tx1"/>
+            </a:solidFill>
             <a:headEnd type="none" w="med" len="med"/>
             <a:tailEnd type="none" w="med" len="med"/>
           </a:ln>
@@ -34216,23 +34587,15 @@
               </a:spcAft>
             </a:pPr>
             <a:r>
-              <a:rPr lang="en-US" sz="1400" dirty="0">
-                <a:gradFill>
-                  <a:gsLst>
-                    <a:gs pos="0">
-                      <a:srgbClr val="FFFFFF"/>
-                    </a:gs>
-                    <a:gs pos="100000">
-                      <a:srgbClr val="FFFFFF"/>
-                    </a:gs>
-                  </a:gsLst>
-                  <a:lin ang="5400000" scaled="0"/>
-                </a:gradFill>
+              <a:rPr lang="en-US" sz="1200" dirty="0">
+                <a:solidFill>
+                  <a:schemeClr val="bg1"/>
+                </a:solidFill>
                 <a:latin typeface="Lucida Console" panose="020B0609040504020204" pitchFamily="49" charset="0"/>
                 <a:ea typeface="Segoe UI" pitchFamily="34" charset="0"/>
                 <a:cs typeface="Segoe UI" pitchFamily="34" charset="0"/>
               </a:rPr>
-              <a:t>custom code for </a:t>
+              <a:t>release</a:t>
             </a:r>
           </a:p>
           <a:p>
@@ -34248,33 +34611,25 @@
               </a:spcAft>
             </a:pPr>
             <a:r>
-              <a:rPr lang="en-US" sz="1400" dirty="0">
-                <a:gradFill>
-                  <a:gsLst>
-                    <a:gs pos="0">
-                      <a:srgbClr val="FFFFFF"/>
-                    </a:gs>
-                    <a:gs pos="100000">
-                      <a:srgbClr val="FFFFFF"/>
-                    </a:gs>
-                  </a:gsLst>
-                  <a:lin ang="5400000" scaled="0"/>
-                </a:gradFill>
+              <a:rPr lang="en-US" sz="1200" dirty="0">
+                <a:solidFill>
+                  <a:schemeClr val="bg1"/>
+                </a:solidFill>
                 <a:latin typeface="Lucida Console" panose="020B0609040504020204" pitchFamily="49" charset="0"/>
                 <a:ea typeface="Segoe UI" pitchFamily="34" charset="0"/>
                 <a:cs typeface="Segoe UI" pitchFamily="34" charset="0"/>
               </a:rPr>
-              <a:t>release process</a:t>
+              <a:t>branch</a:t>
             </a:r>
           </a:p>
         </p:txBody>
       </p:sp>
       <p:sp>
         <p:nvSpPr>
-          <p:cNvPr id="25" name="Rectangle 24">
+          <p:cNvPr id="7" name="Rectangle 6">
             <a:extLst>
               <a:ext uri="{FF2B5EF4-FFF2-40B4-BE49-F238E27FC236}">
-                <a16:creationId xmlns:a16="http://schemas.microsoft.com/office/drawing/2014/main" id="{83547F79-CF55-3D8C-A6B1-2E81F1B66ED9}"/>
+                <a16:creationId xmlns:a16="http://schemas.microsoft.com/office/drawing/2014/main" id="{1F53CB52-9A24-85D7-80DF-8CEEBEE5BC7D}"/>
               </a:ext>
             </a:extLst>
           </p:cNvPr>
@@ -34283,8 +34638,8 @@
         </p:nvSpPr>
         <p:spPr bwMode="auto">
           <a:xfrm>
-            <a:off x="7475325" y="2591375"/>
-            <a:ext cx="1261061" cy="1043333"/>
+            <a:off x="5226276" y="950618"/>
+            <a:ext cx="1694222" cy="1150838"/>
           </a:xfrm>
           <a:prstGeom prst="rect">
             <a:avLst/>
@@ -34294,9 +34649,7 @@
           </a:solidFill>
           <a:ln>
             <a:solidFill>
-              <a:schemeClr val="tx1">
-                <a:lumMod val="75000"/>
-              </a:schemeClr>
+              <a:schemeClr val="tx1"/>
             </a:solidFill>
             <a:headEnd type="none" w="med" len="med"/>
             <a:tailEnd type="none" w="med" len="med"/>
@@ -34338,7 +34691,7 @@
               </a:spcAft>
             </a:pPr>
             <a:r>
-              <a:rPr lang="en-US" sz="1400" b="1" dirty="0">
+              <a:rPr lang="en-US" sz="1200" b="1" dirty="0">
                 <a:solidFill>
                   <a:schemeClr val="tx1"/>
                 </a:solidFill>
@@ -34362,7 +34715,7 @@
               </a:spcAft>
             </a:pPr>
             <a:r>
-              <a:rPr lang="en-US" sz="1400" dirty="0">
+              <a:rPr lang="en-US" sz="1200" dirty="0">
                 <a:solidFill>
                   <a:schemeClr val="tx1"/>
                 </a:solidFill>
@@ -34377,10 +34730,10 @@
       </p:sp>
       <p:grpSp>
         <p:nvGrpSpPr>
-          <p:cNvPr id="5" name="Group 4">
+          <p:cNvPr id="8" name="Group 7">
             <a:extLst>
               <a:ext uri="{FF2B5EF4-FFF2-40B4-BE49-F238E27FC236}">
-                <a16:creationId xmlns:a16="http://schemas.microsoft.com/office/drawing/2014/main" id="{F8F8A8BF-6BD4-B004-BED9-AEA6A1A60FC8}"/>
+                <a16:creationId xmlns:a16="http://schemas.microsoft.com/office/drawing/2014/main" id="{4CDA3BB2-9D9E-B1C9-DDD2-BA11710C22E5}"/>
               </a:ext>
             </a:extLst>
           </p:cNvPr>
@@ -34389,18 +34742,18 @@
         </p:nvGrpSpPr>
         <p:grpSpPr>
           <a:xfrm>
-            <a:off x="4912660" y="2722880"/>
-            <a:ext cx="2493980" cy="804862"/>
-            <a:chOff x="4862504" y="2833855"/>
-            <a:chExt cx="2033199" cy="663407"/>
+            <a:off x="2924542" y="950617"/>
+            <a:ext cx="2131552" cy="1150839"/>
+            <a:chOff x="2867466" y="2709960"/>
+            <a:chExt cx="1694222" cy="1150839"/>
           </a:xfrm>
         </p:grpSpPr>
         <p:sp>
           <p:nvSpPr>
-            <p:cNvPr id="29" name="Arrow: Right 28">
+            <p:cNvPr id="9" name="Rectangle 8">
               <a:extLst>
                 <a:ext uri="{FF2B5EF4-FFF2-40B4-BE49-F238E27FC236}">
-                  <a16:creationId xmlns:a16="http://schemas.microsoft.com/office/drawing/2014/main" id="{D8CB168B-B7ED-3D89-588F-7132701DE342}"/>
+                  <a16:creationId xmlns:a16="http://schemas.microsoft.com/office/drawing/2014/main" id="{139BA928-91BA-52AC-1218-E4647D790200}"/>
                 </a:ext>
               </a:extLst>
             </p:cNvPr>
@@ -34409,20 +34762,19 @@
           </p:nvSpPr>
           <p:spPr bwMode="auto">
             <a:xfrm>
-              <a:off x="4862504" y="2833855"/>
-              <a:ext cx="2021254" cy="279187"/>
+              <a:off x="2867466" y="2709960"/>
+              <a:ext cx="1694222" cy="1150839"/>
             </a:xfrm>
-            <a:prstGeom prst="rightArrow">
-              <a:avLst>
-                <a:gd name="adj1" fmla="val 73858"/>
-                <a:gd name="adj2" fmla="val 77367"/>
-              </a:avLst>
+            <a:prstGeom prst="rect">
+              <a:avLst/>
             </a:prstGeom>
             <a:solidFill>
-              <a:srgbClr val="C00000"/>
+              <a:schemeClr val="accent3"/>
             </a:solidFill>
             <a:ln>
-              <a:noFill/>
+              <a:solidFill>
+                <a:schemeClr val="tx1"/>
+              </a:solidFill>
               <a:headEnd type="none" w="med" len="med"/>
               <a:tailEnd type="none" w="med" len="med"/>
             </a:ln>
@@ -34443,7 +34795,7 @@
             </a:fontRef>
           </p:style>
           <p:txBody>
-            <a:bodyPr rot="0" spcFirstLastPara="0" vertOverflow="overflow" horzOverflow="overflow" vert="horz" wrap="square" lIns="73152" tIns="0" rIns="0" bIns="0" numCol="1" spcCol="0" rtlCol="0" fromWordArt="0" anchor="ctr" anchorCtr="0" forceAA="0" compatLnSpc="1">
+            <a:bodyPr rot="0" spcFirstLastPara="0" vertOverflow="overflow" horzOverflow="overflow" vert="horz" wrap="square" lIns="0" tIns="91440" rIns="0" bIns="0" numCol="1" spcCol="0" rtlCol="0" fromWordArt="0" anchor="t" anchorCtr="0" forceAA="0" compatLnSpc="1">
               <a:prstTxWarp prst="textNoShape">
                 <a:avLst/>
               </a:prstTxWarp>
@@ -34451,7 +34803,7 @@
             </a:bodyPr>
             <a:lstStyle/>
             <a:p>
-              <a:pPr defTabSz="932472" fontAlgn="base">
+              <a:pPr algn="ctr" defTabSz="932472" fontAlgn="base">
                 <a:lnSpc>
                   <a:spcPct val="90000"/>
                 </a:lnSpc>
@@ -34463,116 +34815,240 @@
                 </a:spcAft>
               </a:pPr>
               <a:r>
-                <a:rPr lang="en-US" sz="1000" b="1" dirty="0">
-                  <a:gradFill>
-                    <a:gsLst>
-                      <a:gs pos="0">
-                        <a:srgbClr val="FFFFFF"/>
-                      </a:gs>
-                      <a:gs pos="100000">
-                        <a:srgbClr val="FFFFFF"/>
-                      </a:gs>
-                    </a:gsLst>
-                    <a:lin ang="5400000" scaled="0"/>
-                  </a:gradFill>
-                  <a:latin typeface="Lucida Console" panose="020B0609040504020204" pitchFamily="49" charset="0"/>
+                <a:rPr lang="en-US" sz="1200" dirty="0">
+                  <a:solidFill>
+                    <a:schemeClr val="tx1">
+                      <a:lumMod val="60000"/>
+                      <a:lumOff val="40000"/>
+                    </a:schemeClr>
+                  </a:solidFill>
+                  <a:latin typeface="+mj-lt"/>
                   <a:ea typeface="Segoe UI" pitchFamily="34" charset="0"/>
                   <a:cs typeface="Segoe UI" pitchFamily="34" charset="0"/>
                 </a:rPr>
-                <a:t>1. Call Update from GIT</a:t>
+                <a:t>release process</a:t>
               </a:r>
             </a:p>
           </p:txBody>
         </p:sp>
-        <p:sp>
-          <p:nvSpPr>
-            <p:cNvPr id="3" name="Arrow: Right 2">
+        <p:grpSp>
+          <p:nvGrpSpPr>
+            <p:cNvPr id="10" name="Group 9">
               <a:extLst>
                 <a:ext uri="{FF2B5EF4-FFF2-40B4-BE49-F238E27FC236}">
-                  <a16:creationId xmlns:a16="http://schemas.microsoft.com/office/drawing/2014/main" id="{510EFE0B-5866-86CE-1CFB-519ED5BD9E1D}"/>
+                  <a16:creationId xmlns:a16="http://schemas.microsoft.com/office/drawing/2014/main" id="{3A863DE7-B394-6CF3-D19C-3BE7DF7C6FC8}"/>
                 </a:ext>
               </a:extLst>
             </p:cNvPr>
-            <p:cNvSpPr/>
+            <p:cNvGrpSpPr/>
             <p:nvPr/>
-          </p:nvSpPr>
-          <p:spPr bwMode="auto">
+          </p:nvGrpSpPr>
+          <p:grpSpPr>
             <a:xfrm>
-              <a:off x="4874449" y="3218075"/>
-              <a:ext cx="2021254" cy="279187"/>
+              <a:off x="3011977" y="3020268"/>
+              <a:ext cx="1393609" cy="736239"/>
+              <a:chOff x="7990583" y="1103694"/>
+              <a:chExt cx="1393609" cy="736239"/>
             </a:xfrm>
-            <a:prstGeom prst="rightArrow">
-              <a:avLst>
-                <a:gd name="adj1" fmla="val 73858"/>
-                <a:gd name="adj2" fmla="val 76355"/>
-              </a:avLst>
-            </a:prstGeom>
-            <a:solidFill>
-              <a:srgbClr val="C00000"/>
-            </a:solidFill>
-            <a:ln>
-              <a:noFill/>
-              <a:headEnd type="none" w="med" len="med"/>
-              <a:tailEnd type="none" w="med" len="med"/>
-            </a:ln>
-            <a:effectLst/>
-          </p:spPr>
-          <p:style>
-            <a:lnRef idx="1">
-              <a:schemeClr val="accent2"/>
-            </a:lnRef>
-            <a:fillRef idx="3">
-              <a:schemeClr val="accent2"/>
-            </a:fillRef>
-            <a:effectRef idx="2">
-              <a:schemeClr val="accent2"/>
-            </a:effectRef>
-            <a:fontRef idx="minor">
-              <a:schemeClr val="lt1"/>
-            </a:fontRef>
-          </p:style>
-          <p:txBody>
-            <a:bodyPr rot="0" spcFirstLastPara="0" vertOverflow="overflow" horzOverflow="overflow" vert="horz" wrap="square" lIns="73152" tIns="0" rIns="0" bIns="0" numCol="1" spcCol="0" rtlCol="0" fromWordArt="0" anchor="ctr" anchorCtr="0" forceAA="0" compatLnSpc="1">
-              <a:prstTxWarp prst="textNoShape">
-                <a:avLst/>
-              </a:prstTxWarp>
-              <a:noAutofit/>
-            </a:bodyPr>
-            <a:lstStyle/>
-            <a:p>
-              <a:pPr defTabSz="932472" fontAlgn="base">
-                <a:lnSpc>
-                  <a:spcPct val="90000"/>
-                </a:lnSpc>
-                <a:spcBef>
-                  <a:spcPct val="0"/>
-                </a:spcBef>
-                <a:spcAft>
-                  <a:spcPct val="0"/>
-                </a:spcAft>
-              </a:pPr>
-              <a:r>
-                <a:rPr lang="en-US" sz="1000" b="1" dirty="0">
-                  <a:gradFill>
-                    <a:gsLst>
-                      <a:gs pos="0">
-                        <a:srgbClr val="FFFFFF"/>
-                      </a:gs>
-                      <a:gs pos="100000">
-                        <a:srgbClr val="FFFFFF"/>
-                      </a:gs>
-                    </a:gsLst>
-                    <a:lin ang="5400000" scaled="0"/>
-                  </a:gradFill>
-                  <a:latin typeface="Lucida Console" panose="020B0609040504020204" pitchFamily="49" charset="0"/>
-                  <a:ea typeface="Segoe UI" pitchFamily="34" charset="0"/>
-                  <a:cs typeface="Segoe UI" pitchFamily="34" charset="0"/>
-                </a:rPr>
-                <a:t>2. Run post-sync operations</a:t>
-              </a:r>
-            </a:p>
-          </p:txBody>
-        </p:sp>
+          </p:grpSpPr>
+          <p:sp>
+            <p:nvSpPr>
+              <p:cNvPr id="11" name="Arrow: Right 10">
+                <a:extLst>
+                  <a:ext uri="{FF2B5EF4-FFF2-40B4-BE49-F238E27FC236}">
+                    <a16:creationId xmlns:a16="http://schemas.microsoft.com/office/drawing/2014/main" id="{C3EBD0FF-3020-E501-DB45-7B700AC489A3}"/>
+                  </a:ext>
+                </a:extLst>
+              </p:cNvPr>
+              <p:cNvSpPr/>
+              <p:nvPr/>
+            </p:nvSpPr>
+            <p:spPr bwMode="auto">
+              <a:xfrm>
+                <a:off x="7990583" y="1103694"/>
+                <a:ext cx="1393609" cy="343030"/>
+              </a:xfrm>
+              <a:prstGeom prst="rightArrow">
+                <a:avLst>
+                  <a:gd name="adj1" fmla="val 68047"/>
+                  <a:gd name="adj2" fmla="val 58330"/>
+                </a:avLst>
+              </a:prstGeom>
+              <a:solidFill>
+                <a:srgbClr val="8A0000"/>
+              </a:solidFill>
+              <a:ln>
+                <a:noFill/>
+                <a:headEnd type="none" w="med" len="med"/>
+                <a:tailEnd type="none" w="med" len="med"/>
+              </a:ln>
+              <a:effectLst/>
+            </p:spPr>
+            <p:style>
+              <a:lnRef idx="1">
+                <a:schemeClr val="accent2"/>
+              </a:lnRef>
+              <a:fillRef idx="3">
+                <a:schemeClr val="accent2"/>
+              </a:fillRef>
+              <a:effectRef idx="2">
+                <a:schemeClr val="accent2"/>
+              </a:effectRef>
+              <a:fontRef idx="minor">
+                <a:schemeClr val="lt1"/>
+              </a:fontRef>
+            </p:style>
+            <p:txBody>
+              <a:bodyPr rot="0" spcFirstLastPara="0" vertOverflow="overflow" horzOverflow="overflow" vert="horz" wrap="square" lIns="0" tIns="0" rIns="0" bIns="0" numCol="1" spcCol="0" rtlCol="0" fromWordArt="0" anchor="ctr" anchorCtr="0" forceAA="0" compatLnSpc="1">
+                <a:prstTxWarp prst="textNoShape">
+                  <a:avLst/>
+                </a:prstTxWarp>
+                <a:noAutofit/>
+              </a:bodyPr>
+              <a:lstStyle/>
+              <a:p>
+                <a:pPr algn="ctr" defTabSz="932472" fontAlgn="base">
+                  <a:lnSpc>
+                    <a:spcPct val="90000"/>
+                  </a:lnSpc>
+                  <a:spcBef>
+                    <a:spcPct val="0"/>
+                  </a:spcBef>
+                  <a:spcAft>
+                    <a:spcPct val="0"/>
+                  </a:spcAft>
+                </a:pPr>
+                <a:r>
+                  <a:rPr lang="en-US" sz="1000" dirty="0">
+                    <a:gradFill>
+                      <a:gsLst>
+                        <a:gs pos="0">
+                          <a:srgbClr val="FFFFFF"/>
+                        </a:gs>
+                        <a:gs pos="100000">
+                          <a:srgbClr val="FFFFFF"/>
+                        </a:gs>
+                      </a:gsLst>
+                      <a:lin ang="5400000" scaled="0"/>
+                    </a:gradFill>
+                    <a:latin typeface="+mj-lt"/>
+                    <a:ea typeface="Segoe UI" pitchFamily="34" charset="0"/>
+                    <a:cs typeface="Segoe UI" pitchFamily="34" charset="0"/>
+                  </a:rPr>
+                  <a:t>Call </a:t>
+                </a:r>
+                <a:r>
+                  <a:rPr lang="en-US" sz="1000" b="1" dirty="0">
+                    <a:gradFill>
+                      <a:gsLst>
+                        <a:gs pos="0">
+                          <a:srgbClr val="FFFFFF"/>
+                        </a:gs>
+                        <a:gs pos="100000">
+                          <a:srgbClr val="FFFFFF"/>
+                        </a:gs>
+                      </a:gsLst>
+                      <a:lin ang="5400000" scaled="0"/>
+                    </a:gradFill>
+                    <a:latin typeface="+mj-lt"/>
+                    <a:ea typeface="Segoe UI" pitchFamily="34" charset="0"/>
+                    <a:cs typeface="Segoe UI" pitchFamily="34" charset="0"/>
+                  </a:rPr>
+                  <a:t>Update from GIT</a:t>
+                </a:r>
+              </a:p>
+            </p:txBody>
+          </p:sp>
+          <p:sp>
+            <p:nvSpPr>
+              <p:cNvPr id="12" name="Arrow: Right 11">
+                <a:extLst>
+                  <a:ext uri="{FF2B5EF4-FFF2-40B4-BE49-F238E27FC236}">
+                    <a16:creationId xmlns:a16="http://schemas.microsoft.com/office/drawing/2014/main" id="{98ADDB9B-0C98-01AB-2532-E03AA54F77B6}"/>
+                  </a:ext>
+                </a:extLst>
+              </p:cNvPr>
+              <p:cNvSpPr/>
+              <p:nvPr/>
+            </p:nvSpPr>
+            <p:spPr bwMode="auto">
+              <a:xfrm>
+                <a:off x="7990583" y="1496903"/>
+                <a:ext cx="1393609" cy="343030"/>
+              </a:xfrm>
+              <a:prstGeom prst="rightArrow">
+                <a:avLst>
+                  <a:gd name="adj1" fmla="val 68047"/>
+                  <a:gd name="adj2" fmla="val 58330"/>
+                </a:avLst>
+              </a:prstGeom>
+              <a:solidFill>
+                <a:srgbClr val="8A0000"/>
+              </a:solidFill>
+              <a:ln>
+                <a:noFill/>
+                <a:headEnd type="none" w="med" len="med"/>
+                <a:tailEnd type="none" w="med" len="med"/>
+              </a:ln>
+              <a:effectLst/>
+            </p:spPr>
+            <p:style>
+              <a:lnRef idx="1">
+                <a:schemeClr val="accent2"/>
+              </a:lnRef>
+              <a:fillRef idx="3">
+                <a:schemeClr val="accent2"/>
+              </a:fillRef>
+              <a:effectRef idx="2">
+                <a:schemeClr val="accent2"/>
+              </a:effectRef>
+              <a:fontRef idx="minor">
+                <a:schemeClr val="lt1"/>
+              </a:fontRef>
+            </p:style>
+            <p:txBody>
+              <a:bodyPr rot="0" spcFirstLastPara="0" vertOverflow="overflow" horzOverflow="overflow" vert="horz" wrap="square" lIns="0" tIns="0" rIns="0" bIns="0" numCol="1" spcCol="0" rtlCol="0" fromWordArt="0" anchor="ctr" anchorCtr="0" forceAA="0" compatLnSpc="1">
+                <a:prstTxWarp prst="textNoShape">
+                  <a:avLst/>
+                </a:prstTxWarp>
+                <a:noAutofit/>
+              </a:bodyPr>
+              <a:lstStyle/>
+              <a:p>
+                <a:pPr algn="ctr" defTabSz="932472" fontAlgn="base">
+                  <a:lnSpc>
+                    <a:spcPct val="90000"/>
+                  </a:lnSpc>
+                  <a:spcBef>
+                    <a:spcPct val="0"/>
+                  </a:spcBef>
+                  <a:spcAft>
+                    <a:spcPct val="0"/>
+                  </a:spcAft>
+                </a:pPr>
+                <a:r>
+                  <a:rPr lang="en-US" sz="1000" b="1" dirty="0">
+                    <a:gradFill>
+                      <a:gsLst>
+                        <a:gs pos="0">
+                          <a:srgbClr val="FFFFFF"/>
+                        </a:gs>
+                        <a:gs pos="100000">
+                          <a:srgbClr val="FFFFFF"/>
+                        </a:gs>
+                      </a:gsLst>
+                      <a:lin ang="5400000" scaled="0"/>
+                    </a:gradFill>
+                    <a:latin typeface="+mj-lt"/>
+                    <a:ea typeface="Segoe UI" pitchFamily="34" charset="0"/>
+                    <a:cs typeface="Segoe UI" pitchFamily="34" charset="0"/>
+                  </a:rPr>
+                  <a:t>Run post-sync job</a:t>
+                </a:r>
+              </a:p>
+            </p:txBody>
+          </p:sp>
+        </p:grpSp>
       </p:grpSp>
     </p:spTree>
     <p:extLst>
@@ -45970,6 +46446,16 @@
 </file>
 
 <file path=customXml/item1.xml><?xml version="1.0" encoding="utf-8"?>
+<p:properties xmlns:p="http://schemas.microsoft.com/office/2006/metadata/properties" xmlns:xsi="http://www.w3.org/2001/XMLSchema-instance" xmlns:pc="http://schemas.microsoft.com/office/infopath/2007/PartnerControls">
+  <documentManagement>
+    <_ip_UnifiedCompliancePolicyUIAction xmlns="http://schemas.microsoft.com/sharepoint/v3" xsi:nil="true"/>
+    <_ip_UnifiedCompliancePolicyProperties xmlns="http://schemas.microsoft.com/sharepoint/v3" xsi:nil="true"/>
+    <_activity xmlns="3c10a0e8-556e-4c2d-9121-1181542ea83c" xsi:nil="true"/>
+  </documentManagement>
+</p:properties>
+</file>
+
+<file path=customXml/item2.xml><?xml version="1.0" encoding="utf-8"?>
 <?mso-contentType ?>
 <FormTemplates xmlns="http://schemas.microsoft.com/sharepoint/v3/contenttype/forms">
   <Display>DocumentLibraryForm</Display>
@@ -45978,7 +46464,7 @@
 </FormTemplates>
 </file>
 
-<file path=customXml/item2.xml><?xml version="1.0" encoding="utf-8"?>
+<file path=customXml/item3.xml><?xml version="1.0" encoding="utf-8"?>
 <ct:contentTypeSchema xmlns:ct="http://schemas.microsoft.com/office/2006/metadata/contentType" xmlns:ma="http://schemas.microsoft.com/office/2006/metadata/properties/metaAttributes" ct:_="" ma:_="" ma:contentTypeName="Document" ma:contentTypeID="0x010100B63AD2D799A0384499DFA8618B2D06C3" ma:contentTypeVersion="19" ma:contentTypeDescription="Create a new document." ma:contentTypeScope="" ma:versionID="4ad8bb11041bccc4900be347311affd5">
   <xsd:schema xmlns:xsd="http://www.w3.org/2001/XMLSchema" xmlns:xs="http://www.w3.org/2001/XMLSchema" xmlns:p="http://schemas.microsoft.com/office/2006/metadata/properties" xmlns:ns1="http://schemas.microsoft.com/sharepoint/v3" xmlns:ns3="3c10a0e8-556e-4c2d-9121-1181542ea83c" xmlns:ns4="91f22b01-9196-48cc-8d58-ee179122dd75" targetNamespace="http://schemas.microsoft.com/office/2006/metadata/properties" ma:root="true" ma:fieldsID="55cc422832b79ebb748bec44d447ca3b" ns1:_="" ns3:_="" ns4:_="">
     <xsd:import namespace="http://schemas.microsoft.com/sharepoint/v3"/>
@@ -46242,17 +46728,25 @@
 </ct:contentTypeSchema>
 </file>
 
-<file path=customXml/item3.xml><?xml version="1.0" encoding="utf-8"?>
-<p:properties xmlns:p="http://schemas.microsoft.com/office/2006/metadata/properties" xmlns:xsi="http://www.w3.org/2001/XMLSchema-instance" xmlns:pc="http://schemas.microsoft.com/office/infopath/2007/PartnerControls">
-  <documentManagement>
-    <_ip_UnifiedCompliancePolicyUIAction xmlns="http://schemas.microsoft.com/sharepoint/v3" xsi:nil="true"/>
-    <_ip_UnifiedCompliancePolicyProperties xmlns="http://schemas.microsoft.com/sharepoint/v3" xsi:nil="true"/>
-    <_activity xmlns="3c10a0e8-556e-4c2d-9121-1181542ea83c" xsi:nil="true"/>
-  </documentManagement>
-</p:properties>
+<file path=customXml/itemProps1.xml><?xml version="1.0" encoding="utf-8"?>
+<ds:datastoreItem xmlns:ds="http://schemas.openxmlformats.org/officeDocument/2006/customXml" ds:itemID="{F990F116-B58F-4255-B05B-DA3808E0E5C6}">
+  <ds:schemaRefs>
+    <ds:schemaRef ds:uri="http://schemas.openxmlformats.org/package/2006/metadata/core-properties"/>
+    <ds:schemaRef ds:uri="http://purl.org/dc/elements/1.1/"/>
+    <ds:schemaRef ds:uri="http://purl.org/dc/dcmitype/"/>
+    <ds:schemaRef ds:uri="http://schemas.microsoft.com/office/2006/documentManagement/types"/>
+    <ds:schemaRef ds:uri="http://schemas.microsoft.com/office/2006/metadata/properties"/>
+    <ds:schemaRef ds:uri="http://purl.org/dc/terms/"/>
+    <ds:schemaRef ds:uri="http://schemas.microsoft.com/sharepoint/v3"/>
+    <ds:schemaRef ds:uri="http://www.w3.org/XML/1998/namespace"/>
+    <ds:schemaRef ds:uri="http://schemas.microsoft.com/office/infopath/2007/PartnerControls"/>
+    <ds:schemaRef ds:uri="91f22b01-9196-48cc-8d58-ee179122dd75"/>
+    <ds:schemaRef ds:uri="3c10a0e8-556e-4c2d-9121-1181542ea83c"/>
+  </ds:schemaRefs>
+</ds:datastoreItem>
 </file>
 
-<file path=customXml/itemProps1.xml><?xml version="1.0" encoding="utf-8"?>
+<file path=customXml/itemProps2.xml><?xml version="1.0" encoding="utf-8"?>
 <ds:datastoreItem xmlns:ds="http://schemas.openxmlformats.org/officeDocument/2006/customXml" ds:itemID="{758FDAC0-319D-4A54-8D8E-1D42CB1F8004}">
   <ds:schemaRefs>
     <ds:schemaRef ds:uri="http://schemas.microsoft.com/sharepoint/v3/contenttype/forms"/>
@@ -46260,7 +46754,7 @@
 </ds:datastoreItem>
 </file>
 
-<file path=customXml/itemProps2.xml><?xml version="1.0" encoding="utf-8"?>
+<file path=customXml/itemProps3.xml><?xml version="1.0" encoding="utf-8"?>
 <ds:datastoreItem xmlns:ds="http://schemas.openxmlformats.org/officeDocument/2006/customXml" ds:itemID="{C2411704-DA91-4A2A-81D1-00044852D0BE}">
   <ds:schemaRefs>
     <ds:schemaRef ds:uri="3c10a0e8-556e-4c2d-9121-1181542ea83c"/>
@@ -46280,24 +46774,6 @@
 </ds:datastoreItem>
 </file>
 
-<file path=customXml/itemProps3.xml><?xml version="1.0" encoding="utf-8"?>
-<ds:datastoreItem xmlns:ds="http://schemas.openxmlformats.org/officeDocument/2006/customXml" ds:itemID="{F990F116-B58F-4255-B05B-DA3808E0E5C6}">
-  <ds:schemaRefs>
-    <ds:schemaRef ds:uri="http://schemas.openxmlformats.org/package/2006/metadata/core-properties"/>
-    <ds:schemaRef ds:uri="http://purl.org/dc/elements/1.1/"/>
-    <ds:schemaRef ds:uri="http://purl.org/dc/dcmitype/"/>
-    <ds:schemaRef ds:uri="http://schemas.microsoft.com/office/2006/documentManagement/types"/>
-    <ds:schemaRef ds:uri="http://schemas.microsoft.com/office/2006/metadata/properties"/>
-    <ds:schemaRef ds:uri="http://purl.org/dc/terms/"/>
-    <ds:schemaRef ds:uri="http://schemas.microsoft.com/sharepoint/v3"/>
-    <ds:schemaRef ds:uri="http://www.w3.org/XML/1998/namespace"/>
-    <ds:schemaRef ds:uri="http://schemas.microsoft.com/office/infopath/2007/PartnerControls"/>
-    <ds:schemaRef ds:uri="91f22b01-9196-48cc-8d58-ee179122dd75"/>
-    <ds:schemaRef ds:uri="3c10a0e8-556e-4c2d-9121-1181542ea83c"/>
-  </ds:schemaRefs>
-</ds:datastoreItem>
-</file>
-
 <file path=docMetadata/LabelInfo.xml><?xml version="1.0" encoding="utf-8"?>
 <clbl:labelList xmlns:clbl="http://schemas.microsoft.com/office/2020/mipLabelMetadata">
   <clbl:label id="{87867195-f2b8-4ac2-b0b6-6bb73cb33afc}" enabled="1" method="Privileged" siteId="{72f988bf-86f1-41af-91ab-2d7cd011db47}" removed="0"/>
